--- a/infra_learning/PPT/端侧推理一体机团队能力建设研讨_第1-2页.pptx
+++ b/infra_learning/PPT/端侧推理一体机团队能力建设研讨_第1-2页.pptx
@@ -7367,8 +7367,8 @@
         </ns0:nvSpPr>
         <ns0:spPr>
           <ns1:xfrm>
-            <ns1:off x="285750" y="990600"/>
-            <ns1:ext cx="2476500" cy="1143000"/>
+            <ns1:off x="312958" y="990600"/>
+            <ns1:ext cx="1718146" cy="1143000"/>
           </ns1:xfrm>
           <ns1:prstGeom prst="roundRect">
             <ns1:avLst>
@@ -7401,8 +7401,8 @@
         </ns0:nvSpPr>
         <ns0:spPr>
           <ns1:xfrm>
-            <ns1:off x="361950" y="1066800"/>
-            <ns1:ext cx="2324100" cy="371475"/>
+            <ns1:off x="365824" y="1066800"/>
+            <ns1:ext cx="1612414" cy="371475"/>
           </ns1:xfrm>
           <ns1:prstGeom prst="rect">
             <ns1:avLst/>
@@ -7416,7 +7416,7 @@
           <ns1:bodyPr lIns="0" tIns="0" rIns="0" bIns="0" anchor="ctr"/>
           <ns1:lstStyle>
             <ns1:defPPr algn="ctr">
-              <ns1:defRPr sz="1950" b="1">
+              <ns1:defRPr sz="1482" b="1">
                 <ns1:solidFill>
                   <ns1:srgbClr val="BC2026"/>
                 </ns1:solidFill>
@@ -7428,7 +7428,7 @@
           </ns1:lstStyle>
           <ns1:p>
             <ns1:pPr algn="ctr">
-              <ns1:defRPr sz="1950" b="1">
+              <ns1:defRPr sz="1482" b="1">
                 <ns1:solidFill>
                   <ns1:srgbClr val="BC2026"/>
                 </ns1:solidFill>
@@ -7438,7 +7438,7 @@
               </ns1:defRPr>
             </ns1:pPr>
             <ns1:r>
-              <ns1:rPr sz="1950" b="1">
+              <ns1:rPr sz="1482" b="1">
                 <ns1:solidFill>
                   <ns1:srgbClr val="BC2026"/>
                 </ns1:solidFill>
@@ -7467,8 +7467,8 @@
         </ns0:nvSpPr>
         <ns0:spPr>
           <ns1:xfrm>
-            <ns1:off x="361950" y="1476375"/>
-            <ns1:ext cx="2324100" cy="266700"/>
+            <ns1:off x="365824" y="1476375"/>
+            <ns1:ext cx="1612414" cy="266700"/>
           </ns1:xfrm>
           <ns1:prstGeom prst="rect">
             <ns1:avLst/>
@@ -7482,7 +7482,7 @@
           <ns1:bodyPr lIns="0" tIns="0" rIns="0" bIns="0" anchor="ctr"/>
           <ns1:lstStyle>
             <ns1:defPPr algn="ctr">
-              <ns1:defRPr sz="1725" b="1">
+              <ns1:defRPr sz="1311" b="1">
                 <ns1:solidFill>
                   <ns1:srgbClr val="242424"/>
                 </ns1:solidFill>
@@ -7494,7 +7494,7 @@
           </ns1:lstStyle>
           <ns1:p>
             <ns1:pPr algn="ctr">
-              <ns1:defRPr sz="1725" b="1">
+              <ns1:defRPr sz="1311" b="1">
                 <ns1:solidFill>
                   <ns1:srgbClr val="242424"/>
                 </ns1:solidFill>
@@ -7504,7 +7504,7 @@
               </ns1:defRPr>
             </ns1:pPr>
             <ns1:r>
-              <ns1:rPr sz="1725" b="1">
+              <ns1:rPr sz="1311" b="1">
                 <ns1:solidFill>
                   <ns1:srgbClr val="242424"/>
                 </ns1:solidFill>
@@ -7533,8 +7533,8 @@
         </ns0:nvSpPr>
         <ns0:spPr>
           <ns1:xfrm>
-            <ns1:off x="361950" y="1809750"/>
-            <ns1:ext cx="2324100" cy="247650"/>
+            <ns1:off x="365824" y="1809750"/>
+            <ns1:ext cx="1612414" cy="247650"/>
           </ns1:xfrm>
           <ns1:prstGeom prst="rect">
             <ns1:avLst/>
@@ -7548,7 +7548,7 @@
           <ns1:bodyPr lIns="0" tIns="0" rIns="0" bIns="0" anchor="ctr"/>
           <ns1:lstStyle>
             <ns1:defPPr algn="ctr">
-              <ns1:defRPr sz="1350" b="0">
+              <ns1:defRPr sz="1125" b="0">
                 <ns1:solidFill>
                   <ns1:srgbClr val="242424"/>
                 </ns1:solidFill>
@@ -7560,7 +7560,7 @@
           </ns1:lstStyle>
           <ns1:p>
             <ns1:pPr algn="ctr">
-              <ns1:defRPr sz="1350" b="0">
+              <ns1:defRPr sz="1125" b="0">
                 <ns1:solidFill>
                   <ns1:srgbClr val="242424"/>
                 </ns1:solidFill>
@@ -7570,7 +7570,7 @@
               </ns1:defRPr>
             </ns1:pPr>
             <ns1:r>
-              <ns1:rPr sz="1350" b="0">
+              <ns1:rPr sz="1125" b="0">
                 <ns1:solidFill>
                   <ns1:srgbClr val="242424"/>
                 </ns1:solidFill>
@@ -7578,7 +7578,7 @@
                 <ns1:ea typeface="Microsoft YaHei"/>
                 <ns1:cs typeface="Microsoft YaHei"/>
               </ns1:rPr>
-              <ns1:t>多用户 Agent · 吞吐优先</ns1:t>
+              <ns1:t>多用户 Agent 服务</ns1:t>
             </ns1:r>
           </ns1:p>
         </ns0:txBody>
@@ -7599,8 +7599,8 @@
         </ns0:nvSpPr>
         <ns0:spPr>
           <ns1:xfrm>
-            <ns1:off x="2962275" y="990600"/>
-            <ns1:ext cx="2476500" cy="1143000"/>
+            <ns1:off x="2169877" y="990600"/>
+            <ns1:ext cx="1718146" cy="1143000"/>
           </ns1:xfrm>
           <ns1:prstGeom prst="roundRect">
             <ns1:avLst>
@@ -7633,8 +7633,8 @@
         </ns0:nvSpPr>
         <ns0:spPr>
           <ns1:xfrm>
-            <ns1:off x="3038475" y="1066800"/>
-            <ns1:ext cx="2324100" cy="371475"/>
+            <ns1:off x="2222743" y="1066800"/>
+            <ns1:ext cx="1612414" cy="371475"/>
           </ns1:xfrm>
           <ns1:prstGeom prst="rect">
             <ns1:avLst/>
@@ -7648,7 +7648,7 @@
           <ns1:bodyPr lIns="0" tIns="0" rIns="0" bIns="0" anchor="ctr"/>
           <ns1:lstStyle>
             <ns1:defPPr algn="ctr">
-              <ns1:defRPr sz="1950" b="1">
+              <ns1:defRPr sz="1482" b="1">
                 <ns1:solidFill>
                   <ns1:srgbClr val="BC2026"/>
                 </ns1:solidFill>
@@ -7660,7 +7660,7 @@
           </ns1:lstStyle>
           <ns1:p>
             <ns1:pPr algn="ctr">
-              <ns1:defRPr sz="1950" b="1">
+              <ns1:defRPr sz="1482" b="1">
                 <ns1:solidFill>
                   <ns1:srgbClr val="BC2026"/>
                 </ns1:solidFill>
@@ -7670,7 +7670,7 @@
               </ns1:defRPr>
             </ns1:pPr>
             <ns1:r>
-              <ns1:rPr sz="1950" b="1">
+              <ns1:rPr sz="1482" b="1">
                 <ns1:solidFill>
                   <ns1:srgbClr val="BC2026"/>
                 </ns1:solidFill>
@@ -7699,8 +7699,8 @@
         </ns0:nvSpPr>
         <ns0:spPr>
           <ns1:xfrm>
-            <ns1:off x="3038475" y="1476375"/>
-            <ns1:ext cx="2324100" cy="266700"/>
+            <ns1:off x="2222743" y="1476375"/>
+            <ns1:ext cx="1612414" cy="266700"/>
           </ns1:xfrm>
           <ns1:prstGeom prst="rect">
             <ns1:avLst/>
@@ -7714,7 +7714,7 @@
           <ns1:bodyPr lIns="0" tIns="0" rIns="0" bIns="0" anchor="ctr"/>
           <ns1:lstStyle>
             <ns1:defPPr algn="ctr">
-              <ns1:defRPr sz="1725" b="1">
+              <ns1:defRPr sz="1311" b="1">
                 <ns1:solidFill>
                   <ns1:srgbClr val="242424"/>
                 </ns1:solidFill>
@@ -7726,7 +7726,7 @@
           </ns1:lstStyle>
           <ns1:p>
             <ns1:pPr algn="ctr">
-              <ns1:defRPr sz="1725" b="1">
+              <ns1:defRPr sz="1311" b="1">
                 <ns1:solidFill>
                   <ns1:srgbClr val="242424"/>
                 </ns1:solidFill>
@@ -7736,7 +7736,7 @@
               </ns1:defRPr>
             </ns1:pPr>
             <ns1:r>
-              <ns1:rPr sz="1725" b="1">
+              <ns1:rPr sz="1311" b="1">
                 <ns1:solidFill>
                   <ns1:srgbClr val="242424"/>
                 </ns1:solidFill>
@@ -7765,8 +7765,8 @@
         </ns0:nvSpPr>
         <ns0:spPr>
           <ns1:xfrm>
-            <ns1:off x="3038475" y="1809750"/>
-            <ns1:ext cx="2324100" cy="247650"/>
+            <ns1:off x="2222743" y="1809750"/>
+            <ns1:ext cx="1612414" cy="247650"/>
           </ns1:xfrm>
           <ns1:prstGeom prst="rect">
             <ns1:avLst/>
@@ -7780,7 +7780,7 @@
           <ns1:bodyPr lIns="0" tIns="0" rIns="0" bIns="0" anchor="ctr"/>
           <ns1:lstStyle>
             <ns1:defPPr algn="ctr">
-              <ns1:defRPr sz="1350" b="0">
+              <ns1:defRPr sz="1125" b="0">
                 <ns1:solidFill>
                   <ns1:srgbClr val="242424"/>
                 </ns1:solidFill>
@@ -7792,7 +7792,7 @@
           </ns1:lstStyle>
           <ns1:p>
             <ns1:pPr algn="ctr">
-              <ns1:defRPr sz="1350" b="0">
+              <ns1:defRPr sz="1125" b="0">
                 <ns1:solidFill>
                   <ns1:srgbClr val="242424"/>
                 </ns1:solidFill>
@@ -7802,7 +7802,7 @@
               </ns1:defRPr>
             </ns1:pPr>
             <ns1:r>
-              <ns1:rPr sz="1350" b="0">
+              <ns1:rPr sz="1125" b="0">
                 <ns1:solidFill>
                   <ns1:srgbClr val="242424"/>
                 </ns1:solidFill>
@@ -7810,7 +7810,7 @@
                 <ns1:ea typeface="Microsoft YaHei"/>
                 <ns1:cs typeface="Microsoft YaHei"/>
               </ns1:rPr>
-              <ns1:t>个人助手 · 低内存 · 响应快</ns1:t>
+              <ns1:t>个人助手与本地 AI</ns1:t>
             </ns1:r>
           </ns1:p>
         </ns0:txBody>
@@ -7831,8 +7831,8 @@
         </ns0:nvSpPr>
         <ns0:spPr>
           <ns1:xfrm>
-            <ns1:off x="5638800" y="990600"/>
-            <ns1:ext cx="2476500" cy="1143000"/>
+            <ns1:off x="4026796" y="990600"/>
+            <ns1:ext cx="1718146" cy="1143000"/>
           </ns1:xfrm>
           <ns1:prstGeom prst="roundRect">
             <ns1:avLst>
@@ -7865,8 +7865,8 @@
         </ns0:nvSpPr>
         <ns0:spPr>
           <ns1:xfrm>
-            <ns1:off x="5715000" y="1066800"/>
-            <ns1:ext cx="2324100" cy="371475"/>
+            <ns1:off x="4079662" y="1066800"/>
+            <ns1:ext cx="1612414" cy="371475"/>
           </ns1:xfrm>
           <ns1:prstGeom prst="rect">
             <ns1:avLst/>
@@ -7880,7 +7880,7 @@
           <ns1:bodyPr lIns="0" tIns="0" rIns="0" bIns="0" anchor="ctr"/>
           <ns1:lstStyle>
             <ns1:defPPr algn="ctr">
-              <ns1:defRPr sz="1350" b="1">
+              <ns1:defRPr sz="1125" b="1">
                 <ns1:solidFill>
                   <ns1:srgbClr val="BC2026"/>
                 </ns1:solidFill>
@@ -7892,7 +7892,7 @@
           </ns1:lstStyle>
           <ns1:p>
             <ns1:pPr algn="ctr">
-              <ns1:defRPr sz="1350" b="1">
+              <ns1:defRPr sz="1125" b="1">
                 <ns1:solidFill>
                   <ns1:srgbClr val="BC2026"/>
                 </ns1:solidFill>
@@ -7902,7 +7902,7 @@
               </ns1:defRPr>
             </ns1:pPr>
             <ns1:r>
-              <ns1:rPr sz="1350" b="1">
+              <ns1:rPr sz="1125" b="1">
                 <ns1:solidFill>
                   <ns1:srgbClr val="BC2026"/>
                 </ns1:solidFill>
@@ -7910,7 +7910,7 @@
                 <ns1:ea typeface="Microsoft YaHei"/>
                 <ns1:cs typeface="Microsoft YaHei"/>
               </ns1:rPr>
-              <ns1:t>嵌入式、具身机器人、无人车</ns1:t>
+              <ns1:t>嵌入式 / 具身 / 无人车</ns1:t>
             </ns1:r>
           </ns1:p>
         </ns0:txBody>
@@ -7931,8 +7931,8 @@
         </ns0:nvSpPr>
         <ns0:spPr>
           <ns1:xfrm>
-            <ns1:off x="5715000" y="1476375"/>
-            <ns1:ext cx="2324100" cy="266700"/>
+            <ns1:off x="4079662" y="1476375"/>
+            <ns1:ext cx="1612414" cy="266700"/>
           </ns1:xfrm>
           <ns1:prstGeom prst="rect">
             <ns1:avLst/>
@@ -7946,7 +7946,7 @@
           <ns1:bodyPr lIns="0" tIns="0" rIns="0" bIns="0" anchor="ctr"/>
           <ns1:lstStyle>
             <ns1:defPPr algn="ctr">
-              <ns1:defRPr sz="1725" b="1">
+              <ns1:defRPr sz="1311" b="1">
                 <ns1:solidFill>
                   <ns1:srgbClr val="242424"/>
                 </ns1:solidFill>
@@ -7958,7 +7958,7 @@
           </ns1:lstStyle>
           <ns1:p>
             <ns1:pPr algn="ctr">
-              <ns1:defRPr sz="1725" b="1">
+              <ns1:defRPr sz="1311" b="1">
                 <ns1:solidFill>
                   <ns1:srgbClr val="242424"/>
                 </ns1:solidFill>
@@ -7968,7 +7968,7 @@
               </ns1:defRPr>
             </ns1:pPr>
             <ns1:r>
-              <ns1:rPr sz="1725" b="1">
+              <ns1:rPr sz="1311" b="1">
                 <ns1:solidFill>
                   <ns1:srgbClr val="242424"/>
                 </ns1:solidFill>
@@ -7997,8 +7997,8 @@
         </ns0:nvSpPr>
         <ns0:spPr>
           <ns1:xfrm>
-            <ns1:off x="5715000" y="1809750"/>
-            <ns1:ext cx="2324100" cy="247650"/>
+            <ns1:off x="4079662" y="1809750"/>
+            <ns1:ext cx="1612414" cy="247650"/>
           </ns1:xfrm>
           <ns1:prstGeom prst="rect">
             <ns1:avLst/>
@@ -8012,7 +8012,7 @@
           <ns1:bodyPr lIns="0" tIns="0" rIns="0" bIns="0" anchor="ctr"/>
           <ns1:lstStyle>
             <ns1:defPPr algn="ctr">
-              <ns1:defRPr sz="1350" b="0">
+              <ns1:defRPr sz="1125" b="0">
                 <ns1:solidFill>
                   <ns1:srgbClr val="242424"/>
                 </ns1:solidFill>
@@ -8024,7 +8024,7 @@
           </ns1:lstStyle>
           <ns1:p>
             <ns1:pPr algn="ctr">
-              <ns1:defRPr sz="1350" b="0">
+              <ns1:defRPr sz="1125" b="0">
                 <ns1:solidFill>
                   <ns1:srgbClr val="242424"/>
                 </ns1:solidFill>
@@ -8034,7 +8034,7 @@
               </ns1:defRPr>
             </ns1:pPr>
             <ns1:r>
-              <ns1:rPr sz="1350" b="0">
+              <ns1:rPr sz="1125" b="0">
                 <ns1:solidFill>
                   <ns1:srgbClr val="242424"/>
                 </ns1:solidFill>
@@ -8042,7 +8042,7 @@
                 <ns1:ea typeface="Microsoft YaHei"/>
                 <ns1:cs typeface="Microsoft YaHei"/>
               </ns1:rPr>
-              <ns1:t>多模态闭环 · 时延与功耗约束</ns1:t>
+              <ns1:t>多模态与实时推理</ns1:t>
             </ns1:r>
           </ns1:p>
         </ns0:txBody>
@@ -8063,8 +8063,8 @@
         </ns0:nvSpPr>
         <ns0:spPr>
           <ns1:xfrm>
-            <ns1:off x="219075" y="2333625"/>
-            <ns1:ext cx="7962900" cy="2324100"/>
+            <ns1:off x="266700" y="2333625"/>
+            <ns1:ext cx="5524500" cy="2324100"/>
           </ns1:xfrm>
           <ns1:prstGeom prst="roundRect">
             <ns1:avLst>
@@ -8097,8 +8097,8 @@
         </ns0:nvSpPr>
         <ns0:spPr>
           <ns1:xfrm>
-            <ns1:off x="381000" y="2371725"/>
-            <ns1:ext cx="7620000" cy="285750"/>
+            <ns1:off x="379040" y="2371725"/>
+            <ns1:ext cx="5286603" cy="285750"/>
           </ns1:xfrm>
           <ns1:prstGeom prst="rect">
             <ns1:avLst/>
@@ -8112,7 +8112,7 @@
           <ns1:bodyPr lIns="0" tIns="0" rIns="0" bIns="0" anchor="ctr"/>
           <ns1:lstStyle>
             <ns1:defPPr algn="ctr">
-              <ns1:defRPr sz="1875" b="1">
+              <ns1:defRPr sz="1425" b="1">
                 <ns1:solidFill>
                   <ns1:srgbClr val="BC2026"/>
                 </ns1:solidFill>
@@ -8124,7 +8124,7 @@
           </ns1:lstStyle>
           <ns1:p>
             <ns1:pPr algn="ctr">
-              <ns1:defRPr sz="1875" b="1">
+              <ns1:defRPr sz="1425" b="1">
                 <ns1:solidFill>
                   <ns1:srgbClr val="BC2026"/>
                 </ns1:solidFill>
@@ -8134,7 +8134,7 @@
               </ns1:defRPr>
             </ns1:pPr>
             <ns1:r>
-              <ns1:rPr sz="1875" b="1">
+              <ns1:rPr sz="1425" b="1">
                 <ns1:solidFill>
                   <ns1:srgbClr val="BC2026"/>
                 </ns1:solidFill>
@@ -8163,8 +8163,8 @@
         </ns0:nvSpPr>
         <ns0:spPr>
           <ns1:xfrm>
-            <ns1:off x="381000" y="2724150"/>
-            <ns1:ext cx="2286000" cy="1790700"/>
+            <ns1:off x="379040" y="2724150"/>
+            <ns1:ext cx="1585981" cy="1790700"/>
           </ns1:xfrm>
           <ns1:prstGeom prst="roundRect">
             <ns1:avLst>
@@ -8197,8 +8197,8 @@
         </ns0:nvSpPr>
         <ns0:spPr>
           <ns1:xfrm>
-            <ns1:off x="438150" y="2809875"/>
-            <ns1:ext cx="2171700" cy="304800"/>
+            <ns1:off x="418690" y="2809875"/>
+            <ns1:ext cx="1506682" cy="304800"/>
           </ns1:xfrm>
           <ns1:prstGeom prst="rect">
             <ns1:avLst/>
@@ -8212,7 +8212,7 @@
           <ns1:bodyPr lIns="0" tIns="0" rIns="0" bIns="0" anchor="ctr"/>
           <ns1:lstStyle>
             <ns1:defPPr algn="ctr">
-              <ns1:defRPr sz="1725" b="1">
+              <ns1:defRPr sz="1311" b="1">
                 <ns1:solidFill>
                   <ns1:srgbClr val="242424"/>
                 </ns1:solidFill>
@@ -8224,7 +8224,7 @@
           </ns1:lstStyle>
           <ns1:p>
             <ns1:pPr algn="ctr">
-              <ns1:defRPr sz="1725" b="1">
+              <ns1:defRPr sz="1311" b="1">
                 <ns1:solidFill>
                   <ns1:srgbClr val="242424"/>
                 </ns1:solidFill>
@@ -8234,7 +8234,7 @@
               </ns1:defRPr>
             </ns1:pPr>
             <ns1:r>
-              <ns1:rPr sz="1725" b="1">
+              <ns1:rPr sz="1311" b="1">
                 <ns1:solidFill>
                   <ns1:srgbClr val="242424"/>
                 </ns1:solidFill>
@@ -8263,8 +8263,8 @@
         </ns0:nvSpPr>
         <ns0:spPr>
           <ns1:xfrm>
-            <ns1:off x="552450" y="3190875"/>
-            <ns1:ext cx="1943100" cy="304800"/>
+            <ns1:off x="497989" y="3190875"/>
+            <ns1:ext cx="1348084" cy="304800"/>
           </ns1:xfrm>
           <ns1:prstGeom prst="rect">
             <ns1:avLst/>
@@ -8295,8 +8295,8 @@
         </ns0:nvSpPr>
         <ns0:spPr>
           <ns1:xfrm>
-            <ns1:off x="600075" y="3190875"/>
-            <ns1:ext cx="1847850" cy="304800"/>
+            <ns1:off x="531030" y="3190875"/>
+            <ns1:ext cx="1282001" cy="304800"/>
           </ns1:xfrm>
           <ns1:prstGeom prst="rect">
             <ns1:avLst/>
@@ -8310,7 +8310,7 @@
           <ns1:bodyPr lIns="0" tIns="0" rIns="0" bIns="0" anchor="ctr"/>
           <ns1:lstStyle>
             <ns1:defPPr algn="ctr">
-              <ns1:defRPr sz="1350" b="0">
+              <ns1:defRPr sz="1125" b="0">
                 <ns1:solidFill>
                   <ns1:srgbClr val="242424"/>
                 </ns1:solidFill>
@@ -8322,7 +8322,7 @@
           </ns1:lstStyle>
           <ns1:p>
             <ns1:pPr algn="ctr">
-              <ns1:defRPr sz="1350" b="0">
+              <ns1:defRPr sz="1125" b="0">
                 <ns1:solidFill>
                   <ns1:srgbClr val="242424"/>
                 </ns1:solidFill>
@@ -8332,7 +8332,7 @@
               </ns1:defRPr>
             </ns1:pPr>
             <ns1:r>
-              <ns1:rPr sz="1350" b="0">
+              <ns1:rPr sz="1125" b="0">
                 <ns1:solidFill>
                   <ns1:srgbClr val="242424"/>
                 </ns1:solidFill>
@@ -8340,7 +8340,7 @@
                 <ns1:ea typeface="Microsoft YaHei"/>
                 <ns1:cs typeface="Microsoft YaHei"/>
               </ns1:rPr>
-              <ns1:t>框架选型与后端接入</ns1:t>
+              <ns1:t>引擎选型与接入</ns1:t>
             </ns1:r>
           </ns1:p>
         </ns0:txBody>
@@ -8361,8 +8361,8 @@
         </ns0:nvSpPr>
         <ns0:spPr>
           <ns1:xfrm>
-            <ns1:off x="552450" y="3590925"/>
-            <ns1:ext cx="1943100" cy="304800"/>
+            <ns1:off x="497989" y="3590925"/>
+            <ns1:ext cx="1348084" cy="304800"/>
           </ns1:xfrm>
           <ns1:prstGeom prst="rect">
             <ns1:avLst/>
@@ -8393,8 +8393,8 @@
         </ns0:nvSpPr>
         <ns0:spPr>
           <ns1:xfrm>
-            <ns1:off x="600075" y="3590925"/>
-            <ns1:ext cx="1847850" cy="304800"/>
+            <ns1:off x="531030" y="3590925"/>
+            <ns1:ext cx="1282001" cy="304800"/>
           </ns1:xfrm>
           <ns1:prstGeom prst="rect">
             <ns1:avLst/>
@@ -8408,7 +8408,7 @@
           <ns1:bodyPr lIns="0" tIns="0" rIns="0" bIns="0" anchor="ctr"/>
           <ns1:lstStyle>
             <ns1:defPPr algn="ctr">
-              <ns1:defRPr sz="1350" b="0">
+              <ns1:defRPr sz="1125" b="0">
                 <ns1:solidFill>
                   <ns1:srgbClr val="242424"/>
                 </ns1:solidFill>
@@ -8420,7 +8420,7 @@
           </ns1:lstStyle>
           <ns1:p>
             <ns1:pPr algn="ctr">
-              <ns1:defRPr sz="1350" b="0">
+              <ns1:defRPr sz="1125" b="0">
                 <ns1:solidFill>
                   <ns1:srgbClr val="242424"/>
                 </ns1:solidFill>
@@ -8430,7 +8430,7 @@
               </ns1:defRPr>
             </ns1:pPr>
             <ns1:r>
-              <ns1:rPr sz="1350" b="0">
+              <ns1:rPr sz="1125" b="0">
                 <ns1:solidFill>
                   <ns1:srgbClr val="242424"/>
                 </ns1:solidFill>
@@ -8459,8 +8459,8 @@
         </ns0:nvSpPr>
         <ns0:spPr>
           <ns1:xfrm>
-            <ns1:off x="552450" y="3990975"/>
-            <ns1:ext cx="1943100" cy="304800"/>
+            <ns1:off x="497989" y="3990975"/>
+            <ns1:ext cx="1348084" cy="304800"/>
           </ns1:xfrm>
           <ns1:prstGeom prst="rect">
             <ns1:avLst/>
@@ -8491,8 +8491,8 @@
         </ns0:nvSpPr>
         <ns0:spPr>
           <ns1:xfrm>
-            <ns1:off x="600075" y="3990975"/>
-            <ns1:ext cx="1847850" cy="304800"/>
+            <ns1:off x="531030" y="3990975"/>
+            <ns1:ext cx="1282001" cy="304800"/>
           </ns1:xfrm>
           <ns1:prstGeom prst="rect">
             <ns1:avLst/>
@@ -8506,7 +8506,7 @@
           <ns1:bodyPr lIns="0" tIns="0" rIns="0" bIns="0" anchor="ctr"/>
           <ns1:lstStyle>
             <ns1:defPPr algn="ctr">
-              <ns1:defRPr sz="1350" b="0">
+              <ns1:defRPr sz="1125" b="0">
                 <ns1:solidFill>
                   <ns1:srgbClr val="242424"/>
                 </ns1:solidFill>
@@ -8518,7 +8518,7 @@
           </ns1:lstStyle>
           <ns1:p>
             <ns1:pPr algn="ctr">
-              <ns1:defRPr sz="1350" b="0">
+              <ns1:defRPr sz="1125" b="0">
                 <ns1:solidFill>
                   <ns1:srgbClr val="242424"/>
                 </ns1:solidFill>
@@ -8528,7 +8528,7 @@
               </ns1:defRPr>
             </ns1:pPr>
             <ns1:r>
-              <ns1:rPr sz="1350" b="0">
+              <ns1:rPr sz="1125" b="0">
                 <ns1:solidFill>
                   <ns1:srgbClr val="242424"/>
                 </ns1:solidFill>
@@ -8536,7 +8536,7 @@
                 <ns1:ea typeface="Microsoft YaHei"/>
                 <ns1:cs typeface="Microsoft YaHei"/>
               </ns1:rPr>
-              <ns1:t>模型精度与兼容验证</ns1:t>
+              <ns1:t>精度与兼容验证</ns1:t>
             </ns1:r>
           </ns1:p>
         </ns0:txBody>
@@ -8557,8 +8557,8 @@
         </ns0:nvSpPr>
         <ns0:spPr>
           <ns1:xfrm>
-            <ns1:off x="3057525" y="2724150"/>
-            <ns1:ext cx="2286000" cy="1790700"/>
+            <ns1:off x="2235960" y="2724150"/>
+            <ns1:ext cx="1585981" cy="1790700"/>
           </ns1:xfrm>
           <ns1:prstGeom prst="roundRect">
             <ns1:avLst>
@@ -8591,8 +8591,8 @@
         </ns0:nvSpPr>
         <ns0:spPr>
           <ns1:xfrm>
-            <ns1:off x="3114675" y="2809875"/>
-            <ns1:ext cx="2171700" cy="304800"/>
+            <ns1:off x="2275609" y="2809875"/>
+            <ns1:ext cx="1506682" cy="304800"/>
           </ns1:xfrm>
           <ns1:prstGeom prst="rect">
             <ns1:avLst/>
@@ -8606,7 +8606,7 @@
           <ns1:bodyPr lIns="0" tIns="0" rIns="0" bIns="0" anchor="ctr"/>
           <ns1:lstStyle>
             <ns1:defPPr algn="ctr">
-              <ns1:defRPr sz="1725" b="1">
+              <ns1:defRPr sz="1311" b="1">
                 <ns1:solidFill>
                   <ns1:srgbClr val="242424"/>
                 </ns1:solidFill>
@@ -8618,7 +8618,7 @@
           </ns1:lstStyle>
           <ns1:p>
             <ns1:pPr algn="ctr">
-              <ns1:defRPr sz="1725" b="1">
+              <ns1:defRPr sz="1311" b="1">
                 <ns1:solidFill>
                   <ns1:srgbClr val="242424"/>
                 </ns1:solidFill>
@@ -8628,7 +8628,7 @@
               </ns1:defRPr>
             </ns1:pPr>
             <ns1:r>
-              <ns1:rPr sz="1725" b="1">
+              <ns1:rPr sz="1311" b="1">
                 <ns1:solidFill>
                   <ns1:srgbClr val="242424"/>
                 </ns1:solidFill>
@@ -8657,8 +8657,8 @@
         </ns0:nvSpPr>
         <ns0:spPr>
           <ns1:xfrm>
-            <ns1:off x="3228975" y="3190875"/>
-            <ns1:ext cx="1943100" cy="304800"/>
+            <ns1:off x="2354908" y="3190875"/>
+            <ns1:ext cx="1348084" cy="304800"/>
           </ns1:xfrm>
           <ns1:prstGeom prst="rect">
             <ns1:avLst/>
@@ -8689,8 +8689,8 @@
         </ns0:nvSpPr>
         <ns0:spPr>
           <ns1:xfrm>
-            <ns1:off x="3276600" y="3190875"/>
-            <ns1:ext cx="1847850" cy="304800"/>
+            <ns1:off x="2387949" y="3190875"/>
+            <ns1:ext cx="1282001" cy="304800"/>
           </ns1:xfrm>
           <ns1:prstGeom prst="rect">
             <ns1:avLst/>
@@ -8704,7 +8704,7 @@
           <ns1:bodyPr lIns="0" tIns="0" rIns="0" bIns="0" anchor="ctr"/>
           <ns1:lstStyle>
             <ns1:defPPr algn="ctr">
-              <ns1:defRPr sz="1350" b="0">
+              <ns1:defRPr sz="1125" b="0">
                 <ns1:solidFill>
                   <ns1:srgbClr val="242424"/>
                 </ns1:solidFill>
@@ -8716,7 +8716,7 @@
           </ns1:lstStyle>
           <ns1:p>
             <ns1:pPr algn="ctr">
-              <ns1:defRPr sz="1350" b="0">
+              <ns1:defRPr sz="1125" b="0">
                 <ns1:solidFill>
                   <ns1:srgbClr val="242424"/>
                 </ns1:solidFill>
@@ -8726,7 +8726,7 @@
               </ns1:defRPr>
             </ns1:pPr>
             <ns1:r>
-              <ns1:rPr sz="1350" b="0">
+              <ns1:rPr sz="1125" b="0">
                 <ns1:solidFill>
                   <ns1:srgbClr val="242424"/>
                 </ns1:solidFill>
@@ -8734,7 +8734,7 @@
                 <ns1:ea typeface="Microsoft YaHei"/>
                 <ns1:cs typeface="Microsoft YaHei"/>
               </ns1:rPr>
-              <ns1:t>权重与 KV 分级压缩</ns1:t>
+              <ns1:t>权重与 KV 压缩</ns1:t>
             </ns1:r>
           </ns1:p>
         </ns0:txBody>
@@ -8755,8 +8755,8 @@
         </ns0:nvSpPr>
         <ns0:spPr>
           <ns1:xfrm>
-            <ns1:off x="3228975" y="3590925"/>
-            <ns1:ext cx="1943100" cy="304800"/>
+            <ns1:off x="2354908" y="3590925"/>
+            <ns1:ext cx="1348084" cy="304800"/>
           </ns1:xfrm>
           <ns1:prstGeom prst="rect">
             <ns1:avLst/>
@@ -8787,8 +8787,8 @@
         </ns0:nvSpPr>
         <ns0:spPr>
           <ns1:xfrm>
-            <ns1:off x="3276600" y="3590925"/>
-            <ns1:ext cx="1847850" cy="304800"/>
+            <ns1:off x="2387949" y="3590925"/>
+            <ns1:ext cx="1282001" cy="304800"/>
           </ns1:xfrm>
           <ns1:prstGeom prst="rect">
             <ns1:avLst/>
@@ -8802,7 +8802,7 @@
           <ns1:bodyPr lIns="0" tIns="0" rIns="0" bIns="0" anchor="ctr"/>
           <ns1:lstStyle>
             <ns1:defPPr algn="ctr">
-              <ns1:defRPr sz="1350" b="0">
+              <ns1:defRPr sz="1125" b="0">
                 <ns1:solidFill>
                   <ns1:srgbClr val="242424"/>
                 </ns1:solidFill>
@@ -8814,7 +8814,7 @@
           </ns1:lstStyle>
           <ns1:p>
             <ns1:pPr algn="ctr">
-              <ns1:defRPr sz="1350" b="0">
+              <ns1:defRPr sz="1125" b="0">
                 <ns1:solidFill>
                   <ns1:srgbClr val="242424"/>
                 </ns1:solidFill>
@@ -8824,7 +8824,7 @@
               </ns1:defRPr>
             </ns1:pPr>
             <ns1:r>
-              <ns1:rPr sz="1350" b="0">
+              <ns1:rPr sz="1125" b="0">
                 <ns1:solidFill>
                   <ns1:srgbClr val="242424"/>
                 </ns1:solidFill>
@@ -8832,7 +8832,7 @@
                 <ns1:ea typeface="Microsoft YaHei"/>
                 <ns1:cs typeface="Microsoft YaHei"/>
               </ns1:rPr>
-              <ns1:t>量化、算子与图优化</ns1:t>
+              <ns1:t>量化与图算子优化</ns1:t>
             </ns1:r>
           </ns1:p>
         </ns0:txBody>
@@ -8853,8 +8853,8 @@
         </ns0:nvSpPr>
         <ns0:spPr>
           <ns1:xfrm>
-            <ns1:off x="3228975" y="3990975"/>
-            <ns1:ext cx="1943100" cy="304800"/>
+            <ns1:off x="2354908" y="3990975"/>
+            <ns1:ext cx="1348084" cy="304800"/>
           </ns1:xfrm>
           <ns1:prstGeom prst="rect">
             <ns1:avLst/>
@@ -8885,8 +8885,8 @@
         </ns0:nvSpPr>
         <ns0:spPr>
           <ns1:xfrm>
-            <ns1:off x="3276600" y="3990975"/>
-            <ns1:ext cx="1847850" cy="304800"/>
+            <ns1:off x="2387949" y="3990975"/>
+            <ns1:ext cx="1282001" cy="304800"/>
           </ns1:xfrm>
           <ns1:prstGeom prst="rect">
             <ns1:avLst/>
@@ -8900,7 +8900,7 @@
           <ns1:bodyPr lIns="0" tIns="0" rIns="0" bIns="0" anchor="ctr"/>
           <ns1:lstStyle>
             <ns1:defPPr algn="ctr">
-              <ns1:defRPr sz="1350" b="0">
+              <ns1:defRPr sz="1125" b="0">
                 <ns1:solidFill>
                   <ns1:srgbClr val="242424"/>
                 </ns1:solidFill>
@@ -8912,7 +8912,7 @@
           </ns1:lstStyle>
           <ns1:p>
             <ns1:pPr algn="ctr">
-              <ns1:defRPr sz="1350" b="0">
+              <ns1:defRPr sz="1125" b="0">
                 <ns1:solidFill>
                   <ns1:srgbClr val="242424"/>
                 </ns1:solidFill>
@@ -8922,7 +8922,7 @@
               </ns1:defRPr>
             </ns1:pPr>
             <ns1:r>
-              <ns1:rPr sz="1350" b="0">
+              <ns1:rPr sz="1125" b="0">
                 <ns1:solidFill>
                   <ns1:srgbClr val="242424"/>
                 </ns1:solidFill>
@@ -8930,7 +8930,7 @@
                 <ns1:ea typeface="Microsoft YaHei"/>
                 <ns1:cs typeface="Microsoft YaHei"/>
               </ns1:rPr>
-              <ns1:t>内存与 CPU/NPU 协同</ns1:t>
+              <ns1:t>内存与异构协同</ns1:t>
             </ns1:r>
           </ns1:p>
         </ns0:txBody>
@@ -8951,8 +8951,8 @@
         </ns0:nvSpPr>
         <ns0:spPr>
           <ns1:xfrm>
-            <ns1:off x="5734050" y="2724150"/>
-            <ns1:ext cx="2286000" cy="1790700"/>
+            <ns1:off x="4092879" y="2724150"/>
+            <ns1:ext cx="1585981" cy="1790700"/>
           </ns1:xfrm>
           <ns1:prstGeom prst="roundRect">
             <ns1:avLst>
@@ -8985,8 +8985,8 @@
         </ns0:nvSpPr>
         <ns0:spPr>
           <ns1:xfrm>
-            <ns1:off x="5791200" y="2809875"/>
-            <ns1:ext cx="2171700" cy="304800"/>
+            <ns1:off x="4132528" y="2809875"/>
+            <ns1:ext cx="1506682" cy="304800"/>
           </ns1:xfrm>
           <ns1:prstGeom prst="rect">
             <ns1:avLst/>
@@ -9000,7 +9000,7 @@
           <ns1:bodyPr lIns="0" tIns="0" rIns="0" bIns="0" anchor="ctr"/>
           <ns1:lstStyle>
             <ns1:defPPr algn="ctr">
-              <ns1:defRPr sz="1725" b="1">
+              <ns1:defRPr sz="1311" b="1">
                 <ns1:solidFill>
                   <ns1:srgbClr val="242424"/>
                 </ns1:solidFill>
@@ -9012,7 +9012,7 @@
           </ns1:lstStyle>
           <ns1:p>
             <ns1:pPr algn="ctr">
-              <ns1:defRPr sz="1725" b="1">
+              <ns1:defRPr sz="1311" b="1">
                 <ns1:solidFill>
                   <ns1:srgbClr val="242424"/>
                 </ns1:solidFill>
@@ -9022,7 +9022,7 @@
               </ns1:defRPr>
             </ns1:pPr>
             <ns1:r>
-              <ns1:rPr sz="1725" b="1">
+              <ns1:rPr sz="1311" b="1">
                 <ns1:solidFill>
                   <ns1:srgbClr val="242424"/>
                 </ns1:solidFill>
@@ -9051,8 +9051,8 @@
         </ns0:nvSpPr>
         <ns0:spPr>
           <ns1:xfrm>
-            <ns1:off x="5905500" y="3190875"/>
-            <ns1:ext cx="1943100" cy="304800"/>
+            <ns1:off x="4211827" y="3190875"/>
+            <ns1:ext cx="1348084" cy="304800"/>
           </ns1:xfrm>
           <ns1:prstGeom prst="rect">
             <ns1:avLst/>
@@ -9083,8 +9083,8 @@
         </ns0:nvSpPr>
         <ns0:spPr>
           <ns1:xfrm>
-            <ns1:off x="5953125" y="3190875"/>
-            <ns1:ext cx="1847850" cy="304800"/>
+            <ns1:off x="4244869" y="3190875"/>
+            <ns1:ext cx="1282001" cy="304800"/>
           </ns1:xfrm>
           <ns1:prstGeom prst="rect">
             <ns1:avLst/>
@@ -9098,7 +9098,7 @@
           <ns1:bodyPr lIns="0" tIns="0" rIns="0" bIns="0" anchor="ctr"/>
           <ns1:lstStyle>
             <ns1:defPPr algn="ctr">
-              <ns1:defRPr sz="1350" b="0">
+              <ns1:defRPr sz="1125" b="0">
                 <ns1:solidFill>
                   <ns1:srgbClr val="242424"/>
                 </ns1:solidFill>
@@ -9110,7 +9110,7 @@
           </ns1:lstStyle>
           <ns1:p>
             <ns1:pPr algn="ctr">
-              <ns1:defRPr sz="1350" b="0">
+              <ns1:defRPr sz="1125" b="0">
                 <ns1:solidFill>
                   <ns1:srgbClr val="242424"/>
                 </ns1:solidFill>
@@ -9120,7 +9120,7 @@
               </ns1:defRPr>
             </ns1:pPr>
             <ns1:r>
-              <ns1:rPr sz="1350" b="0">
+              <ns1:rPr sz="1125" b="0">
                 <ns1:solidFill>
                   <ns1:srgbClr val="242424"/>
                 </ns1:solidFill>
@@ -9128,7 +9128,7 @@
                 <ns1:ea typeface="Microsoft YaHei"/>
                 <ns1:cs typeface="Microsoft YaHei"/>
               </ns1:rPr>
-              <ns1:t>模型适配与性能调优</ns1:t>
+              <ns1:t>模型适配与调优</ns1:t>
             </ns1:r>
           </ns1:p>
         </ns0:txBody>
@@ -9149,8 +9149,8 @@
         </ns0:nvSpPr>
         <ns0:spPr>
           <ns1:xfrm>
-            <ns1:off x="5905500" y="3590925"/>
-            <ns1:ext cx="1943100" cy="304800"/>
+            <ns1:off x="4211827" y="3590925"/>
+            <ns1:ext cx="1348084" cy="304800"/>
           </ns1:xfrm>
           <ns1:prstGeom prst="rect">
             <ns1:avLst/>
@@ -9181,8 +9181,8 @@
         </ns0:nvSpPr>
         <ns0:spPr>
           <ns1:xfrm>
-            <ns1:off x="5953125" y="3590925"/>
-            <ns1:ext cx="1847850" cy="304800"/>
+            <ns1:off x="4244869" y="3590925"/>
+            <ns1:ext cx="1282001" cy="304800"/>
           </ns1:xfrm>
           <ns1:prstGeom prst="rect">
             <ns1:avLst/>
@@ -9196,7 +9196,7 @@
           <ns1:bodyPr lIns="0" tIns="0" rIns="0" bIns="0" anchor="ctr"/>
           <ns1:lstStyle>
             <ns1:defPPr algn="ctr">
-              <ns1:defRPr sz="1350" b="0">
+              <ns1:defRPr sz="1125" b="0">
                 <ns1:solidFill>
                   <ns1:srgbClr val="242424"/>
                 </ns1:solidFill>
@@ -9208,7 +9208,7 @@
           </ns1:lstStyle>
           <ns1:p>
             <ns1:pPr algn="ctr">
-              <ns1:defRPr sz="1350" b="0">
+              <ns1:defRPr sz="1125" b="0">
                 <ns1:solidFill>
                   <ns1:srgbClr val="242424"/>
                 </ns1:solidFill>
@@ -9218,7 +9218,7 @@
               </ns1:defRPr>
             </ns1:pPr>
             <ns1:r>
-              <ns1:rPr sz="1350" b="0">
+              <ns1:rPr sz="1125" b="0">
                 <ns1:solidFill>
                   <ns1:srgbClr val="242424"/>
                 </ns1:solidFill>
@@ -9226,7 +9226,7 @@
                 <ns1:ea typeface="Microsoft YaHei"/>
                 <ns1:cs typeface="Microsoft YaHei"/>
               </ns1:rPr>
-              <ns1:t>精度定位与算子开发</ns1:t>
+              <ns1:t>精度与算子开发</ns1:t>
             </ns1:r>
           </ns1:p>
         </ns0:txBody>
@@ -9247,8 +9247,8 @@
         </ns0:nvSpPr>
         <ns0:spPr>
           <ns1:xfrm>
-            <ns1:off x="5905500" y="3990975"/>
-            <ns1:ext cx="1943100" cy="304800"/>
+            <ns1:off x="4211827" y="3990975"/>
+            <ns1:ext cx="1348084" cy="304800"/>
           </ns1:xfrm>
           <ns1:prstGeom prst="rect">
             <ns1:avLst/>
@@ -9279,8 +9279,8 @@
         </ns0:nvSpPr>
         <ns0:spPr>
           <ns1:xfrm>
-            <ns1:off x="5953125" y="3990975"/>
-            <ns1:ext cx="1847850" cy="304800"/>
+            <ns1:off x="4244869" y="3990975"/>
+            <ns1:ext cx="1282001" cy="304800"/>
           </ns1:xfrm>
           <ns1:prstGeom prst="rect">
             <ns1:avLst/>
@@ -9294,7 +9294,7 @@
           <ns1:bodyPr lIns="0" tIns="0" rIns="0" bIns="0" anchor="ctr"/>
           <ns1:lstStyle>
             <ns1:defPPr algn="ctr">
-              <ns1:defRPr sz="1350" b="0">
+              <ns1:defRPr sz="1125" b="0">
                 <ns1:solidFill>
                   <ns1:srgbClr val="242424"/>
                 </ns1:solidFill>
@@ -9306,7 +9306,7 @@
           </ns1:lstStyle>
           <ns1:p>
             <ns1:pPr algn="ctr">
-              <ns1:defRPr sz="1350" b="0">
+              <ns1:defRPr sz="1125" b="0">
                 <ns1:solidFill>
                   <ns1:srgbClr val="242424"/>
                 </ns1:solidFill>
@@ -9316,7 +9316,7 @@
               </ns1:defRPr>
             </ns1:pPr>
             <ns1:r>
-              <ns1:rPr sz="1350" b="0">
+              <ns1:rPr sz="1125" b="0">
                 <ns1:solidFill>
                   <ns1:srgbClr val="242424"/>
                 </ns1:solidFill>
@@ -9324,7 +9324,7 @@
                 <ns1:ea typeface="Microsoft YaHei"/>
                 <ns1:cs typeface="Microsoft YaHei"/>
               </ns1:rPr>
-              <ns1:t>通用 Skills 沉淀复用</ns1:t>
+              <ns1:t>Skills 沉淀复用</ns1:t>
             </ns1:r>
           </ns1:p>
         </ns0:txBody>
@@ -9345,8 +9345,8 @@
         </ns0:nvSpPr>
         <ns0:spPr>
           <ns1:xfrm>
-            <ns1:off x="219075" y="4810125"/>
-            <ns1:ext cx="7962900" cy="390525"/>
+            <ns1:off x="266700" y="4810125"/>
+            <ns1:ext cx="5524500" cy="390525"/>
           </ns1:xfrm>
           <ns1:prstGeom prst="roundRect">
             <ns1:avLst>
@@ -9379,8 +9379,8 @@
         </ns0:nvSpPr>
         <ns0:spPr>
           <ns1:xfrm>
-            <ns1:off x="285750" y="4810125"/>
-            <ns1:ext cx="7829550" cy="390525"/>
+            <ns1:off x="312958" y="4810125"/>
+            <ns1:ext cx="5431984" cy="390525"/>
           </ns1:xfrm>
           <ns1:prstGeom prst="rect">
             <ns1:avLst/>
@@ -9394,7 +9394,7 @@
           <ns1:bodyPr lIns="0" tIns="0" rIns="0" bIns="0" anchor="ctr"/>
           <ns1:lstStyle>
             <ns1:defPPr algn="ctr">
-              <ns1:defRPr sz="1875" b="1">
+              <ns1:defRPr sz="1425" b="1">
                 <ns1:solidFill>
                   <ns1:srgbClr val="242424"/>
                 </ns1:solidFill>
@@ -9406,7 +9406,7 @@
           </ns1:lstStyle>
           <ns1:p>
             <ns1:pPr algn="ctr">
-              <ns1:defRPr sz="1875" b="1">
+              <ns1:defRPr sz="1425" b="1">
                 <ns1:solidFill>
                   <ns1:srgbClr val="242424"/>
                 </ns1:solidFill>
@@ -9416,7 +9416,7 @@
               </ns1:defRPr>
             </ns1:pPr>
             <ns1:r>
-              <ns1:rPr sz="1875" b="1">
+              <ns1:rPr sz="1425" b="1">
                 <ns1:solidFill>
                   <ns1:srgbClr val="242424"/>
                 </ns1:solidFill>
@@ -9445,8 +9445,8 @@
         </ns0:nvSpPr>
         <ns0:spPr>
           <ns1:xfrm>
-            <ns1:off x="219075" y="5305425"/>
-            <ns1:ext cx="7962900" cy="390525"/>
+            <ns1:off x="266700" y="5305425"/>
+            <ns1:ext cx="5524500" cy="390525"/>
           </ns1:xfrm>
           <ns1:prstGeom prst="roundRect">
             <ns1:avLst>
@@ -9479,8 +9479,8 @@
         </ns0:nvSpPr>
         <ns0:spPr>
           <ns1:xfrm>
-            <ns1:off x="285750" y="5305425"/>
-            <ns1:ext cx="7829550" cy="390525"/>
+            <ns1:off x="312958" y="5305425"/>
+            <ns1:ext cx="5431984" cy="390525"/>
           </ns1:xfrm>
           <ns1:prstGeom prst="rect">
             <ns1:avLst/>
@@ -9494,7 +9494,7 @@
           <ns1:bodyPr lIns="0" tIns="0" rIns="0" bIns="0" anchor="ctr"/>
           <ns1:lstStyle>
             <ns1:defPPr algn="ctr">
-              <ns1:defRPr sz="1725" b="1">
+              <ns1:defRPr sz="1311" b="1">
                 <ns1:solidFill>
                   <ns1:srgbClr val="242424"/>
                 </ns1:solidFill>
@@ -9506,7 +9506,7 @@
           </ns1:lstStyle>
           <ns1:p>
             <ns1:pPr algn="ctr">
-              <ns1:defRPr sz="1725" b="1">
+              <ns1:defRPr sz="1311" b="1">
                 <ns1:solidFill>
                   <ns1:srgbClr val="242424"/>
                 </ns1:solidFill>
@@ -9516,7 +9516,7 @@
               </ns1:defRPr>
             </ns1:pPr>
             <ns1:r>
-              <ns1:rPr sz="1725" b="1">
+              <ns1:rPr sz="1311" b="1">
                 <ns1:solidFill>
                   <ns1:srgbClr val="242424"/>
                 </ns1:solidFill>
@@ -9524,7 +9524,7 @@
                 <ns1:ea typeface="Microsoft YaHei"/>
                 <ns1:cs typeface="Microsoft YaHei"/>
               </ns1:rPr>
-              <ns1:t>操作系统：Ubuntu / openEuler / Windows 等</ns1:t>
+              <ns1:t>Ubuntu / openEuler / Windows</ns1:t>
             </ns1:r>
           </ns1:p>
         </ns0:txBody>
@@ -9545,8 +9545,8 @@
         </ns0:nvSpPr>
         <ns0:spPr>
           <ns1:xfrm>
-            <ns1:off x="219075" y="5800725"/>
-            <ns1:ext cx="7962900" cy="342900"/>
+            <ns1:off x="266700" y="5800725"/>
+            <ns1:ext cx="5524500" cy="342900"/>
           </ns1:xfrm>
           <ns1:prstGeom prst="roundRect">
             <ns1:avLst>
@@ -9579,8 +9579,8 @@
         </ns0:nvSpPr>
         <ns0:spPr>
           <ns1:xfrm>
-            <ns1:off x="285750" y="5800725"/>
-            <ns1:ext cx="7829550" cy="342900"/>
+            <ns1:off x="312958" y="5800725"/>
+            <ns1:ext cx="5431984" cy="342900"/>
           </ns1:xfrm>
           <ns1:prstGeom prst="rect">
             <ns1:avLst/>
@@ -9594,7 +9594,7 @@
           <ns1:bodyPr lIns="0" tIns="0" rIns="0" bIns="0" anchor="ctr"/>
           <ns1:lstStyle>
             <ns1:defPPr algn="ctr">
-              <ns1:defRPr sz="1800" b="1">
+              <ns1:defRPr sz="1368" b="1">
                 <ns1:solidFill>
                   <ns1:srgbClr val="242424"/>
                 </ns1:solidFill>
@@ -9606,7 +9606,7 @@
           </ns1:lstStyle>
           <ns1:p>
             <ns1:pPr algn="ctr">
-              <ns1:defRPr sz="1800" b="1">
+              <ns1:defRPr sz="1368" b="1">
                 <ns1:solidFill>
                   <ns1:srgbClr val="242424"/>
                 </ns1:solidFill>
@@ -9616,7 +9616,7 @@
               </ns1:defRPr>
             </ns1:pPr>
             <ns1:r>
-              <ns1:rPr sz="1800" b="1">
+              <ns1:rPr sz="1368" b="1">
                 <ns1:solidFill>
                   <ns1:srgbClr val="242424"/>
                 </ns1:solidFill>
@@ -9645,8 +9645,8 @@
         </ns0:nvSpPr>
         <ns0:spPr>
           <ns1:xfrm>
-            <ns1:off x="219075" y="6248400"/>
-            <ns1:ext cx="7962900" cy="333375"/>
+            <ns1:off x="266700" y="6248400"/>
+            <ns1:ext cx="5524500" cy="333375"/>
           </ns1:xfrm>
           <ns1:prstGeom prst="roundRect">
             <ns1:avLst>
@@ -9679,8 +9679,8 @@
         </ns0:nvSpPr>
         <ns0:spPr>
           <ns1:xfrm>
-            <ns1:off x="285750" y="6248400"/>
-            <ns1:ext cx="7829550" cy="333375"/>
+            <ns1:off x="312958" y="6248400"/>
+            <ns1:ext cx="5431984" cy="333375"/>
           </ns1:xfrm>
           <ns1:prstGeom prst="rect">
             <ns1:avLst/>
@@ -9694,7 +9694,7 @@
           <ns1:bodyPr lIns="0" tIns="0" rIns="0" bIns="0" anchor="ctr"/>
           <ns1:lstStyle>
             <ns1:defPPr algn="ctr">
-              <ns1:defRPr sz="1575" b="1">
+              <ns1:defRPr sz="1197" b="1">
                 <ns1:solidFill>
                   <ns1:srgbClr val="242424"/>
                 </ns1:solidFill>
@@ -9706,7 +9706,7 @@
           </ns1:lstStyle>
           <ns1:p>
             <ns1:pPr algn="ctr">
-              <ns1:defRPr sz="1575" b="1">
+              <ns1:defRPr sz="1197" b="1">
                 <ns1:solidFill>
                   <ns1:srgbClr val="242424"/>
                 </ns1:solidFill>
@@ -9716,7 +9716,7 @@
               </ns1:defRPr>
             </ns1:pPr>
             <ns1:r>
-              <ns1:rPr sz="1575" b="1">
+              <ns1:rPr sz="1050" b="1">
                 <ns1:solidFill>
                   <ns1:srgbClr val="242424"/>
                 </ns1:solidFill>
@@ -9724,7 +9724,7 @@
                 <ns1:ea typeface="Microsoft YaHei"/>
                 <ns1:cs typeface="Microsoft YaHei"/>
               </ns1:rPr>
-              <ns1:t>310B / 310B-Next / 310P / 950PR-Lite / 310P-Next</ns1:t>
+              <ns1:t>310B / 310P / 310B-Next / 950PR-Lite / 310P-Next</ns1:t>
             </ns1:r>
           </ns1:p>
         </ns0:txBody>
@@ -9745,8 +9745,8 @@
         </ns0:nvSpPr>
         <ns0:spPr>
           <ns1:xfrm>
-            <ns1:off x="8553450" y="981075"/>
-            <ns1:ext cx="3238500" cy="361950"/>
+            <ns1:off x="6334125" y="981075"/>
+            <ns1:ext cx="5429250" cy="361950"/>
           </ns1:xfrm>
           <ns1:prstGeom prst="rect">
             <ns1:avLst/>
@@ -9760,7 +9760,7 @@
           <ns1:bodyPr lIns="0" tIns="0" rIns="0" bIns="0" anchor="ctr"/>
           <ns1:lstStyle>
             <ns1:defPPr algn="l">
-              <ns1:defRPr sz="2175" b="1">
+              <ns1:defRPr sz="2436" b="1">
                 <ns1:solidFill>
                   <ns1:srgbClr val="BC2026"/>
                 </ns1:solidFill>
@@ -9772,7 +9772,7 @@
           </ns1:lstStyle>
           <ns1:p>
             <ns1:pPr algn="l">
-              <ns1:defRPr sz="2175" b="1">
+              <ns1:defRPr sz="2436" b="1">
                 <ns1:solidFill>
                   <ns1:srgbClr val="BC2026"/>
                 </ns1:solidFill>
@@ -9782,7 +9782,7 @@
               </ns1:defRPr>
             </ns1:pPr>
             <ns1:r>
-              <ns1:rPr sz="2175" b="1">
+              <ns1:rPr sz="2436" b="1">
                 <ns1:solidFill>
                   <ns1:srgbClr val="BC2026"/>
                 </ns1:solidFill>
@@ -9811,8 +9811,8 @@
         </ns0:nvSpPr>
         <ns0:spPr>
           <ns1:xfrm>
-            <ns1:off x="8553450" y="1438275"/>
-            <ns1:ext cx="3238500" cy="276225"/>
+            <ns1:off x="6334125" y="1438275"/>
+            <ns1:ext cx="5429250" cy="276225"/>
           </ns1:xfrm>
           <ns1:prstGeom prst="rect">
             <ns1:avLst/>
@@ -9826,7 +9826,7 @@
           <ns1:bodyPr lIns="0" tIns="0" rIns="0" bIns="0" anchor="ctr"/>
           <ns1:lstStyle>
             <ns1:defPPr algn="l">
-              <ns1:defRPr sz="1725" b="1">
+              <ns1:defRPr sz="1932" b="1">
                 <ns1:solidFill>
                   <ns1:srgbClr val="BC2026"/>
                 </ns1:solidFill>
@@ -9838,7 +9838,7 @@
           </ns1:lstStyle>
           <ns1:p>
             <ns1:pPr algn="l">
-              <ns1:defRPr sz="1725" b="1">
+              <ns1:defRPr sz="1932" b="1">
                 <ns1:solidFill>
                   <ns1:srgbClr val="BC2026"/>
                 </ns1:solidFill>
@@ -9848,7 +9848,7 @@
               </ns1:defRPr>
             </ns1:pPr>
             <ns1:r>
-              <ns1:rPr sz="1725" b="1">
+              <ns1:rPr sz="1932" b="1">
                 <ns1:solidFill>
                   <ns1:srgbClr val="BC2026"/>
                 </ns1:solidFill>
@@ -9877,8 +9877,8 @@
         </ns0:nvSpPr>
         <ns0:spPr>
           <ns1:xfrm>
-            <ns1:off x="8553450" y="1724025"/>
-            <ns1:ext cx="3238500" cy="485775"/>
+            <ns1:off x="6334125" y="1724025"/>
+            <ns1:ext cx="5429250" cy="485775"/>
           </ns1:xfrm>
           <ns1:prstGeom prst="rect">
             <ns1:avLst/>
@@ -9892,7 +9892,7 @@
           <ns1:bodyPr lIns="0" tIns="0" rIns="0" bIns="0" anchor="ctr"/>
           <ns1:lstStyle>
             <ns1:defPPr algn="l">
-              <ns1:defRPr sz="1500" b="0">
+              <ns1:defRPr sz="1680" b="0">
                 <ns1:solidFill>
                   <ns1:srgbClr val="333333"/>
                 </ns1:solidFill>
@@ -9904,7 +9904,7 @@
           </ns1:lstStyle>
           <ns1:p>
             <ns1:pPr algn="l">
-              <ns1:defRPr sz="1500" b="0">
+              <ns1:defRPr sz="1680" b="0">
                 <ns1:solidFill>
                   <ns1:srgbClr val="333333"/>
                 </ns1:solidFill>
@@ -9914,7 +9914,7 @@
               </ns1:defRPr>
             </ns1:pPr>
             <ns1:r>
-              <ns1:rPr sz="1500" b="0">
+              <ns1:rPr sz="1680" b="0">
                 <ns1:solidFill>
                   <ns1:srgbClr val="333333"/>
                 </ns1:solidFill>
@@ -9927,7 +9927,7 @@
           </ns1:p>
           <ns1:p>
             <ns1:pPr algn="l">
-              <ns1:defRPr sz="1500" b="0">
+              <ns1:defRPr sz="1680" b="0">
                 <ns1:solidFill>
                   <ns1:srgbClr val="333333"/>
                 </ns1:solidFill>
@@ -9937,7 +9937,7 @@
               </ns1:defRPr>
             </ns1:pPr>
             <ns1:r>
-              <ns1:rPr sz="1500" b="0">
+              <ns1:rPr sz="1680" b="0">
                 <ns1:solidFill>
                   <ns1:srgbClr val="333333"/>
                 </ns1:solidFill>
@@ -9966,8 +9966,8 @@
         </ns0:nvSpPr>
         <ns0:spPr>
           <ns1:xfrm>
-            <ns1:off x="8553450" y="2228850"/>
-            <ns1:ext cx="3238500" cy="276225"/>
+            <ns1:off x="6334125" y="2228850"/>
+            <ns1:ext cx="5429250" cy="276225"/>
           </ns1:xfrm>
           <ns1:prstGeom prst="rect">
             <ns1:avLst/>
@@ -9981,7 +9981,7 @@
           <ns1:bodyPr lIns="0" tIns="0" rIns="0" bIns="0" anchor="ctr"/>
           <ns1:lstStyle>
             <ns1:defPPr algn="l">
-              <ns1:defRPr sz="1725" b="1">
+              <ns1:defRPr sz="1932" b="1">
                 <ns1:solidFill>
                   <ns1:srgbClr val="BC2026"/>
                 </ns1:solidFill>
@@ -9993,7 +9993,7 @@
           </ns1:lstStyle>
           <ns1:p>
             <ns1:pPr algn="l">
-              <ns1:defRPr sz="1725" b="1">
+              <ns1:defRPr sz="1932" b="1">
                 <ns1:solidFill>
                   <ns1:srgbClr val="BC2026"/>
                 </ns1:solidFill>
@@ -10003,7 +10003,7 @@
               </ns1:defRPr>
             </ns1:pPr>
             <ns1:r>
-              <ns1:rPr sz="1725" b="1">
+              <ns1:rPr sz="1932" b="1">
                 <ns1:solidFill>
                   <ns1:srgbClr val="BC2026"/>
                 </ns1:solidFill>
@@ -10032,8 +10032,8 @@
         </ns0:nvSpPr>
         <ns0:spPr>
           <ns1:xfrm>
-            <ns1:off x="8553450" y="2514600"/>
-            <ns1:ext cx="3238500" cy="485775"/>
+            <ns1:off x="6334125" y="2514600"/>
+            <ns1:ext cx="5429250" cy="485775"/>
           </ns1:xfrm>
           <ns1:prstGeom prst="rect">
             <ns1:avLst/>
@@ -10047,7 +10047,7 @@
           <ns1:bodyPr lIns="0" tIns="0" rIns="0" bIns="0" anchor="ctr"/>
           <ns1:lstStyle>
             <ns1:defPPr algn="l">
-              <ns1:defRPr sz="1500" b="0">
+              <ns1:defRPr sz="1680" b="0">
                 <ns1:solidFill>
                   <ns1:srgbClr val="333333"/>
                 </ns1:solidFill>
@@ -10059,7 +10059,7 @@
           </ns1:lstStyle>
           <ns1:p>
             <ns1:pPr algn="l">
-              <ns1:defRPr sz="1500" b="0">
+              <ns1:defRPr sz="1680" b="0">
                 <ns1:solidFill>
                   <ns1:srgbClr val="333333"/>
                 </ns1:solidFill>
@@ -10069,7 +10069,7 @@
               </ns1:defRPr>
             </ns1:pPr>
             <ns1:r>
-              <ns1:rPr sz="1500" b="0">
+              <ns1:rPr sz="1680" b="0">
                 <ns1:solidFill>
                   <ns1:srgbClr val="333333"/>
                 </ns1:solidFill>
@@ -10082,7 +10082,7 @@
           </ns1:p>
           <ns1:p>
             <ns1:pPr algn="l">
-              <ns1:defRPr sz="1500" b="0">
+              <ns1:defRPr sz="1680" b="0">
                 <ns1:solidFill>
                   <ns1:srgbClr val="333333"/>
                 </ns1:solidFill>
@@ -10092,7 +10092,7 @@
               </ns1:defRPr>
             </ns1:pPr>
             <ns1:r>
-              <ns1:rPr sz="1500" b="0">
+              <ns1:rPr sz="1680" b="0">
                 <ns1:solidFill>
                   <ns1:srgbClr val="333333"/>
                 </ns1:solidFill>
@@ -10121,8 +10121,8 @@
         </ns0:nvSpPr>
         <ns0:spPr>
           <ns1:xfrm>
-            <ns1:off x="8553450" y="3019425"/>
-            <ns1:ext cx="3238500" cy="276225"/>
+            <ns1:off x="6334125" y="3019425"/>
+            <ns1:ext cx="5429250" cy="276225"/>
           </ns1:xfrm>
           <ns1:prstGeom prst="rect">
             <ns1:avLst/>
@@ -10136,7 +10136,7 @@
           <ns1:bodyPr lIns="0" tIns="0" rIns="0" bIns="0" anchor="ctr"/>
           <ns1:lstStyle>
             <ns1:defPPr algn="l">
-              <ns1:defRPr sz="1725" b="1">
+              <ns1:defRPr sz="1932" b="1">
                 <ns1:solidFill>
                   <ns1:srgbClr val="BC2026"/>
                 </ns1:solidFill>
@@ -10148,7 +10148,7 @@
           </ns1:lstStyle>
           <ns1:p>
             <ns1:pPr algn="l">
-              <ns1:defRPr sz="1725" b="1">
+              <ns1:defRPr sz="1932" b="1">
                 <ns1:solidFill>
                   <ns1:srgbClr val="BC2026"/>
                 </ns1:solidFill>
@@ -10158,7 +10158,7 @@
               </ns1:defRPr>
             </ns1:pPr>
             <ns1:r>
-              <ns1:rPr sz="1725" b="1">
+              <ns1:rPr sz="1932" b="1">
                 <ns1:solidFill>
                   <ns1:srgbClr val="BC2026"/>
                 </ns1:solidFill>
@@ -10187,8 +10187,8 @@
         </ns0:nvSpPr>
         <ns0:spPr>
           <ns1:xfrm>
-            <ns1:off x="8553450" y="3305175"/>
-            <ns1:ext cx="3238500" cy="485775"/>
+            <ns1:off x="6334125" y="3305175"/>
+            <ns1:ext cx="5429250" cy="485775"/>
           </ns1:xfrm>
           <ns1:prstGeom prst="rect">
             <ns1:avLst/>
@@ -10202,7 +10202,7 @@
           <ns1:bodyPr lIns="0" tIns="0" rIns="0" bIns="0" anchor="ctr"/>
           <ns1:lstStyle>
             <ns1:defPPr algn="l">
-              <ns1:defRPr sz="1500" b="0">
+              <ns1:defRPr sz="1680" b="0">
                 <ns1:solidFill>
                   <ns1:srgbClr val="333333"/>
                 </ns1:solidFill>
@@ -10214,7 +10214,7 @@
           </ns1:lstStyle>
           <ns1:p>
             <ns1:pPr algn="l">
-              <ns1:defRPr sz="1500" b="0">
+              <ns1:defRPr sz="1680" b="0">
                 <ns1:solidFill>
                   <ns1:srgbClr val="333333"/>
                 </ns1:solidFill>
@@ -10224,7 +10224,7 @@
               </ns1:defRPr>
             </ns1:pPr>
             <ns1:r>
-              <ns1:rPr sz="1500" b="0">
+              <ns1:rPr sz="1680" b="0">
                 <ns1:solidFill>
                   <ns1:srgbClr val="333333"/>
                 </ns1:solidFill>
@@ -10237,7 +10237,7 @@
           </ns1:p>
           <ns1:p>
             <ns1:pPr algn="l">
-              <ns1:defRPr sz="1500" b="0">
+              <ns1:defRPr sz="1680" b="0">
                 <ns1:solidFill>
                   <ns1:srgbClr val="333333"/>
                 </ns1:solidFill>
@@ -10247,7 +10247,7 @@
               </ns1:defRPr>
             </ns1:pPr>
             <ns1:r>
-              <ns1:rPr sz="1500" b="0">
+              <ns1:rPr sz="1680" b="0">
                 <ns1:solidFill>
                   <ns1:srgbClr val="333333"/>
                 </ns1:solidFill>
@@ -10276,8 +10276,8 @@
         </ns0:nvSpPr>
         <ns0:spPr>
           <ns1:xfrm>
-            <ns1:off x="8553450" y="3981450"/>
-            <ns1:ext cx="3238500" cy="361950"/>
+            <ns1:off x="6334125" y="3981450"/>
+            <ns1:ext cx="5429250" cy="361950"/>
           </ns1:xfrm>
           <ns1:prstGeom prst="rect">
             <ns1:avLst/>
@@ -10291,7 +10291,7 @@
           <ns1:bodyPr lIns="0" tIns="0" rIns="0" bIns="0" anchor="ctr"/>
           <ns1:lstStyle>
             <ns1:defPPr algn="l">
-              <ns1:defRPr sz="2175" b="1">
+              <ns1:defRPr sz="2436" b="1">
                 <ns1:solidFill>
                   <ns1:srgbClr val="BC2026"/>
                 </ns1:solidFill>
@@ -10303,7 +10303,7 @@
           </ns1:lstStyle>
           <ns1:p>
             <ns1:pPr algn="l">
-              <ns1:defRPr sz="2175" b="1">
+              <ns1:defRPr sz="2436" b="1">
                 <ns1:solidFill>
                   <ns1:srgbClr val="BC2026"/>
                 </ns1:solidFill>
@@ -10313,7 +10313,7 @@
               </ns1:defRPr>
             </ns1:pPr>
             <ns1:r>
-              <ns1:rPr sz="2175" b="1">
+              <ns1:rPr sz="2436" b="1">
                 <ns1:solidFill>
                   <ns1:srgbClr val="BC2026"/>
                 </ns1:solidFill>
@@ -10342,8 +10342,8 @@
         </ns0:nvSpPr>
         <ns0:spPr>
           <ns1:xfrm>
-            <ns1:off x="8553450" y="4419600"/>
-            <ns1:ext cx="3238500" cy="276225"/>
+            <ns1:off x="6334125" y="4419600"/>
+            <ns1:ext cx="5429250" cy="276225"/>
           </ns1:xfrm>
           <ns1:prstGeom prst="rect">
             <ns1:avLst/>
@@ -10357,7 +10357,7 @@
           <ns1:bodyPr lIns="0" tIns="0" rIns="0" bIns="0" anchor="ctr"/>
           <ns1:lstStyle>
             <ns1:defPPr algn="l">
-              <ns1:defRPr sz="1650" b="1">
+              <ns1:defRPr sz="1848" b="1">
                 <ns1:solidFill>
                   <ns1:srgbClr val="BC2026"/>
                 </ns1:solidFill>
@@ -10369,7 +10369,7 @@
           </ns1:lstStyle>
           <ns1:p>
             <ns1:pPr algn="l">
-              <ns1:defRPr sz="1650" b="1">
+              <ns1:defRPr sz="1848" b="1">
                 <ns1:solidFill>
                   <ns1:srgbClr val="BC2026"/>
                 </ns1:solidFill>
@@ -10379,7 +10379,7 @@
               </ns1:defRPr>
             </ns1:pPr>
             <ns1:r>
-              <ns1:rPr sz="1650" b="1">
+              <ns1:rPr sz="1848" b="1">
                 <ns1:solidFill>
                   <ns1:srgbClr val="BC2026"/>
                 </ns1:solidFill>
@@ -10408,8 +10408,8 @@
         </ns0:nvSpPr>
         <ns0:spPr>
           <ns1:xfrm>
-            <ns1:off x="8553450" y="4695825"/>
-            <ns1:ext cx="3238500" cy="457200"/>
+            <ns1:off x="6334125" y="4695825"/>
+            <ns1:ext cx="5429250" cy="457200"/>
           </ns1:xfrm>
           <ns1:prstGeom prst="rect">
             <ns1:avLst/>
@@ -10423,7 +10423,7 @@
           <ns1:bodyPr lIns="0" tIns="0" rIns="0" bIns="0" anchor="ctr"/>
           <ns1:lstStyle>
             <ns1:defPPr algn="l">
-              <ns1:defRPr sz="1425" b="0">
+              <ns1:defRPr sz="1596" b="0">
                 <ns1:solidFill>
                   <ns1:srgbClr val="333333"/>
                 </ns1:solidFill>
@@ -10435,7 +10435,7 @@
           </ns1:lstStyle>
           <ns1:p>
             <ns1:pPr algn="l">
-              <ns1:defRPr sz="1425" b="0">
+              <ns1:defRPr sz="1596" b="0">
                 <ns1:solidFill>
                   <ns1:srgbClr val="333333"/>
                 </ns1:solidFill>
@@ -10445,7 +10445,7 @@
               </ns1:defRPr>
             </ns1:pPr>
             <ns1:r>
-              <ns1:rPr sz="1425" b="0">
+              <ns1:rPr sz="1596" b="0">
                 <ns1:solidFill>
                   <ns1:srgbClr val="333333"/>
                 </ns1:solidFill>
@@ -10458,7 +10458,7 @@
           </ns1:p>
           <ns1:p>
             <ns1:pPr algn="l">
-              <ns1:defRPr sz="1425" b="0">
+              <ns1:defRPr sz="1596" b="0">
                 <ns1:solidFill>
                   <ns1:srgbClr val="333333"/>
                 </ns1:solidFill>
@@ -10468,7 +10468,7 @@
               </ns1:defRPr>
             </ns1:pPr>
             <ns1:r>
-              <ns1:rPr sz="1425" b="0">
+              <ns1:rPr sz="1596" b="0">
                 <ns1:solidFill>
                   <ns1:srgbClr val="333333"/>
                 </ns1:solidFill>
@@ -10497,8 +10497,8 @@
         </ns0:nvSpPr>
         <ns0:spPr>
           <ns1:xfrm>
-            <ns1:off x="8553450" y="5153025"/>
-            <ns1:ext cx="3238500" cy="276225"/>
+            <ns1:off x="6334125" y="5153025"/>
+            <ns1:ext cx="5429250" cy="276225"/>
           </ns1:xfrm>
           <ns1:prstGeom prst="rect">
             <ns1:avLst/>
@@ -10512,7 +10512,7 @@
           <ns1:bodyPr lIns="0" tIns="0" rIns="0" bIns="0" anchor="ctr"/>
           <ns1:lstStyle>
             <ns1:defPPr algn="l">
-              <ns1:defRPr sz="1650" b="1">
+              <ns1:defRPr sz="1848" b="1">
                 <ns1:solidFill>
                   <ns1:srgbClr val="BC2026"/>
                 </ns1:solidFill>
@@ -10524,7 +10524,7 @@
           </ns1:lstStyle>
           <ns1:p>
             <ns1:pPr algn="l">
-              <ns1:defRPr sz="1650" b="1">
+              <ns1:defRPr sz="1848" b="1">
                 <ns1:solidFill>
                   <ns1:srgbClr val="BC2026"/>
                 </ns1:solidFill>
@@ -10534,7 +10534,7 @@
               </ns1:defRPr>
             </ns1:pPr>
             <ns1:r>
-              <ns1:rPr sz="1650" b="1">
+              <ns1:rPr sz="1848" b="1">
                 <ns1:solidFill>
                   <ns1:srgbClr val="BC2026"/>
                 </ns1:solidFill>
@@ -10563,8 +10563,8 @@
         </ns0:nvSpPr>
         <ns0:spPr>
           <ns1:xfrm>
-            <ns1:off x="8553450" y="5429250"/>
-            <ns1:ext cx="3238500" cy="457200"/>
+            <ns1:off x="6334125" y="5429250"/>
+            <ns1:ext cx="5429250" cy="457200"/>
           </ns1:xfrm>
           <ns1:prstGeom prst="rect">
             <ns1:avLst/>
@@ -10578,7 +10578,7 @@
           <ns1:bodyPr lIns="0" tIns="0" rIns="0" bIns="0" anchor="ctr"/>
           <ns1:lstStyle>
             <ns1:defPPr algn="l">
-              <ns1:defRPr sz="1425" b="0">
+              <ns1:defRPr sz="1596" b="0">
                 <ns1:solidFill>
                   <ns1:srgbClr val="333333"/>
                 </ns1:solidFill>
@@ -10590,7 +10590,7 @@
           </ns1:lstStyle>
           <ns1:p>
             <ns1:pPr algn="l">
-              <ns1:defRPr sz="1425" b="0">
+              <ns1:defRPr sz="1596" b="0">
                 <ns1:solidFill>
                   <ns1:srgbClr val="333333"/>
                 </ns1:solidFill>
@@ -10600,7 +10600,7 @@
               </ns1:defRPr>
             </ns1:pPr>
             <ns1:r>
-              <ns1:rPr sz="1425" b="0">
+              <ns1:rPr sz="1596" b="0">
                 <ns1:solidFill>
                   <ns1:srgbClr val="333333"/>
                 </ns1:solidFill>
@@ -10613,7 +10613,7 @@
           </ns1:p>
           <ns1:p>
             <ns1:pPr algn="l">
-              <ns1:defRPr sz="1425" b="0">
+              <ns1:defRPr sz="1596" b="0">
                 <ns1:solidFill>
                   <ns1:srgbClr val="333333"/>
                 </ns1:solidFill>
@@ -10623,7 +10623,7 @@
               </ns1:defRPr>
             </ns1:pPr>
             <ns1:r>
-              <ns1:rPr sz="1425" b="0">
+              <ns1:rPr sz="1596" b="0">
                 <ns1:solidFill>
                   <ns1:srgbClr val="333333"/>
                 </ns1:solidFill>
@@ -10652,8 +10652,8 @@
         </ns0:nvSpPr>
         <ns0:spPr>
           <ns1:xfrm>
-            <ns1:off x="8553450" y="5886450"/>
-            <ns1:ext cx="3238500" cy="276225"/>
+            <ns1:off x="6334125" y="5886450"/>
+            <ns1:ext cx="5429250" cy="276225"/>
           </ns1:xfrm>
           <ns1:prstGeom prst="rect">
             <ns1:avLst/>
@@ -10667,7 +10667,7 @@
           <ns1:bodyPr lIns="0" tIns="0" rIns="0" bIns="0" anchor="ctr"/>
           <ns1:lstStyle>
             <ns1:defPPr algn="l">
-              <ns1:defRPr sz="1650" b="1">
+              <ns1:defRPr sz="1848" b="1">
                 <ns1:solidFill>
                   <ns1:srgbClr val="BC2026"/>
                 </ns1:solidFill>
@@ -10679,7 +10679,7 @@
           </ns1:lstStyle>
           <ns1:p>
             <ns1:pPr algn="l">
-              <ns1:defRPr sz="1650" b="1">
+              <ns1:defRPr sz="1848" b="1">
                 <ns1:solidFill>
                   <ns1:srgbClr val="BC2026"/>
                 </ns1:solidFill>
@@ -10689,7 +10689,7 @@
               </ns1:defRPr>
             </ns1:pPr>
             <ns1:r>
-              <ns1:rPr sz="1650" b="1">
+              <ns1:rPr sz="1848" b="1">
                 <ns1:solidFill>
                   <ns1:srgbClr val="BC2026"/>
                 </ns1:solidFill>
@@ -10718,8 +10718,8 @@
         </ns0:nvSpPr>
         <ns0:spPr>
           <ns1:xfrm>
-            <ns1:off x="8553450" y="6162675"/>
-            <ns1:ext cx="3238500" cy="457200"/>
+            <ns1:off x="6334125" y="6162675"/>
+            <ns1:ext cx="5429250" cy="457200"/>
           </ns1:xfrm>
           <ns1:prstGeom prst="rect">
             <ns1:avLst/>
@@ -10733,7 +10733,7 @@
           <ns1:bodyPr lIns="0" tIns="0" rIns="0" bIns="0" anchor="ctr"/>
           <ns1:lstStyle>
             <ns1:defPPr algn="l">
-              <ns1:defRPr sz="1425" b="0">
+              <ns1:defRPr sz="1596" b="0">
                 <ns1:solidFill>
                   <ns1:srgbClr val="333333"/>
                 </ns1:solidFill>
@@ -10745,7 +10745,7 @@
           </ns1:lstStyle>
           <ns1:p>
             <ns1:pPr algn="l">
-              <ns1:defRPr sz="1425" b="0">
+              <ns1:defRPr sz="1596" b="0">
                 <ns1:solidFill>
                   <ns1:srgbClr val="333333"/>
                 </ns1:solidFill>
@@ -10755,7 +10755,7 @@
               </ns1:defRPr>
             </ns1:pPr>
             <ns1:r>
-              <ns1:rPr sz="1425" b="0">
+              <ns1:rPr sz="1596" b="0">
                 <ns1:solidFill>
                   <ns1:srgbClr val="333333"/>
                 </ns1:solidFill>
@@ -10768,7 +10768,7 @@
           </ns1:p>
           <ns1:p>
             <ns1:pPr algn="l">
-              <ns1:defRPr sz="1425" b="0">
+              <ns1:defRPr sz="1596" b="0">
                 <ns1:solidFill>
                   <ns1:srgbClr val="333333"/>
                 </ns1:solidFill>
@@ -10778,7 +10778,7 @@
               </ns1:defRPr>
             </ns1:pPr>
             <ns1:r>
-              <ns1:rPr sz="1425" b="0">
+              <ns1:rPr sz="1596" b="0">
                 <ns1:solidFill>
                   <ns1:srgbClr val="333333"/>
                 </ns1:solidFill>

--- a/infra_learning/PPT/端侧推理一体机团队能力建设研讨_第1-2页.pptx
+++ b/infra_learning/PPT/端侧推理一体机团队能力建设研讨_第1-2页.pptx
@@ -2,18 +2,20 @@
 <file path=ppt/presentation.xml><?xml version="1.0" encoding="utf-8"?>
 <p:presentation xmlns:p="http://schemas.openxmlformats.org/presentationml/2006/main">
   <p:sldMasterIdLst>
-    <p:sldMasterId xmlns:r="http://schemas.openxmlformats.org/officeDocument/2006/relationships" id="2147483648" r:id="R12aba6e14b854f1c"/>
+    <p:sldMasterId xmlns:r="http://schemas.openxmlformats.org/officeDocument/2006/relationships" id="2147483648" r:id="R3c6cc17db37c473b"/>
   </p:sldMasterIdLst>
   <p:notesMasterIdLst>
-    <p:notesMasterId xmlns:r="http://schemas.openxmlformats.org/officeDocument/2006/relationships" r:id="R1cf39188fe3b4520"/>
+    <p:notesMasterId xmlns:r="http://schemas.openxmlformats.org/officeDocument/2006/relationships" r:id="R7ee3f269dc2a44b3"/>
   </p:notesMasterIdLst>
   <p:sldIdLst>
-    <p:sldId xmlns:r="http://schemas.openxmlformats.org/officeDocument/2006/relationships" id="256" r:id="Rcb8884221fc1422c"/>
-    <p:sldId xmlns:r="http://schemas.openxmlformats.org/officeDocument/2006/relationships" id="257" r:id="R6cff237dcc494f1f"/>
-    <p:sldId xmlns:r="http://schemas.openxmlformats.org/officeDocument/2006/relationships" id="258" r:id="Ra8ec1487c5254770"/>
-    <p:sldId xmlns:r="http://schemas.openxmlformats.org/officeDocument/2006/relationships" id="259" r:id="R54476d7832524a1e"/>
-    <p:sldId xmlns:r="http://schemas.openxmlformats.org/officeDocument/2006/relationships" id="260" r:id="R66901c40e30c473c"/>
-    <p:sldId xmlns:r="http://schemas.openxmlformats.org/officeDocument/2006/relationships" id="261" r:id="R7510d43e4a4d4f84"/>
+    <p:sldId xmlns:r="http://schemas.openxmlformats.org/officeDocument/2006/relationships" id="256" r:id="R296d93644f70452a"/>
+    <p:sldId xmlns:r="http://schemas.openxmlformats.org/officeDocument/2006/relationships" id="257" r:id="R7920c50c1e654396"/>
+    <p:sldId xmlns:r="http://schemas.openxmlformats.org/officeDocument/2006/relationships" id="258" r:id="Rfe6b48e61ad34937"/>
+    <p:sldId xmlns:r="http://schemas.openxmlformats.org/officeDocument/2006/relationships" id="259" r:id="R15b7db8b67154b63"/>
+    <p:sldId xmlns:r="http://schemas.openxmlformats.org/officeDocument/2006/relationships" id="260" r:id="R821b981734da4b8b"/>
+    <p:sldId xmlns:r="http://schemas.openxmlformats.org/officeDocument/2006/relationships" id="261" r:id="R92b01621187f4b80"/>
+    <p:sldId xmlns:r="http://schemas.openxmlformats.org/officeDocument/2006/relationships" id="262" r:id="Rd0552a4616994c37"/>
+    <p:sldId xmlns:r="http://schemas.openxmlformats.org/officeDocument/2006/relationships" id="263" r:id="Rfb6adf48e20c48d2"/>
   </p:sldIdLst>
   <p:sldSz cx="12192000" cy="6858000"/>
   <p:notesSz cx="6858000" cy="9144000"/>
@@ -789,6 +791,221 @@
 </file>
 
 <file path=ppt/notesSlides/notesSlide6.xml><?xml version="1.0" encoding="utf-8"?>
+<p:notes xmlns:p="http://schemas.openxmlformats.org/presentationml/2006/main">
+  <p:cSld>
+    <p:spTree>
+      <p:nvGrpSpPr>
+        <p:cNvPr id="1" name=""/>
+        <p:cNvGrpSpPr/>
+        <p:nvPr/>
+      </p:nvGrpSpPr>
+      <p:grpSpPr>
+        <a:xfrm xmlns:a="http://schemas.openxmlformats.org/drawingml/2006/main"/>
+      </p:grpSpPr>
+      <p:sp>
+        <p:nvSpPr>
+          <p:cNvPr id="2" name="Slide Image Placeholder 1"/>
+          <p:cNvSpPr>
+            <a:spLocks xmlns:a="http://schemas.openxmlformats.org/drawingml/2006/main" noGrp="1"/>
+          </p:cNvSpPr>
+          <p:nvPr>
+            <p:ph type="sldImg" idx="0"/>
+          </p:nvPr>
+        </p:nvSpPr>
+        <p:spPr/>
+      </p:sp>
+      <p:sp>
+        <p:nvSpPr>
+          <p:cNvPr id="3" name="Notes Placeholder 2"/>
+          <p:cNvSpPr>
+            <a:spLocks xmlns:a="http://schemas.openxmlformats.org/drawingml/2006/main" noGrp="1"/>
+          </p:cNvSpPr>
+          <p:nvPr>
+            <p:ph type="body" idx="1"/>
+          </p:nvPr>
+        </p:nvSpPr>
+        <p:spPr/>
+        <p:txBody>
+          <a:bodyPr xmlns:a="http://schemas.openxmlformats.org/drawingml/2006/main"/>
+          <a:lstStyle xmlns:a="http://schemas.openxmlformats.org/drawingml/2006/main"/>
+          <a:p xmlns:a="http://schemas.openxmlformats.org/drawingml/2006/main">
+            <a:r>
+              <a:t>参考用户提供的无人车开发套件图，保留业务闭环、模型库、算子库和开发使能的层次，新增具身智能模型与推理框架。右侧能力及策略为规划目标，“开箱即最优”指在指定场景、精度和资源约束下追求的性能目标，不代表已实现全模型全硬件最优。ModelZoo资产分散为用户提供的内部现状。关键竞争力描述伙伴收益，策略分别落到仓库与接口、共性技术组件、AI Coding工具链与自动验证。建设状态按用户输入：黄色已完成、绿色未完成、黄绿对角分色完成一半。具身推理框架尚未开展，其余模型适配、无人车执行、算子接口与工程使能完成一半。两条业务链为简化示意，动作和车辆状态均需反馈到后续感知与推理；VLA输出仍需设备控制接口适配，不等同于直接取代底层控制器。具身推理框架为拟建设的应用执行层，关注动作分块、多模态接入、时序与异构调度；不是单一算子运行库。低时延与稳定执行需按整机资源、传感时序与控制需求实测，不代表安全认证。实际模型适配与算子支持需验证。资料：https://github.com/Physical-Intelligence/openpi/blob/main/packages/openpi-client/src/openpi_client/action_chunk_broker.py ，https://github.com/NVIDIA-ISAAC-ROS/isaac_ros_dnn_inference 。</a:t>
+            </a:r>
+          </a:p>
+        </p:txBody>
+      </p:sp>
+      <p:sp>
+        <p:nvSpPr>
+          <p:cNvPr id="4" name="Slide Number Placeholder 3"/>
+          <p:cNvSpPr>
+            <a:spLocks xmlns:a="http://schemas.openxmlformats.org/drawingml/2006/main" noGrp="1"/>
+          </p:cNvSpPr>
+          <p:nvPr>
+            <p:ph type="sldNum" idx="5"/>
+          </p:nvPr>
+        </p:nvSpPr>
+        <p:spPr/>
+        <p:txBody>
+          <a:bodyPr xmlns:a="http://schemas.openxmlformats.org/drawingml/2006/main"/>
+          <a:lstStyle xmlns:a="http://schemas.openxmlformats.org/drawingml/2006/main"/>
+          <a:p xmlns:a="http://schemas.openxmlformats.org/drawingml/2006/main"/>
+        </p:txBody>
+      </p:sp>
+    </p:spTree>
+  </p:cSld>
+  <p:clrMapOvr>
+    <a:masterClrMapping xmlns:a="http://schemas.openxmlformats.org/drawingml/2006/main"/>
+  </p:clrMapOvr>
+</p:notes>
+</file>
+
+<file path=ppt/notesSlides/notesSlide7.xml><?xml version="1.0" encoding="utf-8"?>
+<p:notes xmlns:p="http://schemas.openxmlformats.org/presentationml/2006/main">
+  <p:cSld>
+    <p:spTree>
+      <p:nvGrpSpPr>
+        <p:cNvPr id="1" name=""/>
+        <p:cNvGrpSpPr/>
+        <p:nvPr/>
+      </p:nvGrpSpPr>
+      <p:grpSpPr>
+        <a:xfrm xmlns:a="http://schemas.openxmlformats.org/drawingml/2006/main"/>
+      </p:grpSpPr>
+      <p:sp>
+        <p:nvSpPr>
+          <p:cNvPr id="2" name="Slide Image Placeholder 1"/>
+          <p:cNvSpPr>
+            <a:spLocks xmlns:a="http://schemas.openxmlformats.org/drawingml/2006/main" noGrp="1"/>
+          </p:cNvSpPr>
+          <p:nvPr>
+            <p:ph type="sldImg" idx="0"/>
+          </p:nvPr>
+        </p:nvSpPr>
+        <p:spPr/>
+      </p:sp>
+      <p:sp>
+        <p:nvSpPr>
+          <p:cNvPr id="3" name="Notes Placeholder 2"/>
+          <p:cNvSpPr>
+            <a:spLocks xmlns:a="http://schemas.openxmlformats.org/drawingml/2006/main" noGrp="1"/>
+          </p:cNvSpPr>
+          <p:nvPr>
+            <p:ph type="body" idx="1"/>
+          </p:nvPr>
+        </p:nvSpPr>
+        <p:spPr/>
+        <p:txBody>
+          <a:bodyPr xmlns:a="http://schemas.openxmlformats.org/drawingml/2006/main"/>
+          <a:lstStyle xmlns:a="http://schemas.openxmlformats.org/drawingml/2006/main"/>
+          <a:p xmlns:a="http://schemas.openxmlformats.org/drawingml/2006/main">
+            <a:r>
+              <a:t>本页右侧按高吞吐、大参数量模型、长序列三个场景目标组织。A+K沿用用户表述，指昇腾与鲲鹏协同的规划方向，不预设CPU执行专家算子或特定统一内存硬件已落地。卸载主要增加可承载容量，不保证提高速度；需验证搬运开销。长上下文扩容不能超越模型自身位置编码或质量边界，需要单独评估。低成本和性价比属于待实测目标。基于官方文档调研，为端侧建设规划，不声称全部功能已在310P或全部芯片落地。星号标记重点适配/预研，不是团队完成状态；未标星功能也需核对模型、芯片、版本及组合兼容性。</a:t>
+            </a:r>
+          </a:p>
+          <a:p xmlns:a="http://schemas.openxmlformats.org/drawingml/2006/main">
+            <a:r>
+              <a:t>1. 调度、图模式、融合算子、投机解码和并行见vLLM-Ascend特性与发布说明；ACL Graph主要降低Host调度开销，捕获与工作区可能增加内存，应按需调优。TTFT为首token时延，TPOT为输出每token时延，吞吐应在指定时延和精度约束下比较。</a:t>
+            </a:r>
+          </a:p>
+          <a:p xmlns:a="http://schemas.openxmlformats.org/drawingml/2006/main">
+            <a:r>
+              <a:t>https://docs.vllm.ai/projects/ascend/en/main/user_guide/support_matrix/supported_features.html</a:t>
+            </a:r>
+          </a:p>
+          <a:p xmlns:a="http://schemas.openxmlformats.org/drawingml/2006/main">
+            <a:r>
+              <a:t>https://docs.vllm.ai/projects/ascend/en/main/user_guide/release_notes.html</a:t>
+            </a:r>
+          </a:p>
+          <a:p xmlns:a="http://schemas.openxmlformats.org/drawingml/2006/main">
+            <a:r>
+              <a:t>2. W4A8/W4A4在部分模型与设备有支持，310系列不能默认复用全部格式。Qwen3教程指出Atlas inference products使用W8A8SC-310。FP4/FP8标星是面向支持硬件的适配或下一代预研，W4A4是位宽描述，不能等同于FP4格式。KV量化按版本/模型可有INT8或其他实现，不泛化到全部模型。极低位宽压缩可能损害精度，必须校准与评测。</a:t>
+            </a:r>
+          </a:p>
+          <a:p xmlns:a="http://schemas.openxmlformats.org/drawingml/2006/main">
+            <a:r>
+              <a:t>https://docs.vllm.ai/projects/ascend/en/v0.23.0rc1/tutorials/models/Qwen3-Dense.html</a:t>
+            </a:r>
+          </a:p>
+          <a:p xmlns:a="http://schemas.openxmlformats.org/drawingml/2006/main">
+            <a:r>
+              <a:t>https://docs.vllm.ai/projects/ascend/en/main/user_guide/feature_guide/quantization.html</a:t>
+            </a:r>
+          </a:p>
+          <a:p xmlns:a="http://schemas.openxmlformats.org/drawingml/2006/main">
+            <a:r>
+              <a:t>https://docs.vllm.ai/projects/ascend/en/v0.11.0/user_guide/configuration/additional_config.html</a:t>
+            </a:r>
+          </a:p>
+          <a:p xmlns:a="http://schemas.openxmlformats.org/drawingml/2006/main">
+            <a:r>
+              <a:t>3. KV Cache CPU Offload官方文档介绍非活跃KV块向Host卸载、异步传输与复用，不能理解为统一内存平台必然节省总物理内存。CPU池可能增加Host内存，需测实际互连带宽。</a:t>
+            </a:r>
+          </a:p>
+          <a:p xmlns:a="http://schemas.openxmlformats.org/drawingml/2006/main">
+            <a:r>
+              <a:t>https://docs.vllm.ai/projects/ascend/en/main/user_guide/feature_guide/kv_cache_cpu_offload.html</a:t>
+            </a:r>
+          </a:p>
+          <a:p xmlns:a="http://schemas.openxmlformats.org/drawingml/2006/main">
+            <a:r>
+              <a:t>4. Layer Offload指模型权重按层/分组卸载到Host与异步预取，不是KV按层卸载。上游OffloadConfig给出UVA和PrefetchOffloadConfig，支持参数名筛选；需验证Ascend端对应实现。Ascend平台代码对权重卸载与EPLB组合存在限制，不能宣称可任意叠加。</a:t>
+            </a:r>
+          </a:p>
+          <a:p xmlns:a="http://schemas.openxmlformats.org/drawingml/2006/main">
+            <a:r>
+              <a:t>https://docs.vllm.ai/en/latest/api/vllm/config/offload/</a:t>
+            </a:r>
+          </a:p>
+          <a:p xmlns:a="http://schemas.openxmlformats.org/drawingml/2006/main">
+            <a:r>
+              <a:t>https://github.com/vllm-project/vllm-ascend/blob/main/vllm_ascend/platform.py</a:t>
+            </a:r>
+          </a:p>
+          <a:p xmlns:a="http://schemas.openxmlformats.org/drawingml/2006/main">
+            <a:r>
+              <a:t>5. MoE Offload / 专家预取为重点预研项：优先验证选择性专家权重驻留/卸载与按需搬运，不宣称主线已具备成熟动态专家缓存，也不等同于让CPU执行专家计算。专家并行EP、专家负载均衡EPLB、专家卸载是不同技术。</a:t>
+            </a:r>
+          </a:p>
+          <a:p xmlns:a="http://schemas.openxmlformats.org/drawingml/2006/main">
+            <a:r>
+              <a:t>6. 图参考用户图片的应用、引擎、运行时、系统、驱动与芯片层次；未照搬Windows支持或以生态色块表示已完成状态。低并发、低内存场景需与轻量引擎对照，不预设vLLM适合全部嵌入式/机器人闭环。源文档main会演进，实施时锁定版本。</a:t>
+            </a:r>
+          </a:p>
+          <a:p xmlns:a="http://schemas.openxmlformats.org/drawingml/2006/main">
+            <a:r>
+              <a:t>本次按用户明确的团队建设状态调整：DSpark、DFlash、EAGLE3、EP、W4A4、FP4、FP8、KV Cache量化、Layer Offload、MoE Offload、调度策略、CANN融合算子均为待完善。黄色已有基础、绿色待完善代表用户指定的团队状态，不是对上游是否支持或全部芯片可用的判断。ACL Graph、Prefix Cache、MTP、TP、PP、W4A8暂按已有基础呈现，具体支持仍以目标芯片与版本验证。融合算子移至CANN层，移除算子编译和工作区复用。TP为张量并行，EP为专家并行，PP为流水线并行；投机解码展开DSpark、DFlash、EAGLE3、MTP，Prefix Cache放入推理加速。原有研究资料保留作为可追溯参考，旧星号标记不再用于本页。</a:t>
+            </a:r>
+          </a:p>
+        </p:txBody>
+      </p:sp>
+      <p:sp>
+        <p:nvSpPr>
+          <p:cNvPr id="4" name="Slide Number Placeholder 3"/>
+          <p:cNvSpPr>
+            <a:spLocks xmlns:a="http://schemas.openxmlformats.org/drawingml/2006/main" noGrp="1"/>
+          </p:cNvSpPr>
+          <p:nvPr>
+            <p:ph type="sldNum" idx="5"/>
+          </p:nvPr>
+        </p:nvSpPr>
+        <p:spPr/>
+        <p:txBody>
+          <a:bodyPr xmlns:a="http://schemas.openxmlformats.org/drawingml/2006/main"/>
+          <a:lstStyle xmlns:a="http://schemas.openxmlformats.org/drawingml/2006/main"/>
+          <a:p xmlns:a="http://schemas.openxmlformats.org/drawingml/2006/main"/>
+        </p:txBody>
+      </p:sp>
+    </p:spTree>
+  </p:cSld>
+  <p:clrMapOvr>
+    <a:masterClrMapping xmlns:a="http://schemas.openxmlformats.org/drawingml/2006/main"/>
+  </p:clrMapOvr>
+</p:notes>
+</file>
+
+<file path=ppt/notesSlides/notesSlide8.xml><?xml version="1.0" encoding="utf-8"?>
 <p:notes xmlns:p="http://schemas.openxmlformats.org/presentationml/2006/main">
   <p:cSld>
     <p:spTree>
@@ -2641,12 +2858,12 @@
   </p:cSld>
   <p:clrMap bg1="lt1" tx1="dk1" bg2="lt2" tx2="dk2" accent1="accent1" accent2="accent2" accent3="accent3" accent4="accent4" accent5="accent5" accent6="accent6" hlink="hlink" folHlink="folHlink"/>
   <p:sldLayoutIdLst>
-    <p:sldLayoutId xmlns:r="http://schemas.openxmlformats.org/officeDocument/2006/relationships" id="2147483649" r:id="R122ef7fa940e4f47"/>
-    <p:sldLayoutId xmlns:r="http://schemas.openxmlformats.org/officeDocument/2006/relationships" id="2147483650" r:id="R42850f7172384b4e"/>
-    <p:sldLayoutId xmlns:r="http://schemas.openxmlformats.org/officeDocument/2006/relationships" id="2147483651" r:id="R3a998e57854847ba"/>
-    <p:sldLayoutId xmlns:r="http://schemas.openxmlformats.org/officeDocument/2006/relationships" id="2147483652" r:id="R722f734428a641dc"/>
-    <p:sldLayoutId xmlns:r="http://schemas.openxmlformats.org/officeDocument/2006/relationships" id="2147483653" r:id="R7c7a007c969b462c"/>
-    <p:sldLayoutId xmlns:r="http://schemas.openxmlformats.org/officeDocument/2006/relationships" id="2147483654" r:id="R6745698043dc49ef"/>
+    <p:sldLayoutId xmlns:r="http://schemas.openxmlformats.org/officeDocument/2006/relationships" id="2147483649" r:id="Rf725b2ca0d814287"/>
+    <p:sldLayoutId xmlns:r="http://schemas.openxmlformats.org/officeDocument/2006/relationships" id="2147483650" r:id="R5d121b7c93604714"/>
+    <p:sldLayoutId xmlns:r="http://schemas.openxmlformats.org/officeDocument/2006/relationships" id="2147483651" r:id="R3693c0ff46814116"/>
+    <p:sldLayoutId xmlns:r="http://schemas.openxmlformats.org/officeDocument/2006/relationships" id="2147483652" r:id="Rc409fc3880324a2c"/>
+    <p:sldLayoutId xmlns:r="http://schemas.openxmlformats.org/officeDocument/2006/relationships" id="2147483653" r:id="R0c8c9d382f5d4aaa"/>
+    <p:sldLayoutId xmlns:r="http://schemas.openxmlformats.org/officeDocument/2006/relationships" id="2147483654" r:id="R37ae2f65de6c4cbc"/>
   </p:sldLayoutIdLst>
   <p:txStyles>
     <p:titleStyle>
@@ -4693,7 +4910,7 @@
           <ns0:cNvPr id="25" name="">
             <ns1:extLst>
               <ns1:ext uri="{FF2B5EF4-FFF2-40B4-BE49-F238E27FC236}">
-                <ns2:creationId id="{999B48DF-CF87-4282-83A3-E755A90E95B2}"/>
+                <ns2:creationId id="{A29EDAC6-CEEE-4E5A-B8FB-B4F575262721}"/>
               </ns1:ext>
             </ns1:extLst>
           </ns0:cNvPr>
@@ -4703,7 +4920,7 @@
           <ns0:nvPr/>
         </ns0:nvPicPr>
         <ns0:blipFill>
-          <ns1:blip ns3:embed="Rb8d7e167d33f4438"/>
+          <ns1:blip ns3:embed="R03e49a6f76c44558"/>
           <ns1:stretch/>
         </ns0:blipFill>
         <ns0:spPr>
@@ -4721,7 +4938,7 @@
           <ns0:cNvPr id="26" name="">
             <ns1:extLst>
               <ns1:ext uri="{FF2B5EF4-FFF2-40B4-BE49-F238E27FC236}">
-                <ns2:creationId id="{FFAE9458-B8DB-470B-AAD4-DE1B129B15CF}"/>
+                <ns2:creationId id="{AC4B99C1-224A-4ED9-979F-3E76DC95CF31}"/>
               </ns1:ext>
             </ns1:extLst>
           </ns0:cNvPr>
@@ -4731,7 +4948,7 @@
           <ns0:nvPr/>
         </ns0:nvPicPr>
         <ns0:blipFill>
-          <ns1:blip ns3:embed="R6d81cf95ef2b46b7"/>
+          <ns1:blip ns3:embed="R29aae8be5c504518"/>
           <ns1:stretch/>
         </ns0:blipFill>
         <ns0:spPr>
@@ -4942,7 +5159,7 @@
           <ns0:cNvPr id="38" name="">
             <ns1:extLst>
               <ns1:ext uri="{FF2B5EF4-FFF2-40B4-BE49-F238E27FC236}">
-                <ns2:creationId id="{93B4C3B2-9252-402E-85A8-165B4221D31C}"/>
+                <ns2:creationId id="{C565F22B-3D6F-4531-A0FC-CEA22F173CA0}"/>
               </ns1:ext>
             </ns1:extLst>
           </ns0:cNvPr>
@@ -5780,7 +5997,7 @@
           <ns0:cNvPr id="40" name="">
             <ns1:extLst>
               <ns1:ext uri="{FF2B5EF4-FFF2-40B4-BE49-F238E27FC236}">
-                <ns2:creationId id="{4018CF7E-6867-4117-BB51-0354771CCB3F}"/>
+                <ns2:creationId id="{5488EABC-6832-446F-8FAD-F3D6ABDF7BB6}"/>
               </ns1:ext>
             </ns1:extLst>
           </ns0:cNvPr>
@@ -6567,7 +6784,7 @@
           <ns0:cNvPr id="5" name="">
             <ns1:extLst>
               <ns1:ext uri="{FF2B5EF4-FFF2-40B4-BE49-F238E27FC236}">
-                <ns2:creationId id="{5DC2A9A1-EDD5-44FF-AAB0-7C67F832E96F}"/>
+                <ns2:creationId id="{9DB08E02-86F5-4717-8054-733E718D6467}"/>
               </ns1:ext>
             </ns1:extLst>
           </ns0:cNvPr>
@@ -7428,6 +7645,7 @@
           </ns1:lstStyle>
           <ns1:p>
             <ns1:pPr algn="ctr">
+              <ns1:buNone/>
               <ns1:defRPr sz="1482" b="1">
                 <ns1:solidFill>
                   <ns1:srgbClr val="BC2026"/>
@@ -7494,6 +7712,7 @@
           </ns1:lstStyle>
           <ns1:p>
             <ns1:pPr algn="ctr">
+              <ns1:buNone/>
               <ns1:defRPr sz="1311" b="1">
                 <ns1:solidFill>
                   <ns1:srgbClr val="242424"/>
@@ -7560,6 +7779,7 @@
           </ns1:lstStyle>
           <ns1:p>
             <ns1:pPr algn="ctr">
+              <ns1:buNone/>
               <ns1:defRPr sz="1125" b="0">
                 <ns1:solidFill>
                   <ns1:srgbClr val="242424"/>
@@ -7660,6 +7880,7 @@
           </ns1:lstStyle>
           <ns1:p>
             <ns1:pPr algn="ctr">
+              <ns1:buNone/>
               <ns1:defRPr sz="1482" b="1">
                 <ns1:solidFill>
                   <ns1:srgbClr val="BC2026"/>
@@ -7726,6 +7947,7 @@
           </ns1:lstStyle>
           <ns1:p>
             <ns1:pPr algn="ctr">
+              <ns1:buNone/>
               <ns1:defRPr sz="1311" b="1">
                 <ns1:solidFill>
                   <ns1:srgbClr val="242424"/>
@@ -7792,6 +8014,7 @@
           </ns1:lstStyle>
           <ns1:p>
             <ns1:pPr algn="ctr">
+              <ns1:buNone/>
               <ns1:defRPr sz="1125" b="0">
                 <ns1:solidFill>
                   <ns1:srgbClr val="242424"/>
@@ -7892,6 +8115,7 @@
           </ns1:lstStyle>
           <ns1:p>
             <ns1:pPr algn="ctr">
+              <ns1:buNone/>
               <ns1:defRPr sz="1125" b="1">
                 <ns1:solidFill>
                   <ns1:srgbClr val="BC2026"/>
@@ -7958,6 +8182,7 @@
           </ns1:lstStyle>
           <ns1:p>
             <ns1:pPr algn="ctr">
+              <ns1:buNone/>
               <ns1:defRPr sz="1311" b="1">
                 <ns1:solidFill>
                   <ns1:srgbClr val="242424"/>
@@ -8024,6 +8249,7 @@
           </ns1:lstStyle>
           <ns1:p>
             <ns1:pPr algn="ctr">
+              <ns1:buNone/>
               <ns1:defRPr sz="1125" b="0">
                 <ns1:solidFill>
                   <ns1:srgbClr val="242424"/>
@@ -8124,6 +8350,7 @@
           </ns1:lstStyle>
           <ns1:p>
             <ns1:pPr algn="ctr">
+              <ns1:buNone/>
               <ns1:defRPr sz="1425" b="1">
                 <ns1:solidFill>
                   <ns1:srgbClr val="BC2026"/>
@@ -8224,6 +8451,7 @@
           </ns1:lstStyle>
           <ns1:p>
             <ns1:pPr algn="ctr">
+              <ns1:buNone/>
               <ns1:defRPr sz="1311" b="1">
                 <ns1:solidFill>
                   <ns1:srgbClr val="242424"/>
@@ -8322,6 +8550,7 @@
           </ns1:lstStyle>
           <ns1:p>
             <ns1:pPr algn="ctr">
+              <ns1:buNone/>
               <ns1:defRPr sz="1125" b="0">
                 <ns1:solidFill>
                   <ns1:srgbClr val="242424"/>
@@ -8420,6 +8649,7 @@
           </ns1:lstStyle>
           <ns1:p>
             <ns1:pPr algn="ctr">
+              <ns1:buNone/>
               <ns1:defRPr sz="1125" b="0">
                 <ns1:solidFill>
                   <ns1:srgbClr val="242424"/>
@@ -8518,6 +8748,7 @@
           </ns1:lstStyle>
           <ns1:p>
             <ns1:pPr algn="ctr">
+              <ns1:buNone/>
               <ns1:defRPr sz="1125" b="0">
                 <ns1:solidFill>
                   <ns1:srgbClr val="242424"/>
@@ -8618,6 +8849,7 @@
           </ns1:lstStyle>
           <ns1:p>
             <ns1:pPr algn="ctr">
+              <ns1:buNone/>
               <ns1:defRPr sz="1311" b="1">
                 <ns1:solidFill>
                   <ns1:srgbClr val="242424"/>
@@ -8716,6 +8948,7 @@
           </ns1:lstStyle>
           <ns1:p>
             <ns1:pPr algn="ctr">
+              <ns1:buNone/>
               <ns1:defRPr sz="1125" b="0">
                 <ns1:solidFill>
                   <ns1:srgbClr val="242424"/>
@@ -8814,6 +9047,7 @@
           </ns1:lstStyle>
           <ns1:p>
             <ns1:pPr algn="ctr">
+              <ns1:buNone/>
               <ns1:defRPr sz="1125" b="0">
                 <ns1:solidFill>
                   <ns1:srgbClr val="242424"/>
@@ -8912,6 +9146,7 @@
           </ns1:lstStyle>
           <ns1:p>
             <ns1:pPr algn="ctr">
+              <ns1:buNone/>
               <ns1:defRPr sz="1125" b="0">
                 <ns1:solidFill>
                   <ns1:srgbClr val="242424"/>
@@ -9012,6 +9247,7 @@
           </ns1:lstStyle>
           <ns1:p>
             <ns1:pPr algn="ctr">
+              <ns1:buNone/>
               <ns1:defRPr sz="1311" b="1">
                 <ns1:solidFill>
                   <ns1:srgbClr val="242424"/>
@@ -9110,6 +9346,7 @@
           </ns1:lstStyle>
           <ns1:p>
             <ns1:pPr algn="ctr">
+              <ns1:buNone/>
               <ns1:defRPr sz="1125" b="0">
                 <ns1:solidFill>
                   <ns1:srgbClr val="242424"/>
@@ -9208,6 +9445,7 @@
           </ns1:lstStyle>
           <ns1:p>
             <ns1:pPr algn="ctr">
+              <ns1:buNone/>
               <ns1:defRPr sz="1125" b="0">
                 <ns1:solidFill>
                   <ns1:srgbClr val="242424"/>
@@ -9306,6 +9544,7 @@
           </ns1:lstStyle>
           <ns1:p>
             <ns1:pPr algn="ctr">
+              <ns1:buNone/>
               <ns1:defRPr sz="1125" b="0">
                 <ns1:solidFill>
                   <ns1:srgbClr val="242424"/>
@@ -9406,6 +9645,7 @@
           </ns1:lstStyle>
           <ns1:p>
             <ns1:pPr algn="ctr">
+              <ns1:buNone/>
               <ns1:defRPr sz="1425" b="1">
                 <ns1:solidFill>
                   <ns1:srgbClr val="242424"/>
@@ -9506,6 +9746,7 @@
           </ns1:lstStyle>
           <ns1:p>
             <ns1:pPr algn="ctr">
+              <ns1:buNone/>
               <ns1:defRPr sz="1311" b="1">
                 <ns1:solidFill>
                   <ns1:srgbClr val="242424"/>
@@ -9606,6 +9847,7 @@
           </ns1:lstStyle>
           <ns1:p>
             <ns1:pPr algn="ctr">
+              <ns1:buNone/>
               <ns1:defRPr sz="1368" b="1">
                 <ns1:solidFill>
                   <ns1:srgbClr val="242424"/>
@@ -9706,6 +9948,7 @@
           </ns1:lstStyle>
           <ns1:p>
             <ns1:pPr algn="ctr">
+              <ns1:buNone/>
               <ns1:defRPr sz="1197" b="1">
                 <ns1:solidFill>
                   <ns1:srgbClr val="242424"/>
@@ -9772,6 +10015,7 @@
           </ns1:lstStyle>
           <ns1:p>
             <ns1:pPr algn="l">
+              <ns1:buNone/>
               <ns1:defRPr sz="2436" b="1">
                 <ns1:solidFill>
                   <ns1:srgbClr val="BC2026"/>
@@ -9838,6 +10082,7 @@
           </ns1:lstStyle>
           <ns1:p>
             <ns1:pPr algn="l">
+              <ns1:buNone/>
               <ns1:defRPr sz="1932" b="1">
                 <ns1:solidFill>
                   <ns1:srgbClr val="BC2026"/>
@@ -9904,6 +10149,7 @@
           </ns1:lstStyle>
           <ns1:p>
             <ns1:pPr algn="l">
+              <ns1:buNone/>
               <ns1:defRPr sz="1680" b="0">
                 <ns1:solidFill>
                   <ns1:srgbClr val="333333"/>
@@ -9927,6 +10173,7 @@
           </ns1:p>
           <ns1:p>
             <ns1:pPr algn="l">
+              <ns1:buNone/>
               <ns1:defRPr sz="1680" b="0">
                 <ns1:solidFill>
                   <ns1:srgbClr val="333333"/>
@@ -9993,6 +10240,7 @@
           </ns1:lstStyle>
           <ns1:p>
             <ns1:pPr algn="l">
+              <ns1:buNone/>
               <ns1:defRPr sz="1932" b="1">
                 <ns1:solidFill>
                   <ns1:srgbClr val="BC2026"/>
@@ -10059,6 +10307,7 @@
           </ns1:lstStyle>
           <ns1:p>
             <ns1:pPr algn="l">
+              <ns1:buNone/>
               <ns1:defRPr sz="1680" b="0">
                 <ns1:solidFill>
                   <ns1:srgbClr val="333333"/>
@@ -10082,6 +10331,7 @@
           </ns1:p>
           <ns1:p>
             <ns1:pPr algn="l">
+              <ns1:buNone/>
               <ns1:defRPr sz="1680" b="0">
                 <ns1:solidFill>
                   <ns1:srgbClr val="333333"/>
@@ -10148,6 +10398,7 @@
           </ns1:lstStyle>
           <ns1:p>
             <ns1:pPr algn="l">
+              <ns1:buNone/>
               <ns1:defRPr sz="1932" b="1">
                 <ns1:solidFill>
                   <ns1:srgbClr val="BC2026"/>
@@ -10214,6 +10465,7 @@
           </ns1:lstStyle>
           <ns1:p>
             <ns1:pPr algn="l">
+              <ns1:buNone/>
               <ns1:defRPr sz="1680" b="0">
                 <ns1:solidFill>
                   <ns1:srgbClr val="333333"/>
@@ -10237,6 +10489,7 @@
           </ns1:p>
           <ns1:p>
             <ns1:pPr algn="l">
+              <ns1:buNone/>
               <ns1:defRPr sz="1680" b="0">
                 <ns1:solidFill>
                   <ns1:srgbClr val="333333"/>
@@ -10303,6 +10556,7 @@
           </ns1:lstStyle>
           <ns1:p>
             <ns1:pPr algn="l">
+              <ns1:buNone/>
               <ns1:defRPr sz="2436" b="1">
                 <ns1:solidFill>
                   <ns1:srgbClr val="BC2026"/>
@@ -10369,6 +10623,7 @@
           </ns1:lstStyle>
           <ns1:p>
             <ns1:pPr algn="l">
+              <ns1:buNone/>
               <ns1:defRPr sz="1848" b="1">
                 <ns1:solidFill>
                   <ns1:srgbClr val="BC2026"/>
@@ -10435,6 +10690,7 @@
           </ns1:lstStyle>
           <ns1:p>
             <ns1:pPr algn="l">
+              <ns1:buNone/>
               <ns1:defRPr sz="1596" b="0">
                 <ns1:solidFill>
                   <ns1:srgbClr val="333333"/>
@@ -10458,6 +10714,7 @@
           </ns1:p>
           <ns1:p>
             <ns1:pPr algn="l">
+              <ns1:buNone/>
               <ns1:defRPr sz="1596" b="0">
                 <ns1:solidFill>
                   <ns1:srgbClr val="333333"/>
@@ -10524,6 +10781,7 @@
           </ns1:lstStyle>
           <ns1:p>
             <ns1:pPr algn="l">
+              <ns1:buNone/>
               <ns1:defRPr sz="1848" b="1">
                 <ns1:solidFill>
                   <ns1:srgbClr val="BC2026"/>
@@ -10590,6 +10848,7 @@
           </ns1:lstStyle>
           <ns1:p>
             <ns1:pPr algn="l">
+              <ns1:buNone/>
               <ns1:defRPr sz="1596" b="0">
                 <ns1:solidFill>
                   <ns1:srgbClr val="333333"/>
@@ -10613,6 +10872,7 @@
           </ns1:p>
           <ns1:p>
             <ns1:pPr algn="l">
+              <ns1:buNone/>
               <ns1:defRPr sz="1596" b="0">
                 <ns1:solidFill>
                   <ns1:srgbClr val="333333"/>
@@ -10679,6 +10939,7 @@
           </ns1:lstStyle>
           <ns1:p>
             <ns1:pPr algn="l">
+              <ns1:buNone/>
               <ns1:defRPr sz="1848" b="1">
                 <ns1:solidFill>
                   <ns1:srgbClr val="BC2026"/>
@@ -10745,6 +11006,7 @@
           </ns1:lstStyle>
           <ns1:p>
             <ns1:pPr algn="l">
+              <ns1:buNone/>
               <ns1:defRPr sz="1596" b="0">
                 <ns1:solidFill>
                   <ns1:srgbClr val="333333"/>
@@ -10768,6 +11030,7 @@
           </ns1:p>
           <ns1:p>
             <ns1:pPr algn="l">
+              <ns1:buNone/>
               <ns1:defRPr sz="1596" b="0">
                 <ns1:solidFill>
                   <ns1:srgbClr val="333333"/>
@@ -10834,6 +11097,7 @@
           </ns1:lstStyle>
           <ns1:p>
             <ns1:pPr algn="ctr">
+              <ns1:buNone/>
               <ns1:defRPr sz="1275" b="0">
                 <ns1:solidFill>
                   <ns1:srgbClr val="888888"/>
@@ -10888,6 +11152,8416 @@
       </ns0:grpSpPr>
       <ns0:sp>
         <ns0:nvSpPr>
+          <ns0:cNvPr id="60" name="">
+            <ns1:extLst>
+              <ns1:ext uri="{FF2B5EF4-FFF2-40B4-BE49-F238E27FC236}">
+                <ns2:creationId id="{C923DAE3-38D9-40B3-91F0-361E388F9954}"/>
+              </ns1:ext>
+            </ns1:extLst>
+          </ns0:cNvPr>
+          <ns0:cNvSpPr>
+            <ns1:spLocks noGrp="1"/>
+          </ns0:cNvSpPr>
+          <ns0:nvPr/>
+        </ns0:nvSpPr>
+        <ns0:spPr>
+          <ns1:xfrm>
+            <ns1:off x="0" y="0"/>
+            <ns1:ext cx="12192000" cy="723900"/>
+          </ns1:xfrm>
+          <ns1:prstGeom prst="rect">
+            <ns1:avLst/>
+          </ns1:prstGeom>
+          <ns1:solidFill>
+            <ns1:srgbClr val="BC2026"/>
+          </ns1:solidFill>
+          <ns1:ln w="11430">
+            <ns1:solidFill>
+              <ns1:srgbClr val="B8C4B0"/>
+            </ns1:solidFill>
+            <ns1:prstDash val="solid"/>
+          </ns1:ln>
+        </ns0:spPr>
+      </ns0:sp>
+      <ns0:sp>
+        <ns0:nvSpPr>
+          <ns0:cNvPr id="2" name="">
+            <ns1:extLst>
+              <ns1:ext uri="{FF2B5EF4-FFF2-40B4-BE49-F238E27FC236}">
+                <ns2:creationId id="{A11FB5E2-D221-4EF9-814F-DA39FDFF2A88}"/>
+              </ns1:ext>
+            </ns1:extLst>
+          </ns0:cNvPr>
+          <ns0:cNvSpPr>
+            <ns1:spLocks noGrp="1"/>
+          </ns0:cNvSpPr>
+          <ns0:nvPr/>
+        </ns0:nvSpPr>
+        <ns0:spPr>
+          <ns1:xfrm>
+            <ns1:off x="419100" y="152400"/>
+            <ns1:ext cx="11353800" cy="495300"/>
+          </ns1:xfrm>
+          <ns1:prstGeom prst="rect">
+            <ns1:avLst/>
+          </ns1:prstGeom>
+          <ns1:noFill/>
+          <ns1:ln w="0">
+            <ns1:noFill/>
+          </ns1:ln>
+        </ns0:spPr>
+        <ns0:txBody>
+          <ns1:bodyPr lIns="0" tIns="0" rIns="0" bIns="0" anchor="ctr"/>
+          <ns1:lstStyle>
+            <ns1:defPPr algn="l">
+              <ns1:defRPr sz="2850" b="1">
+                <ns1:solidFill>
+                  <ns1:srgbClr val="FFFFFF"/>
+                </ns1:solidFill>
+                <ns1:latin typeface="Microsoft YaHei"/>
+                <ns1:ea typeface="Microsoft YaHei"/>
+                <ns1:cs typeface="Microsoft YaHei"/>
+              </ns1:defRPr>
+            </ns1:defPPr>
+          </ns1:lstStyle>
+          <ns1:p>
+            <ns1:pPr algn="l">
+              <ns1:buNone/>
+              <ns1:defRPr sz="2850" b="1">
+                <ns1:solidFill>
+                  <ns1:srgbClr val="FFFFFF"/>
+                </ns1:solidFill>
+                <ns1:latin typeface="Microsoft YaHei"/>
+                <ns1:ea typeface="Microsoft YaHei"/>
+                <ns1:cs typeface="Microsoft YaHei"/>
+              </ns1:defRPr>
+            </ns1:pPr>
+            <ns1:r>
+              <ns1:rPr sz="2850" b="1">
+                <ns1:solidFill>
+                  <ns1:srgbClr val="FFFFFF"/>
+                </ns1:solidFill>
+                <ns1:latin typeface="Microsoft YaHei"/>
+                <ns1:ea typeface="Microsoft YaHei"/>
+                <ns1:cs typeface="Microsoft YaHei"/>
+              </ns1:rPr>
+              <ns1:t>具身智能与无人车：推理框架与加速能力建设</ns1:t>
+            </ns1:r>
+          </ns1:p>
+        </ns0:txBody>
+      </ns0:sp>
+      <ns0:sp>
+        <ns0:nvSpPr>
+          <ns0:cNvPr id="3" name="">
+            <ns1:extLst>
+              <ns1:ext uri="{FF2B5EF4-FFF2-40B4-BE49-F238E27FC236}">
+                <ns2:creationId id="{5EE8C5B7-829A-4B2B-93AB-7494BE2843FE}"/>
+              </ns1:ext>
+            </ns1:extLst>
+          </ns0:cNvPr>
+          <ns0:cNvSpPr>
+            <ns1:spLocks noGrp="1"/>
+          </ns0:cNvSpPr>
+          <ns0:nvPr/>
+        </ns0:nvSpPr>
+        <ns0:spPr>
+          <ns1:xfrm>
+            <ns1:off x="266700" y="981075"/>
+            <ns1:ext cx="5524500" cy="1228725"/>
+          </ns1:xfrm>
+          <ns1:prstGeom prst="rect">
+            <ns1:avLst/>
+          </ns1:prstGeom>
+          <ns1:solidFill>
+            <ns1:srgbClr val="FFFFFF"/>
+          </ns1:solidFill>
+          <ns1:ln w="11430">
+            <ns1:solidFill>
+              <ns1:srgbClr val="B15A20"/>
+            </ns1:solidFill>
+            <ns1:prstDash val="dash"/>
+          </ns1:ln>
+        </ns0:spPr>
+      </ns0:sp>
+      <ns0:sp>
+        <ns0:nvSpPr>
+          <ns0:cNvPr id="4" name="">
+            <ns1:extLst>
+              <ns1:ext uri="{FF2B5EF4-FFF2-40B4-BE49-F238E27FC236}">
+                <ns2:creationId id="{630711C8-A13A-4FA6-9BED-C2C3816F703A}"/>
+              </ns1:ext>
+            </ns1:extLst>
+          </ns0:cNvPr>
+          <ns0:cNvSpPr>
+            <ns1:spLocks noGrp="1"/>
+          </ns0:cNvSpPr>
+          <ns0:nvPr/>
+        </ns0:nvSpPr>
+        <ns0:spPr>
+          <ns1:xfrm>
+            <ns1:off x="381000" y="1019175"/>
+            <ns1:ext cx="5295900" cy="266700"/>
+          </ns1:xfrm>
+          <ns1:prstGeom prst="rect">
+            <ns1:avLst/>
+          </ns1:prstGeom>
+          <ns1:noFill/>
+          <ns1:ln w="0">
+            <ns1:noFill/>
+          </ns1:ln>
+        </ns0:spPr>
+        <ns0:txBody>
+          <ns1:bodyPr lIns="0" tIns="0" rIns="0" bIns="0" anchor="ctr"/>
+          <ns1:lstStyle>
+            <ns1:defPPr algn="ctr">
+              <ns1:defRPr sz="1725" b="1">
+                <ns1:solidFill>
+                  <ns1:srgbClr val="BC2026"/>
+                </ns1:solidFill>
+                <ns1:latin typeface="Microsoft YaHei"/>
+                <ns1:ea typeface="Microsoft YaHei"/>
+                <ns1:cs typeface="Microsoft YaHei"/>
+              </ns1:defRPr>
+            </ns1:defPPr>
+          </ns1:lstStyle>
+          <ns1:p>
+            <ns1:pPr algn="ctr">
+              <ns1:buNone/>
+              <ns1:defRPr sz="1725" b="1">
+                <ns1:solidFill>
+                  <ns1:srgbClr val="BC2026"/>
+                </ns1:solidFill>
+                <ns1:latin typeface="Microsoft YaHei"/>
+                <ns1:ea typeface="Microsoft YaHei"/>
+                <ns1:cs typeface="Microsoft YaHei"/>
+              </ns1:defRPr>
+            </ns1:pPr>
+            <ns1:r>
+              <ns1:rPr sz="1725" b="1">
+                <ns1:solidFill>
+                  <ns1:srgbClr val="BC2026"/>
+                </ns1:solidFill>
+                <ns1:latin typeface="Microsoft YaHei"/>
+                <ns1:ea typeface="Microsoft YaHei"/>
+                <ns1:cs typeface="Microsoft YaHei"/>
+              </ns1:rPr>
+              <ns1:t>业务闭环</ns1:t>
+            </ns1:r>
+          </ns1:p>
+        </ns0:txBody>
+      </ns0:sp>
+      <ns0:sp>
+        <ns0:nvSpPr>
+          <ns0:cNvPr id="5" name="">
+            <ns1:extLst>
+              <ns1:ext uri="{FF2B5EF4-FFF2-40B4-BE49-F238E27FC236}">
+                <ns2:creationId id="{93803A09-2957-42EF-810E-70FFD40C1092}"/>
+              </ns1:ext>
+            </ns1:extLst>
+          </ns0:cNvPr>
+          <ns0:cNvSpPr>
+            <ns1:spLocks noGrp="1"/>
+          </ns0:cNvSpPr>
+          <ns0:nvPr/>
+        </ns0:nvSpPr>
+        <ns0:spPr>
+          <ns1:xfrm>
+            <ns1:off x="352425" y="1343025"/>
+            <ns1:ext cx="628650" cy="333375"/>
+          </ns1:xfrm>
+          <ns1:prstGeom prst="rect">
+            <ns1:avLst/>
+          </ns1:prstGeom>
+          <ns1:noFill/>
+          <ns1:ln w="0">
+            <ns1:noFill/>
+          </ns1:ln>
+        </ns0:spPr>
+        <ns0:txBody>
+          <ns1:bodyPr lIns="0" tIns="0" rIns="0" bIns="0" anchor="ctr"/>
+          <ns1:lstStyle>
+            <ns1:defPPr algn="ctr">
+              <ns1:defRPr sz="1350" b="1">
+                <ns1:solidFill>
+                  <ns1:srgbClr val="BC2026"/>
+                </ns1:solidFill>
+                <ns1:latin typeface="Microsoft YaHei"/>
+                <ns1:ea typeface="Microsoft YaHei"/>
+                <ns1:cs typeface="Microsoft YaHei"/>
+              </ns1:defRPr>
+            </ns1:defPPr>
+          </ns1:lstStyle>
+          <ns1:p>
+            <ns1:pPr algn="ctr">
+              <ns1:buNone/>
+              <ns1:defRPr sz="1350" b="1">
+                <ns1:solidFill>
+                  <ns1:srgbClr val="BC2026"/>
+                </ns1:solidFill>
+                <ns1:latin typeface="Microsoft YaHei"/>
+                <ns1:ea typeface="Microsoft YaHei"/>
+                <ns1:cs typeface="Microsoft YaHei"/>
+              </ns1:defRPr>
+            </ns1:pPr>
+            <ns1:r>
+              <ns1:rPr sz="1350" b="1">
+                <ns1:solidFill>
+                  <ns1:srgbClr val="BC2026"/>
+                </ns1:solidFill>
+                <ns1:latin typeface="Microsoft YaHei"/>
+                <ns1:ea typeface="Microsoft YaHei"/>
+                <ns1:cs typeface="Microsoft YaHei"/>
+              </ns1:rPr>
+              <ns1:t>具身</ns1:t>
+            </ns1:r>
+          </ns1:p>
+        </ns0:txBody>
+      </ns0:sp>
+      <ns0:sp>
+        <ns0:nvSpPr>
+          <ns0:cNvPr id="6" name="">
+            <ns1:extLst>
+              <ns1:ext uri="{FF2B5EF4-FFF2-40B4-BE49-F238E27FC236}">
+                <ns2:creationId id="{CF70E6AA-C565-482F-9E54-BA2B7C6C0389}"/>
+              </ns1:ext>
+            </ns1:extLst>
+          </ns0:cNvPr>
+          <ns0:cNvSpPr>
+            <ns1:spLocks noGrp="1"/>
+          </ns0:cNvSpPr>
+          <ns0:nvPr/>
+        </ns0:nvSpPr>
+        <ns0:spPr>
+          <ns1:xfrm>
+            <ns1:off x="1047750" y="1343025"/>
+            <ns1:ext cx="1409700" cy="333375"/>
+          </ns1:xfrm>
+          <ns1:prstGeom prst="rect">
+            <ns1:avLst/>
+          </ns1:prstGeom>
+          <ns1:solidFill>
+            <ns1:srgbClr val="DBEDF0"/>
+          </ns1:solidFill>
+          <ns1:ln w="11430">
+            <ns1:solidFill>
+              <ns1:srgbClr val="B8C4B0"/>
+            </ns1:solidFill>
+            <ns1:prstDash val="solid"/>
+          </ns1:ln>
+        </ns0:spPr>
+      </ns0:sp>
+      <ns0:sp>
+        <ns0:nvSpPr>
+          <ns0:cNvPr id="7" name="">
+            <ns1:extLst>
+              <ns1:ext uri="{FF2B5EF4-FFF2-40B4-BE49-F238E27FC236}">
+                <ns2:creationId id="{E7F97365-CB39-4FA6-B27E-40B92082B7E2}"/>
+              </ns1:ext>
+            </ns1:extLst>
+          </ns0:cNvPr>
+          <ns0:cNvSpPr>
+            <ns1:spLocks noGrp="1"/>
+          </ns0:cNvSpPr>
+          <ns0:nvPr/>
+        </ns0:nvSpPr>
+        <ns0:spPr>
+          <ns1:xfrm>
+            <ns1:off x="1085850" y="1343025"/>
+            <ns1:ext cx="1333500" cy="333375"/>
+          </ns1:xfrm>
+          <ns1:prstGeom prst="rect">
+            <ns1:avLst/>
+          </ns1:prstGeom>
+          <ns1:noFill/>
+          <ns1:ln w="0">
+            <ns1:noFill/>
+          </ns1:ln>
+        </ns0:spPr>
+        <ns0:txBody>
+          <ns1:bodyPr lIns="0" tIns="0" rIns="0" bIns="0" anchor="ctr"/>
+          <ns1:lstStyle>
+            <ns1:defPPr algn="ctr">
+              <ns1:defRPr sz="1350" b="0">
+                <ns1:solidFill>
+                  <ns1:srgbClr val="262626"/>
+                </ns1:solidFill>
+                <ns1:latin typeface="Microsoft YaHei"/>
+                <ns1:ea typeface="Microsoft YaHei"/>
+                <ns1:cs typeface="Microsoft YaHei"/>
+              </ns1:defRPr>
+            </ns1:defPPr>
+          </ns1:lstStyle>
+          <ns1:p>
+            <ns1:pPr algn="ctr">
+              <ns1:buNone/>
+              <ns1:defRPr sz="1350" b="0">
+                <ns1:solidFill>
+                  <ns1:srgbClr val="262626"/>
+                </ns1:solidFill>
+                <ns1:latin typeface="Microsoft YaHei"/>
+                <ns1:ea typeface="Microsoft YaHei"/>
+                <ns1:cs typeface="Microsoft YaHei"/>
+              </ns1:defRPr>
+            </ns1:pPr>
+            <ns1:r>
+              <ns1:rPr sz="1350" b="0">
+                <ns1:solidFill>
+                  <ns1:srgbClr val="262626"/>
+                </ns1:solidFill>
+                <ns1:latin typeface="Microsoft YaHei"/>
+                <ns1:ea typeface="Microsoft YaHei"/>
+                <ns1:cs typeface="Microsoft YaHei"/>
+              </ns1:rPr>
+              <ns1:t>视觉 / 状态</ns1:t>
+            </ns1:r>
+          </ns1:p>
+        </ns0:txBody>
+      </ns0:sp>
+      <ns0:sp>
+        <ns0:nvSpPr>
+          <ns0:cNvPr id="8" name="">
+            <ns1:extLst>
+              <ns1:ext uri="{FF2B5EF4-FFF2-40B4-BE49-F238E27FC236}">
+                <ns2:creationId id="{40EE1F81-C89B-4723-AD32-5DC78573450E}"/>
+              </ns1:ext>
+            </ns1:extLst>
+          </ns0:cNvPr>
+          <ns0:cNvSpPr>
+            <ns1:spLocks noGrp="1"/>
+          </ns0:cNvSpPr>
+          <ns0:nvPr/>
+        </ns0:nvSpPr>
+        <ns0:spPr>
+          <ns1:xfrm>
+            <ns1:off x="2466975" y="1343025"/>
+            <ns1:ext cx="171450" cy="333375"/>
+          </ns1:xfrm>
+          <ns1:prstGeom prst="rect">
+            <ns1:avLst/>
+          </ns1:prstGeom>
+          <ns1:noFill/>
+          <ns1:ln w="0">
+            <ns1:noFill/>
+          </ns1:ln>
+        </ns0:spPr>
+        <ns0:txBody>
+          <ns1:bodyPr lIns="0" tIns="0" rIns="0" bIns="0" anchor="ctr"/>
+          <ns1:lstStyle>
+            <ns1:defPPr algn="ctr">
+              <ns1:defRPr sz="1350" b="0">
+                <ns1:solidFill>
+                  <ns1:srgbClr val="262626"/>
+                </ns1:solidFill>
+                <ns1:latin typeface="Microsoft YaHei"/>
+                <ns1:ea typeface="Microsoft YaHei"/>
+                <ns1:cs typeface="Microsoft YaHei"/>
+              </ns1:defRPr>
+            </ns1:defPPr>
+          </ns1:lstStyle>
+          <ns1:p>
+            <ns1:pPr algn="ctr">
+              <ns1:buNone/>
+              <ns1:defRPr sz="1350" b="0">
+                <ns1:solidFill>
+                  <ns1:srgbClr val="262626"/>
+                </ns1:solidFill>
+                <ns1:latin typeface="Microsoft YaHei"/>
+                <ns1:ea typeface="Microsoft YaHei"/>
+                <ns1:cs typeface="Microsoft YaHei"/>
+              </ns1:defRPr>
+            </ns1:pPr>
+            <ns1:r>
+              <ns1:rPr sz="1350" b="0">
+                <ns1:solidFill>
+                  <ns1:srgbClr val="262626"/>
+                </ns1:solidFill>
+                <ns1:latin typeface="Microsoft YaHei"/>
+                <ns1:ea typeface="Microsoft YaHei"/>
+                <ns1:cs typeface="Microsoft YaHei"/>
+              </ns1:rPr>
+              <ns1:t>→</ns1:t>
+            </ns1:r>
+          </ns1:p>
+        </ns0:txBody>
+      </ns0:sp>
+      <ns0:sp>
+        <ns0:nvSpPr>
+          <ns0:cNvPr id="9" name="">
+            <ns1:extLst>
+              <ns1:ext uri="{FF2B5EF4-FFF2-40B4-BE49-F238E27FC236}">
+                <ns2:creationId id="{A9DBD398-C67A-45FD-AC6D-CF86C3322A9A}"/>
+              </ns1:ext>
+            </ns1:extLst>
+          </ns0:cNvPr>
+          <ns0:cNvSpPr>
+            <ns1:spLocks noGrp="1"/>
+          </ns0:cNvSpPr>
+          <ns0:nvPr/>
+        </ns0:nvSpPr>
+        <ns0:spPr>
+          <ns1:xfrm>
+            <ns1:off x="2647950" y="1343025"/>
+            <ns1:ext cx="1409700" cy="333375"/>
+          </ns1:xfrm>
+          <ns1:prstGeom prst="rect">
+            <ns1:avLst/>
+          </ns1:prstGeom>
+          <ns1:solidFill>
+            <ns1:srgbClr val="DBEDF0"/>
+          </ns1:solidFill>
+          <ns1:ln w="11430">
+            <ns1:solidFill>
+              <ns1:srgbClr val="B8C4B0"/>
+            </ns1:solidFill>
+            <ns1:prstDash val="solid"/>
+          </ns1:ln>
+        </ns0:spPr>
+      </ns0:sp>
+      <ns0:sp>
+        <ns0:nvSpPr>
+          <ns0:cNvPr id="10" name="">
+            <ns1:extLst>
+              <ns1:ext uri="{FF2B5EF4-FFF2-40B4-BE49-F238E27FC236}">
+                <ns2:creationId id="{2B44D2F5-7C34-4312-8C06-53CE992094D9}"/>
+              </ns1:ext>
+            </ns1:extLst>
+          </ns0:cNvPr>
+          <ns0:cNvSpPr>
+            <ns1:spLocks noGrp="1"/>
+          </ns0:cNvSpPr>
+          <ns0:nvPr/>
+        </ns0:nvSpPr>
+        <ns0:spPr>
+          <ns1:xfrm>
+            <ns1:off x="2686050" y="1343025"/>
+            <ns1:ext cx="1333500" cy="333375"/>
+          </ns1:xfrm>
+          <ns1:prstGeom prst="rect">
+            <ns1:avLst/>
+          </ns1:prstGeom>
+          <ns1:noFill/>
+          <ns1:ln w="0">
+            <ns1:noFill/>
+          </ns1:ln>
+        </ns0:spPr>
+        <ns0:txBody>
+          <ns1:bodyPr lIns="0" tIns="0" rIns="0" bIns="0" anchor="ctr"/>
+          <ns1:lstStyle>
+            <ns1:defPPr algn="ctr">
+              <ns1:defRPr sz="1350" b="0">
+                <ns1:solidFill>
+                  <ns1:srgbClr val="262626"/>
+                </ns1:solidFill>
+                <ns1:latin typeface="Microsoft YaHei"/>
+                <ns1:ea typeface="Microsoft YaHei"/>
+                <ns1:cs typeface="Microsoft YaHei"/>
+              </ns1:defRPr>
+            </ns1:defPPr>
+          </ns1:lstStyle>
+          <ns1:p>
+            <ns1:pPr algn="ctr">
+              <ns1:buNone/>
+              <ns1:defRPr sz="1350" b="0">
+                <ns1:solidFill>
+                  <ns1:srgbClr val="262626"/>
+                </ns1:solidFill>
+                <ns1:latin typeface="Microsoft YaHei"/>
+                <ns1:ea typeface="Microsoft YaHei"/>
+                <ns1:cs typeface="Microsoft YaHei"/>
+              </ns1:defRPr>
+            </ns1:pPr>
+            <ns1:r>
+              <ns1:rPr sz="1350" b="0">
+                <ns1:solidFill>
+                  <ns1:srgbClr val="262626"/>
+                </ns1:solidFill>
+                <ns1:latin typeface="Microsoft YaHei"/>
+                <ns1:ea typeface="Microsoft YaHei"/>
+                <ns1:cs typeface="Microsoft YaHei"/>
+              </ns1:rPr>
+              <ns1:t>VLA / 策略</ns1:t>
+            </ns1:r>
+          </ns1:p>
+        </ns0:txBody>
+      </ns0:sp>
+      <ns0:sp>
+        <ns0:nvSpPr>
+          <ns0:cNvPr id="11" name="">
+            <ns1:extLst>
+              <ns1:ext uri="{FF2B5EF4-FFF2-40B4-BE49-F238E27FC236}">
+                <ns2:creationId id="{ABEFCD2F-810E-48AF-A48E-3FBBB5B500B0}"/>
+              </ns1:ext>
+            </ns1:extLst>
+          </ns0:cNvPr>
+          <ns0:cNvSpPr>
+            <ns1:spLocks noGrp="1"/>
+          </ns0:cNvSpPr>
+          <ns0:nvPr/>
+        </ns0:nvSpPr>
+        <ns0:spPr>
+          <ns1:xfrm>
+            <ns1:off x="4067175" y="1343025"/>
+            <ns1:ext cx="171450" cy="333375"/>
+          </ns1:xfrm>
+          <ns1:prstGeom prst="rect">
+            <ns1:avLst/>
+          </ns1:prstGeom>
+          <ns1:noFill/>
+          <ns1:ln w="0">
+            <ns1:noFill/>
+          </ns1:ln>
+        </ns0:spPr>
+        <ns0:txBody>
+          <ns1:bodyPr lIns="0" tIns="0" rIns="0" bIns="0" anchor="ctr"/>
+          <ns1:lstStyle>
+            <ns1:defPPr algn="ctr">
+              <ns1:defRPr sz="1350" b="0">
+                <ns1:solidFill>
+                  <ns1:srgbClr val="262626"/>
+                </ns1:solidFill>
+                <ns1:latin typeface="Microsoft YaHei"/>
+                <ns1:ea typeface="Microsoft YaHei"/>
+                <ns1:cs typeface="Microsoft YaHei"/>
+              </ns1:defRPr>
+            </ns1:defPPr>
+          </ns1:lstStyle>
+          <ns1:p>
+            <ns1:pPr algn="ctr">
+              <ns1:buNone/>
+              <ns1:defRPr sz="1350" b="0">
+                <ns1:solidFill>
+                  <ns1:srgbClr val="262626"/>
+                </ns1:solidFill>
+                <ns1:latin typeface="Microsoft YaHei"/>
+                <ns1:ea typeface="Microsoft YaHei"/>
+                <ns1:cs typeface="Microsoft YaHei"/>
+              </ns1:defRPr>
+            </ns1:pPr>
+            <ns1:r>
+              <ns1:rPr sz="1350" b="0">
+                <ns1:solidFill>
+                  <ns1:srgbClr val="262626"/>
+                </ns1:solidFill>
+                <ns1:latin typeface="Microsoft YaHei"/>
+                <ns1:ea typeface="Microsoft YaHei"/>
+                <ns1:cs typeface="Microsoft YaHei"/>
+              </ns1:rPr>
+              <ns1:t>→</ns1:t>
+            </ns1:r>
+          </ns1:p>
+        </ns0:txBody>
+      </ns0:sp>
+      <ns0:sp>
+        <ns0:nvSpPr>
+          <ns0:cNvPr id="12" name="">
+            <ns1:extLst>
+              <ns1:ext uri="{FF2B5EF4-FFF2-40B4-BE49-F238E27FC236}">
+                <ns2:creationId id="{EAA35553-60E6-4A83-9907-F100EF6BE4B4}"/>
+              </ns1:ext>
+            </ns1:extLst>
+          </ns0:cNvPr>
+          <ns0:cNvSpPr>
+            <ns1:spLocks noGrp="1"/>
+          </ns0:cNvSpPr>
+          <ns0:nvPr/>
+        </ns0:nvSpPr>
+        <ns0:spPr>
+          <ns1:xfrm>
+            <ns1:off x="4248150" y="1343025"/>
+            <ns1:ext cx="1409700" cy="333375"/>
+          </ns1:xfrm>
+          <ns1:prstGeom prst="rect">
+            <ns1:avLst/>
+          </ns1:prstGeom>
+          <ns1:solidFill>
+            <ns1:srgbClr val="DBEDF0"/>
+          </ns1:solidFill>
+          <ns1:ln w="11430">
+            <ns1:solidFill>
+              <ns1:srgbClr val="B8C4B0"/>
+            </ns1:solidFill>
+            <ns1:prstDash val="solid"/>
+          </ns1:ln>
+        </ns0:spPr>
+      </ns0:sp>
+      <ns0:sp>
+        <ns0:nvSpPr>
+          <ns0:cNvPr id="13" name="">
+            <ns1:extLst>
+              <ns1:ext uri="{FF2B5EF4-FFF2-40B4-BE49-F238E27FC236}">
+                <ns2:creationId id="{66AE3816-38CA-4755-9C60-0F8BDF7AF4C1}"/>
+              </ns1:ext>
+            </ns1:extLst>
+          </ns0:cNvPr>
+          <ns0:cNvSpPr>
+            <ns1:spLocks noGrp="1"/>
+          </ns0:cNvSpPr>
+          <ns0:nvPr/>
+        </ns0:nvSpPr>
+        <ns0:spPr>
+          <ns1:xfrm>
+            <ns1:off x="4286250" y="1343025"/>
+            <ns1:ext cx="1333500" cy="333375"/>
+          </ns1:xfrm>
+          <ns1:prstGeom prst="rect">
+            <ns1:avLst/>
+          </ns1:prstGeom>
+          <ns1:noFill/>
+          <ns1:ln w="0">
+            <ns1:noFill/>
+          </ns1:ln>
+        </ns0:spPr>
+        <ns0:txBody>
+          <ns1:bodyPr lIns="0" tIns="0" rIns="0" bIns="0" anchor="ctr"/>
+          <ns1:lstStyle>
+            <ns1:defPPr algn="ctr">
+              <ns1:defRPr sz="1350" b="0">
+                <ns1:solidFill>
+                  <ns1:srgbClr val="262626"/>
+                </ns1:solidFill>
+                <ns1:latin typeface="Microsoft YaHei"/>
+                <ns1:ea typeface="Microsoft YaHei"/>
+                <ns1:cs typeface="Microsoft YaHei"/>
+              </ns1:defRPr>
+            </ns1:defPPr>
+          </ns1:lstStyle>
+          <ns1:p>
+            <ns1:pPr algn="ctr">
+              <ns1:buNone/>
+              <ns1:defRPr sz="1350" b="0">
+                <ns1:solidFill>
+                  <ns1:srgbClr val="262626"/>
+                </ns1:solidFill>
+                <ns1:latin typeface="Microsoft YaHei"/>
+                <ns1:ea typeface="Microsoft YaHei"/>
+                <ns1:cs typeface="Microsoft YaHei"/>
+              </ns1:defRPr>
+            </ns1:pPr>
+            <ns1:r>
+              <ns1:rPr sz="1350" b="0">
+                <ns1:solidFill>
+                  <ns1:srgbClr val="262626"/>
+                </ns1:solidFill>
+                <ns1:latin typeface="Microsoft YaHei"/>
+                <ns1:ea typeface="Microsoft YaHei"/>
+                <ns1:cs typeface="Microsoft YaHei"/>
+              </ns1:rPr>
+              <ns1:t>动作 / 反馈</ns1:t>
+            </ns1:r>
+          </ns1:p>
+        </ns0:txBody>
+      </ns0:sp>
+      <ns0:sp>
+        <ns0:nvSpPr>
+          <ns0:cNvPr id="14" name="">
+            <ns1:extLst>
+              <ns1:ext uri="{FF2B5EF4-FFF2-40B4-BE49-F238E27FC236}">
+                <ns2:creationId id="{3FA86042-65EF-4EA9-BC72-A4DCA60D1600}"/>
+              </ns1:ext>
+            </ns1:extLst>
+          </ns0:cNvPr>
+          <ns0:cNvSpPr>
+            <ns1:spLocks noGrp="1"/>
+          </ns0:cNvSpPr>
+          <ns0:nvPr/>
+        </ns0:nvSpPr>
+        <ns0:spPr>
+          <ns1:xfrm>
+            <ns1:off x="352425" y="1781175"/>
+            <ns1:ext cx="628650" cy="333375"/>
+          </ns1:xfrm>
+          <ns1:prstGeom prst="rect">
+            <ns1:avLst/>
+          </ns1:prstGeom>
+          <ns1:noFill/>
+          <ns1:ln w="0">
+            <ns1:noFill/>
+          </ns1:ln>
+        </ns0:spPr>
+        <ns0:txBody>
+          <ns1:bodyPr lIns="0" tIns="0" rIns="0" bIns="0" anchor="ctr"/>
+          <ns1:lstStyle>
+            <ns1:defPPr algn="ctr">
+              <ns1:defRPr sz="1350" b="1">
+                <ns1:solidFill>
+                  <ns1:srgbClr val="BC2026"/>
+                </ns1:solidFill>
+                <ns1:latin typeface="Microsoft YaHei"/>
+                <ns1:ea typeface="Microsoft YaHei"/>
+                <ns1:cs typeface="Microsoft YaHei"/>
+              </ns1:defRPr>
+            </ns1:defPPr>
+          </ns1:lstStyle>
+          <ns1:p>
+            <ns1:pPr algn="ctr">
+              <ns1:buNone/>
+              <ns1:defRPr sz="1350" b="1">
+                <ns1:solidFill>
+                  <ns1:srgbClr val="BC2026"/>
+                </ns1:solidFill>
+                <ns1:latin typeface="Microsoft YaHei"/>
+                <ns1:ea typeface="Microsoft YaHei"/>
+                <ns1:cs typeface="Microsoft YaHei"/>
+              </ns1:defRPr>
+            </ns1:pPr>
+            <ns1:r>
+              <ns1:rPr sz="1350" b="1">
+                <ns1:solidFill>
+                  <ns1:srgbClr val="BC2026"/>
+                </ns1:solidFill>
+                <ns1:latin typeface="Microsoft YaHei"/>
+                <ns1:ea typeface="Microsoft YaHei"/>
+                <ns1:cs typeface="Microsoft YaHei"/>
+              </ns1:rPr>
+              <ns1:t>无人车</ns1:t>
+            </ns1:r>
+          </ns1:p>
+        </ns0:txBody>
+      </ns0:sp>
+      <ns0:sp>
+        <ns0:nvSpPr>
+          <ns0:cNvPr id="15" name="">
+            <ns1:extLst>
+              <ns1:ext uri="{FF2B5EF4-FFF2-40B4-BE49-F238E27FC236}">
+                <ns2:creationId id="{42996EE1-B13C-48A6-AB08-2F410D18551D}"/>
+              </ns1:ext>
+            </ns1:extLst>
+          </ns0:cNvPr>
+          <ns0:cNvSpPr>
+            <ns1:spLocks noGrp="1"/>
+          </ns0:cNvSpPr>
+          <ns0:nvPr/>
+        </ns0:nvSpPr>
+        <ns0:spPr>
+          <ns1:xfrm>
+            <ns1:off x="1047750" y="1781175"/>
+            <ns1:ext cx="1409700" cy="333375"/>
+          </ns1:xfrm>
+          <ns1:prstGeom prst="rect">
+            <ns1:avLst/>
+          </ns1:prstGeom>
+          <ns1:solidFill>
+            <ns1:srgbClr val="DBEDF0"/>
+          </ns1:solidFill>
+          <ns1:ln w="11430">
+            <ns1:solidFill>
+              <ns1:srgbClr val="B8C4B0"/>
+            </ns1:solidFill>
+            <ns1:prstDash val="solid"/>
+          </ns1:ln>
+        </ns0:spPr>
+      </ns0:sp>
+      <ns0:sp>
+        <ns0:nvSpPr>
+          <ns0:cNvPr id="16" name="">
+            <ns1:extLst>
+              <ns1:ext uri="{FF2B5EF4-FFF2-40B4-BE49-F238E27FC236}">
+                <ns2:creationId id="{A8CBDCB0-FEF8-4C1C-9519-D825DB9564E7}"/>
+              </ns1:ext>
+            </ns1:extLst>
+          </ns0:cNvPr>
+          <ns0:cNvSpPr>
+            <ns1:spLocks noGrp="1"/>
+          </ns0:cNvSpPr>
+          <ns0:nvPr/>
+        </ns0:nvSpPr>
+        <ns0:spPr>
+          <ns1:xfrm>
+            <ns1:off x="1085850" y="1781175"/>
+            <ns1:ext cx="1333500" cy="333375"/>
+          </ns1:xfrm>
+          <ns1:prstGeom prst="rect">
+            <ns1:avLst/>
+          </ns1:prstGeom>
+          <ns1:noFill/>
+          <ns1:ln w="0">
+            <ns1:noFill/>
+          </ns1:ln>
+        </ns0:spPr>
+        <ns0:txBody>
+          <ns1:bodyPr lIns="0" tIns="0" rIns="0" bIns="0" anchor="ctr"/>
+          <ns1:lstStyle>
+            <ns1:defPPr algn="ctr">
+              <ns1:defRPr sz="1350" b="0">
+                <ns1:solidFill>
+                  <ns1:srgbClr val="262626"/>
+                </ns1:solidFill>
+                <ns1:latin typeface="Microsoft YaHei"/>
+                <ns1:ea typeface="Microsoft YaHei"/>
+                <ns1:cs typeface="Microsoft YaHei"/>
+              </ns1:defRPr>
+            </ns1:defPPr>
+          </ns1:lstStyle>
+          <ns1:p>
+            <ns1:pPr algn="ctr">
+              <ns1:buNone/>
+              <ns1:defRPr sz="1350" b="0">
+                <ns1:solidFill>
+                  <ns1:srgbClr val="262626"/>
+                </ns1:solidFill>
+                <ns1:latin typeface="Microsoft YaHei"/>
+                <ns1:ea typeface="Microsoft YaHei"/>
+                <ns1:cs typeface="Microsoft YaHei"/>
+              </ns1:defRPr>
+            </ns1:pPr>
+            <ns1:r>
+              <ns1:rPr sz="1350" b="0">
+                <ns1:solidFill>
+                  <ns1:srgbClr val="262626"/>
+                </ns1:solidFill>
+                <ns1:latin typeface="Microsoft YaHei"/>
+                <ns1:ea typeface="Microsoft YaHei"/>
+                <ns1:cs typeface="Microsoft YaHei"/>
+              </ns1:rPr>
+              <ns1:t>多传感输入</ns1:t>
+            </ns1:r>
+          </ns1:p>
+        </ns0:txBody>
+      </ns0:sp>
+      <ns0:sp>
+        <ns0:nvSpPr>
+          <ns0:cNvPr id="17" name="">
+            <ns1:extLst>
+              <ns1:ext uri="{FF2B5EF4-FFF2-40B4-BE49-F238E27FC236}">
+                <ns2:creationId id="{C848D9A6-93C4-43BD-958F-9B210DE69686}"/>
+              </ns1:ext>
+            </ns1:extLst>
+          </ns0:cNvPr>
+          <ns0:cNvSpPr>
+            <ns1:spLocks noGrp="1"/>
+          </ns0:cNvSpPr>
+          <ns0:nvPr/>
+        </ns0:nvSpPr>
+        <ns0:spPr>
+          <ns1:xfrm>
+            <ns1:off x="2466975" y="1781175"/>
+            <ns1:ext cx="171450" cy="333375"/>
+          </ns1:xfrm>
+          <ns1:prstGeom prst="rect">
+            <ns1:avLst/>
+          </ns1:prstGeom>
+          <ns1:noFill/>
+          <ns1:ln w="0">
+            <ns1:noFill/>
+          </ns1:ln>
+        </ns0:spPr>
+        <ns0:txBody>
+          <ns1:bodyPr lIns="0" tIns="0" rIns="0" bIns="0" anchor="ctr"/>
+          <ns1:lstStyle>
+            <ns1:defPPr algn="ctr">
+              <ns1:defRPr sz="1350" b="0">
+                <ns1:solidFill>
+                  <ns1:srgbClr val="262626"/>
+                </ns1:solidFill>
+                <ns1:latin typeface="Microsoft YaHei"/>
+                <ns1:ea typeface="Microsoft YaHei"/>
+                <ns1:cs typeface="Microsoft YaHei"/>
+              </ns1:defRPr>
+            </ns1:defPPr>
+          </ns1:lstStyle>
+          <ns1:p>
+            <ns1:pPr algn="ctr">
+              <ns1:buNone/>
+              <ns1:defRPr sz="1350" b="0">
+                <ns1:solidFill>
+                  <ns1:srgbClr val="262626"/>
+                </ns1:solidFill>
+                <ns1:latin typeface="Microsoft YaHei"/>
+                <ns1:ea typeface="Microsoft YaHei"/>
+                <ns1:cs typeface="Microsoft YaHei"/>
+              </ns1:defRPr>
+            </ns1:pPr>
+            <ns1:r>
+              <ns1:rPr sz="1350" b="0">
+                <ns1:solidFill>
+                  <ns1:srgbClr val="262626"/>
+                </ns1:solidFill>
+                <ns1:latin typeface="Microsoft YaHei"/>
+                <ns1:ea typeface="Microsoft YaHei"/>
+                <ns1:cs typeface="Microsoft YaHei"/>
+              </ns1:rPr>
+              <ns1:t>→</ns1:t>
+            </ns1:r>
+          </ns1:p>
+        </ns0:txBody>
+      </ns0:sp>
+      <ns0:sp>
+        <ns0:nvSpPr>
+          <ns0:cNvPr id="18" name="">
+            <ns1:extLst>
+              <ns1:ext uri="{FF2B5EF4-FFF2-40B4-BE49-F238E27FC236}">
+                <ns2:creationId id="{5F60B350-C137-4B9A-8043-B3A8E91DDACC}"/>
+              </ns1:ext>
+            </ns1:extLst>
+          </ns0:cNvPr>
+          <ns0:cNvSpPr>
+            <ns1:spLocks noGrp="1"/>
+          </ns0:cNvSpPr>
+          <ns0:nvPr/>
+        </ns0:nvSpPr>
+        <ns0:spPr>
+          <ns1:xfrm>
+            <ns1:off x="2647950" y="1781175"/>
+            <ns1:ext cx="1409700" cy="333375"/>
+          </ns1:xfrm>
+          <ns1:prstGeom prst="rect">
+            <ns1:avLst/>
+          </ns1:prstGeom>
+          <ns1:solidFill>
+            <ns1:srgbClr val="DBEDF0"/>
+          </ns1:solidFill>
+          <ns1:ln w="11430">
+            <ns1:solidFill>
+              <ns1:srgbClr val="B8C4B0"/>
+            </ns1:solidFill>
+            <ns1:prstDash val="solid"/>
+          </ns1:ln>
+        </ns0:spPr>
+      </ns0:sp>
+      <ns0:sp>
+        <ns0:nvSpPr>
+          <ns0:cNvPr id="19" name="">
+            <ns1:extLst>
+              <ns1:ext uri="{FF2B5EF4-FFF2-40B4-BE49-F238E27FC236}">
+                <ns2:creationId id="{71066721-9229-4A20-BA0A-1CA1013E18E2}"/>
+              </ns1:ext>
+            </ns1:extLst>
+          </ns0:cNvPr>
+          <ns0:cNvSpPr>
+            <ns1:spLocks noGrp="1"/>
+          </ns0:cNvSpPr>
+          <ns0:nvPr/>
+        </ns0:nvSpPr>
+        <ns0:spPr>
+          <ns1:xfrm>
+            <ns1:off x="2686050" y="1781175"/>
+            <ns1:ext cx="1333500" cy="333375"/>
+          </ns1:xfrm>
+          <ns1:prstGeom prst="rect">
+            <ns1:avLst/>
+          </ns1:prstGeom>
+          <ns1:noFill/>
+          <ns1:ln w="0">
+            <ns1:noFill/>
+          </ns1:ln>
+        </ns0:spPr>
+        <ns0:txBody>
+          <ns1:bodyPr lIns="0" tIns="0" rIns="0" bIns="0" anchor="ctr"/>
+          <ns1:lstStyle>
+            <ns1:defPPr algn="ctr">
+              <ns1:defRPr sz="1350" b="0">
+                <ns1:solidFill>
+                  <ns1:srgbClr val="262626"/>
+                </ns1:solidFill>
+                <ns1:latin typeface="Microsoft YaHei"/>
+                <ns1:ea typeface="Microsoft YaHei"/>
+                <ns1:cs typeface="Microsoft YaHei"/>
+              </ns1:defRPr>
+            </ns1:defPPr>
+          </ns1:lstStyle>
+          <ns1:p>
+            <ns1:pPr algn="ctr">
+              <ns1:buNone/>
+              <ns1:defRPr sz="1350" b="0">
+                <ns1:solidFill>
+                  <ns1:srgbClr val="262626"/>
+                </ns1:solidFill>
+                <ns1:latin typeface="Microsoft YaHei"/>
+                <ns1:ea typeface="Microsoft YaHei"/>
+                <ns1:cs typeface="Microsoft YaHei"/>
+              </ns1:defRPr>
+            </ns1:pPr>
+            <ns1:r>
+              <ns1:rPr sz="1350" b="0">
+                <ns1:solidFill>
+                  <ns1:srgbClr val="262626"/>
+                </ns1:solidFill>
+                <ns1:latin typeface="Microsoft YaHei"/>
+                <ns1:ea typeface="Microsoft YaHei"/>
+                <ns1:cs typeface="Microsoft YaHei"/>
+              </ns1:rPr>
+              <ns1:t>感知 / 预测</ns1:t>
+            </ns1:r>
+          </ns1:p>
+        </ns0:txBody>
+      </ns0:sp>
+      <ns0:sp>
+        <ns0:nvSpPr>
+          <ns0:cNvPr id="20" name="">
+            <ns1:extLst>
+              <ns1:ext uri="{FF2B5EF4-FFF2-40B4-BE49-F238E27FC236}">
+                <ns2:creationId id="{DD9E67FD-CDF7-424A-89B4-41DF671C8846}"/>
+              </ns1:ext>
+            </ns1:extLst>
+          </ns0:cNvPr>
+          <ns0:cNvSpPr>
+            <ns1:spLocks noGrp="1"/>
+          </ns0:cNvSpPr>
+          <ns0:nvPr/>
+        </ns0:nvSpPr>
+        <ns0:spPr>
+          <ns1:xfrm>
+            <ns1:off x="4067175" y="1781175"/>
+            <ns1:ext cx="171450" cy="333375"/>
+          </ns1:xfrm>
+          <ns1:prstGeom prst="rect">
+            <ns1:avLst/>
+          </ns1:prstGeom>
+          <ns1:noFill/>
+          <ns1:ln w="0">
+            <ns1:noFill/>
+          </ns1:ln>
+        </ns0:spPr>
+        <ns0:txBody>
+          <ns1:bodyPr lIns="0" tIns="0" rIns="0" bIns="0" anchor="ctr"/>
+          <ns1:lstStyle>
+            <ns1:defPPr algn="ctr">
+              <ns1:defRPr sz="1350" b="0">
+                <ns1:solidFill>
+                  <ns1:srgbClr val="262626"/>
+                </ns1:solidFill>
+                <ns1:latin typeface="Microsoft YaHei"/>
+                <ns1:ea typeface="Microsoft YaHei"/>
+                <ns1:cs typeface="Microsoft YaHei"/>
+              </ns1:defRPr>
+            </ns1:defPPr>
+          </ns1:lstStyle>
+          <ns1:p>
+            <ns1:pPr algn="ctr">
+              <ns1:buNone/>
+              <ns1:defRPr sz="1350" b="0">
+                <ns1:solidFill>
+                  <ns1:srgbClr val="262626"/>
+                </ns1:solidFill>
+                <ns1:latin typeface="Microsoft YaHei"/>
+                <ns1:ea typeface="Microsoft YaHei"/>
+                <ns1:cs typeface="Microsoft YaHei"/>
+              </ns1:defRPr>
+            </ns1:pPr>
+            <ns1:r>
+              <ns1:rPr sz="1350" b="0">
+                <ns1:solidFill>
+                  <ns1:srgbClr val="262626"/>
+                </ns1:solidFill>
+                <ns1:latin typeface="Microsoft YaHei"/>
+                <ns1:ea typeface="Microsoft YaHei"/>
+                <ns1:cs typeface="Microsoft YaHei"/>
+              </ns1:rPr>
+              <ns1:t>→</ns1:t>
+            </ns1:r>
+          </ns1:p>
+        </ns0:txBody>
+      </ns0:sp>
+      <ns0:sp>
+        <ns0:nvSpPr>
+          <ns0:cNvPr id="21" name="">
+            <ns1:extLst>
+              <ns1:ext uri="{FF2B5EF4-FFF2-40B4-BE49-F238E27FC236}">
+                <ns2:creationId id="{6D2A1250-4A2B-4A98-A077-C96747349CE6}"/>
+              </ns1:ext>
+            </ns1:extLst>
+          </ns0:cNvPr>
+          <ns0:cNvSpPr>
+            <ns1:spLocks noGrp="1"/>
+          </ns0:cNvSpPr>
+          <ns0:nvPr/>
+        </ns0:nvSpPr>
+        <ns0:spPr>
+          <ns1:xfrm>
+            <ns1:off x="4248150" y="1781175"/>
+            <ns1:ext cx="1409700" cy="333375"/>
+          </ns1:xfrm>
+          <ns1:prstGeom prst="rect">
+            <ns1:avLst/>
+          </ns1:prstGeom>
+          <ns1:solidFill>
+            <ns1:srgbClr val="DBEDF0"/>
+          </ns1:solidFill>
+          <ns1:ln w="11430">
+            <ns1:solidFill>
+              <ns1:srgbClr val="B8C4B0"/>
+            </ns1:solidFill>
+            <ns1:prstDash val="solid"/>
+          </ns1:ln>
+        </ns0:spPr>
+      </ns0:sp>
+      <ns0:sp>
+        <ns0:nvSpPr>
+          <ns0:cNvPr id="22" name="">
+            <ns1:extLst>
+              <ns1:ext uri="{FF2B5EF4-FFF2-40B4-BE49-F238E27FC236}">
+                <ns2:creationId id="{E5063AFB-569B-46D8-B0E6-AAB8799E59A2}"/>
+              </ns1:ext>
+            </ns1:extLst>
+          </ns0:cNvPr>
+          <ns0:cNvSpPr>
+            <ns1:spLocks noGrp="1"/>
+          </ns0:cNvSpPr>
+          <ns0:nvPr/>
+        </ns0:nvSpPr>
+        <ns0:spPr>
+          <ns1:xfrm>
+            <ns1:off x="4286250" y="1781175"/>
+            <ns1:ext cx="1333500" cy="333375"/>
+          </ns1:xfrm>
+          <ns1:prstGeom prst="rect">
+            <ns1:avLst/>
+          </ns1:prstGeom>
+          <ns1:noFill/>
+          <ns1:ln w="0">
+            <ns1:noFill/>
+          </ns1:ln>
+        </ns0:spPr>
+        <ns0:txBody>
+          <ns1:bodyPr lIns="0" tIns="0" rIns="0" bIns="0" anchor="ctr"/>
+          <ns1:lstStyle>
+            <ns1:defPPr algn="ctr">
+              <ns1:defRPr sz="1350" b="0">
+                <ns1:solidFill>
+                  <ns1:srgbClr val="262626"/>
+                </ns1:solidFill>
+                <ns1:latin typeface="Microsoft YaHei"/>
+                <ns1:ea typeface="Microsoft YaHei"/>
+                <ns1:cs typeface="Microsoft YaHei"/>
+              </ns1:defRPr>
+            </ns1:defPPr>
+          </ns1:lstStyle>
+          <ns1:p>
+            <ns1:pPr algn="ctr">
+              <ns1:buNone/>
+              <ns1:defRPr sz="1350" b="0">
+                <ns1:solidFill>
+                  <ns1:srgbClr val="262626"/>
+                </ns1:solidFill>
+                <ns1:latin typeface="Microsoft YaHei"/>
+                <ns1:ea typeface="Microsoft YaHei"/>
+                <ns1:cs typeface="Microsoft YaHei"/>
+              </ns1:defRPr>
+            </ns1:pPr>
+            <ns1:r>
+              <ns1:rPr sz="1350" b="0">
+                <ns1:solidFill>
+                  <ns1:srgbClr val="262626"/>
+                </ns1:solidFill>
+                <ns1:latin typeface="Microsoft YaHei"/>
+                <ns1:ea typeface="Microsoft YaHei"/>
+                <ns1:cs typeface="Microsoft YaHei"/>
+              </ns1:rPr>
+              <ns1:t>规划 / 控制</ns1:t>
+            </ns1:r>
+          </ns1:p>
+        </ns0:txBody>
+      </ns0:sp>
+      <ns0:sp>
+        <ns0:nvSpPr>
+          <ns0:cNvPr id="23" name="">
+            <ns1:extLst>
+              <ns1:ext uri="{FF2B5EF4-FFF2-40B4-BE49-F238E27FC236}">
+                <ns2:creationId id="{992CF687-1C3F-45B3-86FF-320ED6281769}"/>
+              </ns1:ext>
+            </ns1:extLst>
+          </ns0:cNvPr>
+          <ns0:cNvSpPr>
+            <ns1:spLocks noGrp="1"/>
+          </ns0:cNvSpPr>
+          <ns0:nvPr/>
+        </ns0:nvSpPr>
+        <ns0:spPr>
+          <ns1:xfrm>
+            <ns1:off x="266700" y="2352675"/>
+            <ns1:ext cx="5524500" cy="1047750"/>
+          </ns1:xfrm>
+          <ns1:prstGeom prst="rect">
+            <ns1:avLst/>
+          </ns1:prstGeom>
+          <ns1:solidFill>
+            <ns1:srgbClr val="FFFFFF"/>
+          </ns1:solidFill>
+          <ns1:ln w="11430">
+            <ns1:solidFill>
+              <ns1:srgbClr val="B15A20"/>
+            </ns1:solidFill>
+            <ns1:prstDash val="dash"/>
+          </ns1:ln>
+        </ns0:spPr>
+      </ns0:sp>
+      <ns0:sp>
+        <ns0:nvSpPr>
+          <ns0:cNvPr id="24" name="">
+            <ns1:extLst>
+              <ns1:ext uri="{FF2B5EF4-FFF2-40B4-BE49-F238E27FC236}">
+                <ns2:creationId id="{B420BDC8-CFB9-479F-8443-41EA1AFB5E50}"/>
+              </ns1:ext>
+            </ns1:extLst>
+          </ns0:cNvPr>
+          <ns0:cNvSpPr>
+            <ns1:spLocks noGrp="1"/>
+          </ns0:cNvSpPr>
+          <ns0:nvPr/>
+        </ns0:nvSpPr>
+        <ns0:spPr>
+          <ns1:xfrm>
+            <ns1:off x="381000" y="2390775"/>
+            <ns1:ext cx="5295900" cy="266700"/>
+          </ns1:xfrm>
+          <ns1:prstGeom prst="rect">
+            <ns1:avLst/>
+          </ns1:prstGeom>
+          <ns1:noFill/>
+          <ns1:ln w="0">
+            <ns1:noFill/>
+          </ns1:ln>
+        </ns0:spPr>
+        <ns0:txBody>
+          <ns1:bodyPr lIns="0" tIns="0" rIns="0" bIns="0" anchor="ctr"/>
+          <ns1:lstStyle>
+            <ns1:defPPr algn="ctr">
+              <ns1:defRPr sz="1725" b="1">
+                <ns1:solidFill>
+                  <ns1:srgbClr val="BC2026"/>
+                </ns1:solidFill>
+                <ns1:latin typeface="Microsoft YaHei"/>
+                <ns1:ea typeface="Microsoft YaHei"/>
+                <ns1:cs typeface="Microsoft YaHei"/>
+              </ns1:defRPr>
+            </ns1:defPPr>
+          </ns1:lstStyle>
+          <ns1:p>
+            <ns1:pPr algn="ctr">
+              <ns1:buNone/>
+              <ns1:defRPr sz="1725" b="1">
+                <ns1:solidFill>
+                  <ns1:srgbClr val="BC2026"/>
+                </ns1:solidFill>
+                <ns1:latin typeface="Microsoft YaHei"/>
+                <ns1:ea typeface="Microsoft YaHei"/>
+                <ns1:cs typeface="Microsoft YaHei"/>
+              </ns1:defRPr>
+            </ns1:pPr>
+            <ns1:r>
+              <ns1:rPr sz="1725" b="1">
+                <ns1:solidFill>
+                  <ns1:srgbClr val="BC2026"/>
+                </ns1:solidFill>
+                <ns1:latin typeface="Microsoft YaHei"/>
+                <ns1:ea typeface="Microsoft YaHei"/>
+                <ns1:cs typeface="Microsoft YaHei"/>
+              </ns1:rPr>
+              <ns1:t>模型适配与验证</ns1:t>
+            </ns1:r>
+          </ns1:p>
+        </ns0:txBody>
+      </ns0:sp>
+      <ns0:sp>
+        <ns0:nvSpPr>
+          <ns0:cNvPr id="25" name="">
+            <ns1:extLst>
+              <ns1:ext uri="{FF2B5EF4-FFF2-40B4-BE49-F238E27FC236}">
+                <ns2:creationId id="{6D5CA051-5D35-42DB-A6C7-465CDE28C993}"/>
+              </ns1:ext>
+            </ns1:extLst>
+          </ns0:cNvPr>
+          <ns0:cNvSpPr>
+            <ns1:spLocks noGrp="1"/>
+          </ns0:cNvSpPr>
+          <ns0:nvPr/>
+        </ns0:nvSpPr>
+        <ns0:spPr>
+          <ns1:xfrm>
+            <ns1:off x="381000" y="2752725"/>
+            <ns1:ext cx="2590800" cy="523875"/>
+          </ns1:xfrm>
+          <ns1:prstGeom prst="rect">
+            <ns1:avLst/>
+          </ns1:prstGeom>
+          <ns1:solidFill>
+            <ns1:srgbClr val="E0EFD4"/>
+          </ns1:solidFill>
+          <ns1:ln w="11430">
+            <ns1:solidFill>
+              <ns1:srgbClr val="B8C4B0"/>
+            </ns1:solidFill>
+            <ns1:prstDash val="solid"/>
+          </ns1:ln>
+        </ns0:spPr>
+      </ns0:sp>
+      <ns0:sp>
+        <ns0:nvSpPr>
+          <ns0:cNvPr id="67" name="半完成状态：对角黄色区域">
+            <ns1:extLst>
+              <ns1:ext uri="{FF2B5EF4-FFF2-40B4-BE49-F238E27FC236}">
+                <ns2:creationId id="{F0E8F2F5-A6B6-4A64-94EB-DFC7BD5F0ADF}"/>
+              </ns1:ext>
+            </ns1:extLst>
+          </ns0:cNvPr>
+          <ns0:cNvSpPr>
+            <ns1:spLocks noGrp="1"/>
+          </ns0:cNvSpPr>
+          <ns0:nvPr/>
+        </ns0:nvSpPr>
+        <ns0:spPr>
+          <ns1:xfrm>
+            <ns1:off x="381000" y="2752725"/>
+            <ns1:ext cx="2590800" cy="523875"/>
+          </ns1:xfrm>
+          <ns1:custGeom>
+            <ns1:rect l="0" t="0" r="r" b="b"/>
+            <ns1:pathLst>
+              <ns1:path w="100000" h="100000">
+                <ns1:moveTo>
+                  <ns1:pt x="0" y="0"/>
+                </ns1:moveTo>
+                <ns1:lnTo>
+                  <ns1:pt x="100000" y="100000"/>
+                </ns1:lnTo>
+                <ns1:lnTo>
+                  <ns1:pt x="0" y="100000"/>
+                </ns1:lnTo>
+                <ns1:close/>
+              </ns1:path>
+            </ns1:pathLst>
+          </ns1:custGeom>
+          <ns1:solidFill>
+            <ns1:srgbClr val="FFF1CD"/>
+          </ns1:solidFill>
+          <ns1:ln>
+            <ns1:noFill/>
+          </ns1:ln>
+        </ns0:spPr>
+      </ns0:sp>
+      <ns0:sp>
+        <ns0:nvSpPr>
+          <ns0:cNvPr id="26" name="">
+            <ns1:extLst>
+              <ns1:ext uri="{FF2B5EF4-FFF2-40B4-BE49-F238E27FC236}">
+                <ns2:creationId id="{43BFCE5A-A293-4448-93C6-E6C4B661CC68}"/>
+              </ns1:ext>
+            </ns1:extLst>
+          </ns0:cNvPr>
+          <ns0:cNvSpPr>
+            <ns1:spLocks noGrp="1"/>
+          </ns0:cNvSpPr>
+          <ns0:nvPr/>
+        </ns0:nvSpPr>
+        <ns0:spPr>
+          <ns1:xfrm>
+            <ns1:off x="3086100" y="2752725"/>
+            <ns1:ext cx="2590800" cy="523875"/>
+          </ns1:xfrm>
+          <ns1:prstGeom prst="rect">
+            <ns1:avLst/>
+          </ns1:prstGeom>
+          <ns1:solidFill>
+            <ns1:srgbClr val="E0EFD4"/>
+          </ns1:solidFill>
+          <ns1:ln w="11430">
+            <ns1:solidFill>
+              <ns1:srgbClr val="B8C4B0"/>
+            </ns1:solidFill>
+            <ns1:prstDash val="solid"/>
+          </ns1:ln>
+        </ns0:spPr>
+      </ns0:sp>
+      <ns0:sp>
+        <ns0:nvSpPr>
+          <ns0:cNvPr id="68" name="半完成状态：对角黄色区域">
+            <ns1:extLst>
+              <ns1:ext uri="{FF2B5EF4-FFF2-40B4-BE49-F238E27FC236}">
+                <ns2:creationId id="{B65EC466-9827-4586-8EED-16B19A27A94D}"/>
+              </ns1:ext>
+            </ns1:extLst>
+          </ns0:cNvPr>
+          <ns0:cNvSpPr>
+            <ns1:spLocks noGrp="1"/>
+          </ns0:cNvSpPr>
+          <ns0:nvPr/>
+        </ns0:nvSpPr>
+        <ns0:spPr>
+          <ns1:xfrm>
+            <ns1:off x="3086100" y="2752725"/>
+            <ns1:ext cx="2590800" cy="523875"/>
+          </ns1:xfrm>
+          <ns1:custGeom>
+            <ns1:rect l="0" t="0" r="r" b="b"/>
+            <ns1:pathLst>
+              <ns1:path w="100000" h="100000">
+                <ns1:moveTo>
+                  <ns1:pt x="0" y="0"/>
+                </ns1:moveTo>
+                <ns1:lnTo>
+                  <ns1:pt x="100000" y="100000"/>
+                </ns1:lnTo>
+                <ns1:lnTo>
+                  <ns1:pt x="0" y="100000"/>
+                </ns1:lnTo>
+                <ns1:close/>
+              </ns1:path>
+            </ns1:pathLst>
+          </ns1:custGeom>
+          <ns1:solidFill>
+            <ns1:srgbClr val="FFF1CD"/>
+          </ns1:solidFill>
+          <ns1:ln>
+            <ns1:noFill/>
+          </ns1:ln>
+        </ns0:spPr>
+      </ns0:sp>
+      <ns0:sp>
+        <ns0:nvSpPr>
+          <ns0:cNvPr id="27" name="">
+            <ns1:extLst>
+              <ns1:ext uri="{FF2B5EF4-FFF2-40B4-BE49-F238E27FC236}">
+                <ns2:creationId id="{E160F245-CC58-4F4A-9307-94D06123E89A}"/>
+              </ns1:ext>
+            </ns1:extLst>
+          </ns0:cNvPr>
+          <ns0:cNvSpPr>
+            <ns1:spLocks noGrp="1"/>
+          </ns0:cNvSpPr>
+          <ns0:nvPr/>
+        </ns0:nvSpPr>
+        <ns0:spPr>
+          <ns1:xfrm>
+            <ns1:off x="438150" y="2781300"/>
+            <ns1:ext cx="2476500" cy="228600"/>
+          </ns1:xfrm>
+          <ns1:prstGeom prst="rect">
+            <ns1:avLst/>
+          </ns1:prstGeom>
+          <ns1:noFill/>
+          <ns1:ln w="0">
+            <ns1:noFill/>
+          </ns1:ln>
+        </ns0:spPr>
+        <ns0:txBody>
+          <ns1:bodyPr lIns="0" tIns="0" rIns="0" bIns="0" anchor="ctr"/>
+          <ns1:lstStyle>
+            <ns1:defPPr algn="ctr">
+              <ns1:defRPr sz="1350" b="1">
+                <ns1:solidFill>
+                  <ns1:srgbClr val="262626"/>
+                </ns1:solidFill>
+                <ns1:latin typeface="Microsoft YaHei"/>
+                <ns1:ea typeface="Microsoft YaHei"/>
+                <ns1:cs typeface="Microsoft YaHei"/>
+              </ns1:defRPr>
+            </ns1:defPPr>
+          </ns1:lstStyle>
+          <ns1:p>
+            <ns1:pPr algn="ctr">
+              <ns1:buNone/>
+              <ns1:defRPr sz="1350" b="1">
+                <ns1:solidFill>
+                  <ns1:srgbClr val="262626"/>
+                </ns1:solidFill>
+                <ns1:latin typeface="Microsoft YaHei"/>
+                <ns1:ea typeface="Microsoft YaHei"/>
+                <ns1:cs typeface="Microsoft YaHei"/>
+              </ns1:defRPr>
+            </ns1:pPr>
+            <ns1:r>
+              <ns1:rPr sz="1350" b="1">
+                <ns1:solidFill>
+                  <ns1:srgbClr val="262626"/>
+                </ns1:solidFill>
+                <ns1:latin typeface="Microsoft YaHei"/>
+                <ns1:ea typeface="Microsoft YaHei"/>
+                <ns1:cs typeface="Microsoft YaHei"/>
+              </ns1:rPr>
+              <ns1:t>具身：VLM / VLA / 策略模型</ns1:t>
+            </ns1:r>
+          </ns1:p>
+        </ns0:txBody>
+      </ns0:sp>
+      <ns0:sp>
+        <ns0:nvSpPr>
+          <ns0:cNvPr id="28" name="">
+            <ns1:extLst>
+              <ns1:ext uri="{FF2B5EF4-FFF2-40B4-BE49-F238E27FC236}">
+                <ns2:creationId id="{94E3D4FB-5ABC-45B1-90B1-E1A805463B33}"/>
+              </ns1:ext>
+            </ns1:extLst>
+          </ns0:cNvPr>
+          <ns0:cNvSpPr>
+            <ns1:spLocks noGrp="1"/>
+          </ns0:cNvSpPr>
+          <ns0:nvPr/>
+        </ns0:nvSpPr>
+        <ns0:spPr>
+          <ns1:xfrm>
+            <ns1:off x="438150" y="3028950"/>
+            <ns1:ext cx="2476500" cy="228600"/>
+          </ns1:xfrm>
+          <ns1:prstGeom prst="rect">
+            <ns1:avLst/>
+          </ns1:prstGeom>
+          <ns1:noFill/>
+          <ns1:ln w="0">
+            <ns1:noFill/>
+          </ns1:ln>
+        </ns0:spPr>
+        <ns0:txBody>
+          <ns1:bodyPr lIns="0" tIns="0" rIns="0" bIns="0" anchor="ctr"/>
+          <ns1:lstStyle>
+            <ns1:defPPr algn="ctr">
+              <ns1:defRPr sz="1275" b="0">
+                <ns1:solidFill>
+                  <ns1:srgbClr val="262626"/>
+                </ns1:solidFill>
+                <ns1:latin typeface="Microsoft YaHei"/>
+                <ns1:ea typeface="Microsoft YaHei"/>
+                <ns1:cs typeface="Microsoft YaHei"/>
+              </ns1:defRPr>
+            </ns1:defPPr>
+          </ns1:lstStyle>
+          <ns1:p>
+            <ns1:pPr algn="ctr">
+              <ns1:buNone/>
+              <ns1:defRPr sz="1275" b="0">
+                <ns1:solidFill>
+                  <ns1:srgbClr val="262626"/>
+                </ns1:solidFill>
+                <ns1:latin typeface="Microsoft YaHei"/>
+                <ns1:ea typeface="Microsoft YaHei"/>
+                <ns1:cs typeface="Microsoft YaHei"/>
+              </ns1:defRPr>
+            </ns1:pPr>
+            <ns1:r>
+              <ns1:rPr sz="1275" b="0">
+                <ns1:solidFill>
+                  <ns1:srgbClr val="262626"/>
+                </ns1:solidFill>
+                <ns1:latin typeface="Microsoft YaHei"/>
+                <ns1:ea typeface="Microsoft YaHei"/>
+                <ns1:cs typeface="Microsoft YaHei"/>
+              </ns1:rPr>
+              <ns1:t>多模态理解、动作生成</ns1:t>
+            </ns1:r>
+          </ns1:p>
+        </ns0:txBody>
+      </ns0:sp>
+      <ns0:sp>
+        <ns0:nvSpPr>
+          <ns0:cNvPr id="29" name="">
+            <ns1:extLst>
+              <ns1:ext uri="{FF2B5EF4-FFF2-40B4-BE49-F238E27FC236}">
+                <ns2:creationId id="{805E28B3-9116-4112-8A2D-2B8C19D1A297}"/>
+              </ns1:ext>
+            </ns1:extLst>
+          </ns0:cNvPr>
+          <ns0:cNvSpPr>
+            <ns1:spLocks noGrp="1"/>
+          </ns0:cNvSpPr>
+          <ns0:nvPr/>
+        </ns0:nvSpPr>
+        <ns0:spPr>
+          <ns1:xfrm>
+            <ns1:off x="3143250" y="2781300"/>
+            <ns1:ext cx="2476500" cy="228600"/>
+          </ns1:xfrm>
+          <ns1:prstGeom prst="rect">
+            <ns1:avLst/>
+          </ns1:prstGeom>
+          <ns1:noFill/>
+          <ns1:ln w="0">
+            <ns1:noFill/>
+          </ns1:ln>
+        </ns0:spPr>
+        <ns0:txBody>
+          <ns1:bodyPr lIns="0" tIns="0" rIns="0" bIns="0" anchor="ctr"/>
+          <ns1:lstStyle>
+            <ns1:defPPr algn="ctr">
+              <ns1:defRPr sz="1350" b="1">
+                <ns1:solidFill>
+                  <ns1:srgbClr val="262626"/>
+                </ns1:solidFill>
+                <ns1:latin typeface="Microsoft YaHei"/>
+                <ns1:ea typeface="Microsoft YaHei"/>
+                <ns1:cs typeface="Microsoft YaHei"/>
+              </ns1:defRPr>
+            </ns1:defPPr>
+          </ns1:lstStyle>
+          <ns1:p>
+            <ns1:pPr algn="ctr">
+              <ns1:buNone/>
+              <ns1:defRPr sz="1350" b="1">
+                <ns1:solidFill>
+                  <ns1:srgbClr val="262626"/>
+                </ns1:solidFill>
+                <ns1:latin typeface="Microsoft YaHei"/>
+                <ns1:ea typeface="Microsoft YaHei"/>
+                <ns1:cs typeface="Microsoft YaHei"/>
+              </ns1:defRPr>
+            </ns1:pPr>
+            <ns1:r>
+              <ns1:rPr sz="1350" b="1">
+                <ns1:solidFill>
+                  <ns1:srgbClr val="262626"/>
+                </ns1:solidFill>
+                <ns1:latin typeface="Microsoft YaHei"/>
+                <ns1:ea typeface="Microsoft YaHei"/>
+                <ns1:cs typeface="Microsoft YaHei"/>
+              </ns1:rPr>
+              <ns1:t>无人车：感知 / 占据 / 规控</ns1:t>
+            </ns1:r>
+          </ns1:p>
+        </ns0:txBody>
+      </ns0:sp>
+      <ns0:sp>
+        <ns0:nvSpPr>
+          <ns0:cNvPr id="30" name="">
+            <ns1:extLst>
+              <ns1:ext uri="{FF2B5EF4-FFF2-40B4-BE49-F238E27FC236}">
+                <ns2:creationId id="{052B535B-E8B4-4B62-A3A9-5A11668A3BFB}"/>
+              </ns1:ext>
+            </ns1:extLst>
+          </ns0:cNvPr>
+          <ns0:cNvSpPr>
+            <ns1:spLocks noGrp="1"/>
+          </ns0:cNvSpPr>
+          <ns0:nvPr/>
+        </ns0:nvSpPr>
+        <ns0:spPr>
+          <ns1:xfrm>
+            <ns1:off x="3143250" y="3028950"/>
+            <ns1:ext cx="2476500" cy="228600"/>
+          </ns1:xfrm>
+          <ns1:prstGeom prst="rect">
+            <ns1:avLst/>
+          </ns1:prstGeom>
+          <ns1:noFill/>
+          <ns1:ln w="0">
+            <ns1:noFill/>
+          </ns1:ln>
+        </ns0:spPr>
+        <ns0:txBody>
+          <ns1:bodyPr lIns="0" tIns="0" rIns="0" bIns="0" anchor="ctr"/>
+          <ns1:lstStyle>
+            <ns1:defPPr algn="ctr">
+              <ns1:defRPr sz="1275" b="0">
+                <ns1:solidFill>
+                  <ns1:srgbClr val="262626"/>
+                </ns1:solidFill>
+                <ns1:latin typeface="Microsoft YaHei"/>
+                <ns1:ea typeface="Microsoft YaHei"/>
+                <ns1:cs typeface="Microsoft YaHei"/>
+              </ns1:defRPr>
+            </ns1:defPPr>
+          </ns1:lstStyle>
+          <ns1:p>
+            <ns1:pPr algn="ctr">
+              <ns1:buNone/>
+              <ns1:defRPr sz="1275" b="0">
+                <ns1:solidFill>
+                  <ns1:srgbClr val="262626"/>
+                </ns1:solidFill>
+                <ns1:latin typeface="Microsoft YaHei"/>
+                <ns1:ea typeface="Microsoft YaHei"/>
+                <ns1:cs typeface="Microsoft YaHei"/>
+              </ns1:defRPr>
+            </ns1:pPr>
+            <ns1:r>
+              <ns1:rPr sz="1275" b="0">
+                <ns1:solidFill>
+                  <ns1:srgbClr val="262626"/>
+                </ns1:solidFill>
+                <ns1:latin typeface="Microsoft YaHei"/>
+                <ns1:ea typeface="Microsoft YaHei"/>
+                <ns1:cs typeface="Microsoft YaHei"/>
+              </ns1:rPr>
+              <ns1:t>检测、BEV、点云与规划</ns1:t>
+            </ns1:r>
+          </ns1:p>
+        </ns0:txBody>
+      </ns0:sp>
+      <ns0:sp>
+        <ns0:nvSpPr>
+          <ns0:cNvPr id="31" name="">
+            <ns1:extLst>
+              <ns1:ext uri="{FF2B5EF4-FFF2-40B4-BE49-F238E27FC236}">
+                <ns2:creationId id="{3F901204-712E-447A-B907-83D1F2690103}"/>
+              </ns1:ext>
+            </ns1:extLst>
+          </ns0:cNvPr>
+          <ns0:cNvSpPr>
+            <ns1:spLocks noGrp="1"/>
+          </ns0:cNvSpPr>
+          <ns0:nvPr/>
+        </ns0:nvSpPr>
+        <ns0:spPr>
+          <ns1:xfrm>
+            <ns1:off x="266700" y="3543300"/>
+            <ns1:ext cx="5524500" cy="1200150"/>
+          </ns1:xfrm>
+          <ns1:prstGeom prst="rect">
+            <ns1:avLst/>
+          </ns1:prstGeom>
+          <ns1:solidFill>
+            <ns1:srgbClr val="FFFFFF"/>
+          </ns1:solidFill>
+          <ns1:ln w="11430">
+            <ns1:solidFill>
+              <ns1:srgbClr val="B15A20"/>
+            </ns1:solidFill>
+            <ns1:prstDash val="dash"/>
+          </ns1:ln>
+        </ns0:spPr>
+      </ns0:sp>
+      <ns0:sp>
+        <ns0:nvSpPr>
+          <ns0:cNvPr id="32" name="">
+            <ns1:extLst>
+              <ns1:ext uri="{FF2B5EF4-FFF2-40B4-BE49-F238E27FC236}">
+                <ns2:creationId id="{42AFE61D-358E-438A-9B61-3C9713917A76}"/>
+              </ns1:ext>
+            </ns1:extLst>
+          </ns0:cNvPr>
+          <ns0:cNvSpPr>
+            <ns1:spLocks noGrp="1"/>
+          </ns0:cNvSpPr>
+          <ns0:nvPr/>
+        </ns0:nvSpPr>
+        <ns0:spPr>
+          <ns1:xfrm>
+            <ns1:off x="381000" y="3657600"/>
+            <ns1:ext cx="2590800" cy="971550"/>
+          </ns1:xfrm>
+          <ns1:prstGeom prst="rect">
+            <ns1:avLst/>
+          </ns1:prstGeom>
+          <ns1:solidFill>
+            <ns1:srgbClr val="E0EFD4"/>
+          </ns1:solidFill>
+          <ns1:ln w="11430">
+            <ns1:solidFill>
+              <ns1:srgbClr val="B8C4B0"/>
+            </ns1:solidFill>
+            <ns1:prstDash val="solid"/>
+          </ns1:ln>
+        </ns0:spPr>
+      </ns0:sp>
+      <ns0:sp>
+        <ns0:nvSpPr>
+          <ns0:cNvPr id="33" name="">
+            <ns1:extLst>
+              <ns1:ext uri="{FF2B5EF4-FFF2-40B4-BE49-F238E27FC236}">
+                <ns2:creationId id="{BBE8FAAF-28E9-4889-BC11-F1DCC4C97CCD}"/>
+              </ns1:ext>
+            </ns1:extLst>
+          </ns0:cNvPr>
+          <ns0:cNvSpPr>
+            <ns1:spLocks noGrp="1"/>
+          </ns0:cNvSpPr>
+          <ns0:nvPr/>
+        </ns0:nvSpPr>
+        <ns0:spPr>
+          <ns1:xfrm>
+            <ns1:off x="3086100" y="3657600"/>
+            <ns1:ext cx="2590800" cy="971550"/>
+          </ns1:xfrm>
+          <ns1:prstGeom prst="rect">
+            <ns1:avLst/>
+          </ns1:prstGeom>
+          <ns1:solidFill>
+            <ns1:srgbClr val="E0EFD4"/>
+          </ns1:solidFill>
+          <ns1:ln w="11430">
+            <ns1:solidFill>
+              <ns1:srgbClr val="B8C4B0"/>
+            </ns1:solidFill>
+            <ns1:prstDash val="solid"/>
+          </ns1:ln>
+        </ns0:spPr>
+      </ns0:sp>
+      <ns0:sp>
+        <ns0:nvSpPr>
+          <ns0:cNvPr id="69" name="半完成状态：对角黄色区域">
+            <ns1:extLst>
+              <ns1:ext uri="{FF2B5EF4-FFF2-40B4-BE49-F238E27FC236}">
+                <ns2:creationId id="{8973C8CB-3362-4616-9C34-A4280C2B9735}"/>
+              </ns1:ext>
+            </ns1:extLst>
+          </ns0:cNvPr>
+          <ns0:cNvSpPr>
+            <ns1:spLocks noGrp="1"/>
+          </ns0:cNvSpPr>
+          <ns0:nvPr/>
+        </ns0:nvSpPr>
+        <ns0:spPr>
+          <ns1:xfrm>
+            <ns1:off x="3086100" y="3657600"/>
+            <ns1:ext cx="2590800" cy="971550"/>
+          </ns1:xfrm>
+          <ns1:custGeom>
+            <ns1:rect l="0" t="0" r="r" b="b"/>
+            <ns1:pathLst>
+              <ns1:path w="100000" h="100000">
+                <ns1:moveTo>
+                  <ns1:pt x="0" y="0"/>
+                </ns1:moveTo>
+                <ns1:lnTo>
+                  <ns1:pt x="100000" y="100000"/>
+                </ns1:lnTo>
+                <ns1:lnTo>
+                  <ns1:pt x="0" y="100000"/>
+                </ns1:lnTo>
+                <ns1:close/>
+              </ns1:path>
+            </ns1:pathLst>
+          </ns1:custGeom>
+          <ns1:solidFill>
+            <ns1:srgbClr val="FFF1CD"/>
+          </ns1:solidFill>
+          <ns1:ln>
+            <ns1:noFill/>
+          </ns1:ln>
+        </ns0:spPr>
+      </ns0:sp>
+      <ns0:sp>
+        <ns0:nvSpPr>
+          <ns0:cNvPr id="34" name="">
+            <ns1:extLst>
+              <ns1:ext uri="{FF2B5EF4-FFF2-40B4-BE49-F238E27FC236}">
+                <ns2:creationId id="{40642992-C145-437A-A343-F7FD3A31B382}"/>
+              </ns1:ext>
+            </ns1:extLst>
+          </ns0:cNvPr>
+          <ns0:cNvSpPr>
+            <ns1:spLocks noGrp="1"/>
+          </ns0:cNvSpPr>
+          <ns0:nvPr/>
+        </ns0:nvSpPr>
+        <ns0:spPr>
+          <ns1:xfrm>
+            <ns1:off x="447675" y="3705225"/>
+            <ns1:ext cx="2457450" cy="276225"/>
+          </ns1:xfrm>
+          <ns1:prstGeom prst="rect">
+            <ns1:avLst/>
+          </ns1:prstGeom>
+          <ns1:noFill/>
+          <ns1:ln w="0">
+            <ns1:noFill/>
+          </ns1:ln>
+        </ns0:spPr>
+        <ns0:txBody>
+          <ns1:bodyPr lIns="0" tIns="0" rIns="0" bIns="0" anchor="ctr"/>
+          <ns1:lstStyle>
+            <ns1:defPPr algn="ctr">
+              <ns1:defRPr sz="1725" b="1">
+                <ns1:solidFill>
+                  <ns1:srgbClr val="BC2026"/>
+                </ns1:solidFill>
+                <ns1:latin typeface="Microsoft YaHei"/>
+                <ns1:ea typeface="Microsoft YaHei"/>
+                <ns1:cs typeface="Microsoft YaHei"/>
+              </ns1:defRPr>
+            </ns1:defPPr>
+          </ns1:lstStyle>
+          <ns1:p>
+            <ns1:pPr algn="ctr">
+              <ns1:buNone/>
+              <ns1:defRPr sz="1725" b="1">
+                <ns1:solidFill>
+                  <ns1:srgbClr val="BC2026"/>
+                </ns1:solidFill>
+                <ns1:latin typeface="Microsoft YaHei"/>
+                <ns1:ea typeface="Microsoft YaHei"/>
+                <ns1:cs typeface="Microsoft YaHei"/>
+              </ns1:defRPr>
+            </ns1:pPr>
+            <ns1:r>
+              <ns1:rPr sz="1725" b="1">
+                <ns1:solidFill>
+                  <ns1:srgbClr val="BC2026"/>
+                </ns1:solidFill>
+                <ns1:latin typeface="Microsoft YaHei"/>
+                <ns1:ea typeface="Microsoft YaHei"/>
+                <ns1:cs typeface="Microsoft YaHei"/>
+              </ns1:rPr>
+              <ns1:t>具身智能推理框架</ns1:t>
+            </ns1:r>
+          </ns1:p>
+        </ns0:txBody>
+      </ns0:sp>
+      <ns0:sp>
+        <ns0:nvSpPr>
+          <ns0:cNvPr id="35" name="">
+            <ns1:extLst>
+              <ns1:ext uri="{FF2B5EF4-FFF2-40B4-BE49-F238E27FC236}">
+                <ns2:creationId id="{EC2DE2BD-C01C-4D74-97CF-4DE07D5E1975}"/>
+              </ns1:ext>
+            </ns1:extLst>
+          </ns0:cNvPr>
+          <ns0:cNvSpPr>
+            <ns1:spLocks noGrp="1"/>
+          </ns0:cNvSpPr>
+          <ns0:nvPr/>
+        </ns0:nvSpPr>
+        <ns0:spPr>
+          <ns1:xfrm>
+            <ns1:off x="447675" y="4048125"/>
+            <ns1:ext cx="2457450" cy="495300"/>
+          </ns1:xfrm>
+          <ns1:prstGeom prst="rect">
+            <ns1:avLst/>
+          </ns1:prstGeom>
+          <ns1:noFill/>
+          <ns1:ln w="0">
+            <ns1:noFill/>
+          </ns1:ln>
+        </ns0:spPr>
+        <ns0:txBody>
+          <ns1:bodyPr lIns="0" tIns="0" rIns="0" bIns="0" anchor="ctr"/>
+          <ns1:lstStyle>
+            <ns1:defPPr algn="ctr">
+              <ns1:defRPr sz="1425" b="0">
+                <ns1:solidFill>
+                  <ns1:srgbClr val="262626"/>
+                </ns1:solidFill>
+                <ns1:latin typeface="Microsoft YaHei"/>
+                <ns1:ea typeface="Microsoft YaHei"/>
+                <ns1:cs typeface="Microsoft YaHei"/>
+              </ns1:defRPr>
+            </ns1:defPPr>
+          </ns1:lstStyle>
+          <ns1:p>
+            <ns1:pPr algn="ctr">
+              <ns1:buNone/>
+              <ns1:defRPr sz="1425" b="0">
+                <ns1:solidFill>
+                  <ns1:srgbClr val="262626"/>
+                </ns1:solidFill>
+                <ns1:latin typeface="Microsoft YaHei"/>
+                <ns1:ea typeface="Microsoft YaHei"/>
+                <ns1:cs typeface="Microsoft YaHei"/>
+              </ns1:defRPr>
+            </ns1:pPr>
+            <ns1:r>
+              <ns1:rPr sz="1425" b="0">
+                <ns1:solidFill>
+                  <ns1:srgbClr val="262626"/>
+                </ns1:solidFill>
+                <ns1:latin typeface="Microsoft YaHei"/>
+                <ns1:ea typeface="Microsoft YaHei"/>
+                <ns1:cs typeface="Microsoft YaHei"/>
+              </ns1:rPr>
+              <ns1:t>多模态接入 · 动作分块</ns1:t>
+            </ns1:r>
+          </ns1:p>
+          <ns1:p>
+            <ns1:pPr algn="ctr">
+              <ns1:buNone/>
+              <ns1:defRPr sz="1425" b="0">
+                <ns1:solidFill>
+                  <ns1:srgbClr val="262626"/>
+                </ns1:solidFill>
+                <ns1:latin typeface="Microsoft YaHei"/>
+                <ns1:ea typeface="Microsoft YaHei"/>
+                <ns1:cs typeface="Microsoft YaHei"/>
+              </ns1:defRPr>
+            </ns1:pPr>
+            <ns1:r>
+              <ns1:rPr sz="1425" b="0">
+                <ns1:solidFill>
+                  <ns1:srgbClr val="262626"/>
+                </ns1:solidFill>
+                <ns1:latin typeface="Microsoft YaHei"/>
+                <ns1:ea typeface="Microsoft YaHei"/>
+                <ns1:cs typeface="Microsoft YaHei"/>
+              </ns1:rPr>
+              <ns1:t>异构调度 · 低时延执行</ns1:t>
+            </ns1:r>
+          </ns1:p>
+        </ns0:txBody>
+      </ns0:sp>
+      <ns0:sp>
+        <ns0:nvSpPr>
+          <ns0:cNvPr id="36" name="">
+            <ns1:extLst>
+              <ns1:ext uri="{FF2B5EF4-FFF2-40B4-BE49-F238E27FC236}">
+                <ns2:creationId id="{5742A96B-0893-4175-A37E-01A2363C8E11}"/>
+              </ns1:ext>
+            </ns1:extLst>
+          </ns0:cNvPr>
+          <ns0:cNvSpPr>
+            <ns1:spLocks noGrp="1"/>
+          </ns0:cNvSpPr>
+          <ns0:nvPr/>
+        </ns0:nvSpPr>
+        <ns0:spPr>
+          <ns1:xfrm>
+            <ns1:off x="3152775" y="3705225"/>
+            <ns1:ext cx="2457450" cy="276225"/>
+          </ns1:xfrm>
+          <ns1:prstGeom prst="rect">
+            <ns1:avLst/>
+          </ns1:prstGeom>
+          <ns1:noFill/>
+          <ns1:ln w="0">
+            <ns1:noFill/>
+          </ns1:ln>
+        </ns0:spPr>
+        <ns0:txBody>
+          <ns1:bodyPr lIns="0" tIns="0" rIns="0" bIns="0" anchor="ctr"/>
+          <ns1:lstStyle>
+            <ns1:defPPr algn="ctr">
+              <ns1:defRPr sz="1725" b="1">
+                <ns1:solidFill>
+                  <ns1:srgbClr val="BC2026"/>
+                </ns1:solidFill>
+                <ns1:latin typeface="Microsoft YaHei"/>
+                <ns1:ea typeface="Microsoft YaHei"/>
+                <ns1:cs typeface="Microsoft YaHei"/>
+              </ns1:defRPr>
+            </ns1:defPPr>
+          </ns1:lstStyle>
+          <ns1:p>
+            <ns1:pPr algn="ctr">
+              <ns1:buNone/>
+              <ns1:defRPr sz="1725" b="1">
+                <ns1:solidFill>
+                  <ns1:srgbClr val="BC2026"/>
+                </ns1:solidFill>
+                <ns1:latin typeface="Microsoft YaHei"/>
+                <ns1:ea typeface="Microsoft YaHei"/>
+                <ns1:cs typeface="Microsoft YaHei"/>
+              </ns1:defRPr>
+            </ns1:pPr>
+            <ns1:r>
+              <ns1:rPr sz="1725" b="1">
+                <ns1:solidFill>
+                  <ns1:srgbClr val="BC2026"/>
+                </ns1:solidFill>
+                <ns1:latin typeface="Microsoft YaHei"/>
+                <ns1:ea typeface="Microsoft YaHei"/>
+                <ns1:cs typeface="Microsoft YaHei"/>
+              </ns1:rPr>
+              <ns1:t>无人车推理执行</ns1:t>
+            </ns1:r>
+          </ns1:p>
+        </ns0:txBody>
+      </ns0:sp>
+      <ns0:sp>
+        <ns0:nvSpPr>
+          <ns0:cNvPr id="37" name="">
+            <ns1:extLst>
+              <ns1:ext uri="{FF2B5EF4-FFF2-40B4-BE49-F238E27FC236}">
+                <ns2:creationId id="{6C681E34-F0EF-45D6-A30E-9662ACFF6B94}"/>
+              </ns1:ext>
+            </ns1:extLst>
+          </ns0:cNvPr>
+          <ns0:cNvSpPr>
+            <ns1:spLocks noGrp="1"/>
+          </ns0:cNvSpPr>
+          <ns0:nvPr/>
+        </ns0:nvSpPr>
+        <ns0:spPr>
+          <ns1:xfrm>
+            <ns1:off x="3152775" y="4048125"/>
+            <ns1:ext cx="2457450" cy="495300"/>
+          </ns1:xfrm>
+          <ns1:prstGeom prst="rect">
+            <ns1:avLst/>
+          </ns1:prstGeom>
+          <ns1:noFill/>
+          <ns1:ln w="0">
+            <ns1:noFill/>
+          </ns1:ln>
+        </ns0:spPr>
+        <ns0:txBody>
+          <ns1:bodyPr lIns="0" tIns="0" rIns="0" bIns="0" anchor="ctr"/>
+          <ns1:lstStyle>
+            <ns1:defPPr algn="ctr">
+              <ns1:defRPr sz="1425" b="0">
+                <ns1:solidFill>
+                  <ns1:srgbClr val="262626"/>
+                </ns1:solidFill>
+                <ns1:latin typeface="Microsoft YaHei"/>
+                <ns1:ea typeface="Microsoft YaHei"/>
+                <ns1:cs typeface="Microsoft YaHei"/>
+              </ns1:defRPr>
+            </ns1:defPPr>
+          </ns1:lstStyle>
+          <ns1:p>
+            <ns1:pPr algn="ctr">
+              <ns1:buNone/>
+              <ns1:defRPr sz="1425" b="0">
+                <ns1:solidFill>
+                  <ns1:srgbClr val="262626"/>
+                </ns1:solidFill>
+                <ns1:latin typeface="Microsoft YaHei"/>
+                <ns1:ea typeface="Microsoft YaHei"/>
+                <ns1:cs typeface="Microsoft YaHei"/>
+              </ns1:defRPr>
+            </ns1:pPr>
+            <ns1:r>
+              <ns1:rPr sz="1425" b="0">
+                <ns1:solidFill>
+                  <ns1:srgbClr val="262626"/>
+                </ns1:solidFill>
+                <ns1:latin typeface="Microsoft YaHei"/>
+                <ns1:ea typeface="Microsoft YaHei"/>
+                <ns1:cs typeface="Microsoft YaHei"/>
+              </ns1:rPr>
+              <ns1:t>前后处理 · 多模型流水线</ns1:t>
+            </ns1:r>
+          </ns1:p>
+          <ns1:p>
+            <ns1:pPr algn="ctr">
+              <ns1:buNone/>
+              <ns1:defRPr sz="1425" b="0">
+                <ns1:solidFill>
+                  <ns1:srgbClr val="262626"/>
+                </ns1:solidFill>
+                <ns1:latin typeface="Microsoft YaHei"/>
+                <ns1:ea typeface="Microsoft YaHei"/>
+                <ns1:cs typeface="Microsoft YaHei"/>
+              </ns1:defRPr>
+            </ns1:pPr>
+            <ns1:r>
+              <ns1:rPr sz="1425" b="0">
+                <ns1:solidFill>
+                  <ns1:srgbClr val="262626"/>
+                </ns1:solidFill>
+                <ns1:latin typeface="Microsoft YaHei"/>
+                <ns1:ea typeface="Microsoft YaHei"/>
+                <ns1:cs typeface="Microsoft YaHei"/>
+              </ns1:rPr>
+              <ns1:t>端到端执行与调优</ns1:t>
+            </ns1:r>
+          </ns1:p>
+        </ns0:txBody>
+      </ns0:sp>
+      <ns0:sp>
+        <ns0:nvSpPr>
+          <ns0:cNvPr id="38" name="">
+            <ns1:extLst>
+              <ns1:ext uri="{FF2B5EF4-FFF2-40B4-BE49-F238E27FC236}">
+                <ns2:creationId id="{C5FA305E-C738-46FC-AF72-BFD3A087CFC6}"/>
+              </ns1:ext>
+            </ns1:extLst>
+          </ns0:cNvPr>
+          <ns0:cNvSpPr>
+            <ns1:spLocks noGrp="1"/>
+          </ns0:cNvSpPr>
+          <ns0:nvPr/>
+        </ns0:nvSpPr>
+        <ns0:spPr>
+          <ns1:xfrm>
+            <ns1:off x="266700" y="4886325"/>
+            <ns1:ext cx="5524500" cy="762000"/>
+          </ns1:xfrm>
+          <ns1:prstGeom prst="rect">
+            <ns1:avLst/>
+          </ns1:prstGeom>
+          <ns1:solidFill>
+            <ns1:srgbClr val="E0EFD4"/>
+          </ns1:solidFill>
+          <ns1:ln w="11430">
+            <ns1:solidFill>
+              <ns1:srgbClr val="B15A20"/>
+            </ns1:solidFill>
+            <ns1:prstDash val="dash"/>
+          </ns1:ln>
+        </ns0:spPr>
+      </ns0:sp>
+      <ns0:sp>
+        <ns0:nvSpPr>
+          <ns0:cNvPr id="70" name="半完成状态：对角黄色区域">
+            <ns1:extLst>
+              <ns1:ext uri="{FF2B5EF4-FFF2-40B4-BE49-F238E27FC236}">
+                <ns2:creationId id="{7705653B-4B32-4E41-BA2F-0DEB8B3E42F8}"/>
+              </ns1:ext>
+            </ns1:extLst>
+          </ns0:cNvPr>
+          <ns0:cNvSpPr>
+            <ns1:spLocks noGrp="1"/>
+          </ns0:cNvSpPr>
+          <ns0:nvPr/>
+        </ns0:nvSpPr>
+        <ns0:spPr>
+          <ns1:xfrm>
+            <ns1:off x="266700" y="4886325"/>
+            <ns1:ext cx="5524500" cy="762000"/>
+          </ns1:xfrm>
+          <ns1:custGeom>
+            <ns1:rect l="0" t="0" r="r" b="b"/>
+            <ns1:pathLst>
+              <ns1:path w="100000" h="100000">
+                <ns1:moveTo>
+                  <ns1:pt x="0" y="0"/>
+                </ns1:moveTo>
+                <ns1:lnTo>
+                  <ns1:pt x="100000" y="100000"/>
+                </ns1:lnTo>
+                <ns1:lnTo>
+                  <ns1:pt x="0" y="100000"/>
+                </ns1:lnTo>
+                <ns1:close/>
+              </ns1:path>
+            </ns1:pathLst>
+          </ns1:custGeom>
+          <ns1:solidFill>
+            <ns1:srgbClr val="FFF1CD"/>
+          </ns1:solidFill>
+          <ns1:ln>
+            <ns1:noFill/>
+          </ns1:ln>
+        </ns0:spPr>
+      </ns0:sp>
+      <ns0:sp>
+        <ns0:nvSpPr>
+          <ns0:cNvPr id="39" name="">
+            <ns1:extLst>
+              <ns1:ext uri="{FF2B5EF4-FFF2-40B4-BE49-F238E27FC236}">
+                <ns2:creationId id="{66A6591B-9DAF-4C3D-ABB0-627A75772CF2}"/>
+              </ns1:ext>
+            </ns1:extLst>
+          </ns0:cNvPr>
+          <ns0:cNvSpPr>
+            <ns1:spLocks noGrp="1"/>
+          </ns0:cNvSpPr>
+          <ns0:nvPr/>
+        </ns0:nvSpPr>
+        <ns0:spPr>
+          <ns1:xfrm>
+            <ns1:off x="381000" y="4914900"/>
+            <ns1:ext cx="5295900" cy="276225"/>
+          </ns1:xfrm>
+          <ns1:prstGeom prst="rect">
+            <ns1:avLst/>
+          </ns1:prstGeom>
+          <ns1:noFill/>
+          <ns1:ln w="0">
+            <ns1:noFill/>
+          </ns1:ln>
+        </ns0:spPr>
+        <ns0:txBody>
+          <ns1:bodyPr lIns="0" tIns="0" rIns="0" bIns="0" anchor="ctr"/>
+          <ns1:lstStyle>
+            <ns1:defPPr algn="ctr">
+              <ns1:defRPr sz="1725" b="1">
+                <ns1:solidFill>
+                  <ns1:srgbClr val="BC2026"/>
+                </ns1:solidFill>
+                <ns1:latin typeface="Microsoft YaHei"/>
+                <ns1:ea typeface="Microsoft YaHei"/>
+                <ns1:cs typeface="Microsoft YaHei"/>
+              </ns1:defRPr>
+            </ns1:defPPr>
+          </ns1:lstStyle>
+          <ns1:p>
+            <ns1:pPr algn="ctr">
+              <ns1:buNone/>
+              <ns1:defRPr sz="1725" b="1">
+                <ns1:solidFill>
+                  <ns1:srgbClr val="BC2026"/>
+                </ns1:solidFill>
+                <ns1:latin typeface="Microsoft YaHei"/>
+                <ns1:ea typeface="Microsoft YaHei"/>
+                <ns1:cs typeface="Microsoft YaHei"/>
+              </ns1:defRPr>
+            </ns1:pPr>
+            <ns1:r>
+              <ns1:rPr sz="1725" b="1">
+                <ns1:solidFill>
+                  <ns1:srgbClr val="BC2026"/>
+                </ns1:solidFill>
+                <ns1:latin typeface="Microsoft YaHei"/>
+                <ns1:ea typeface="Microsoft YaHei"/>
+                <ns1:cs typeface="Microsoft YaHei"/>
+              </ns1:rPr>
+              <ns1:t>统一算子与加速接口</ns1:t>
+            </ns1:r>
+          </ns1:p>
+        </ns0:txBody>
+      </ns0:sp>
+      <ns0:sp>
+        <ns0:nvSpPr>
+          <ns0:cNvPr id="40" name="">
+            <ns1:extLst>
+              <ns1:ext uri="{FF2B5EF4-FFF2-40B4-BE49-F238E27FC236}">
+                <ns2:creationId id="{92FA8C8F-BCDA-41C1-A927-7647DB9736F6}"/>
+              </ns1:ext>
+            </ns1:extLst>
+          </ns0:cNvPr>
+          <ns0:cNvSpPr>
+            <ns1:spLocks noGrp="1"/>
+          </ns0:cNvSpPr>
+          <ns0:nvPr/>
+        </ns0:nvSpPr>
+        <ns0:spPr>
+          <ns1:xfrm>
+            <ns1:off x="381000" y="5238750"/>
+            <ns1:ext cx="5295900" cy="352425"/>
+          </ns1:xfrm>
+          <ns1:prstGeom prst="rect">
+            <ns1:avLst/>
+          </ns1:prstGeom>
+          <ns1:noFill/>
+          <ns1:ln w="0">
+            <ns1:noFill/>
+          </ns1:ln>
+        </ns0:spPr>
+        <ns0:txBody>
+          <ns1:bodyPr lIns="0" tIns="0" rIns="0" bIns="0" anchor="ctr"/>
+          <ns1:lstStyle>
+            <ns1:defPPr algn="ctr">
+              <ns1:defRPr sz="1275" b="0">
+                <ns1:solidFill>
+                  <ns1:srgbClr val="262626"/>
+                </ns1:solidFill>
+                <ns1:latin typeface="Microsoft YaHei"/>
+                <ns1:ea typeface="Microsoft YaHei"/>
+                <ns1:cs typeface="Microsoft YaHei"/>
+              </ns1:defRPr>
+            </ns1:defPPr>
+          </ns1:lstStyle>
+          <ns1:p>
+            <ns1:pPr algn="ctr">
+              <ns1:buNone/>
+              <ns1:defRPr sz="1275" b="0">
+                <ns1:solidFill>
+                  <ns1:srgbClr val="262626"/>
+                </ns1:solidFill>
+                <ns1:latin typeface="Microsoft YaHei"/>
+                <ns1:ea typeface="Microsoft YaHei"/>
+                <ns1:cs typeface="Microsoft YaHei"/>
+              </ns1:defRPr>
+            </ns1:pPr>
+            <ns1:r>
+              <ns1:rPr sz="1275" b="0">
+                <ns1:solidFill>
+                  <ns1:srgbClr val="262626"/>
+                </ns1:solidFill>
+                <ns1:latin typeface="Microsoft YaHei"/>
+                <ns1:ea typeface="Microsoft YaHei"/>
+                <ns1:cs typeface="Microsoft YaHei"/>
+              </ns1:rPr>
+              <ns1:t>注意力 / 扩散计算 · 目标检测 / 点云 / 稀疏计算</ns1:t>
+            </ns1:r>
+          </ns1:p>
+          <ns1:p>
+            <ns1:pPr algn="ctr">
+              <ns1:buNone/>
+              <ns1:defRPr sz="1275" b="0">
+                <ns1:solidFill>
+                  <ns1:srgbClr val="262626"/>
+                </ns1:solidFill>
+                <ns1:latin typeface="Microsoft YaHei"/>
+                <ns1:ea typeface="Microsoft YaHei"/>
+                <ns1:cs typeface="Microsoft YaHei"/>
+              </ns1:defRPr>
+            </ns1:pPr>
+            <ns1:r>
+              <ns1:rPr sz="1275" b="0">
+                <ns1:solidFill>
+                  <ns1:srgbClr val="262626"/>
+                </ns1:solidFill>
+                <ns1:latin typeface="Microsoft YaHei"/>
+                <ns1:ea typeface="Microsoft YaHei"/>
+                <ns1:cs typeface="Microsoft YaHei"/>
+              </ns1:rPr>
+              <ns1:t>Ascend C 算子库 · torch 自定义算子 / aclnn 接口</ns1:t>
+            </ns1:r>
+          </ns1:p>
+        </ns0:txBody>
+      </ns0:sp>
+      <ns0:sp>
+        <ns0:nvSpPr>
+          <ns0:cNvPr id="41" name="">
+            <ns1:extLst>
+              <ns1:ext uri="{FF2B5EF4-FFF2-40B4-BE49-F238E27FC236}">
+                <ns2:creationId id="{D6B1F73A-DA96-401F-9532-876215202F00}"/>
+              </ns1:ext>
+            </ns1:extLst>
+          </ns0:cNvPr>
+          <ns0:cNvSpPr>
+            <ns1:spLocks noGrp="1"/>
+          </ns0:cNvSpPr>
+          <ns0:nvPr/>
+        </ns0:nvSpPr>
+        <ns0:spPr>
+          <ns1:xfrm>
+            <ns1:off x="266700" y="5791200"/>
+            <ns1:ext cx="5524500" cy="685800"/>
+          </ns1:xfrm>
+          <ns1:prstGeom prst="rect">
+            <ns1:avLst/>
+          </ns1:prstGeom>
+          <ns1:solidFill>
+            <ns1:srgbClr val="E0EFD4"/>
+          </ns1:solidFill>
+          <ns1:ln w="11430">
+            <ns1:solidFill>
+              <ns1:srgbClr val="B15A20"/>
+            </ns1:solidFill>
+            <ns1:prstDash val="dash"/>
+          </ns1:ln>
+        </ns0:spPr>
+      </ns0:sp>
+      <ns0:sp>
+        <ns0:nvSpPr>
+          <ns0:cNvPr id="71" name="半完成状态：对角黄色区域">
+            <ns1:extLst>
+              <ns1:ext uri="{FF2B5EF4-FFF2-40B4-BE49-F238E27FC236}">
+                <ns2:creationId id="{E259FB00-A3E6-4F9B-8388-434DD3582C86}"/>
+              </ns1:ext>
+            </ns1:extLst>
+          </ns0:cNvPr>
+          <ns0:cNvSpPr>
+            <ns1:spLocks noGrp="1"/>
+          </ns0:cNvSpPr>
+          <ns0:nvPr/>
+        </ns0:nvSpPr>
+        <ns0:spPr>
+          <ns1:xfrm>
+            <ns1:off x="266700" y="5791200"/>
+            <ns1:ext cx="5524500" cy="685800"/>
+          </ns1:xfrm>
+          <ns1:custGeom>
+            <ns1:rect l="0" t="0" r="r" b="b"/>
+            <ns1:pathLst>
+              <ns1:path w="100000" h="100000">
+                <ns1:moveTo>
+                  <ns1:pt x="0" y="0"/>
+                </ns1:moveTo>
+                <ns1:lnTo>
+                  <ns1:pt x="100000" y="100000"/>
+                </ns1:lnTo>
+                <ns1:lnTo>
+                  <ns1:pt x="0" y="100000"/>
+                </ns1:lnTo>
+                <ns1:close/>
+              </ns1:path>
+            </ns1:pathLst>
+          </ns1:custGeom>
+          <ns1:solidFill>
+            <ns1:srgbClr val="FFF1CD"/>
+          </ns1:solidFill>
+          <ns1:ln>
+            <ns1:noFill/>
+          </ns1:ln>
+        </ns0:spPr>
+      </ns0:sp>
+      <ns0:sp>
+        <ns0:nvSpPr>
+          <ns0:cNvPr id="42" name="">
+            <ns1:extLst>
+              <ns1:ext uri="{FF2B5EF4-FFF2-40B4-BE49-F238E27FC236}">
+                <ns2:creationId id="{2C3F7CFD-3CB9-45C7-8958-1A68F55528C6}"/>
+              </ns1:ext>
+            </ns1:extLst>
+          </ns0:cNvPr>
+          <ns0:cNvSpPr>
+            <ns1:spLocks noGrp="1"/>
+          </ns0:cNvSpPr>
+          <ns0:nvPr/>
+        </ns0:nvSpPr>
+        <ns0:spPr>
+          <ns1:xfrm>
+            <ns1:off x="381000" y="5819775"/>
+            <ns1:ext cx="5295900" cy="257175"/>
+          </ns1:xfrm>
+          <ns1:prstGeom prst="rect">
+            <ns1:avLst/>
+          </ns1:prstGeom>
+          <ns1:noFill/>
+          <ns1:ln w="0">
+            <ns1:noFill/>
+          </ns1:ln>
+        </ns0:spPr>
+        <ns0:txBody>
+          <ns1:bodyPr lIns="0" tIns="0" rIns="0" bIns="0" anchor="ctr"/>
+          <ns1:lstStyle>
+            <ns1:defPPr algn="ctr">
+              <ns1:defRPr sz="1725" b="1">
+                <ns1:solidFill>
+                  <ns1:srgbClr val="BC2026"/>
+                </ns1:solidFill>
+                <ns1:latin typeface="Microsoft YaHei"/>
+                <ns1:ea typeface="Microsoft YaHei"/>
+                <ns1:cs typeface="Microsoft YaHei"/>
+              </ns1:defRPr>
+            </ns1:defPPr>
+          </ns1:lstStyle>
+          <ns1:p>
+            <ns1:pPr algn="ctr">
+              <ns1:buNone/>
+              <ns1:defRPr sz="1725" b="1">
+                <ns1:solidFill>
+                  <ns1:srgbClr val="BC2026"/>
+                </ns1:solidFill>
+                <ns1:latin typeface="Microsoft YaHei"/>
+                <ns1:ea typeface="Microsoft YaHei"/>
+                <ns1:cs typeface="Microsoft YaHei"/>
+              </ns1:defRPr>
+            </ns1:pPr>
+            <ns1:r>
+              <ns1:rPr sz="1725" b="1">
+                <ns1:solidFill>
+                  <ns1:srgbClr val="BC2026"/>
+                </ns1:solidFill>
+                <ns1:latin typeface="Microsoft YaHei"/>
+                <ns1:ea typeface="Microsoft YaHei"/>
+                <ns1:cs typeface="Microsoft YaHei"/>
+              </ns1:rPr>
+              <ns1:t>算子开发与工程使能</ns1:t>
+            </ns1:r>
+          </ns1:p>
+        </ns0:txBody>
+      </ns0:sp>
+      <ns0:sp>
+        <ns0:nvSpPr>
+          <ns0:cNvPr id="43" name="">
+            <ns1:extLst>
+              <ns1:ext uri="{FF2B5EF4-FFF2-40B4-BE49-F238E27FC236}">
+                <ns2:creationId id="{9F56A4E7-F473-4C83-88CC-23DC73D062B6}"/>
+              </ns1:ext>
+            </ns1:extLst>
+          </ns0:cNvPr>
+          <ns0:cNvSpPr>
+            <ns1:spLocks noGrp="1"/>
+          </ns0:cNvSpPr>
+          <ns0:nvPr/>
+        </ns0:nvSpPr>
+        <ns0:spPr>
+          <ns1:xfrm>
+            <ns1:off x="381000" y="6124575"/>
+            <ns1:ext cx="5295900" cy="257175"/>
+          </ns1:xfrm>
+          <ns1:prstGeom prst="rect">
+            <ns1:avLst/>
+          </ns1:prstGeom>
+          <ns1:noFill/>
+          <ns1:ln w="0">
+            <ns1:noFill/>
+          </ns1:ln>
+        </ns0:spPr>
+        <ns0:txBody>
+          <ns1:bodyPr lIns="0" tIns="0" rIns="0" bIns="0" anchor="ctr"/>
+          <ns1:lstStyle>
+            <ns1:defPPr algn="ctr">
+              <ns1:defRPr sz="1350" b="0">
+                <ns1:solidFill>
+                  <ns1:srgbClr val="262626"/>
+                </ns1:solidFill>
+                <ns1:latin typeface="Microsoft YaHei"/>
+                <ns1:ea typeface="Microsoft YaHei"/>
+                <ns1:cs typeface="Microsoft YaHei"/>
+              </ns1:defRPr>
+            </ns1:defPPr>
+          </ns1:lstStyle>
+          <ns1:p>
+            <ns1:pPr algn="ctr">
+              <ns1:buNone/>
+              <ns1:defRPr sz="1350" b="0">
+                <ns1:solidFill>
+                  <ns1:srgbClr val="262626"/>
+                </ns1:solidFill>
+                <ns1:latin typeface="Microsoft YaHei"/>
+                <ns1:ea typeface="Microsoft YaHei"/>
+                <ns1:cs typeface="Microsoft YaHei"/>
+              </ns1:defRPr>
+            </ns1:pPr>
+            <ns1:r>
+              <ns1:rPr sz="1350" b="0">
+                <ns1:solidFill>
+                  <ns1:srgbClr val="262626"/>
+                </ns1:solidFill>
+                <ns1:latin typeface="Microsoft YaHei"/>
+                <ns1:ea typeface="Microsoft YaHei"/>
+                <ns1:cs typeface="Microsoft YaHei"/>
+              </ns1:rPr>
+              <ns1:t>参考实现 · 性能剖析 · 精度定位 · 调优 Skills</ns1:t>
+            </ns1:r>
+          </ns1:p>
+        </ns0:txBody>
+      </ns0:sp>
+      <ns0:sp>
+        <ns0:nvSpPr>
+          <ns0:cNvPr id="44" name="">
+            <ns1:extLst>
+              <ns1:ext uri="{FF2B5EF4-FFF2-40B4-BE49-F238E27FC236}">
+                <ns2:creationId id="{0BE14E79-B7EE-4168-B68C-F4CD68F81C71}"/>
+              </ns1:ext>
+            </ns1:extLst>
+          </ns0:cNvPr>
+          <ns0:cNvSpPr>
+            <ns1:spLocks noGrp="1"/>
+          </ns0:cNvSpPr>
+          <ns0:nvPr/>
+        </ns0:nvSpPr>
+        <ns0:spPr>
+          <ns1:xfrm>
+            <ns1:off x="6334125" y="981075"/>
+            <ns1:ext cx="5429250" cy="361950"/>
+          </ns1:xfrm>
+          <ns1:prstGeom prst="rect">
+            <ns1:avLst/>
+          </ns1:prstGeom>
+          <ns1:noFill/>
+          <ns1:ln w="0">
+            <ns1:noFill/>
+          </ns1:ln>
+        </ns0:spPr>
+        <ns0:txBody>
+          <ns1:bodyPr lIns="0" tIns="0" rIns="0" bIns="0" anchor="ctr"/>
+          <ns1:lstStyle>
+            <ns1:defPPr algn="l">
+              <ns1:defRPr sz="2250" b="1">
+                <ns1:solidFill>
+                  <ns1:srgbClr val="BC2026"/>
+                </ns1:solidFill>
+                <ns1:latin typeface="Microsoft YaHei"/>
+                <ns1:ea typeface="Microsoft YaHei"/>
+                <ns1:cs typeface="Microsoft YaHei"/>
+              </ns1:defRPr>
+            </ns1:defPPr>
+          </ns1:lstStyle>
+          <ns1:p>
+            <ns1:pPr algn="l">
+              <ns1:buNone/>
+              <ns1:defRPr sz="2250" b="1">
+                <ns1:solidFill>
+                  <ns1:srgbClr val="BC2026"/>
+                </ns1:solidFill>
+                <ns1:latin typeface="Microsoft YaHei"/>
+                <ns1:ea typeface="Microsoft YaHei"/>
+                <ns1:cs typeface="Microsoft YaHei"/>
+              </ns1:defRPr>
+            </ns1:pPr>
+            <ns1:r>
+              <ns1:rPr sz="2250" b="1">
+                <ns1:solidFill>
+                  <ns1:srgbClr val="BC2026"/>
+                </ns1:solidFill>
+                <ns1:latin typeface="Microsoft YaHei"/>
+                <ns1:ea typeface="Microsoft YaHei"/>
+                <ns1:cs typeface="Microsoft YaHei"/>
+              </ns1:rPr>
+              <ns1:t>关键竞争力</ns1:t>
+            </ns1:r>
+          </ns1:p>
+        </ns0:txBody>
+      </ns0:sp>
+      <ns0:sp>
+        <ns0:nvSpPr>
+          <ns0:cNvPr id="45" name="">
+            <ns1:extLst>
+              <ns1:ext uri="{FF2B5EF4-FFF2-40B4-BE49-F238E27FC236}">
+                <ns2:creationId id="{DFFB74D3-CF56-45AC-BB07-C55F4397CD5E}"/>
+              </ns1:ext>
+            </ns1:extLst>
+          </ns0:cNvPr>
+          <ns0:cNvSpPr>
+            <ns1:spLocks noGrp="1"/>
+          </ns0:cNvSpPr>
+          <ns0:nvPr/>
+        </ns0:nvSpPr>
+        <ns0:spPr>
+          <ns1:xfrm>
+            <ns1:off x="6334125" y="1438275"/>
+            <ns1:ext cx="5429250" cy="276225"/>
+          </ns1:xfrm>
+          <ns1:prstGeom prst="rect">
+            <ns1:avLst/>
+          </ns1:prstGeom>
+          <ns1:noFill/>
+          <ns1:ln w="0">
+            <ns1:noFill/>
+          </ns1:ln>
+        </ns0:spPr>
+        <ns0:txBody>
+          <ns1:bodyPr lIns="0" tIns="0" rIns="0" bIns="0" anchor="ctr"/>
+          <ns1:lstStyle>
+            <ns1:defPPr algn="l">
+              <ns1:defRPr sz="1875" b="1">
+                <ns1:solidFill>
+                  <ns1:srgbClr val="BC2026"/>
+                </ns1:solidFill>
+                <ns1:latin typeface="Microsoft YaHei"/>
+                <ns1:ea typeface="Microsoft YaHei"/>
+                <ns1:cs typeface="Microsoft YaHei"/>
+              </ns1:defRPr>
+            </ns1:defPPr>
+          </ns1:lstStyle>
+          <ns1:p>
+            <ns1:pPr algn="l">
+              <ns1:buNone/>
+              <ns1:defRPr sz="1875" b="1">
+                <ns1:solidFill>
+                  <ns1:srgbClr val="BC2026"/>
+                </ns1:solidFill>
+                <ns1:latin typeface="Microsoft YaHei"/>
+                <ns1:ea typeface="Microsoft YaHei"/>
+                <ns1:cs typeface="Microsoft YaHei"/>
+              </ns1:defRPr>
+            </ns1:pPr>
+            <ns1:r>
+              <ns1:rPr sz="1875" b="1">
+                <ns1:solidFill>
+                  <ns1:srgbClr val="BC2026"/>
+                </ns1:solidFill>
+                <ns1:latin typeface="Microsoft YaHei"/>
+                <ns1:ea typeface="Microsoft YaHei"/>
+                <ns1:cs typeface="Microsoft YaHei"/>
+              </ns1:rPr>
+              <ns1:t>模型适配与性能优化</ns1:t>
+            </ns1:r>
+          </ns1:p>
+        </ns0:txBody>
+      </ns0:sp>
+      <ns0:sp>
+        <ns0:nvSpPr>
+          <ns0:cNvPr id="46" name="">
+            <ns1:extLst>
+              <ns1:ext uri="{FF2B5EF4-FFF2-40B4-BE49-F238E27FC236}">
+                <ns2:creationId id="{BCD4CC9D-7847-4F79-B676-B5F40E2252B5}"/>
+              </ns1:ext>
+            </ns1:extLst>
+          </ns0:cNvPr>
+          <ns0:cNvSpPr>
+            <ns1:spLocks noGrp="1"/>
+          </ns0:cNvSpPr>
+          <ns0:nvPr/>
+        </ns0:nvSpPr>
+        <ns0:spPr>
+          <ns1:xfrm>
+            <ns1:off x="6334125" y="1724025"/>
+            <ns1:ext cx="5429250" cy="485775"/>
+          </ns1:xfrm>
+          <ns1:prstGeom prst="rect">
+            <ns1:avLst/>
+          </ns1:prstGeom>
+          <ns1:noFill/>
+          <ns1:ln w="0">
+            <ns1:noFill/>
+          </ns1:ln>
+        </ns0:spPr>
+        <ns0:txBody>
+          <ns1:bodyPr lIns="0" tIns="0" rIns="0" bIns="0" anchor="ctr"/>
+          <ns1:lstStyle>
+            <ns1:defPPr algn="l">
+              <ns1:defRPr sz="1650" b="0">
+                <ns1:solidFill>
+                  <ns1:srgbClr val="333333"/>
+                </ns1:solidFill>
+                <ns1:latin typeface="Microsoft YaHei"/>
+                <ns1:ea typeface="Microsoft YaHei"/>
+                <ns1:cs typeface="Microsoft YaHei"/>
+              </ns1:defRPr>
+            </ns1:defPPr>
+          </ns1:lstStyle>
+          <ns1:p>
+            <ns1:pPr algn="l">
+              <ns1:buNone/>
+              <ns1:defRPr sz="1650" b="0">
+                <ns1:solidFill>
+                  <ns1:srgbClr val="333333"/>
+                </ns1:solidFill>
+                <ns1:latin typeface="Microsoft YaHei"/>
+                <ns1:ea typeface="Microsoft YaHei"/>
+                <ns1:cs typeface="Microsoft YaHei"/>
+              </ns1:defRPr>
+            </ns1:pPr>
+            <ns1:r>
+              <ns1:rPr sz="1650" b="0">
+                <ns1:solidFill>
+                  <ns1:srgbClr val="333333"/>
+                </ns1:solidFill>
+                <ns1:latin typeface="Microsoft YaHei"/>
+                <ns1:ea typeface="Microsoft YaHei"/>
+                <ns1:cs typeface="Microsoft YaHei"/>
+              </ns1:rPr>
+              <ns1:t>覆盖主流具身与无人车模型，</ns1:t>
+            </ns1:r>
+          </ns1:p>
+          <ns1:p>
+            <ns1:pPr algn="l">
+              <ns1:buNone/>
+              <ns1:defRPr sz="1650" b="0">
+                <ns1:solidFill>
+                  <ns1:srgbClr val="333333"/>
+                </ns1:solidFill>
+                <ns1:latin typeface="Microsoft YaHei"/>
+                <ns1:ea typeface="Microsoft YaHei"/>
+                <ns1:cs typeface="Microsoft YaHei"/>
+              </ns1:defRPr>
+            </ns1:pPr>
+            <ns1:r>
+              <ns1:rPr sz="1650" b="0">
+                <ns1:solidFill>
+                  <ns1:srgbClr val="333333"/>
+                </ns1:solidFill>
+                <ns1:latin typeface="Microsoft YaHei"/>
+                <ns1:ea typeface="Microsoft YaHei"/>
+                <ns1:cs typeface="Microsoft YaHei"/>
+              </ns1:rPr>
+              <ns1:t>适配与调优 Agent 化，面向开箱即最优。</ns1:t>
+            </ns1:r>
+          </ns1:p>
+        </ns0:txBody>
+      </ns0:sp>
+      <ns0:sp>
+        <ns0:nvSpPr>
+          <ns0:cNvPr id="47" name="">
+            <ns1:extLst>
+              <ns1:ext uri="{FF2B5EF4-FFF2-40B4-BE49-F238E27FC236}">
+                <ns2:creationId id="{37B0A34D-D2D5-438A-8B6E-D64FF908603E}"/>
+              </ns1:ext>
+            </ns1:extLst>
+          </ns0:cNvPr>
+          <ns0:cNvSpPr>
+            <ns1:spLocks noGrp="1"/>
+          </ns0:cNvSpPr>
+          <ns0:nvPr/>
+        </ns0:nvSpPr>
+        <ns0:spPr>
+          <ns1:xfrm>
+            <ns1:off x="6334125" y="2228850"/>
+            <ns1:ext cx="5429250" cy="276225"/>
+          </ns1:xfrm>
+          <ns1:prstGeom prst="rect">
+            <ns1:avLst/>
+          </ns1:prstGeom>
+          <ns1:noFill/>
+          <ns1:ln w="0">
+            <ns1:noFill/>
+          </ns1:ln>
+        </ns0:spPr>
+        <ns0:txBody>
+          <ns1:bodyPr lIns="0" tIns="0" rIns="0" bIns="0" anchor="ctr"/>
+          <ns1:lstStyle>
+            <ns1:defPPr algn="l">
+              <ns1:defRPr sz="1875" b="1">
+                <ns1:solidFill>
+                  <ns1:srgbClr val="BC2026"/>
+                </ns1:solidFill>
+                <ns1:latin typeface="Microsoft YaHei"/>
+                <ns1:ea typeface="Microsoft YaHei"/>
+                <ns1:cs typeface="Microsoft YaHei"/>
+              </ns1:defRPr>
+            </ns1:defPPr>
+          </ns1:lstStyle>
+          <ns1:p>
+            <ns1:pPr algn="l">
+              <ns1:buNone/>
+              <ns1:defRPr sz="1875" b="1">
+                <ns1:solidFill>
+                  <ns1:srgbClr val="BC2026"/>
+                </ns1:solidFill>
+                <ns1:latin typeface="Microsoft YaHei"/>
+                <ns1:ea typeface="Microsoft YaHei"/>
+                <ns1:cs typeface="Microsoft YaHei"/>
+              </ns1:defRPr>
+            </ns1:pPr>
+            <ns1:r>
+              <ns1:rPr sz="1875" b="1">
+                <ns1:solidFill>
+                  <ns1:srgbClr val="BC2026"/>
+                </ns1:solidFill>
+                <ns1:latin typeface="Microsoft YaHei"/>
+                <ns1:ea typeface="Microsoft YaHei"/>
+                <ns1:cs typeface="Microsoft YaHei"/>
+              </ns1:rPr>
+              <ns1:t>低时延感知决策闭环</ns1:t>
+            </ns1:r>
+          </ns1:p>
+        </ns0:txBody>
+      </ns0:sp>
+      <ns0:sp>
+        <ns0:nvSpPr>
+          <ns0:cNvPr id="48" name="">
+            <ns1:extLst>
+              <ns1:ext uri="{FF2B5EF4-FFF2-40B4-BE49-F238E27FC236}">
+                <ns2:creationId id="{74A723F8-B510-4BBF-9C2A-9E60694D8AAF}"/>
+              </ns1:ext>
+            </ns1:extLst>
+          </ns0:cNvPr>
+          <ns0:cNvSpPr>
+            <ns1:spLocks noGrp="1"/>
+          </ns0:cNvSpPr>
+          <ns0:nvPr/>
+        </ns0:nvSpPr>
+        <ns0:spPr>
+          <ns1:xfrm>
+            <ns1:off x="6334125" y="2514600"/>
+            <ns1:ext cx="5429250" cy="485775"/>
+          </ns1:xfrm>
+          <ns1:prstGeom prst="rect">
+            <ns1:avLst/>
+          </ns1:prstGeom>
+          <ns1:noFill/>
+          <ns1:ln w="0">
+            <ns1:noFill/>
+          </ns1:ln>
+        </ns0:spPr>
+        <ns0:txBody>
+          <ns1:bodyPr lIns="0" tIns="0" rIns="0" bIns="0" anchor="ctr"/>
+          <ns1:lstStyle>
+            <ns1:defPPr algn="l">
+              <ns1:defRPr sz="1650" b="0">
+                <ns1:solidFill>
+                  <ns1:srgbClr val="333333"/>
+                </ns1:solidFill>
+                <ns1:latin typeface="Microsoft YaHei"/>
+                <ns1:ea typeface="Microsoft YaHei"/>
+                <ns1:cs typeface="Microsoft YaHei"/>
+              </ns1:defRPr>
+            </ns1:defPPr>
+          </ns1:lstStyle>
+          <ns1:p>
+            <ns1:pPr algn="l">
+              <ns1:buNone/>
+              <ns1:defRPr sz="1650" b="0">
+                <ns1:solidFill>
+                  <ns1:srgbClr val="333333"/>
+                </ns1:solidFill>
+                <ns1:latin typeface="Microsoft YaHei"/>
+                <ns1:ea typeface="Microsoft YaHei"/>
+                <ns1:cs typeface="Microsoft YaHei"/>
+              </ns1:defRPr>
+            </ns1:pPr>
+            <ns1:r>
+              <ns1:rPr sz="1650" b="0">
+                <ns1:solidFill>
+                  <ns1:srgbClr val="333333"/>
+                </ns1:solidFill>
+                <ns1:latin typeface="Microsoft YaHei"/>
+                <ns1:ea typeface="Microsoft YaHei"/>
+                <ns1:cs typeface="Microsoft YaHei"/>
+              </ns1:rPr>
+              <ns1:t>统一具身与自动驾驶推理算子库，</ns1:t>
+            </ns1:r>
+          </ns1:p>
+          <ns1:p>
+            <ns1:pPr algn="l">
+              <ns1:buNone/>
+              <ns1:defRPr sz="1650" b="0">
+                <ns1:solidFill>
+                  <ns1:srgbClr val="333333"/>
+                </ns1:solidFill>
+                <ns1:latin typeface="Microsoft YaHei"/>
+                <ns1:ea typeface="Microsoft YaHei"/>
+                <ns1:cs typeface="Microsoft YaHei"/>
+              </ns1:defRPr>
+            </ns1:pPr>
+            <ns1:r>
+              <ns1:rPr sz="1650" b="0">
+                <ns1:solidFill>
+                  <ns1:srgbClr val="333333"/>
+                </ns1:solidFill>
+                <ns1:latin typeface="Microsoft YaHei"/>
+                <ns1:ea typeface="Microsoft YaHei"/>
+                <ns1:cs typeface="Microsoft YaHei"/>
+              </ns1:rPr>
+              <ns1:t>加速端侧感知、决策与动作生成。</ns1:t>
+            </ns1:r>
+          </ns1:p>
+        </ns0:txBody>
+      </ns0:sp>
+      <ns0:sp>
+        <ns0:nvSpPr>
+          <ns0:cNvPr id="49" name="">
+            <ns1:extLst>
+              <ns1:ext uri="{FF2B5EF4-FFF2-40B4-BE49-F238E27FC236}">
+                <ns2:creationId id="{93B4D1AD-51EC-448C-8D18-F93D3A6A48C7}"/>
+              </ns1:ext>
+            </ns1:extLst>
+          </ns0:cNvPr>
+          <ns0:cNvSpPr>
+            <ns1:spLocks noGrp="1"/>
+          </ns0:cNvSpPr>
+          <ns0:nvPr/>
+        </ns0:nvSpPr>
+        <ns0:spPr>
+          <ns1:xfrm>
+            <ns1:off x="6334125" y="3019425"/>
+            <ns1:ext cx="5429250" cy="276225"/>
+          </ns1:xfrm>
+          <ns1:prstGeom prst="rect">
+            <ns1:avLst/>
+          </ns1:prstGeom>
+          <ns1:noFill/>
+          <ns1:ln w="0">
+            <ns1:noFill/>
+          </ns1:ln>
+        </ns0:spPr>
+        <ns0:txBody>
+          <ns1:bodyPr lIns="0" tIns="0" rIns="0" bIns="0" anchor="ctr"/>
+          <ns1:lstStyle>
+            <ns1:defPPr algn="l">
+              <ns1:defRPr sz="1875" b="1">
+                <ns1:solidFill>
+                  <ns1:srgbClr val="BC2026"/>
+                </ns1:solidFill>
+                <ns1:latin typeface="Microsoft YaHei"/>
+                <ns1:ea typeface="Microsoft YaHei"/>
+                <ns1:cs typeface="Microsoft YaHei"/>
+              </ns1:defRPr>
+            </ns1:defPPr>
+          </ns1:lstStyle>
+          <ns1:p>
+            <ns1:pPr algn="l">
+              <ns1:buNone/>
+              <ns1:defRPr sz="1875" b="1">
+                <ns1:solidFill>
+                  <ns1:srgbClr val="BC2026"/>
+                </ns1:solidFill>
+                <ns1:latin typeface="Microsoft YaHei"/>
+                <ns1:ea typeface="Microsoft YaHei"/>
+                <ns1:cs typeface="Microsoft YaHei"/>
+              </ns1:defRPr>
+            </ns1:pPr>
+            <ns1:r>
+              <ns1:rPr sz="1875" b="1">
+                <ns1:solidFill>
+                  <ns1:srgbClr val="BC2026"/>
+                </ns1:solidFill>
+                <ns1:latin typeface="Microsoft YaHei"/>
+                <ns1:ea typeface="Microsoft YaHei"/>
+                <ns1:cs typeface="Microsoft YaHei"/>
+              </ns1:rPr>
+              <ns1:t>易用性与伙伴自主迁移</ns1:t>
+            </ns1:r>
+          </ns1:p>
+        </ns0:txBody>
+      </ns0:sp>
+      <ns0:sp>
+        <ns0:nvSpPr>
+          <ns0:cNvPr id="50" name="">
+            <ns1:extLst>
+              <ns1:ext uri="{FF2B5EF4-FFF2-40B4-BE49-F238E27FC236}">
+                <ns2:creationId id="{8198AC9C-0540-4EDF-A353-D0301D25D2E4}"/>
+              </ns1:ext>
+            </ns1:extLst>
+          </ns0:cNvPr>
+          <ns0:cNvSpPr>
+            <ns1:spLocks noGrp="1"/>
+          </ns0:cNvSpPr>
+          <ns0:nvPr/>
+        </ns0:nvSpPr>
+        <ns0:spPr>
+          <ns1:xfrm>
+            <ns1:off x="6334125" y="3305175"/>
+            <ns1:ext cx="5429250" cy="485775"/>
+          </ns1:xfrm>
+          <ns1:prstGeom prst="rect">
+            <ns1:avLst/>
+          </ns1:prstGeom>
+          <ns1:noFill/>
+          <ns1:ln w="0">
+            <ns1:noFill/>
+          </ns1:ln>
+        </ns0:spPr>
+        <ns0:txBody>
+          <ns1:bodyPr lIns="0" tIns="0" rIns="0" bIns="0" anchor="ctr"/>
+          <ns1:lstStyle>
+            <ns1:defPPr algn="l">
+              <ns1:defRPr sz="1650" b="0">
+                <ns1:solidFill>
+                  <ns1:srgbClr val="333333"/>
+                </ns1:solidFill>
+                <ns1:latin typeface="Microsoft YaHei"/>
+                <ns1:ea typeface="Microsoft YaHei"/>
+                <ns1:cs typeface="Microsoft YaHei"/>
+              </ns1:defRPr>
+            </ns1:defPPr>
+          </ns1:lstStyle>
+          <ns1:p>
+            <ns1:pPr algn="l">
+              <ns1:buNone/>
+              <ns1:defRPr sz="1650" b="0">
+                <ns1:solidFill>
+                  <ns1:srgbClr val="333333"/>
+                </ns1:solidFill>
+                <ns1:latin typeface="Microsoft YaHei"/>
+                <ns1:ea typeface="Microsoft YaHei"/>
+                <ns1:cs typeface="Microsoft YaHei"/>
+              </ns1:defRPr>
+            </ns1:pPr>
+            <ns1:r>
+              <ns1:rPr sz="1650" b="0">
+                <ns1:solidFill>
+                  <ns1:srgbClr val="333333"/>
+                </ns1:solidFill>
+                <ns1:latin typeface="Microsoft YaHei"/>
+                <ns1:ea typeface="Microsoft YaHei"/>
+                <ns1:cs typeface="Microsoft YaHei"/>
+              </ns1:rPr>
+              <ns1:t>提供标准流程、Skills 与最佳实践，</ns1:t>
+            </ns1:r>
+          </ns1:p>
+          <ns1:p>
+            <ns1:pPr algn="l">
+              <ns1:buNone/>
+              <ns1:defRPr sz="1650" b="0">
+                <ns1:solidFill>
+                  <ns1:srgbClr val="333333"/>
+                </ns1:solidFill>
+                <ns1:latin typeface="Microsoft YaHei"/>
+                <ns1:ea typeface="Microsoft YaHei"/>
+                <ns1:cs typeface="Microsoft YaHei"/>
+              </ns1:defRPr>
+            </ns1:pPr>
+            <ns1:r>
+              <ns1:rPr sz="1650" b="0">
+                <ns1:solidFill>
+                  <ns1:srgbClr val="333333"/>
+                </ns1:solidFill>
+                <ns1:latin typeface="Microsoft YaHei"/>
+                <ns1:ea typeface="Microsoft YaHei"/>
+                <ns1:cs typeface="Microsoft YaHei"/>
+              </ns1:rPr>
+              <ns1:t>支持伙伴自主高效迁移新模型。</ns1:t>
+            </ns1:r>
+          </ns1:p>
+        </ns0:txBody>
+      </ns0:sp>
+      <ns0:sp>
+        <ns0:nvSpPr>
+          <ns0:cNvPr id="51" name="">
+            <ns1:extLst>
+              <ns1:ext uri="{FF2B5EF4-FFF2-40B4-BE49-F238E27FC236}">
+                <ns2:creationId id="{7073F4B2-5885-453D-8BD8-CA09D5D8070C}"/>
+              </ns1:ext>
+            </ns1:extLst>
+          </ns0:cNvPr>
+          <ns0:cNvSpPr>
+            <ns1:spLocks noGrp="1"/>
+          </ns0:cNvSpPr>
+          <ns0:nvPr/>
+        </ns0:nvSpPr>
+        <ns0:spPr>
+          <ns1:xfrm>
+            <ns1:off x="6334125" y="3981450"/>
+            <ns1:ext cx="5429250" cy="361950"/>
+          </ns1:xfrm>
+          <ns1:prstGeom prst="rect">
+            <ns1:avLst/>
+          </ns1:prstGeom>
+          <ns1:noFill/>
+          <ns1:ln w="0">
+            <ns1:noFill/>
+          </ns1:ln>
+        </ns0:spPr>
+        <ns0:txBody>
+          <ns1:bodyPr lIns="0" tIns="0" rIns="0" bIns="0" anchor="ctr"/>
+          <ns1:lstStyle>
+            <ns1:defPPr algn="l">
+              <ns1:defRPr sz="2250" b="1">
+                <ns1:solidFill>
+                  <ns1:srgbClr val="BC2026"/>
+                </ns1:solidFill>
+                <ns1:latin typeface="Microsoft YaHei"/>
+                <ns1:ea typeface="Microsoft YaHei"/>
+                <ns1:cs typeface="Microsoft YaHei"/>
+              </ns1:defRPr>
+            </ns1:defPPr>
+          </ns1:lstStyle>
+          <ns1:p>
+            <ns1:pPr algn="l">
+              <ns1:buNone/>
+              <ns1:defRPr sz="2250" b="1">
+                <ns1:solidFill>
+                  <ns1:srgbClr val="BC2026"/>
+                </ns1:solidFill>
+                <ns1:latin typeface="Microsoft YaHei"/>
+                <ns1:ea typeface="Microsoft YaHei"/>
+                <ns1:cs typeface="Microsoft YaHei"/>
+              </ns1:defRPr>
+            </ns1:pPr>
+            <ns1:r>
+              <ns1:rPr sz="2250" b="1">
+                <ns1:solidFill>
+                  <ns1:srgbClr val="BC2026"/>
+                </ns1:solidFill>
+                <ns1:latin typeface="Microsoft YaHei"/>
+                <ns1:ea typeface="Microsoft YaHei"/>
+                <ns1:cs typeface="Microsoft YaHei"/>
+              </ns1:rPr>
+              <ns1:t>实现策略</ns1:t>
+            </ns1:r>
+          </ns1:p>
+        </ns0:txBody>
+      </ns0:sp>
+      <ns0:sp>
+        <ns0:nvSpPr>
+          <ns0:cNvPr id="52" name="">
+            <ns1:extLst>
+              <ns1:ext uri="{FF2B5EF4-FFF2-40B4-BE49-F238E27FC236}">
+                <ns2:creationId id="{13CD2614-F58F-4DF5-9DF0-08F43B40F1D3}"/>
+              </ns1:ext>
+            </ns1:extLst>
+          </ns0:cNvPr>
+          <ns0:cNvSpPr>
+            <ns1:spLocks noGrp="1"/>
+          </ns0:cNvSpPr>
+          <ns0:nvPr/>
+        </ns0:nvSpPr>
+        <ns0:spPr>
+          <ns1:xfrm>
+            <ns1:off x="6334125" y="4419600"/>
+            <ns1:ext cx="5429250" cy="276225"/>
+          </ns1:xfrm>
+          <ns1:prstGeom prst="rect">
+            <ns1:avLst/>
+          </ns1:prstGeom>
+          <ns1:noFill/>
+          <ns1:ln w="0">
+            <ns1:noFill/>
+          </ns1:ln>
+        </ns0:spPr>
+        <ns0:txBody>
+          <ns1:bodyPr lIns="0" tIns="0" rIns="0" bIns="0" anchor="ctr"/>
+          <ns1:lstStyle>
+            <ns1:defPPr algn="l">
+              <ns1:defRPr sz="1800" b="1">
+                <ns1:solidFill>
+                  <ns1:srgbClr val="BC2026"/>
+                </ns1:solidFill>
+                <ns1:latin typeface="Microsoft YaHei"/>
+                <ns1:ea typeface="Microsoft YaHei"/>
+                <ns1:cs typeface="Microsoft YaHei"/>
+              </ns1:defRPr>
+            </ns1:defPPr>
+          </ns1:lstStyle>
+          <ns1:p>
+            <ns1:pPr algn="l">
+              <ns1:buNone/>
+              <ns1:defRPr sz="1800" b="1">
+                <ns1:solidFill>
+                  <ns1:srgbClr val="BC2026"/>
+                </ns1:solidFill>
+                <ns1:latin typeface="Microsoft YaHei"/>
+                <ns1:ea typeface="Microsoft YaHei"/>
+                <ns1:cs typeface="Microsoft YaHei"/>
+              </ns1:defRPr>
+            </ns1:pPr>
+            <ns1:r>
+              <ns1:rPr sz="1800" b="1">
+                <ns1:solidFill>
+                  <ns1:srgbClr val="BC2026"/>
+                </ns1:solidFill>
+                <ns1:latin typeface="Microsoft YaHei"/>
+                <ns1:ea typeface="Microsoft YaHei"/>
+                <ns1:cs typeface="Microsoft YaHei"/>
+              </ns1:rPr>
+              <ns1:t>构建统一推理加速库</ns1:t>
+            </ns1:r>
+          </ns1:p>
+        </ns0:txBody>
+      </ns0:sp>
+      <ns0:sp>
+        <ns0:nvSpPr>
+          <ns0:cNvPr id="53" name="">
+            <ns1:extLst>
+              <ns1:ext uri="{FF2B5EF4-FFF2-40B4-BE49-F238E27FC236}">
+                <ns2:creationId id="{00D86CD9-750C-4239-9E17-A6AF96648BBA}"/>
+              </ns1:ext>
+            </ns1:extLst>
+          </ns0:cNvPr>
+          <ns0:cNvSpPr>
+            <ns1:spLocks noGrp="1"/>
+          </ns0:cNvSpPr>
+          <ns0:nvPr/>
+        </ns0:nvSpPr>
+        <ns0:spPr>
+          <ns1:xfrm>
+            <ns1:off x="6334125" y="4695825"/>
+            <ns1:ext cx="5429250" cy="457200"/>
+          </ns1:xfrm>
+          <ns1:prstGeom prst="rect">
+            <ns1:avLst/>
+          </ns1:prstGeom>
+          <ns1:noFill/>
+          <ns1:ln w="0">
+            <ns1:noFill/>
+          </ns1:ln>
+        </ns0:spPr>
+        <ns0:txBody>
+          <ns1:bodyPr lIns="0" tIns="0" rIns="0" bIns="0" anchor="ctr"/>
+          <ns1:lstStyle>
+            <ns1:defPPr algn="l">
+              <ns1:defRPr sz="1575" b="0">
+                <ns1:solidFill>
+                  <ns1:srgbClr val="333333"/>
+                </ns1:solidFill>
+                <ns1:latin typeface="Microsoft YaHei"/>
+                <ns1:ea typeface="Microsoft YaHei"/>
+                <ns1:cs typeface="Microsoft YaHei"/>
+              </ns1:defRPr>
+            </ns1:defPPr>
+          </ns1:lstStyle>
+          <ns1:p>
+            <ns1:pPr algn="l">
+              <ns1:buNone/>
+              <ns1:defRPr sz="1575" b="0">
+                <ns1:solidFill>
+                  <ns1:srgbClr val="333333"/>
+                </ns1:solidFill>
+                <ns1:latin typeface="Microsoft YaHei"/>
+                <ns1:ea typeface="Microsoft YaHei"/>
+                <ns1:cs typeface="Microsoft YaHei"/>
+              </ns1:defRPr>
+            </ns1:pPr>
+            <ns1:r>
+              <ns1:rPr sz="1575" b="0">
+                <ns1:solidFill>
+                  <ns1:srgbClr val="333333"/>
+                </ns1:solidFill>
+                <ns1:latin typeface="Microsoft YaHei"/>
+                <ns1:ea typeface="Microsoft YaHei"/>
+                <ns1:cs typeface="Microsoft YaHei"/>
+              </ns1:rPr>
+              <ns1:t>归集 ModelZoo 中分散的模型与推理算子，</ns1:t>
+            </ns1:r>
+          </ns1:p>
+          <ns1:p>
+            <ns1:pPr algn="l">
+              <ns1:buNone/>
+              <ns1:defRPr sz="1575" b="0">
+                <ns1:solidFill>
+                  <ns1:srgbClr val="333333"/>
+                </ns1:solidFill>
+                <ns1:latin typeface="Microsoft YaHei"/>
+                <ns1:ea typeface="Microsoft YaHei"/>
+                <ns1:cs typeface="Microsoft YaHei"/>
+              </ns1:defRPr>
+            </ns1:pPr>
+            <ns1:r>
+              <ns1:rPr sz="1575" b="0">
+                <ns1:solidFill>
+                  <ns1:srgbClr val="333333"/>
+                </ns1:solidFill>
+                <ns1:latin typeface="Microsoft YaHei"/>
+                <ns1:ea typeface="Microsoft YaHei"/>
+                <ns1:cs typeface="Microsoft YaHei"/>
+              </ns1:rPr>
+              <ns1:t>建立统一代码仓、接口及版本管理。</ns1:t>
+            </ns1:r>
+          </ns1:p>
+        </ns0:txBody>
+      </ns0:sp>
+      <ns0:sp>
+        <ns0:nvSpPr>
+          <ns0:cNvPr id="54" name="">
+            <ns1:extLst>
+              <ns1:ext uri="{FF2B5EF4-FFF2-40B4-BE49-F238E27FC236}">
+                <ns2:creationId id="{8A97254F-3113-49FF-8363-DEDBB866EDD3}"/>
+              </ns1:ext>
+            </ns1:extLst>
+          </ns0:cNvPr>
+          <ns0:cNvSpPr>
+            <ns1:spLocks noGrp="1"/>
+          </ns0:cNvSpPr>
+          <ns0:nvPr/>
+        </ns0:nvSpPr>
+        <ns0:spPr>
+          <ns1:xfrm>
+            <ns1:off x="6334125" y="5153025"/>
+            <ns1:ext cx="5429250" cy="276225"/>
+          </ns1:xfrm>
+          <ns1:prstGeom prst="rect">
+            <ns1:avLst/>
+          </ns1:prstGeom>
+          <ns1:noFill/>
+          <ns1:ln w="0">
+            <ns1:noFill/>
+          </ns1:ln>
+        </ns0:spPr>
+        <ns0:txBody>
+          <ns1:bodyPr lIns="0" tIns="0" rIns="0" bIns="0" anchor="ctr"/>
+          <ns1:lstStyle>
+            <ns1:defPPr algn="l">
+              <ns1:defRPr sz="1800" b="1">
+                <ns1:solidFill>
+                  <ns1:srgbClr val="BC2026"/>
+                </ns1:solidFill>
+                <ns1:latin typeface="Microsoft YaHei"/>
+                <ns1:ea typeface="Microsoft YaHei"/>
+                <ns1:cs typeface="Microsoft YaHei"/>
+              </ns1:defRPr>
+            </ns1:defPPr>
+          </ns1:lstStyle>
+          <ns1:p>
+            <ns1:pPr algn="l">
+              <ns1:buNone/>
+              <ns1:defRPr sz="1800" b="1">
+                <ns1:solidFill>
+                  <ns1:srgbClr val="BC2026"/>
+                </ns1:solidFill>
+                <ns1:latin typeface="Microsoft YaHei"/>
+                <ns1:ea typeface="Microsoft YaHei"/>
+                <ns1:cs typeface="Microsoft YaHei"/>
+              </ns1:defRPr>
+            </ns1:pPr>
+            <ns1:r>
+              <ns1:rPr sz="1800" b="1">
+                <ns1:solidFill>
+                  <ns1:srgbClr val="BC2026"/>
+                </ns1:solidFill>
+                <ns1:latin typeface="Microsoft YaHei"/>
+                <ns1:ea typeface="Microsoft YaHei"/>
+                <ns1:cs typeface="Microsoft YaHei"/>
+              </ns1:rPr>
+              <ns1:t>构建可复用加速技术</ns1:t>
+            </ns1:r>
+          </ns1:p>
+        </ns0:txBody>
+      </ns0:sp>
+      <ns0:sp>
+        <ns0:nvSpPr>
+          <ns0:cNvPr id="55" name="">
+            <ns1:extLst>
+              <ns1:ext uri="{FF2B5EF4-FFF2-40B4-BE49-F238E27FC236}">
+                <ns2:creationId id="{0BF94A94-928C-448F-8BEE-B654798C0888}"/>
+              </ns1:ext>
+            </ns1:extLst>
+          </ns0:cNvPr>
+          <ns0:cNvSpPr>
+            <ns1:spLocks noGrp="1"/>
+          </ns0:cNvSpPr>
+          <ns0:nvPr/>
+        </ns0:nvSpPr>
+        <ns0:spPr>
+          <ns1:xfrm>
+            <ns1:off x="6334125" y="5429250"/>
+            <ns1:ext cx="5429250" cy="457200"/>
+          </ns1:xfrm>
+          <ns1:prstGeom prst="rect">
+            <ns1:avLst/>
+          </ns1:prstGeom>
+          <ns1:noFill/>
+          <ns1:ln w="0">
+            <ns1:noFill/>
+          </ns1:ln>
+        </ns0:spPr>
+        <ns0:txBody>
+          <ns1:bodyPr lIns="0" tIns="0" rIns="0" bIns="0" anchor="ctr"/>
+          <ns1:lstStyle>
+            <ns1:defPPr algn="l">
+              <ns1:defRPr sz="1575" b="0">
+                <ns1:solidFill>
+                  <ns1:srgbClr val="333333"/>
+                </ns1:solidFill>
+                <ns1:latin typeface="Microsoft YaHei"/>
+                <ns1:ea typeface="Microsoft YaHei"/>
+                <ns1:cs typeface="Microsoft YaHei"/>
+              </ns1:defRPr>
+            </ns1:defPPr>
+          </ns1:lstStyle>
+          <ns1:p>
+            <ns1:pPr algn="l">
+              <ns1:buNone/>
+              <ns1:defRPr sz="1575" b="0">
+                <ns1:solidFill>
+                  <ns1:srgbClr val="333333"/>
+                </ns1:solidFill>
+                <ns1:latin typeface="Microsoft YaHei"/>
+                <ns1:ea typeface="Microsoft YaHei"/>
+                <ns1:cs typeface="Microsoft YaHei"/>
+              </ns1:defRPr>
+            </ns1:pPr>
+            <ns1:r>
+              <ns1:rPr sz="1575" b="0">
+                <ns1:solidFill>
+                  <ns1:srgbClr val="333333"/>
+                </ns1:solidFill>
+                <ns1:latin typeface="Microsoft YaHei"/>
+                <ns1:ea typeface="Microsoft YaHei"/>
+                <ns1:cs typeface="Microsoft YaHei"/>
+              </ns1:rPr>
+              <ns1:t>调研具身推理框架，实测筛选加速技术，</ns1:t>
+            </ns1:r>
+          </ns1:p>
+          <ns1:p>
+            <ns1:pPr algn="l">
+              <ns1:buNone/>
+              <ns1:defRPr sz="1575" b="0">
+                <ns1:solidFill>
+                  <ns1:srgbClr val="333333"/>
+                </ns1:solidFill>
+                <ns1:latin typeface="Microsoft YaHei"/>
+                <ns1:ea typeface="Microsoft YaHei"/>
+                <ns1:cs typeface="Microsoft YaHei"/>
+              </ns1:defRPr>
+            </ns1:pPr>
+            <ns1:r>
+              <ns1:rPr sz="1575" b="0">
+                <ns1:solidFill>
+                  <ns1:srgbClr val="333333"/>
+                </ns1:solidFill>
+                <ns1:latin typeface="Microsoft YaHei"/>
+                <ns1:ea typeface="Microsoft YaHei"/>
+                <ns1:cs typeface="Microsoft YaHei"/>
+              </ns1:rPr>
+              <ns1:t>沉淀可复用的调度、缓存与融合组件。</ns1:t>
+            </ns1:r>
+          </ns1:p>
+        </ns0:txBody>
+      </ns0:sp>
+      <ns0:sp>
+        <ns0:nvSpPr>
+          <ns0:cNvPr id="56" name="">
+            <ns1:extLst>
+              <ns1:ext uri="{FF2B5EF4-FFF2-40B4-BE49-F238E27FC236}">
+                <ns2:creationId id="{5D7FBE55-411C-4598-85BA-AC4724E0171D}"/>
+              </ns1:ext>
+            </ns1:extLst>
+          </ns0:cNvPr>
+          <ns0:cNvSpPr>
+            <ns1:spLocks noGrp="1"/>
+          </ns0:cNvSpPr>
+          <ns0:nvPr/>
+        </ns0:nvSpPr>
+        <ns0:spPr>
+          <ns1:xfrm>
+            <ns1:off x="6334125" y="5886450"/>
+            <ns1:ext cx="5429250" cy="276225"/>
+          </ns1:xfrm>
+          <ns1:prstGeom prst="rect">
+            <ns1:avLst/>
+          </ns1:prstGeom>
+          <ns1:noFill/>
+          <ns1:ln w="0">
+            <ns1:noFill/>
+          </ns1:ln>
+        </ns0:spPr>
+        <ns0:txBody>
+          <ns1:bodyPr lIns="0" tIns="0" rIns="0" bIns="0" anchor="ctr"/>
+          <ns1:lstStyle>
+            <ns1:defPPr algn="l">
+              <ns1:defRPr sz="1800" b="1">
+                <ns1:solidFill>
+                  <ns1:srgbClr val="BC2026"/>
+                </ns1:solidFill>
+                <ns1:latin typeface="Microsoft YaHei"/>
+                <ns1:ea typeface="Microsoft YaHei"/>
+                <ns1:cs typeface="Microsoft YaHei"/>
+              </ns1:defRPr>
+            </ns1:defPPr>
+          </ns1:lstStyle>
+          <ns1:p>
+            <ns1:pPr algn="l">
+              <ns1:buNone/>
+              <ns1:defRPr sz="1800" b="1">
+                <ns1:solidFill>
+                  <ns1:srgbClr val="BC2026"/>
+                </ns1:solidFill>
+                <ns1:latin typeface="Microsoft YaHei"/>
+                <ns1:ea typeface="Microsoft YaHei"/>
+                <ns1:cs typeface="Microsoft YaHei"/>
+              </ns1:defRPr>
+            </ns1:pPr>
+            <ns1:r>
+              <ns1:rPr sz="1800" b="1">
+                <ns1:solidFill>
+                  <ns1:srgbClr val="BC2026"/>
+                </ns1:solidFill>
+                <ns1:latin typeface="Microsoft YaHei"/>
+                <ns1:ea typeface="Microsoft YaHei"/>
+                <ns1:cs typeface="Microsoft YaHei"/>
+              </ns1:rPr>
+              <ns1:t>AI Coding 工程化与自动验证</ns1:t>
+            </ns1:r>
+          </ns1:p>
+        </ns0:txBody>
+      </ns0:sp>
+      <ns0:sp>
+        <ns0:nvSpPr>
+          <ns0:cNvPr id="57" name="">
+            <ns1:extLst>
+              <ns1:ext uri="{FF2B5EF4-FFF2-40B4-BE49-F238E27FC236}">
+                <ns2:creationId id="{AFCDAFD4-646C-40FB-BB94-D219E89E724D}"/>
+              </ns1:ext>
+            </ns1:extLst>
+          </ns0:cNvPr>
+          <ns0:cNvSpPr>
+            <ns1:spLocks noGrp="1"/>
+          </ns0:cNvSpPr>
+          <ns0:nvPr/>
+        </ns0:nvSpPr>
+        <ns0:spPr>
+          <ns1:xfrm>
+            <ns1:off x="6334125" y="6162675"/>
+            <ns1:ext cx="5429250" cy="457200"/>
+          </ns1:xfrm>
+          <ns1:prstGeom prst="rect">
+            <ns1:avLst/>
+          </ns1:prstGeom>
+          <ns1:noFill/>
+          <ns1:ln w="0">
+            <ns1:noFill/>
+          </ns1:ln>
+        </ns0:spPr>
+        <ns0:txBody>
+          <ns1:bodyPr lIns="0" tIns="0" rIns="0" bIns="0" anchor="ctr"/>
+          <ns1:lstStyle>
+            <ns1:defPPr algn="l">
+              <ns1:defRPr sz="1575" b="0">
+                <ns1:solidFill>
+                  <ns1:srgbClr val="333333"/>
+                </ns1:solidFill>
+                <ns1:latin typeface="Microsoft YaHei"/>
+                <ns1:ea typeface="Microsoft YaHei"/>
+                <ns1:cs typeface="Microsoft YaHei"/>
+              </ns1:defRPr>
+            </ns1:defPPr>
+          </ns1:lstStyle>
+          <ns1:p>
+            <ns1:pPr algn="l">
+              <ns1:buNone/>
+              <ns1:defRPr sz="1575" b="0">
+                <ns1:solidFill>
+                  <ns1:srgbClr val="333333"/>
+                </ns1:solidFill>
+                <ns1:latin typeface="Microsoft YaHei"/>
+                <ns1:ea typeface="Microsoft YaHei"/>
+                <ns1:cs typeface="Microsoft YaHei"/>
+              </ns1:defRPr>
+            </ns1:pPr>
+            <ns1:r>
+              <ns1:rPr sz="1575" b="0">
+                <ns1:solidFill>
+                  <ns1:srgbClr val="333333"/>
+                </ns1:solidFill>
+                <ns1:latin typeface="Microsoft YaHei"/>
+                <ns1:ea typeface="Microsoft YaHei"/>
+                <ns1:cs typeface="Microsoft YaHei"/>
+              </ns1:rPr>
+              <ns1:t>将代码模板、测试与性能评测接入 Agent，</ns1:t>
+            </ns1:r>
+          </ns1:p>
+          <ns1:p>
+            <ns1:pPr algn="l">
+              <ns1:buNone/>
+              <ns1:defRPr sz="1575" b="0">
+                <ns1:solidFill>
+                  <ns1:srgbClr val="333333"/>
+                </ns1:solidFill>
+                <ns1:latin typeface="Microsoft YaHei"/>
+                <ns1:ea typeface="Microsoft YaHei"/>
+                <ns1:cs typeface="Microsoft YaHei"/>
+              </ns1:defRPr>
+            </ns1:pPr>
+            <ns1:r>
+              <ns1:rPr sz="1575" b="0">
+                <ns1:solidFill>
+                  <ns1:srgbClr val="333333"/>
+                </ns1:solidFill>
+                <ns1:latin typeface="Microsoft YaHei"/>
+                <ns1:ea typeface="Microsoft YaHei"/>
+                <ns1:cs typeface="Microsoft YaHei"/>
+              </ns1:rPr>
+              <ns1:t>贯通代码修改、验证及经验回写。</ns1:t>
+            </ns1:r>
+          </ns1:p>
+        </ns0:txBody>
+      </ns0:sp>
+      <ns0:sp>
+        <ns0:nvSpPr>
+          <ns0:cNvPr id="59" name="">
+            <ns1:extLst>
+              <ns1:ext uri="{FF2B5EF4-FFF2-40B4-BE49-F238E27FC236}">
+                <ns2:creationId id="{507BEA1E-BA6B-45C5-8CCB-AE9012273FFC}"/>
+              </ns1:ext>
+            </ns1:extLst>
+          </ns0:cNvPr>
+          <ns0:cNvSpPr>
+            <ns1:spLocks noGrp="1"/>
+          </ns0:cNvSpPr>
+          <ns0:nvPr/>
+        </ns0:nvSpPr>
+        <ns0:spPr>
+          <ns1:xfrm>
+            <ns1:off x="11477625" y="6581775"/>
+            <ns1:ext cx="333375" cy="209550"/>
+          </ns1:xfrm>
+          <ns1:prstGeom prst="rect">
+            <ns1:avLst/>
+          </ns1:prstGeom>
+          <ns1:noFill/>
+          <ns1:ln w="0">
+            <ns1:noFill/>
+          </ns1:ln>
+        </ns0:spPr>
+        <ns0:txBody>
+          <ns1:bodyPr lIns="0" tIns="0" rIns="0" bIns="0" anchor="ctr"/>
+          <ns1:lstStyle>
+            <ns1:defPPr algn="ctr">
+              <ns1:defRPr sz="1275" b="0">
+                <ns1:solidFill>
+                  <ns1:srgbClr val="888888"/>
+                </ns1:solidFill>
+                <ns1:latin typeface="Microsoft YaHei"/>
+                <ns1:ea typeface="Microsoft YaHei"/>
+                <ns1:cs typeface="Microsoft YaHei"/>
+              </ns1:defRPr>
+            </ns1:defPPr>
+          </ns1:lstStyle>
+          <ns1:p>
+            <ns1:pPr algn="ctr">
+              <ns1:buNone/>
+              <ns1:defRPr sz="1275" b="0">
+                <ns1:solidFill>
+                  <ns1:srgbClr val="888888"/>
+                </ns1:solidFill>
+                <ns1:latin typeface="Microsoft YaHei"/>
+                <ns1:ea typeface="Microsoft YaHei"/>
+                <ns1:cs typeface="Microsoft YaHei"/>
+              </ns1:defRPr>
+            </ns1:pPr>
+            <ns1:r>
+              <ns1:rPr sz="1275" b="0">
+                <ns1:solidFill>
+                  <ns1:srgbClr val="888888"/>
+                </ns1:solidFill>
+                <ns1:latin typeface="Microsoft YaHei"/>
+                <ns1:ea typeface="Microsoft YaHei"/>
+                <ns1:cs typeface="Microsoft YaHei"/>
+              </ns1:rPr>
+              <ns1:t>06</ns1:t>
+            </ns1:r>
+          </ns1:p>
+        </ns0:txBody>
+      </ns0:sp>
+      <ns0:sp>
+        <ns0:nvSpPr>
+          <ns0:cNvPr id="61" name="状态色块">
+            <ns1:extLst>
+              <ns1:ext uri="{FF2B5EF4-FFF2-40B4-BE49-F238E27FC236}">
+                <ns2:creationId id="{764AFF75-E61F-4C6F-8F3C-4418731D7C1C}"/>
+              </ns1:ext>
+            </ns1:extLst>
+          </ns0:cNvPr>
+          <ns0:cNvSpPr>
+            <ns1:spLocks noGrp="1"/>
+          </ns0:cNvSpPr>
+          <ns0:nvPr/>
+        </ns0:nvSpPr>
+        <ns0:spPr>
+          <ns1:xfrm>
+            <ns1:off x="2381250" y="6581775"/>
+            <ns1:ext cx="238125" cy="152400"/>
+          </ns1:xfrm>
+          <ns1:prstGeom prst="rect">
+            <ns1:avLst/>
+          </ns1:prstGeom>
+          <ns1:solidFill>
+            <ns1:srgbClr val="FFF1CD"/>
+          </ns1:solidFill>
+          <ns1:ln w="6350">
+            <ns1:solidFill>
+              <ns1:srgbClr val="999999"/>
+            </ns1:solidFill>
+          </ns1:ln>
+        </ns0:spPr>
+      </ns0:sp>
+      <ns0:sp>
+        <ns0:nvSpPr>
+          <ns0:cNvPr id="62" name="">
+            <ns1:extLst>
+              <ns1:ext uri="{FF2B5EF4-FFF2-40B4-BE49-F238E27FC236}">
+                <ns2:creationId id="{3CC97F3E-0C0D-4692-BEB1-267C52DA744C}"/>
+              </ns1:ext>
+            </ns1:extLst>
+          </ns0:cNvPr>
+          <ns0:cNvSpPr>
+            <ns1:spLocks noGrp="1"/>
+          </ns0:cNvSpPr>
+          <ns0:nvPr/>
+        </ns0:nvSpPr>
+        <ns0:spPr>
+          <ns1:xfrm>
+            <ns1:off x="2657475" y="6553200"/>
+            <ns1:ext cx="952500" cy="219075"/>
+          </ns1:xfrm>
+          <ns1:prstGeom prst="rect">
+            <ns1:avLst/>
+          </ns1:prstGeom>
+          <ns1:noFill/>
+          <ns1:ln w="0">
+            <ns1:noFill/>
+          </ns1:ln>
+        </ns0:spPr>
+        <ns0:txBody>
+          <ns1:bodyPr lIns="0" tIns="0" rIns="0" bIns="0" anchor="ctr"/>
+          <ns1:lstStyle>
+            <ns1:defPPr algn="ctr">
+              <ns1:defRPr sz="1125" b="0">
+                <ns1:solidFill>
+                  <ns1:srgbClr val="777777"/>
+                </ns1:solidFill>
+                <ns1:latin typeface="Microsoft YaHei"/>
+                <ns1:ea typeface="Microsoft YaHei"/>
+                <ns1:cs typeface="Microsoft YaHei"/>
+              </ns1:defRPr>
+            </ns1:defPPr>
+          </ns1:lstStyle>
+          <ns1:p>
+            <ns1:pPr algn="l">
+              <ns1:buNone/>
+              <ns1:defRPr sz="1125" b="0">
+                <ns1:solidFill>
+                  <ns1:srgbClr val="777777"/>
+                </ns1:solidFill>
+                <ns1:latin typeface="Microsoft YaHei"/>
+                <ns1:ea typeface="Microsoft YaHei"/>
+                <ns1:cs typeface="Microsoft YaHei"/>
+              </ns1:defRPr>
+            </ns1:pPr>
+            <ns1:r>
+              <ns1:rPr sz="1000" b="0">
+                <ns1:solidFill>
+                  <ns1:srgbClr val="777777"/>
+                </ns1:solidFill>
+                <ns1:latin typeface="Microsoft YaHei"/>
+                <ns1:ea typeface="Microsoft YaHei"/>
+                <ns1:cs typeface="Microsoft YaHei"/>
+              </ns1:rPr>
+              <ns1:t>已完成</ns1:t>
+            </ns1:r>
+          </ns1:p>
+        </ns0:txBody>
+      </ns0:sp>
+      <ns0:sp>
+        <ns0:nvSpPr>
+          <ns0:cNvPr id="63" name="状态色块">
+            <ns1:extLst>
+              <ns1:ext uri="{FF2B5EF4-FFF2-40B4-BE49-F238E27FC236}">
+                <ns2:creationId id="{0FB8D652-4667-4710-8587-92C618FCA885}"/>
+              </ns1:ext>
+            </ns1:extLst>
+          </ns0:cNvPr>
+          <ns0:cNvSpPr>
+            <ns1:spLocks noGrp="1"/>
+          </ns0:cNvSpPr>
+          <ns0:nvPr/>
+        </ns0:nvSpPr>
+        <ns0:spPr>
+          <ns1:xfrm>
+            <ns1:off x="3400425" y="6581775"/>
+            <ns1:ext cx="238125" cy="152400"/>
+          </ns1:xfrm>
+          <ns1:prstGeom prst="rect">
+            <ns1:avLst/>
+          </ns1:prstGeom>
+          <ns1:solidFill>
+            <ns1:srgbClr val="E0EFD4"/>
+          </ns1:solidFill>
+          <ns1:ln w="6350">
+            <ns1:solidFill>
+              <ns1:srgbClr val="999999"/>
+            </ns1:solidFill>
+          </ns1:ln>
+        </ns0:spPr>
+      </ns0:sp>
+      <ns0:sp>
+        <ns0:nvSpPr>
+          <ns0:cNvPr id="64" name="">
+            <ns1:extLst>
+              <ns1:ext uri="{FF2B5EF4-FFF2-40B4-BE49-F238E27FC236}">
+                <ns2:creationId id="{3CC97F3E-0C0D-4692-BEB1-267C52DA744C}"/>
+              </ns1:ext>
+            </ns1:extLst>
+          </ns0:cNvPr>
+          <ns0:cNvSpPr>
+            <ns1:spLocks noGrp="1"/>
+          </ns0:cNvSpPr>
+          <ns0:nvPr/>
+        </ns0:nvSpPr>
+        <ns0:spPr>
+          <ns1:xfrm>
+            <ns1:off x="3676650" y="6553200"/>
+            <ns1:ext cx="952500" cy="219075"/>
+          </ns1:xfrm>
+          <ns1:prstGeom prst="rect">
+            <ns1:avLst/>
+          </ns1:prstGeom>
+          <ns1:noFill/>
+          <ns1:ln w="0">
+            <ns1:noFill/>
+          </ns1:ln>
+        </ns0:spPr>
+        <ns0:txBody>
+          <ns1:bodyPr lIns="0" tIns="0" rIns="0" bIns="0" anchor="ctr"/>
+          <ns1:lstStyle>
+            <ns1:defPPr algn="ctr">
+              <ns1:defRPr sz="1125" b="0">
+                <ns1:solidFill>
+                  <ns1:srgbClr val="777777"/>
+                </ns1:solidFill>
+                <ns1:latin typeface="Microsoft YaHei"/>
+                <ns1:ea typeface="Microsoft YaHei"/>
+                <ns1:cs typeface="Microsoft YaHei"/>
+              </ns1:defRPr>
+            </ns1:defPPr>
+          </ns1:lstStyle>
+          <ns1:p>
+            <ns1:pPr algn="l">
+              <ns1:buNone/>
+              <ns1:defRPr sz="1125" b="0">
+                <ns1:solidFill>
+                  <ns1:srgbClr val="777777"/>
+                </ns1:solidFill>
+                <ns1:latin typeface="Microsoft YaHei"/>
+                <ns1:ea typeface="Microsoft YaHei"/>
+                <ns1:cs typeface="Microsoft YaHei"/>
+              </ns1:defRPr>
+            </ns1:pPr>
+            <ns1:r>
+              <ns1:rPr sz="1000" b="0">
+                <ns1:solidFill>
+                  <ns1:srgbClr val="777777"/>
+                </ns1:solidFill>
+                <ns1:latin typeface="Microsoft YaHei"/>
+                <ns1:ea typeface="Microsoft YaHei"/>
+                <ns1:cs typeface="Microsoft YaHei"/>
+              </ns1:rPr>
+              <ns1:t>未完成</ns1:t>
+            </ns1:r>
+          </ns1:p>
+        </ns0:txBody>
+      </ns0:sp>
+      <ns0:sp>
+        <ns0:nvSpPr>
+          <ns0:cNvPr id="65" name="状态色块">
+            <ns1:extLst>
+              <ns1:ext uri="{FF2B5EF4-FFF2-40B4-BE49-F238E27FC236}">
+                <ns2:creationId id="{E0B7CF13-FD42-4496-B21C-CC1FCFA4010E}"/>
+              </ns1:ext>
+            </ns1:extLst>
+          </ns0:cNvPr>
+          <ns0:cNvSpPr>
+            <ns1:spLocks noGrp="1"/>
+          </ns0:cNvSpPr>
+          <ns0:nvPr/>
+        </ns0:nvSpPr>
+        <ns0:spPr>
+          <ns1:xfrm>
+            <ns1:off x="4419600" y="6581775"/>
+            <ns1:ext cx="238125" cy="152400"/>
+          </ns1:xfrm>
+          <ns1:prstGeom prst="rect">
+            <ns1:avLst/>
+          </ns1:prstGeom>
+          <ns1:solidFill>
+            <ns1:srgbClr val="E0EFD4"/>
+          </ns1:solidFill>
+          <ns1:ln w="6350">
+            <ns1:solidFill>
+              <ns1:srgbClr val="999999"/>
+            </ns1:solidFill>
+          </ns1:ln>
+        </ns0:spPr>
+      </ns0:sp>
+      <ns0:sp>
+        <ns0:nvSpPr>
+          <ns0:cNvPr id="72" name="半完成状态：对角黄色区域">
+            <ns1:extLst>
+              <ns1:ext uri="{FF2B5EF4-FFF2-40B4-BE49-F238E27FC236}">
+                <ns2:creationId id="{104F507E-F118-4F13-BD4D-534AEDBEA0EA}"/>
+              </ns1:ext>
+            </ns1:extLst>
+          </ns0:cNvPr>
+          <ns0:cNvSpPr>
+            <ns1:spLocks noGrp="1"/>
+          </ns0:cNvSpPr>
+          <ns0:nvPr/>
+        </ns0:nvSpPr>
+        <ns0:spPr>
+          <ns1:xfrm>
+            <ns1:off x="4419600" y="6581775"/>
+            <ns1:ext cx="238125" cy="152400"/>
+          </ns1:xfrm>
+          <ns1:custGeom>
+            <ns1:rect l="0" t="0" r="r" b="b"/>
+            <ns1:pathLst>
+              <ns1:path w="100000" h="100000">
+                <ns1:moveTo>
+                  <ns1:pt x="0" y="0"/>
+                </ns1:moveTo>
+                <ns1:lnTo>
+                  <ns1:pt x="100000" y="100000"/>
+                </ns1:lnTo>
+                <ns1:lnTo>
+                  <ns1:pt x="0" y="100000"/>
+                </ns1:lnTo>
+                <ns1:close/>
+              </ns1:path>
+            </ns1:pathLst>
+          </ns1:custGeom>
+          <ns1:solidFill>
+            <ns1:srgbClr val="FFF1CD"/>
+          </ns1:solidFill>
+          <ns1:ln>
+            <ns1:noFill/>
+          </ns1:ln>
+        </ns0:spPr>
+      </ns0:sp>
+      <ns0:sp>
+        <ns0:nvSpPr>
+          <ns0:cNvPr id="66" name="">
+            <ns1:extLst>
+              <ns1:ext uri="{FF2B5EF4-FFF2-40B4-BE49-F238E27FC236}">
+                <ns2:creationId id="{3CC97F3E-0C0D-4692-BEB1-267C52DA744C}"/>
+              </ns1:ext>
+            </ns1:extLst>
+          </ns0:cNvPr>
+          <ns0:cNvSpPr>
+            <ns1:spLocks noGrp="1"/>
+          </ns0:cNvSpPr>
+          <ns0:nvPr/>
+        </ns0:nvSpPr>
+        <ns0:spPr>
+          <ns1:xfrm>
+            <ns1:off x="4695825" y="6553200"/>
+            <ns1:ext cx="952500" cy="219075"/>
+          </ns1:xfrm>
+          <ns1:prstGeom prst="rect">
+            <ns1:avLst/>
+          </ns1:prstGeom>
+          <ns1:noFill/>
+          <ns1:ln w="0">
+            <ns1:noFill/>
+          </ns1:ln>
+        </ns0:spPr>
+        <ns0:txBody>
+          <ns1:bodyPr lIns="0" tIns="0" rIns="0" bIns="0" anchor="ctr"/>
+          <ns1:lstStyle>
+            <ns1:defPPr algn="ctr">
+              <ns1:defRPr sz="1125" b="0">
+                <ns1:solidFill>
+                  <ns1:srgbClr val="777777"/>
+                </ns1:solidFill>
+                <ns1:latin typeface="Microsoft YaHei"/>
+                <ns1:ea typeface="Microsoft YaHei"/>
+                <ns1:cs typeface="Microsoft YaHei"/>
+              </ns1:defRPr>
+            </ns1:defPPr>
+          </ns1:lstStyle>
+          <ns1:p>
+            <ns1:pPr algn="l">
+              <ns1:buNone/>
+              <ns1:defRPr sz="1125" b="0">
+                <ns1:solidFill>
+                  <ns1:srgbClr val="777777"/>
+                </ns1:solidFill>
+                <ns1:latin typeface="Microsoft YaHei"/>
+                <ns1:ea typeface="Microsoft YaHei"/>
+                <ns1:cs typeface="Microsoft YaHei"/>
+              </ns1:defRPr>
+            </ns1:pPr>
+            <ns1:r>
+              <ns1:rPr sz="1000" b="0">
+                <ns1:solidFill>
+                  <ns1:srgbClr val="777777"/>
+                </ns1:solidFill>
+                <ns1:latin typeface="Microsoft YaHei"/>
+                <ns1:ea typeface="Microsoft YaHei"/>
+                <ns1:cs typeface="Microsoft YaHei"/>
+              </ns1:rPr>
+              <ns1:t>完成一半</ns1:t>
+            </ns1:r>
+          </ns1:p>
+        </ns0:txBody>
+      </ns0:sp>
+    </ns0:spTree>
+    <ns0:extLst>
+      <ns0:ext uri="{BB962C8B-B14F-4D97-AF65-F5344CB8AC3E}">
+        <ns3:creationId val="392523969"/>
+      </ns0:ext>
+    </ns0:extLst>
+  </ns0:cSld>
+</ns0:sld>
+</file>
+
+<file path=ppt/slides/slide7.xml><?xml version="1.0" encoding="utf-8"?>
+<ns0:sld xmlns:ns0="http://schemas.openxmlformats.org/presentationml/2006/main" xmlns:ns1="http://schemas.openxmlformats.org/drawingml/2006/main" xmlns:ns2="http://schemas.microsoft.com/office/drawing/2014/main" xmlns:ns3="http://schemas.microsoft.com/office/powerpoint/2010/main">
+  <ns0:cSld>
+    <ns0:bg>
+      <ns0:bgPr>
+        <ns1:solidFill>
+          <ns1:srgbClr val="FFFFFF"/>
+        </ns1:solidFill>
+      </ns0:bgPr>
+    </ns0:bg>
+    <ns0:spTree>
+      <ns0:nvGrpSpPr>
+        <ns0:cNvPr id="1" name=""/>
+        <ns0:cNvGrpSpPr/>
+        <ns0:nvPr/>
+      </ns0:nvGrpSpPr>
+      <ns0:grpSpPr>
+        <ns1:xfrm/>
+      </ns0:grpSpPr>
+      <ns0:sp>
+        <ns0:nvSpPr>
+          <ns0:cNvPr id="46" name="">
+            <ns1:extLst>
+              <ns1:ext uri="{FF2B5EF4-FFF2-40B4-BE49-F238E27FC236}">
+                <ns2:creationId id="{B5524E25-CD1B-409F-9804-9FDD56544676}"/>
+              </ns1:ext>
+            </ns1:extLst>
+          </ns0:cNvPr>
+          <ns0:cNvSpPr>
+            <ns1:spLocks noGrp="1"/>
+          </ns0:cNvSpPr>
+          <ns0:nvPr/>
+        </ns0:nvSpPr>
+        <ns0:spPr>
+          <ns1:xfrm>
+            <ns1:off x="0" y="0"/>
+            <ns1:ext cx="12192000" cy="723900"/>
+          </ns1:xfrm>
+          <ns1:prstGeom prst="rect">
+            <ns1:avLst/>
+          </ns1:prstGeom>
+          <ns1:solidFill>
+            <ns1:srgbClr val="BC2026"/>
+          </ns1:solidFill>
+          <ns1:ln w="11430">
+            <ns1:solidFill>
+              <ns1:srgbClr val="555555"/>
+            </ns1:solidFill>
+          </ns1:ln>
+        </ns0:spPr>
+      </ns0:sp>
+      <ns0:sp>
+        <ns0:nvSpPr>
+          <ns0:cNvPr id="2" name="">
+            <ns1:extLst>
+              <ns1:ext uri="{FF2B5EF4-FFF2-40B4-BE49-F238E27FC236}">
+                <ns2:creationId id="{1E418448-9122-48EC-ABBE-FACD5E29D806}"/>
+              </ns1:ext>
+            </ns1:extLst>
+          </ns0:cNvPr>
+          <ns0:cNvSpPr>
+            <ns1:spLocks noGrp="1"/>
+          </ns0:cNvSpPr>
+          <ns0:nvPr/>
+        </ns0:nvSpPr>
+        <ns0:spPr>
+          <ns1:xfrm>
+            <ns1:off x="419100" y="152400"/>
+            <ns1:ext cx="11353800" cy="495300"/>
+          </ns1:xfrm>
+          <ns1:prstGeom prst="rect">
+            <ns1:avLst/>
+          </ns1:prstGeom>
+          <ns1:noFill/>
+          <ns1:ln w="0">
+            <ns1:noFill/>
+          </ns1:ln>
+        </ns0:spPr>
+        <ns0:txBody>
+          <ns1:bodyPr lIns="0" tIns="0" rIns="0" bIns="0" anchor="ctr"/>
+          <ns1:lstStyle>
+            <ns1:defPPr algn="l">
+              <ns1:defRPr sz="2700" b="1">
+                <ns1:solidFill>
+                  <ns1:srgbClr val="FFFFFF"/>
+                </ns1:solidFill>
+                <ns1:latin typeface="Microsoft YaHei"/>
+                <ns1:ea typeface="Microsoft YaHei"/>
+                <ns1:cs typeface="Microsoft YaHei"/>
+              </ns1:defRPr>
+            </ns1:defPPr>
+          </ns1:lstStyle>
+          <ns1:p>
+            <ns1:pPr algn="l">
+              <ns1:buNone/>
+              <ns1:defRPr sz="2700" b="1">
+                <ns1:solidFill>
+                  <ns1:srgbClr val="FFFFFF"/>
+                </ns1:solidFill>
+                <ns1:latin typeface="Microsoft YaHei"/>
+                <ns1:ea typeface="Microsoft YaHei"/>
+                <ns1:cs typeface="Microsoft YaHei"/>
+              </ns1:defRPr>
+            </ns1:pPr>
+            <ns1:r>
+              <ns1:rPr sz="2700" b="1">
+                <ns1:solidFill>
+                  <ns1:srgbClr val="FFFFFF"/>
+                </ns1:solidFill>
+                <ns1:latin typeface="Microsoft YaHei"/>
+                <ns1:ea typeface="Microsoft YaHei"/>
+                <ns1:cs typeface="Microsoft YaHei"/>
+              </ns1:rPr>
+              <ns1:t>高性能推理：vLLM-Ascend 端侧加速与内存优化</ns1:t>
+            </ns1:r>
+          </ns1:p>
+        </ns0:txBody>
+      </ns0:sp>
+      <ns0:sp>
+        <ns0:nvSpPr>
+          <ns0:cNvPr id="31" name="">
+            <ns1:extLst>
+              <ns1:ext uri="{FF2B5EF4-FFF2-40B4-BE49-F238E27FC236}">
+                <ns2:creationId id="{454DBEEE-0639-46BD-8F78-DC6A7008B5C2}"/>
+              </ns1:ext>
+            </ns1:extLst>
+          </ns0:cNvPr>
+          <ns0:cNvSpPr>
+            <ns1:spLocks noGrp="1"/>
+          </ns0:cNvSpPr>
+          <ns0:nvPr/>
+        </ns0:nvSpPr>
+        <ns0:spPr>
+          <ns1:xfrm>
+            <ns1:off x="6334125" y="981075"/>
+            <ns1:ext cx="5429250" cy="361950"/>
+          </ns1:xfrm>
+          <ns1:prstGeom prst="rect">
+            <ns1:avLst/>
+          </ns1:prstGeom>
+          <ns1:noFill/>
+          <ns1:ln w="0">
+            <ns1:noFill/>
+          </ns1:ln>
+        </ns0:spPr>
+        <ns0:txBody>
+          <ns1:bodyPr lIns="0" tIns="0" rIns="0" bIns="0" anchor="ctr"/>
+          <ns1:lstStyle>
+            <ns1:defPPr algn="l">
+              <ns1:defRPr sz="2250" b="1">
+                <ns1:solidFill>
+                  <ns1:srgbClr val="BC2026"/>
+                </ns1:solidFill>
+                <ns1:latin typeface="Microsoft YaHei"/>
+                <ns1:ea typeface="Microsoft YaHei"/>
+                <ns1:cs typeface="Microsoft YaHei"/>
+              </ns1:defRPr>
+            </ns1:defPPr>
+          </ns1:lstStyle>
+          <ns1:p>
+            <ns1:pPr algn="l">
+              <ns1:buNone/>
+              <ns1:defRPr sz="2250" b="1">
+                <ns1:solidFill>
+                  <ns1:srgbClr val="BC2026"/>
+                </ns1:solidFill>
+                <ns1:latin typeface="Microsoft YaHei"/>
+                <ns1:ea typeface="Microsoft YaHei"/>
+                <ns1:cs typeface="Microsoft YaHei"/>
+              </ns1:defRPr>
+            </ns1:pPr>
+            <ns1:r>
+              <ns1:rPr sz="2250" b="1">
+                <ns1:solidFill>
+                  <ns1:srgbClr val="BC2026"/>
+                </ns1:solidFill>
+                <ns1:latin typeface="Microsoft YaHei"/>
+                <ns1:ea typeface="Microsoft YaHei"/>
+                <ns1:cs typeface="Microsoft YaHei"/>
+              </ns1:rPr>
+              <ns1:t>关键竞争力</ns1:t>
+            </ns1:r>
+          </ns1:p>
+        </ns0:txBody>
+      </ns0:sp>
+      <ns0:sp>
+        <ns0:nvSpPr>
+          <ns0:cNvPr id="32" name="">
+            <ns1:extLst>
+              <ns1:ext uri="{FF2B5EF4-FFF2-40B4-BE49-F238E27FC236}">
+                <ns2:creationId id="{491963DE-8339-4CDA-BE98-8B58F693E7FF}"/>
+              </ns1:ext>
+            </ns1:extLst>
+          </ns0:cNvPr>
+          <ns0:cNvSpPr>
+            <ns1:spLocks noGrp="1"/>
+          </ns0:cNvSpPr>
+          <ns0:nvPr/>
+        </ns0:nvSpPr>
+        <ns0:spPr>
+          <ns1:xfrm>
+            <ns1:off x="6334125" y="1438275"/>
+            <ns1:ext cx="5429250" cy="276225"/>
+          </ns1:xfrm>
+          <ns1:prstGeom prst="rect">
+            <ns1:avLst/>
+          </ns1:prstGeom>
+          <ns1:noFill/>
+          <ns1:ln w="0">
+            <ns1:noFill/>
+          </ns1:ln>
+        </ns0:spPr>
+        <ns0:txBody>
+          <ns1:bodyPr lIns="0" tIns="0" rIns="0" bIns="0" anchor="ctr"/>
+          <ns1:lstStyle>
+            <ns1:defPPr algn="l">
+              <ns1:defRPr sz="1875" b="1">
+                <ns1:solidFill>
+                  <ns1:srgbClr val="BC2026"/>
+                </ns1:solidFill>
+                <ns1:latin typeface="Microsoft YaHei"/>
+                <ns1:ea typeface="Microsoft YaHei"/>
+                <ns1:cs typeface="Microsoft YaHei"/>
+              </ns1:defRPr>
+            </ns1:defPPr>
+          </ns1:lstStyle>
+          <ns1:p>
+            <ns1:pPr algn="l">
+              <ns1:buNone/>
+              <ns1:defRPr sz="1875" b="1">
+                <ns1:solidFill>
+                  <ns1:srgbClr val="BC2026"/>
+                </ns1:solidFill>
+                <ns1:latin typeface="Microsoft YaHei"/>
+                <ns1:ea typeface="Microsoft YaHei"/>
+                <ns1:cs typeface="Microsoft YaHei"/>
+              </ns1:defRPr>
+            </ns1:pPr>
+            <ns1:r>
+              <ns1:rPr sz="1875" b="1">
+                <ns1:solidFill>
+                  <ns1:srgbClr val="BC2026"/>
+                </ns1:solidFill>
+                <ns1:latin typeface="Microsoft YaHei"/>
+                <ns1:ea typeface="Microsoft YaHei"/>
+                <ns1:cs typeface="Microsoft YaHei"/>
+              </ns1:rPr>
+              <ns1:t>高并发推理服务</ns1:t>
+            </ns1:r>
+          </ns1:p>
+        </ns0:txBody>
+      </ns0:sp>
+      <ns0:sp>
+        <ns0:nvSpPr>
+          <ns0:cNvPr id="33" name="">
+            <ns1:extLst>
+              <ns1:ext uri="{FF2B5EF4-FFF2-40B4-BE49-F238E27FC236}">
+                <ns2:creationId id="{CB337422-3CC3-4F1F-B12E-81EFE506339E}"/>
+              </ns1:ext>
+            </ns1:extLst>
+          </ns0:cNvPr>
+          <ns0:cNvSpPr>
+            <ns1:spLocks noGrp="1"/>
+          </ns0:cNvSpPr>
+          <ns0:nvPr/>
+        </ns0:nvSpPr>
+        <ns0:spPr>
+          <ns1:xfrm>
+            <ns1:off x="6334125" y="1724025"/>
+            <ns1:ext cx="5429250" cy="485775"/>
+          </ns1:xfrm>
+          <ns1:prstGeom prst="rect">
+            <ns1:avLst/>
+          </ns1:prstGeom>
+          <ns1:noFill/>
+          <ns1:ln w="0">
+            <ns1:noFill/>
+          </ns1:ln>
+        </ns0:spPr>
+        <ns0:txBody>
+          <ns1:bodyPr lIns="0" tIns="0" rIns="0" bIns="0" anchor="ctr"/>
+          <ns1:lstStyle>
+            <ns1:defPPr algn="l">
+              <ns1:defRPr sz="1650" b="0">
+                <ns1:solidFill>
+                  <ns1:srgbClr val="333333"/>
+                </ns1:solidFill>
+                <ns1:latin typeface="Microsoft YaHei"/>
+                <ns1:ea typeface="Microsoft YaHei"/>
+                <ns1:cs typeface="Microsoft YaHei"/>
+              </ns1:defRPr>
+            </ns1:defPPr>
+          </ns1:lstStyle>
+          <ns1:p>
+            <ns1:pPr algn="l">
+              <ns1:buNone/>
+              <ns1:defRPr sz="1650" b="0">
+                <ns1:solidFill>
+                  <ns1:srgbClr val="333333"/>
+                </ns1:solidFill>
+                <ns1:latin typeface="Microsoft YaHei"/>
+                <ns1:ea typeface="Microsoft YaHei"/>
+                <ns1:cs typeface="Microsoft YaHei"/>
+              </ns1:defRPr>
+            </ns1:pPr>
+            <ns1:r>
+              <ns1:rPr sz="1650" b="0">
+                <ns1:solidFill>
+                  <ns1:srgbClr val="333333"/>
+                </ns1:solidFill>
+                <ns1:latin typeface="Microsoft YaHei"/>
+                <ns1:ea typeface="Microsoft YaHei"/>
+                <ns1:cs typeface="Microsoft YaHei"/>
+              </ns1:rPr>
+              <ns1:t>面向多用户与端侧 Agent 负载，</ns1:t>
+            </ns1:r>
+          </ns1:p>
+          <ns1:p>
+            <ns1:pPr algn="l">
+              <ns1:buNone/>
+              <ns1:defRPr sz="1650" b="0">
+                <ns1:solidFill>
+                  <ns1:srgbClr val="333333"/>
+                </ns1:solidFill>
+                <ns1:latin typeface="Microsoft YaHei"/>
+                <ns1:ea typeface="Microsoft YaHei"/>
+                <ns1:cs typeface="Microsoft YaHei"/>
+              </ns1:defRPr>
+            </ns1:pPr>
+            <ns1:r>
+              <ns1:rPr sz="1650" b="0">
+                <ns1:solidFill>
+                  <ns1:srgbClr val="333333"/>
+                </ns1:solidFill>
+                <ns1:latin typeface="Microsoft YaHei"/>
+                <ns1:ea typeface="Microsoft YaHei"/>
+                <ns1:cs typeface="Microsoft YaHei"/>
+              </ns1:rPr>
+              <ns1:t>兼顾响应时延与持续并发吞吐。</ns1:t>
+            </ns1:r>
+          </ns1:p>
+        </ns0:txBody>
+      </ns0:sp>
+      <ns0:sp>
+        <ns0:nvSpPr>
+          <ns0:cNvPr id="34" name="">
+            <ns1:extLst>
+              <ns1:ext uri="{FF2B5EF4-FFF2-40B4-BE49-F238E27FC236}">
+                <ns2:creationId id="{E89E3938-F5E0-47A5-A799-3F14C33D9E93}"/>
+              </ns1:ext>
+            </ns1:extLst>
+          </ns0:cNvPr>
+          <ns0:cNvSpPr>
+            <ns1:spLocks noGrp="1"/>
+          </ns0:cNvSpPr>
+          <ns0:nvPr/>
+        </ns0:nvSpPr>
+        <ns0:spPr>
+          <ns1:xfrm>
+            <ns1:off x="6334125" y="2228850"/>
+            <ns1:ext cx="5429250" cy="276225"/>
+          </ns1:xfrm>
+          <ns1:prstGeom prst="rect">
+            <ns1:avLst/>
+          </ns1:prstGeom>
+          <ns1:noFill/>
+          <ns1:ln w="0">
+            <ns1:noFill/>
+          </ns1:ln>
+        </ns0:spPr>
+        <ns0:txBody>
+          <ns1:bodyPr lIns="0" tIns="0" rIns="0" bIns="0" anchor="ctr"/>
+          <ns1:lstStyle>
+            <ns1:defPPr algn="l">
+              <ns1:defRPr sz="1875" b="1">
+                <ns1:solidFill>
+                  <ns1:srgbClr val="BC2026"/>
+                </ns1:solidFill>
+                <ns1:latin typeface="Microsoft YaHei"/>
+                <ns1:ea typeface="Microsoft YaHei"/>
+                <ns1:cs typeface="Microsoft YaHei"/>
+              </ns1:defRPr>
+            </ns1:defPPr>
+          </ns1:lstStyle>
+          <ns1:p>
+            <ns1:pPr algn="l">
+              <ns1:buNone/>
+              <ns1:defRPr sz="1875" b="1">
+                <ns1:solidFill>
+                  <ns1:srgbClr val="BC2026"/>
+                </ns1:solidFill>
+                <ns1:latin typeface="Microsoft YaHei"/>
+                <ns1:ea typeface="Microsoft YaHei"/>
+                <ns1:cs typeface="Microsoft YaHei"/>
+              </ns1:defRPr>
+            </ns1:pPr>
+            <ns1:r>
+              <ns1:rPr sz="1875" b="1">
+                <ns1:solidFill>
+                  <ns1:srgbClr val="BC2026"/>
+                </ns1:solidFill>
+                <ns1:latin typeface="Microsoft YaHei"/>
+                <ns1:ea typeface="Microsoft YaHei"/>
+                <ns1:cs typeface="Microsoft YaHei"/>
+              </ns1:rPr>
+              <ns1:t>大模型高性价比部署</ns1:t>
+            </ns1:r>
+          </ns1:p>
+        </ns0:txBody>
+      </ns0:sp>
+      <ns0:sp>
+        <ns0:nvSpPr>
+          <ns0:cNvPr id="35" name="">
+            <ns1:extLst>
+              <ns1:ext uri="{FF2B5EF4-FFF2-40B4-BE49-F238E27FC236}">
+                <ns2:creationId id="{2AF951B8-6300-4F58-9791-2094B57EECDC}"/>
+              </ns1:ext>
+            </ns1:extLst>
+          </ns0:cNvPr>
+          <ns0:cNvSpPr>
+            <ns1:spLocks noGrp="1"/>
+          </ns0:cNvSpPr>
+          <ns0:nvPr/>
+        </ns0:nvSpPr>
+        <ns0:spPr>
+          <ns1:xfrm>
+            <ns1:off x="6334125" y="2514600"/>
+            <ns1:ext cx="5429250" cy="485775"/>
+          </ns1:xfrm>
+          <ns1:prstGeom prst="rect">
+            <ns1:avLst/>
+          </ns1:prstGeom>
+          <ns1:noFill/>
+          <ns1:ln w="0">
+            <ns1:noFill/>
+          </ns1:ln>
+        </ns0:spPr>
+        <ns0:txBody>
+          <ns1:bodyPr lIns="0" tIns="0" rIns="0" bIns="0" anchor="ctr"/>
+          <ns1:lstStyle>
+            <ns1:defPPr algn="l">
+              <ns1:defRPr sz="1650" b="0">
+                <ns1:solidFill>
+                  <ns1:srgbClr val="333333"/>
+                </ns1:solidFill>
+                <ns1:latin typeface="Microsoft YaHei"/>
+                <ns1:ea typeface="Microsoft YaHei"/>
+                <ns1:cs typeface="Microsoft YaHei"/>
+              </ns1:defRPr>
+            </ns1:defPPr>
+          </ns1:lstStyle>
+          <ns1:p>
+            <ns1:pPr algn="l">
+              <ns1:buNone/>
+              <ns1:defRPr sz="1650" b="0">
+                <ns1:solidFill>
+                  <ns1:srgbClr val="333333"/>
+                </ns1:solidFill>
+                <ns1:latin typeface="Microsoft YaHei"/>
+                <ns1:ea typeface="Microsoft YaHei"/>
+                <ns1:cs typeface="Microsoft YaHei"/>
+              </ns1:defRPr>
+            </ns1:pPr>
+            <ns1:r>
+              <ns1:rPr sz="1650" b="0">
+                <ns1:solidFill>
+                  <ns1:srgbClr val="333333"/>
+                </ns1:solidFill>
+                <ns1:latin typeface="Microsoft YaHei"/>
+                <ns1:ea typeface="Microsoft YaHei"/>
+                <ns1:cs typeface="Microsoft YaHei"/>
+              </ns1:rPr>
+              <ns1:t>发挥 A+K 软硬协同优势，</ns1:t>
+            </ns1:r>
+          </ns1:p>
+          <ns1:p>
+            <ns1:pPr algn="l">
+              <ns1:buNone/>
+              <ns1:defRPr sz="1650" b="0">
+                <ns1:solidFill>
+                  <ns1:srgbClr val="333333"/>
+                </ns1:solidFill>
+                <ns1:latin typeface="Microsoft YaHei"/>
+                <ns1:ea typeface="Microsoft YaHei"/>
+                <ns1:cs typeface="Microsoft YaHei"/>
+              </ns1:defRPr>
+            </ns1:pPr>
+            <ns1:r>
+              <ns1:rPr sz="1650" b="0">
+                <ns1:solidFill>
+                  <ns1:srgbClr val="333333"/>
+                </ns1:solidFill>
+                <ns1:latin typeface="Microsoft YaHei"/>
+                <ns1:ea typeface="Microsoft YaHei"/>
+                <ns1:cs typeface="Microsoft YaHei"/>
+              </ns1:rPr>
+              <ns1:t>以量化与分层卸载降低大模型推理成本。</ns1:t>
+            </ns1:r>
+          </ns1:p>
+        </ns0:txBody>
+      </ns0:sp>
+      <ns0:sp>
+        <ns0:nvSpPr>
+          <ns0:cNvPr id="36" name="">
+            <ns1:extLst>
+              <ns1:ext uri="{FF2B5EF4-FFF2-40B4-BE49-F238E27FC236}">
+                <ns2:creationId id="{0B38F9EF-0B00-4827-AD21-01A189F4060E}"/>
+              </ns1:ext>
+            </ns1:extLst>
+          </ns0:cNvPr>
+          <ns0:cNvSpPr>
+            <ns1:spLocks noGrp="1"/>
+          </ns0:cNvSpPr>
+          <ns0:nvPr/>
+        </ns0:nvSpPr>
+        <ns0:spPr>
+          <ns1:xfrm>
+            <ns1:off x="6334125" y="3019425"/>
+            <ns1:ext cx="5429250" cy="276225"/>
+          </ns1:xfrm>
+          <ns1:prstGeom prst="rect">
+            <ns1:avLst/>
+          </ns1:prstGeom>
+          <ns1:noFill/>
+          <ns1:ln w="0">
+            <ns1:noFill/>
+          </ns1:ln>
+        </ns0:spPr>
+        <ns0:txBody>
+          <ns1:bodyPr lIns="0" tIns="0" rIns="0" bIns="0" anchor="ctr"/>
+          <ns1:lstStyle>
+            <ns1:defPPr algn="l">
+              <ns1:defRPr sz="1875" b="1">
+                <ns1:solidFill>
+                  <ns1:srgbClr val="BC2026"/>
+                </ns1:solidFill>
+                <ns1:latin typeface="Microsoft YaHei"/>
+                <ns1:ea typeface="Microsoft YaHei"/>
+                <ns1:cs typeface="Microsoft YaHei"/>
+              </ns1:defRPr>
+            </ns1:defPPr>
+          </ns1:lstStyle>
+          <ns1:p>
+            <ns1:pPr algn="l">
+              <ns1:buNone/>
+              <ns1:defRPr sz="1875" b="1">
+                <ns1:solidFill>
+                  <ns1:srgbClr val="BC2026"/>
+                </ns1:solidFill>
+                <ns1:latin typeface="Microsoft YaHei"/>
+                <ns1:ea typeface="Microsoft YaHei"/>
+                <ns1:cs typeface="Microsoft YaHei"/>
+              </ns1:defRPr>
+            </ns1:pPr>
+            <ns1:r>
+              <ns1:rPr sz="1875" b="1">
+                <ns1:solidFill>
+                  <ns1:srgbClr val="BC2026"/>
+                </ns1:solidFill>
+                <ns1:latin typeface="Microsoft YaHei"/>
+                <ns1:ea typeface="Microsoft YaHei"/>
+                <ns1:cs typeface="Microsoft YaHei"/>
+              </ns1:rPr>
+              <ns1:t>长上下文推理能力</ns1:t>
+            </ns1:r>
+          </ns1:p>
+        </ns0:txBody>
+      </ns0:sp>
+      <ns0:sp>
+        <ns0:nvSpPr>
+          <ns0:cNvPr id="37" name="">
+            <ns1:extLst>
+              <ns1:ext uri="{FF2B5EF4-FFF2-40B4-BE49-F238E27FC236}">
+                <ns2:creationId id="{FA1440E0-A49A-48ED-AEB5-ACD447024637}"/>
+              </ns1:ext>
+            </ns1:extLst>
+          </ns0:cNvPr>
+          <ns0:cNvSpPr>
+            <ns1:spLocks noGrp="1"/>
+          </ns0:cNvSpPr>
+          <ns0:nvPr/>
+        </ns0:nvSpPr>
+        <ns0:spPr>
+          <ns1:xfrm>
+            <ns1:off x="6334125" y="3305175"/>
+            <ns1:ext cx="5429250" cy="485775"/>
+          </ns1:xfrm>
+          <ns1:prstGeom prst="rect">
+            <ns1:avLst/>
+          </ns1:prstGeom>
+          <ns1:noFill/>
+          <ns1:ln w="0">
+            <ns1:noFill/>
+          </ns1:ln>
+        </ns0:spPr>
+        <ns0:txBody>
+          <ns1:bodyPr lIns="0" tIns="0" rIns="0" bIns="0" anchor="ctr"/>
+          <ns1:lstStyle>
+            <ns1:defPPr algn="l">
+              <ns1:defRPr sz="1650" b="0">
+                <ns1:solidFill>
+                  <ns1:srgbClr val="333333"/>
+                </ns1:solidFill>
+                <ns1:latin typeface="Microsoft YaHei"/>
+                <ns1:ea typeface="Microsoft YaHei"/>
+                <ns1:cs typeface="Microsoft YaHei"/>
+              </ns1:defRPr>
+            </ns1:defPPr>
+          </ns1:lstStyle>
+          <ns1:p>
+            <ns1:pPr algn="l">
+              <ns1:buNone/>
+              <ns1:defRPr sz="1650" b="0">
+                <ns1:solidFill>
+                  <ns1:srgbClr val="333333"/>
+                </ns1:solidFill>
+                <ns1:latin typeface="Microsoft YaHei"/>
+                <ns1:ea typeface="Microsoft YaHei"/>
+                <ns1:cs typeface="Microsoft YaHei"/>
+              </ns1:defRPr>
+            </ns1:pPr>
+            <ns1:r>
+              <ns1:rPr sz="1650" b="0">
+                <ns1:solidFill>
+                  <ns1:srgbClr val="333333"/>
+                </ns1:solidFill>
+                <ns1:latin typeface="Microsoft YaHei"/>
+                <ns1:ea typeface="Microsoft YaHei"/>
+                <ns1:cs typeface="Microsoft YaHei"/>
+              </ns1:rPr>
+              <ns1:t>支撑 Agent 多轮交互与长文档任务，</ns1:t>
+            </ns1:r>
+          </ns1:p>
+          <ns1:p>
+            <ns1:pPr algn="l">
+              <ns1:buNone/>
+              <ns1:defRPr sz="1650" b="0">
+                <ns1:solidFill>
+                  <ns1:srgbClr val="333333"/>
+                </ns1:solidFill>
+                <ns1:latin typeface="Microsoft YaHei"/>
+                <ns1:ea typeface="Microsoft YaHei"/>
+                <ns1:cs typeface="Microsoft YaHei"/>
+              </ns1:defRPr>
+            </ns1:pPr>
+            <ns1:r>
+              <ns1:rPr sz="1650" b="0">
+                <ns1:solidFill>
+                  <ns1:srgbClr val="333333"/>
+                </ns1:solidFill>
+                <ns1:latin typeface="Microsoft YaHei"/>
+                <ns1:ea typeface="Microsoft YaHei"/>
+                <ns1:cs typeface="Microsoft YaHei"/>
+              </ns1:rPr>
+              <ns1:t>在有限内存下提升上下文承载与复用能力。</ns1:t>
+            </ns1:r>
+          </ns1:p>
+        </ns0:txBody>
+      </ns0:sp>
+      <ns0:sp>
+        <ns0:nvSpPr>
+          <ns0:cNvPr id="38" name="">
+            <ns1:extLst>
+              <ns1:ext uri="{FF2B5EF4-FFF2-40B4-BE49-F238E27FC236}">
+                <ns2:creationId id="{85568DCE-7067-4879-B82D-C69855C9A672}"/>
+              </ns1:ext>
+            </ns1:extLst>
+          </ns0:cNvPr>
+          <ns0:cNvSpPr>
+            <ns1:spLocks noGrp="1"/>
+          </ns0:cNvSpPr>
+          <ns0:nvPr/>
+        </ns0:nvSpPr>
+        <ns0:spPr>
+          <ns1:xfrm>
+            <ns1:off x="6334125" y="3981450"/>
+            <ns1:ext cx="5429250" cy="361950"/>
+          </ns1:xfrm>
+          <ns1:prstGeom prst="rect">
+            <ns1:avLst/>
+          </ns1:prstGeom>
+          <ns1:noFill/>
+          <ns1:ln w="0">
+            <ns1:noFill/>
+          </ns1:ln>
+        </ns0:spPr>
+        <ns0:txBody>
+          <ns1:bodyPr lIns="0" tIns="0" rIns="0" bIns="0" anchor="ctr"/>
+          <ns1:lstStyle>
+            <ns1:defPPr algn="l">
+              <ns1:defRPr sz="2250" b="1">
+                <ns1:solidFill>
+                  <ns1:srgbClr val="BC2026"/>
+                </ns1:solidFill>
+                <ns1:latin typeface="Microsoft YaHei"/>
+                <ns1:ea typeface="Microsoft YaHei"/>
+                <ns1:cs typeface="Microsoft YaHei"/>
+              </ns1:defRPr>
+            </ns1:defPPr>
+          </ns1:lstStyle>
+          <ns1:p>
+            <ns1:pPr algn="l">
+              <ns1:buNone/>
+              <ns1:defRPr sz="2250" b="1">
+                <ns1:solidFill>
+                  <ns1:srgbClr val="BC2026"/>
+                </ns1:solidFill>
+                <ns1:latin typeface="Microsoft YaHei"/>
+                <ns1:ea typeface="Microsoft YaHei"/>
+                <ns1:cs typeface="Microsoft YaHei"/>
+              </ns1:defRPr>
+            </ns1:pPr>
+            <ns1:r>
+              <ns1:rPr sz="2250" b="1">
+                <ns1:solidFill>
+                  <ns1:srgbClr val="BC2026"/>
+                </ns1:solidFill>
+                <ns1:latin typeface="Microsoft YaHei"/>
+                <ns1:ea typeface="Microsoft YaHei"/>
+                <ns1:cs typeface="Microsoft YaHei"/>
+              </ns1:rPr>
+              <ns1:t>实现策略</ns1:t>
+            </ns1:r>
+          </ns1:p>
+        </ns0:txBody>
+      </ns0:sp>
+      <ns0:sp>
+        <ns0:nvSpPr>
+          <ns0:cNvPr id="39" name="">
+            <ns1:extLst>
+              <ns1:ext uri="{FF2B5EF4-FFF2-40B4-BE49-F238E27FC236}">
+                <ns2:creationId id="{D09C41A1-23B7-4B8A-A34B-0EB8E6EF73E8}"/>
+              </ns1:ext>
+            </ns1:extLst>
+          </ns0:cNvPr>
+          <ns0:cNvSpPr>
+            <ns1:spLocks noGrp="1"/>
+          </ns0:cNvSpPr>
+          <ns0:nvPr/>
+        </ns0:nvSpPr>
+        <ns0:spPr>
+          <ns1:xfrm>
+            <ns1:off x="6334125" y="4419600"/>
+            <ns1:ext cx="5429250" cy="276225"/>
+          </ns1:xfrm>
+          <ns1:prstGeom prst="rect">
+            <ns1:avLst/>
+          </ns1:prstGeom>
+          <ns1:noFill/>
+          <ns1:ln w="0">
+            <ns1:noFill/>
+          </ns1:ln>
+        </ns0:spPr>
+        <ns0:txBody>
+          <ns1:bodyPr lIns="0" tIns="0" rIns="0" bIns="0" anchor="ctr"/>
+          <ns1:lstStyle>
+            <ns1:defPPr algn="l">
+              <ns1:defRPr sz="1800" b="1">
+                <ns1:solidFill>
+                  <ns1:srgbClr val="BC2026"/>
+                </ns1:solidFill>
+                <ns1:latin typeface="Microsoft YaHei"/>
+                <ns1:ea typeface="Microsoft YaHei"/>
+                <ns1:cs typeface="Microsoft YaHei"/>
+              </ns1:defRPr>
+            </ns1:defPPr>
+          </ns1:lstStyle>
+          <ns1:p>
+            <ns1:pPr algn="l">
+              <ns1:buNone/>
+              <ns1:defRPr sz="1800" b="1">
+                <ns1:solidFill>
+                  <ns1:srgbClr val="BC2026"/>
+                </ns1:solidFill>
+                <ns1:latin typeface="Microsoft YaHei"/>
+                <ns1:ea typeface="Microsoft YaHei"/>
+                <ns1:cs typeface="Microsoft YaHei"/>
+              </ns1:defRPr>
+            </ns1:pPr>
+            <ns1:r>
+              <ns1:rPr sz="1800" b="1">
+                <ns1:solidFill>
+                  <ns1:srgbClr val="BC2026"/>
+                </ns1:solidFill>
+                <ns1:latin typeface="Microsoft YaHei"/>
+                <ns1:ea typeface="Microsoft YaHei"/>
+                <ns1:cs typeface="Microsoft YaHei"/>
+              </ns1:rPr>
+              <ns1:t>面向负载的调度优化</ns1:t>
+            </ns1:r>
+          </ns1:p>
+        </ns0:txBody>
+      </ns0:sp>
+      <ns0:sp>
+        <ns0:nvSpPr>
+          <ns0:cNvPr id="40" name="">
+            <ns1:extLst>
+              <ns1:ext uri="{FF2B5EF4-FFF2-40B4-BE49-F238E27FC236}">
+                <ns2:creationId id="{E067C3AB-02A8-4105-9AA2-A28C933F54D8}"/>
+              </ns1:ext>
+            </ns1:extLst>
+          </ns0:cNvPr>
+          <ns0:cNvSpPr>
+            <ns1:spLocks noGrp="1"/>
+          </ns0:cNvSpPr>
+          <ns0:nvPr/>
+        </ns0:nvSpPr>
+        <ns0:spPr>
+          <ns1:xfrm>
+            <ns1:off x="6334125" y="4695825"/>
+            <ns1:ext cx="5429250" cy="457200"/>
+          </ns1:xfrm>
+          <ns1:prstGeom prst="rect">
+            <ns1:avLst/>
+          </ns1:prstGeom>
+          <ns1:noFill/>
+          <ns1:ln w="0">
+            <ns1:noFill/>
+          </ns1:ln>
+        </ns0:spPr>
+        <ns0:txBody>
+          <ns1:bodyPr lIns="0" tIns="0" rIns="0" bIns="0" anchor="ctr"/>
+          <ns1:lstStyle>
+            <ns1:defPPr algn="l">
+              <ns1:defRPr sz="1575" b="0">
+                <ns1:solidFill>
+                  <ns1:srgbClr val="333333"/>
+                </ns1:solidFill>
+                <ns1:latin typeface="Microsoft YaHei"/>
+                <ns1:ea typeface="Microsoft YaHei"/>
+                <ns1:cs typeface="Microsoft YaHei"/>
+              </ns1:defRPr>
+            </ns1:defPPr>
+          </ns1:lstStyle>
+          <ns1:p>
+            <ns1:pPr algn="l">
+              <ns1:buNone/>
+              <ns1:defRPr sz="1575" b="0">
+                <ns1:solidFill>
+                  <ns1:srgbClr val="333333"/>
+                </ns1:solidFill>
+                <ns1:latin typeface="Microsoft YaHei"/>
+                <ns1:ea typeface="Microsoft YaHei"/>
+                <ns1:cs typeface="Microsoft YaHei"/>
+              </ns1:defRPr>
+            </ns1:pPr>
+            <ns1:r>
+              <ns1:rPr sz="1575" b="0">
+                <ns1:solidFill>
+                  <ns1:srgbClr val="333333"/>
+                </ns1:solidFill>
+                <ns1:latin typeface="Microsoft YaHei"/>
+                <ns1:ea typeface="Microsoft YaHei"/>
+                <ns1:cs typeface="Microsoft YaHei"/>
+              </ns1:rPr>
+              <ns1:t>基于真实请求优化批处理与执行调度，</ns1:t>
+            </ns1:r>
+          </ns1:p>
+          <ns1:p>
+            <ns1:pPr algn="l">
+              <ns1:buNone/>
+              <ns1:defRPr sz="1575" b="0">
+                <ns1:solidFill>
+                  <ns1:srgbClr val="333333"/>
+                </ns1:solidFill>
+                <ns1:latin typeface="Microsoft YaHei"/>
+                <ns1:ea typeface="Microsoft YaHei"/>
+                <ns1:cs typeface="Microsoft YaHei"/>
+              </ns1:defRPr>
+            </ns1:pPr>
+            <ns1:r>
+              <ns1:rPr sz="1575" b="0">
+                <ns1:solidFill>
+                  <ns1:srgbClr val="333333"/>
+                </ns1:solidFill>
+                <ns1:latin typeface="Microsoft YaHei"/>
+                <ns1:ea typeface="Microsoft YaHei"/>
+                <ns1:cs typeface="Microsoft YaHei"/>
+              </ns1:rPr>
+              <ns1:t>结合图模式、投机解码和并行策略提升吞吐。</ns1:t>
+            </ns1:r>
+          </ns1:p>
+        </ns0:txBody>
+      </ns0:sp>
+      <ns0:sp>
+        <ns0:nvSpPr>
+          <ns0:cNvPr id="41" name="">
+            <ns1:extLst>
+              <ns1:ext uri="{FF2B5EF4-FFF2-40B4-BE49-F238E27FC236}">
+                <ns2:creationId id="{404894A5-4514-4EDD-BE09-80DDF62DF968}"/>
+              </ns1:ext>
+            </ns1:extLst>
+          </ns0:cNvPr>
+          <ns0:cNvSpPr>
+            <ns1:spLocks noGrp="1"/>
+          </ns0:cNvSpPr>
+          <ns0:nvPr/>
+        </ns0:nvSpPr>
+        <ns0:spPr>
+          <ns1:xfrm>
+            <ns1:off x="6334125" y="5153025"/>
+            <ns1:ext cx="5429250" cy="276225"/>
+          </ns1:xfrm>
+          <ns1:prstGeom prst="rect">
+            <ns1:avLst/>
+          </ns1:prstGeom>
+          <ns1:noFill/>
+          <ns1:ln w="0">
+            <ns1:noFill/>
+          </ns1:ln>
+        </ns0:spPr>
+        <ns0:txBody>
+          <ns1:bodyPr lIns="0" tIns="0" rIns="0" bIns="0" anchor="ctr"/>
+          <ns1:lstStyle>
+            <ns1:defPPr algn="l">
+              <ns1:defRPr sz="1800" b="1">
+                <ns1:solidFill>
+                  <ns1:srgbClr val="BC2026"/>
+                </ns1:solidFill>
+                <ns1:latin typeface="Microsoft YaHei"/>
+                <ns1:ea typeface="Microsoft YaHei"/>
+                <ns1:cs typeface="Microsoft YaHei"/>
+              </ns1:defRPr>
+            </ns1:defPPr>
+          </ns1:lstStyle>
+          <ns1:p>
+            <ns1:pPr algn="l">
+              <ns1:buNone/>
+              <ns1:defRPr sz="1800" b="1">
+                <ns1:solidFill>
+                  <ns1:srgbClr val="BC2026"/>
+                </ns1:solidFill>
+                <ns1:latin typeface="Microsoft YaHei"/>
+                <ns1:ea typeface="Microsoft YaHei"/>
+                <ns1:cs typeface="Microsoft YaHei"/>
+              </ns1:defRPr>
+            </ns1:pPr>
+            <ns1:r>
+              <ns1:rPr sz="1800" b="1">
+                <ns1:solidFill>
+                  <ns1:srgbClr val="BC2026"/>
+                </ns1:solidFill>
+                <ns1:latin typeface="Microsoft YaHei"/>
+                <ns1:ea typeface="Microsoft YaHei"/>
+                <ns1:cs typeface="Microsoft YaHei"/>
+              </ns1:rPr>
+              <ns1:t>A+K 协同与分层存储</ns1:t>
+            </ns1:r>
+          </ns1:p>
+        </ns0:txBody>
+      </ns0:sp>
+      <ns0:sp>
+        <ns0:nvSpPr>
+          <ns0:cNvPr id="42" name="">
+            <ns1:extLst>
+              <ns1:ext uri="{FF2B5EF4-FFF2-40B4-BE49-F238E27FC236}">
+                <ns2:creationId id="{ED9AEB7D-264B-49B9-B711-8DB7E0F95168}"/>
+              </ns1:ext>
+            </ns1:extLst>
+          </ns0:cNvPr>
+          <ns0:cNvSpPr>
+            <ns1:spLocks noGrp="1"/>
+          </ns0:cNvSpPr>
+          <ns0:nvPr/>
+        </ns0:nvSpPr>
+        <ns0:spPr>
+          <ns1:xfrm>
+            <ns1:off x="6334125" y="5429250"/>
+            <ns1:ext cx="5429250" cy="457200"/>
+          </ns1:xfrm>
+          <ns1:prstGeom prst="rect">
+            <ns1:avLst/>
+          </ns1:prstGeom>
+          <ns1:noFill/>
+          <ns1:ln w="0">
+            <ns1:noFill/>
+          </ns1:ln>
+        </ns0:spPr>
+        <ns0:txBody>
+          <ns1:bodyPr lIns="0" tIns="0" rIns="0" bIns="0" anchor="ctr"/>
+          <ns1:lstStyle>
+            <ns1:defPPr algn="l">
+              <ns1:defRPr sz="1575" b="0">
+                <ns1:solidFill>
+                  <ns1:srgbClr val="333333"/>
+                </ns1:solidFill>
+                <ns1:latin typeface="Microsoft YaHei"/>
+                <ns1:ea typeface="Microsoft YaHei"/>
+                <ns1:cs typeface="Microsoft YaHei"/>
+              </ns1:defRPr>
+            </ns1:defPPr>
+          </ns1:lstStyle>
+          <ns1:p>
+            <ns1:pPr algn="l">
+              <ns1:buNone/>
+              <ns1:defRPr sz="1575" b="0">
+                <ns1:solidFill>
+                  <ns1:srgbClr val="333333"/>
+                </ns1:solidFill>
+                <ns1:latin typeface="Microsoft YaHei"/>
+                <ns1:ea typeface="Microsoft YaHei"/>
+                <ns1:cs typeface="Microsoft YaHei"/>
+              </ns1:defRPr>
+            </ns1:pPr>
+            <ns1:r>
+              <ns1:rPr sz="1575" b="0">
+                <ns1:solidFill>
+                  <ns1:srgbClr val="333333"/>
+                </ns1:solidFill>
+                <ns1:latin typeface="Microsoft YaHei"/>
+                <ns1:ea typeface="Microsoft YaHei"/>
+                <ns1:cs typeface="Microsoft YaHei"/>
+              </ns1:rPr>
+              <ns1:t>协同优化低比特量化、层与专家卸载，</ns1:t>
+            </ns1:r>
+          </ns1:p>
+          <ns1:p>
+            <ns1:pPr algn="l">
+              <ns1:buNone/>
+              <ns1:defRPr sz="1575" b="0">
+                <ns1:solidFill>
+                  <ns1:srgbClr val="333333"/>
+                </ns1:solidFill>
+                <ns1:latin typeface="Microsoft YaHei"/>
+                <ns1:ea typeface="Microsoft YaHei"/>
+                <ns1:cs typeface="Microsoft YaHei"/>
+              </ns1:defRPr>
+            </ns1:pPr>
+            <ns1:r>
+              <ns1:rPr sz="1575" b="0">
+                <ns1:solidFill>
+                  <ns1:srgbClr val="333333"/>
+                </ns1:solidFill>
+                <ns1:latin typeface="Microsoft YaHei"/>
+                <ns1:ea typeface="Microsoft YaHei"/>
+                <ns1:cs typeface="Microsoft YaHei"/>
+              </ns1:rPr>
+              <ns1:t>按带宽与容量配置驻留和预取，平衡成本与时延。</ns1:t>
+            </ns1:r>
+          </ns1:p>
+        </ns0:txBody>
+      </ns0:sp>
+      <ns0:sp>
+        <ns0:nvSpPr>
+          <ns0:cNvPr id="43" name="">
+            <ns1:extLst>
+              <ns1:ext uri="{FF2B5EF4-FFF2-40B4-BE49-F238E27FC236}">
+                <ns2:creationId id="{4D487538-4701-45A2-99E4-A192122601F7}"/>
+              </ns1:ext>
+            </ns1:extLst>
+          </ns0:cNvPr>
+          <ns0:cNvSpPr>
+            <ns1:spLocks noGrp="1"/>
+          </ns0:cNvSpPr>
+          <ns0:nvPr/>
+        </ns0:nvSpPr>
+        <ns0:spPr>
+          <ns1:xfrm>
+            <ns1:off x="6334125" y="5886450"/>
+            <ns1:ext cx="5429250" cy="276225"/>
+          </ns1:xfrm>
+          <ns1:prstGeom prst="rect">
+            <ns1:avLst/>
+          </ns1:prstGeom>
+          <ns1:noFill/>
+          <ns1:ln w="0">
+            <ns1:noFill/>
+          </ns1:ln>
+        </ns0:spPr>
+        <ns0:txBody>
+          <ns1:bodyPr lIns="0" tIns="0" rIns="0" bIns="0" anchor="ctr"/>
+          <ns1:lstStyle>
+            <ns1:defPPr algn="l">
+              <ns1:defRPr sz="1800" b="1">
+                <ns1:solidFill>
+                  <ns1:srgbClr val="BC2026"/>
+                </ns1:solidFill>
+                <ns1:latin typeface="Microsoft YaHei"/>
+                <ns1:ea typeface="Microsoft YaHei"/>
+                <ns1:cs typeface="Microsoft YaHei"/>
+              </ns1:defRPr>
+            </ns1:defPPr>
+          </ns1:lstStyle>
+          <ns1:p>
+            <ns1:pPr algn="l">
+              <ns1:buNone/>
+              <ns1:defRPr sz="1800" b="1">
+                <ns1:solidFill>
+                  <ns1:srgbClr val="BC2026"/>
+                </ns1:solidFill>
+                <ns1:latin typeface="Microsoft YaHei"/>
+                <ns1:ea typeface="Microsoft YaHei"/>
+                <ns1:cs typeface="Microsoft YaHei"/>
+              </ns1:defRPr>
+            </ns1:pPr>
+            <ns1:r>
+              <ns1:rPr sz="1800" b="1">
+                <ns1:solidFill>
+                  <ns1:srgbClr val="BC2026"/>
+                </ns1:solidFill>
+                <ns1:latin typeface="Microsoft YaHei"/>
+                <ns1:ea typeface="Microsoft YaHei"/>
+                <ns1:cs typeface="Microsoft YaHei"/>
+              </ns1:rPr>
+              <ns1:t>KV Cache 分级管理</ns1:t>
+            </ns1:r>
+          </ns1:p>
+        </ns0:txBody>
+      </ns0:sp>
+      <ns0:sp>
+        <ns0:nvSpPr>
+          <ns0:cNvPr id="44" name="">
+            <ns1:extLst>
+              <ns1:ext uri="{FF2B5EF4-FFF2-40B4-BE49-F238E27FC236}">
+                <ns2:creationId id="{7A99F3FF-C23B-4EF2-92CF-9FC5DC96F0FE}"/>
+              </ns1:ext>
+            </ns1:extLst>
+          </ns0:cNvPr>
+          <ns0:cNvSpPr>
+            <ns1:spLocks noGrp="1"/>
+          </ns0:cNvSpPr>
+          <ns0:nvPr/>
+        </ns0:nvSpPr>
+        <ns0:spPr>
+          <ns1:xfrm>
+            <ns1:off x="6334125" y="6162675"/>
+            <ns1:ext cx="5429250" cy="457200"/>
+          </ns1:xfrm>
+          <ns1:prstGeom prst="rect">
+            <ns1:avLst/>
+          </ns1:prstGeom>
+          <ns1:noFill/>
+          <ns1:ln w="0">
+            <ns1:noFill/>
+          </ns1:ln>
+        </ns0:spPr>
+        <ns0:txBody>
+          <ns1:bodyPr lIns="0" tIns="0" rIns="0" bIns="0" anchor="ctr"/>
+          <ns1:lstStyle>
+            <ns1:defPPr algn="l">
+              <ns1:defRPr sz="1575" b="0">
+                <ns1:solidFill>
+                  <ns1:srgbClr val="333333"/>
+                </ns1:solidFill>
+                <ns1:latin typeface="Microsoft YaHei"/>
+                <ns1:ea typeface="Microsoft YaHei"/>
+                <ns1:cs typeface="Microsoft YaHei"/>
+              </ns1:defRPr>
+            </ns1:defPPr>
+          </ns1:lstStyle>
+          <ns1:p>
+            <ns1:pPr algn="l">
+              <ns1:buNone/>
+              <ns1:defRPr sz="1575" b="0">
+                <ns1:solidFill>
+                  <ns1:srgbClr val="333333"/>
+                </ns1:solidFill>
+                <ns1:latin typeface="Microsoft YaHei"/>
+                <ns1:ea typeface="Microsoft YaHei"/>
+                <ns1:cs typeface="Microsoft YaHei"/>
+              </ns1:defRPr>
+            </ns1:pPr>
+            <ns1:r>
+              <ns1:rPr sz="1575" b="0">
+                <ns1:solidFill>
+                  <ns1:srgbClr val="333333"/>
+                </ns1:solidFill>
+                <ns1:latin typeface="Microsoft YaHei"/>
+                <ns1:ea typeface="Microsoft YaHei"/>
+                <ns1:cs typeface="Microsoft YaHei"/>
+              </ns1:rPr>
+              <ns1:t>结合量化压缩、前缀复用与 Host 卸载，</ns1:t>
+            </ns1:r>
+          </ns1:p>
+          <ns1:p>
+            <ns1:pPr algn="l">
+              <ns1:buNone/>
+              <ns1:defRPr sz="1575" b="0">
+                <ns1:solidFill>
+                  <ns1:srgbClr val="333333"/>
+                </ns1:solidFill>
+                <ns1:latin typeface="Microsoft YaHei"/>
+                <ns1:ea typeface="Microsoft YaHei"/>
+                <ns1:cs typeface="Microsoft YaHei"/>
+              </ns1:defRPr>
+            </ns1:pPr>
+            <ns1:r>
+              <ns1:rPr sz="1575" b="0">
+                <ns1:solidFill>
+                  <ns1:srgbClr val="333333"/>
+                </ns1:solidFill>
+                <ns1:latin typeface="Microsoft YaHei"/>
+                <ns1:ea typeface="Microsoft YaHei"/>
+                <ns1:cs typeface="Microsoft YaHei"/>
+              </ns1:rPr>
+              <ns1:t>按精度、时延与峰值内存验证长序列收益。</ns1:t>
+            </ns1:r>
+          </ns1:p>
+        </ns0:txBody>
+      </ns0:sp>
+      <ns0:sp>
+        <ns0:nvSpPr>
+          <ns0:cNvPr id="45" name="">
+            <ns1:extLst>
+              <ns1:ext uri="{FF2B5EF4-FFF2-40B4-BE49-F238E27FC236}">
+                <ns2:creationId id="{B3CD8C23-9B9A-4141-B6B5-08ACBB4D13B8}"/>
+              </ns1:ext>
+            </ns1:extLst>
+          </ns0:cNvPr>
+          <ns0:cNvSpPr>
+            <ns1:spLocks noGrp="1"/>
+          </ns0:cNvSpPr>
+          <ns0:nvPr/>
+        </ns0:nvSpPr>
+        <ns0:spPr>
+          <ns1:xfrm>
+            <ns1:off x="11477625" y="6581775"/>
+            <ns1:ext cx="333375" cy="209550"/>
+          </ns1:xfrm>
+          <ns1:prstGeom prst="rect">
+            <ns1:avLst/>
+          </ns1:prstGeom>
+          <ns1:noFill/>
+          <ns1:ln w="0">
+            <ns1:noFill/>
+          </ns1:ln>
+        </ns0:spPr>
+        <ns0:txBody>
+          <ns1:bodyPr lIns="0" tIns="0" rIns="0" bIns="0" anchor="ctr"/>
+          <ns1:lstStyle>
+            <ns1:defPPr algn="ctr">
+              <ns1:defRPr sz="1275" b="0">
+                <ns1:solidFill>
+                  <ns1:srgbClr val="888888"/>
+                </ns1:solidFill>
+                <ns1:latin typeface="Microsoft YaHei"/>
+                <ns1:ea typeface="Microsoft YaHei"/>
+                <ns1:cs typeface="Microsoft YaHei"/>
+              </ns1:defRPr>
+            </ns1:defPPr>
+          </ns1:lstStyle>
+          <ns1:p>
+            <ns1:pPr algn="ctr">
+              <ns1:buNone/>
+              <ns1:defRPr sz="1275" b="0">
+                <ns1:solidFill>
+                  <ns1:srgbClr val="888888"/>
+                </ns1:solidFill>
+                <ns1:latin typeface="Microsoft YaHei"/>
+                <ns1:ea typeface="Microsoft YaHei"/>
+                <ns1:cs typeface="Microsoft YaHei"/>
+              </ns1:defRPr>
+            </ns1:pPr>
+            <ns1:r>
+              <ns1:rPr sz="1275" b="0">
+                <ns1:solidFill>
+                  <ns1:srgbClr val="888888"/>
+                </ns1:solidFill>
+                <ns1:latin typeface="Microsoft YaHei"/>
+                <ns1:ea typeface="Microsoft YaHei"/>
+                <ns1:cs typeface="Microsoft YaHei"/>
+              </ns1:rPr>
+              <ns1:t>07</ns1:t>
+            </ns1:r>
+          </ns1:p>
+        </ns0:txBody>
+      </ns0:sp>
+      <ns0:sp>
+        <ns0:nvSpPr>
+          <ns0:cNvPr id="47" name="">
+            <ns1:extLst>
+              <ns1:ext uri="{FF2B5EF4-FFF2-40B4-BE49-F238E27FC236}">
+                <ns2:creationId id="{7E94A9B1-085D-4A44-974E-9CB2AF32593F}"/>
+              </ns1:ext>
+            </ns1:extLst>
+          </ns0:cNvPr>
+          <ns0:cNvSpPr>
+            <ns1:spLocks noGrp="1"/>
+          </ns0:cNvSpPr>
+          <ns0:nvPr/>
+        </ns0:nvSpPr>
+        <ns0:spPr>
+          <ns1:xfrm>
+            <ns1:off x="266700" y="990600"/>
+            <ns1:ext cx="5524500" cy="590550"/>
+          </ns1:xfrm>
+          <ns1:prstGeom prst="roundRect">
+            <ns1:avLst>
+              <ns1:gd name="adj" fmla="val 16129"/>
+            </ns1:avLst>
+          </ns1:prstGeom>
+          <ns1:solidFill>
+            <ns1:srgbClr val="F6CED6"/>
+          </ns1:solidFill>
+          <ns1:ln w="9525">
+            <ns1:solidFill>
+              <ns1:srgbClr val="777777"/>
+            </ns1:solidFill>
+          </ns1:ln>
+        </ns0:spPr>
+      </ns0:sp>
+      <ns0:sp>
+        <ns0:nvSpPr>
+          <ns0:cNvPr id="48" name="">
+            <ns1:extLst>
+              <ns1:ext uri="{FF2B5EF4-FFF2-40B4-BE49-F238E27FC236}">
+                <ns2:creationId id="{89B69E42-0346-42F2-853F-86C6337B6421}"/>
+              </ns1:ext>
+            </ns1:extLst>
+          </ns0:cNvPr>
+          <ns0:cNvSpPr>
+            <ns1:spLocks noGrp="1"/>
+          </ns0:cNvSpPr>
+          <ns0:nvPr/>
+        </ns0:nvSpPr>
+        <ns0:spPr>
+          <ns1:xfrm>
+            <ns1:off x="371475" y="1047750"/>
+            <ns1:ext cx="5314950" cy="476250"/>
+          </ns1:xfrm>
+          <ns1:prstGeom prst="rect">
+            <ns1:avLst/>
+          </ns1:prstGeom>
+          <ns1:noFill/>
+          <ns1:ln w="0">
+            <ns1:noFill/>
+          </ns1:ln>
+        </ns0:spPr>
+        <ns0:txBody>
+          <ns1:bodyPr lIns="0" tIns="0" rIns="0" bIns="0" anchor="ctr"/>
+          <ns1:lstStyle>
+            <ns1:defPPr algn="ctr">
+              <ns1:defRPr sz="1575" b="1">
+                <ns1:solidFill>
+                  <ns1:srgbClr val="262626"/>
+                </ns1:solidFill>
+                <ns1:latin typeface="Microsoft YaHei"/>
+                <ns1:ea typeface="Microsoft YaHei"/>
+                <ns1:cs typeface="Microsoft YaHei"/>
+              </ns1:defRPr>
+            </ns1:defPPr>
+          </ns1:lstStyle>
+          <ns1:p>
+            <ns1:pPr algn="ctr">
+              <ns1:defRPr sz="1575" b="1">
+                <ns1:solidFill>
+                  <ns1:srgbClr val="262626"/>
+                </ns1:solidFill>
+                <ns1:latin typeface="Microsoft YaHei"/>
+                <ns1:ea typeface="Microsoft YaHei"/>
+                <ns1:cs typeface="Microsoft YaHei"/>
+              </ns1:defRPr>
+            </ns1:pPr>
+            <ns1:r>
+              <ns1:rPr sz="1575" b="1">
+                <ns1:solidFill>
+                  <ns1:srgbClr val="262626"/>
+                </ns1:solidFill>
+                <ns1:latin typeface="Microsoft YaHei"/>
+                <ns1:ea typeface="Microsoft YaHei"/>
+                <ns1:cs typeface="Microsoft YaHei"/>
+              </ns1:rPr>
+              <ns1:t>AI 桌面盒子 / AI PC / 边缘推理节点</ns1:t>
+            </ns1:r>
+          </ns1:p>
+          <ns1:p>
+            <ns1:pPr algn="ctr">
+              <ns1:defRPr sz="1575" b="1">
+                <ns1:solidFill>
+                  <ns1:srgbClr val="262626"/>
+                </ns1:solidFill>
+                <ns1:latin typeface="Microsoft YaHei"/>
+                <ns1:ea typeface="Microsoft YaHei"/>
+                <ns1:cs typeface="Microsoft YaHei"/>
+              </ns1:defRPr>
+            </ns1:pPr>
+            <ns1:r>
+              <ns1:rPr sz="1575" b="1">
+                <ns1:solidFill>
+                  <ns1:srgbClr val="262626"/>
+                </ns1:solidFill>
+                <ns1:latin typeface="Microsoft YaHei"/>
+                <ns1:ea typeface="Microsoft YaHei"/>
+                <ns1:cs typeface="Microsoft YaHei"/>
+              </ns1:rPr>
+              <ns1:t>多用户服务 · Agent / RAG · 本地多模态</ns1:t>
+            </ns1:r>
+          </ns1:p>
+        </ns0:txBody>
+      </ns0:sp>
+      <ns0:sp>
+        <ns0:nvSpPr>
+          <ns0:cNvPr id="49" name="">
+            <ns1:extLst>
+              <ns1:ext uri="{FF2B5EF4-FFF2-40B4-BE49-F238E27FC236}">
+                <ns2:creationId id="{F3BC5CE9-FAFD-4960-8301-DFA4C1312858}"/>
+              </ns1:ext>
+            </ns1:extLst>
+          </ns0:cNvPr>
+          <ns0:cNvSpPr>
+            <ns1:spLocks noGrp="1"/>
+          </ns0:cNvSpPr>
+          <ns0:nvPr/>
+        </ns0:nvSpPr>
+        <ns0:spPr>
+          <ns1:xfrm>
+            <ns1:off x="2809875" y="1600200"/>
+            <ns1:ext cx="428625" cy="190500"/>
+          </ns1:xfrm>
+          <ns1:prstGeom prst="rect">
+            <ns1:avLst/>
+          </ns1:prstGeom>
+          <ns1:noFill/>
+          <ns1:ln w="0">
+            <ns1:noFill/>
+          </ns1:ln>
+        </ns0:spPr>
+        <ns0:txBody>
+          <ns1:bodyPr lIns="0" tIns="0" rIns="0" bIns="0" anchor="ctr"/>
+          <ns1:lstStyle>
+            <ns1:defPPr algn="ctr">
+              <ns1:defRPr sz="1425" b="0">
+                <ns1:solidFill>
+                  <ns1:srgbClr val="777777"/>
+                </ns1:solidFill>
+                <ns1:latin typeface="Microsoft YaHei"/>
+                <ns1:ea typeface="Microsoft YaHei"/>
+                <ns1:cs typeface="Microsoft YaHei"/>
+              </ns1:defRPr>
+            </ns1:defPPr>
+          </ns1:lstStyle>
+          <ns1:p>
+            <ns1:pPr algn="ctr">
+              <ns1:defRPr sz="1425" b="0">
+                <ns1:solidFill>
+                  <ns1:srgbClr val="777777"/>
+                </ns1:solidFill>
+                <ns1:latin typeface="Microsoft YaHei"/>
+                <ns1:ea typeface="Microsoft YaHei"/>
+                <ns1:cs typeface="Microsoft YaHei"/>
+              </ns1:defRPr>
+            </ns1:pPr>
+            <ns1:r>
+              <ns1:rPr sz="1425" b="0">
+                <ns1:solidFill>
+                  <ns1:srgbClr val="777777"/>
+                </ns1:solidFill>
+                <ns1:latin typeface="Microsoft YaHei"/>
+                <ns1:ea typeface="Microsoft YaHei"/>
+                <ns1:cs typeface="Microsoft YaHei"/>
+              </ns1:rPr>
+              <ns1:t>↑</ns1:t>
+            </ns1:r>
+          </ns1:p>
+        </ns0:txBody>
+      </ns0:sp>
+      <ns0:sp>
+        <ns0:nvSpPr>
+          <ns0:cNvPr id="50" name="">
+            <ns1:extLst>
+              <ns1:ext uri="{FF2B5EF4-FFF2-40B4-BE49-F238E27FC236}">
+                <ns2:creationId id="{A8B8A6A3-B220-4A25-AD6F-FCC4041D0F92}"/>
+              </ns1:ext>
+            </ns1:extLst>
+          </ns0:cNvPr>
+          <ns0:cNvSpPr>
+            <ns1:spLocks noGrp="1"/>
+          </ns0:cNvSpPr>
+          <ns0:nvPr/>
+        </ns0:nvSpPr>
+        <ns0:spPr>
+          <ns1:xfrm>
+            <ns1:off x="266700" y="1838325"/>
+            <ns1:ext cx="5524500" cy="3143250"/>
+          </ns1:xfrm>
+          <ns1:prstGeom prst="roundRect">
+            <ns1:avLst>
+              <ns1:gd name="adj" fmla="val 3030"/>
+            </ns1:avLst>
+          </ns1:prstGeom>
+          <ns1:solidFill>
+            <ns1:srgbClr val="FFFFFF"/>
+          </ns1:solidFill>
+          <ns1:ln w="9525">
+            <ns1:solidFill>
+              <ns1:srgbClr val="777777"/>
+            </ns1:solidFill>
+          </ns1:ln>
+        </ns0:spPr>
+      </ns0:sp>
+      <ns0:sp>
+        <ns0:nvSpPr>
+          <ns0:cNvPr id="51" name="">
+            <ns1:extLst>
+              <ns1:ext uri="{FF2B5EF4-FFF2-40B4-BE49-F238E27FC236}">
+                <ns2:creationId id="{B8CC1723-09E8-4C8C-BC82-2C6428285E8E}"/>
+              </ns1:ext>
+            </ns1:extLst>
+          </ns0:cNvPr>
+          <ns0:cNvSpPr>
+            <ns1:spLocks noGrp="1"/>
+          </ns0:cNvSpPr>
+          <ns0:nvPr/>
+        </ns0:nvSpPr>
+        <ns0:spPr>
+          <ns1:xfrm>
+            <ns1:off x="381000" y="1895475"/>
+            <ns1:ext cx="5295900" cy="304800"/>
+          </ns1:xfrm>
+          <ns1:prstGeom prst="rect">
+            <ns1:avLst/>
+          </ns1:prstGeom>
+          <ns1:noFill/>
+          <ns1:ln w="0">
+            <ns1:noFill/>
+          </ns1:ln>
+        </ns0:spPr>
+        <ns0:txBody>
+          <ns1:bodyPr lIns="0" tIns="0" rIns="0" bIns="0" anchor="ctr"/>
+          <ns1:lstStyle>
+            <ns1:defPPr algn="ctr">
+              <ns1:defRPr sz="1950" b="1">
+                <ns1:solidFill>
+                  <ns1:srgbClr val="BC2026"/>
+                </ns1:solidFill>
+                <ns1:latin typeface="Microsoft YaHei"/>
+                <ns1:ea typeface="Microsoft YaHei"/>
+                <ns1:cs typeface="Microsoft YaHei"/>
+              </ns1:defRPr>
+            </ns1:defPPr>
+          </ns1:lstStyle>
+          <ns1:p>
+            <ns1:pPr algn="ctr">
+              <ns1:defRPr sz="1950" b="1">
+                <ns1:solidFill>
+                  <ns1:srgbClr val="BC2026"/>
+                </ns1:solidFill>
+                <ns1:latin typeface="Microsoft YaHei"/>
+                <ns1:ea typeface="Microsoft YaHei"/>
+                <ns1:cs typeface="Microsoft YaHei"/>
+              </ns1:defRPr>
+            </ns1:pPr>
+            <ns1:r>
+              <ns1:rPr sz="1950" b="1">
+                <ns1:solidFill>
+                  <ns1:srgbClr val="BC2026"/>
+                </ns1:solidFill>
+                <ns1:latin typeface="Microsoft YaHei"/>
+                <ns1:ea typeface="Microsoft YaHei"/>
+                <ns1:cs typeface="Microsoft YaHei"/>
+              </ns1:rPr>
+              <ns1:t>vLLM / vLLM-Ascend</ns1:t>
+            </ns1:r>
+          </ns1:p>
+        </ns0:txBody>
+      </ns0:sp>
+      <ns0:sp>
+        <ns0:nvSpPr>
+          <ns0:cNvPr id="52" name="">
+            <ns1:extLst>
+              <ns1:ext uri="{FF2B5EF4-FFF2-40B4-BE49-F238E27FC236}">
+                <ns2:creationId id="{722589D6-9044-4E21-8ADB-B332807F34C4}"/>
+              </ns1:ext>
+            </ns1:extLst>
+          </ns0:cNvPr>
+          <ns0:cNvSpPr>
+            <ns1:spLocks noGrp="1"/>
+          </ns0:cNvSpPr>
+          <ns0:nvPr/>
+        </ns0:nvSpPr>
+        <ns0:spPr>
+          <ns1:xfrm>
+            <ns1:off x="381000" y="2276475"/>
+            <ns1:ext cx="5295900" cy="314325"/>
+          </ns1:xfrm>
+          <ns1:prstGeom prst="roundRect">
+            <ns1:avLst>
+              <ns1:gd name="adj" fmla="val 30303"/>
+            </ns1:avLst>
+          </ns1:prstGeom>
+          <ns1:solidFill>
+            <ns1:srgbClr val="FFF1CD"/>
+          </ns1:solidFill>
+          <ns1:ln w="9525">
+            <ns1:solidFill>
+              <ns1:srgbClr val="777777"/>
+            </ns1:solidFill>
+          </ns1:ln>
+        </ns0:spPr>
+      </ns0:sp>
+      <ns0:sp>
+        <ns0:nvSpPr>
+          <ns0:cNvPr id="53" name="">
+            <ns1:extLst>
+              <ns1:ext uri="{FF2B5EF4-FFF2-40B4-BE49-F238E27FC236}">
+                <ns2:creationId id="{65A2467A-51CF-47FD-A594-B8B85890272F}"/>
+              </ns1:ext>
+            </ns1:extLst>
+          </ns0:cNvPr>
+          <ns0:cNvSpPr>
+            <ns1:spLocks noGrp="1"/>
+          </ns0:cNvSpPr>
+          <ns0:nvPr/>
+        </ns0:nvSpPr>
+        <ns0:spPr>
+          <ns1:xfrm>
+            <ns1:off x="447675" y="2276475"/>
+            <ns1:ext cx="5162550" cy="314325"/>
+          </ns1:xfrm>
+          <ns1:prstGeom prst="rect">
+            <ns1:avLst/>
+          </ns1:prstGeom>
+          <ns1:noFill/>
+          <ns1:ln w="0">
+            <ns1:noFill/>
+          </ns1:ln>
+        </ns0:spPr>
+        <ns0:txBody>
+          <ns1:bodyPr lIns="0" tIns="0" rIns="0" bIns="0" anchor="ctr"/>
+          <ns1:lstStyle>
+            <ns1:defPPr algn="ctr">
+              <ns1:defRPr sz="1575" b="1">
+                <ns1:solidFill>
+                  <ns1:srgbClr val="262626"/>
+                </ns1:solidFill>
+                <ns1:latin typeface="Microsoft YaHei"/>
+                <ns1:ea typeface="Microsoft YaHei"/>
+                <ns1:cs typeface="Microsoft YaHei"/>
+              </ns1:defRPr>
+            </ns1:defPPr>
+          </ns1:lstStyle>
+          <ns1:p>
+            <ns1:pPr algn="ctr">
+              <ns1:defRPr sz="1575" b="1">
+                <ns1:solidFill>
+                  <ns1:srgbClr val="262626"/>
+                </ns1:solidFill>
+                <ns1:latin typeface="Microsoft YaHei"/>
+                <ns1:ea typeface="Microsoft YaHei"/>
+                <ns1:cs typeface="Microsoft YaHei"/>
+              </ns1:defRPr>
+            </ns1:pPr>
+            <ns1:r>
+              <ns1:rPr sz="1575" b="1">
+                <ns1:solidFill>
+                  <ns1:srgbClr val="262626"/>
+                </ns1:solidFill>
+                <ns1:latin typeface="Microsoft YaHei"/>
+                <ns1:ea typeface="Microsoft YaHei"/>
+                <ns1:cs typeface="Microsoft YaHei"/>
+              </ns1:rPr>
+              <ns1:t>应用接口：API Server / Python API</ns1:t>
+            </ns1:r>
+          </ns1:p>
+        </ns0:txBody>
+      </ns0:sp>
+      <ns0:sp>
+        <ns0:nvSpPr>
+          <ns0:cNvPr id="54" name="">
+            <ns1:extLst>
+              <ns1:ext uri="{FF2B5EF4-FFF2-40B4-BE49-F238E27FC236}">
+                <ns2:creationId id="{B0FE73BA-6A84-46C8-957D-A79265E189E2}"/>
+              </ns1:ext>
+            </ns1:extLst>
+          </ns0:cNvPr>
+          <ns0:cNvSpPr>
+            <ns1:spLocks noGrp="1"/>
+          </ns0:cNvSpPr>
+          <ns0:nvPr/>
+        </ns0:nvSpPr>
+        <ns0:spPr>
+          <ns1:xfrm>
+            <ns1:off x="381000" y="2686050"/>
+            <ns1:ext cx="5295900" cy="333375"/>
+          </ns1:xfrm>
+          <ns1:prstGeom prst="roundRect">
+            <ns1:avLst>
+              <ns1:gd name="adj" fmla="val 28571"/>
+            </ns1:avLst>
+          </ns1:prstGeom>
+          <ns1:solidFill>
+            <ns1:srgbClr val="E0EFD4"/>
+          </ns1:solidFill>
+          <ns1:ln w="9525">
+            <ns1:solidFill>
+              <ns1:srgbClr val="777777"/>
+            </ns1:solidFill>
+          </ns1:ln>
+        </ns0:spPr>
+      </ns0:sp>
+      <ns0:sp>
+        <ns0:nvSpPr>
+          <ns0:cNvPr id="55" name="">
+            <ns1:extLst>
+              <ns1:ext uri="{FF2B5EF4-FFF2-40B4-BE49-F238E27FC236}">
+                <ns2:creationId id="{56629DD1-D0F8-46A3-BDB2-A928AE6B1C92}"/>
+              </ns1:ext>
+            </ns1:extLst>
+          </ns0:cNvPr>
+          <ns0:cNvSpPr>
+            <ns1:spLocks noGrp="1"/>
+          </ns0:cNvSpPr>
+          <ns0:nvPr/>
+        </ns0:nvSpPr>
+        <ns0:spPr>
+          <ns1:xfrm>
+            <ns1:off x="447675" y="2686050"/>
+            <ns1:ext cx="5162550" cy="333375"/>
+          </ns1:xfrm>
+          <ns1:prstGeom prst="rect">
+            <ns1:avLst/>
+          </ns1:prstGeom>
+          <ns1:noFill/>
+          <ns1:ln w="0">
+            <ns1:noFill/>
+          </ns1:ln>
+        </ns0:spPr>
+        <ns0:txBody>
+          <ns1:bodyPr lIns="0" tIns="0" rIns="0" bIns="0" anchor="ctr"/>
+          <ns1:lstStyle>
+            <ns1:defPPr algn="ctr">
+              <ns1:defRPr sz="1500" b="0">
+                <ns1:solidFill>
+                  <ns1:srgbClr val="262626"/>
+                </ns1:solidFill>
+                <ns1:latin typeface="Microsoft YaHei"/>
+                <ns1:ea typeface="Microsoft YaHei"/>
+                <ns1:cs typeface="Microsoft YaHei"/>
+              </ns1:defRPr>
+            </ns1:defPPr>
+          </ns1:lstStyle>
+          <ns1:p>
+            <ns1:pPr algn="ctr">
+              <ns1:defRPr sz="1500" b="0">
+                <ns1:solidFill>
+                  <ns1:srgbClr val="262626"/>
+                </ns1:solidFill>
+                <ns1:latin typeface="Microsoft YaHei"/>
+                <ns1:ea typeface="Microsoft YaHei"/>
+                <ns1:cs typeface="Microsoft YaHei"/>
+              </ns1:defRPr>
+            </ns1:pPr>
+            <ns1:r>
+              <ns1:rPr sz="1500" b="0">
+                <ns1:solidFill>
+                  <ns1:srgbClr val="262626"/>
+                </ns1:solidFill>
+                <ns1:latin typeface="Microsoft YaHei"/>
+                <ns1:ea typeface="Microsoft YaHei"/>
+                <ns1:cs typeface="Microsoft YaHei"/>
+              </ns1:rPr>
+              <ns1:t>调度策略：持续批处理 / 分块 Prefill</ns1:t>
+            </ns1:r>
+          </ns1:p>
+        </ns0:txBody>
+      </ns0:sp>
+      <ns0:sp>
+        <ns0:nvSpPr>
+          <ns0:cNvPr id="56" name="">
+            <ns1:extLst>
+              <ns1:ext uri="{FF2B5EF4-FFF2-40B4-BE49-F238E27FC236}">
+                <ns2:creationId id="{155253C7-C01F-4DF0-90FA-10694DCE8824}"/>
+              </ns1:ext>
+            </ns1:extLst>
+          </ns0:cNvPr>
+          <ns0:cNvSpPr>
+            <ns1:spLocks noGrp="1"/>
+          </ns0:cNvSpPr>
+          <ns0:nvPr/>
+        </ns0:nvSpPr>
+        <ns0:spPr>
+          <ns1:xfrm>
+            <ns1:off x="381000" y="3124200"/>
+            <ns1:ext cx="2590800" cy="1752600"/>
+          </ns1:xfrm>
+          <ns1:prstGeom prst="roundRect">
+            <ns1:avLst>
+              <ns1:gd name="adj" fmla="val 5435"/>
+            </ns1:avLst>
+          </ns1:prstGeom>
+          <ns1:solidFill>
+            <ns1:srgbClr val="FFF1CD"/>
+          </ns1:solidFill>
+          <ns1:ln w="9525">
+            <ns1:solidFill>
+              <ns1:srgbClr val="777777"/>
+            </ns1:solidFill>
+          </ns1:ln>
+        </ns0:spPr>
+      </ns0:sp>
+      <ns0:sp>
+        <ns0:nvSpPr>
+          <ns0:cNvPr id="57" name="">
+            <ns1:extLst>
+              <ns1:ext uri="{FF2B5EF4-FFF2-40B4-BE49-F238E27FC236}">
+                <ns2:creationId id="{7679DF1D-482F-4374-B29A-FE6B523069F6}"/>
+              </ns1:ext>
+            </ns1:extLst>
+          </ns0:cNvPr>
+          <ns0:cNvSpPr>
+            <ns1:spLocks noGrp="1"/>
+          </ns0:cNvSpPr>
+          <ns0:nvPr/>
+        </ns0:nvSpPr>
+        <ns0:spPr>
+          <ns1:xfrm>
+            <ns1:off x="3086100" y="3124200"/>
+            <ns1:ext cx="2590800" cy="1752600"/>
+          </ns1:xfrm>
+          <ns1:prstGeom prst="roundRect">
+            <ns1:avLst>
+              <ns1:gd name="adj" fmla="val 5435"/>
+            </ns1:avLst>
+          </ns1:prstGeom>
+          <ns1:solidFill>
+            <ns1:srgbClr val="FFF1CD"/>
+          </ns1:solidFill>
+          <ns1:ln w="9525">
+            <ns1:solidFill>
+              <ns1:srgbClr val="777777"/>
+            </ns1:solidFill>
+          </ns1:ln>
+        </ns0:spPr>
+      </ns0:sp>
+      <ns0:sp>
+        <ns0:nvSpPr>
+          <ns0:cNvPr id="58" name="">
+            <ns1:extLst>
+              <ns1:ext uri="{FF2B5EF4-FFF2-40B4-BE49-F238E27FC236}">
+                <ns2:creationId id="{2E2C5836-E208-44C8-9EC0-3ABEF190BE96}"/>
+              </ns1:ext>
+            </ns1:extLst>
+          </ns0:cNvPr>
+          <ns0:cNvSpPr>
+            <ns1:spLocks noGrp="1"/>
+          </ns0:cNvSpPr>
+          <ns0:nvPr/>
+        </ns0:nvSpPr>
+        <ns0:spPr>
+          <ns1:xfrm>
+            <ns1:off x="457200" y="3171825"/>
+            <ns1:ext cx="2438400" cy="266700"/>
+          </ns1:xfrm>
+          <ns1:prstGeom prst="rect">
+            <ns1:avLst/>
+          </ns1:prstGeom>
+          <ns1:noFill/>
+          <ns1:ln w="0">
+            <ns1:noFill/>
+          </ns1:ln>
+        </ns0:spPr>
+        <ns0:txBody>
+          <ns1:bodyPr lIns="0" tIns="0" rIns="0" bIns="0" anchor="ctr"/>
+          <ns1:lstStyle>
+            <ns1:defPPr algn="ctr">
+              <ns1:defRPr sz="1725" b="1">
+                <ns1:solidFill>
+                  <ns1:srgbClr val="BC2026"/>
+                </ns1:solidFill>
+                <ns1:latin typeface="Microsoft YaHei"/>
+                <ns1:ea typeface="Microsoft YaHei"/>
+                <ns1:cs typeface="Microsoft YaHei"/>
+              </ns1:defRPr>
+            </ns1:defPPr>
+          </ns1:lstStyle>
+          <ns1:p>
+            <ns1:pPr algn="ctr">
+              <ns1:defRPr sz="1725" b="1">
+                <ns1:solidFill>
+                  <ns1:srgbClr val="BC2026"/>
+                </ns1:solidFill>
+                <ns1:latin typeface="Microsoft YaHei"/>
+                <ns1:ea typeface="Microsoft YaHei"/>
+                <ns1:cs typeface="Microsoft YaHei"/>
+              </ns1:defRPr>
+            </ns1:pPr>
+            <ns1:r>
+              <ns1:rPr sz="1725" b="1">
+                <ns1:solidFill>
+                  <ns1:srgbClr val="BC2026"/>
+                </ns1:solidFill>
+                <ns1:latin typeface="Microsoft YaHei"/>
+                <ns1:ea typeface="Microsoft YaHei"/>
+                <ns1:cs typeface="Microsoft YaHei"/>
+              </ns1:rPr>
+              <ns1:t>推理加速</ns1:t>
+            </ns1:r>
+          </ns1:p>
+        </ns0:txBody>
+      </ns0:sp>
+      <ns0:sp>
+        <ns0:nvSpPr>
+          <ns0:cNvPr id="59" name="">
+            <ns1:extLst>
+              <ns1:ext uri="{FF2B5EF4-FFF2-40B4-BE49-F238E27FC236}">
+                <ns2:creationId id="{D3D2724E-B136-4F71-9031-6F3C5BDE3EC2}"/>
+              </ns1:ext>
+            </ns1:extLst>
+          </ns0:cNvPr>
+          <ns0:cNvSpPr>
+            <ns1:spLocks noGrp="1"/>
+          </ns0:cNvSpPr>
+          <ns0:nvPr/>
+        </ns0:nvSpPr>
+        <ns0:spPr>
+          <ns1:xfrm>
+            <ns1:off x="3162300" y="3171825"/>
+            <ns1:ext cx="2438400" cy="266700"/>
+          </ns1:xfrm>
+          <ns1:prstGeom prst="rect">
+            <ns1:avLst/>
+          </ns1:prstGeom>
+          <ns1:noFill/>
+          <ns1:ln w="0">
+            <ns1:noFill/>
+          </ns1:ln>
+        </ns0:spPr>
+        <ns0:txBody>
+          <ns1:bodyPr lIns="0" tIns="0" rIns="0" bIns="0" anchor="ctr"/>
+          <ns1:lstStyle>
+            <ns1:defPPr algn="ctr">
+              <ns1:defRPr sz="1725" b="1">
+                <ns1:solidFill>
+                  <ns1:srgbClr val="BC2026"/>
+                </ns1:solidFill>
+                <ns1:latin typeface="Microsoft YaHei"/>
+                <ns1:ea typeface="Microsoft YaHei"/>
+                <ns1:cs typeface="Microsoft YaHei"/>
+              </ns1:defRPr>
+            </ns1:defPPr>
+          </ns1:lstStyle>
+          <ns1:p>
+            <ns1:pPr algn="ctr">
+              <ns1:defRPr sz="1725" b="1">
+                <ns1:solidFill>
+                  <ns1:srgbClr val="BC2026"/>
+                </ns1:solidFill>
+                <ns1:latin typeface="Microsoft YaHei"/>
+                <ns1:ea typeface="Microsoft YaHei"/>
+                <ns1:cs typeface="Microsoft YaHei"/>
+              </ns1:defRPr>
+            </ns1:pPr>
+            <ns1:r>
+              <ns1:rPr sz="1725" b="1">
+                <ns1:solidFill>
+                  <ns1:srgbClr val="BC2026"/>
+                </ns1:solidFill>
+                <ns1:latin typeface="Microsoft YaHei"/>
+                <ns1:ea typeface="Microsoft YaHei"/>
+                <ns1:cs typeface="Microsoft YaHei"/>
+              </ns1:rPr>
+              <ns1:t>内存 / 显存优化</ns1:t>
+            </ns1:r>
+          </ns1:p>
+        </ns0:txBody>
+      </ns0:sp>
+      <ns0:sp>
+        <ns0:nvSpPr>
+          <ns0:cNvPr id="60" name="">
+            <ns1:extLst>
+              <ns1:ext uri="{FF2B5EF4-FFF2-40B4-BE49-F238E27FC236}">
+                <ns2:creationId id="{D77D02F2-E193-4668-AAD0-4D57EB8CE4DE}"/>
+              </ns1:ext>
+            </ns1:extLst>
+          </ns0:cNvPr>
+          <ns0:cNvSpPr>
+            <ns1:spLocks noGrp="1"/>
+          </ns0:cNvSpPr>
+          <ns0:nvPr/>
+        </ns0:nvSpPr>
+        <ns0:spPr>
+          <ns1:xfrm>
+            <ns1:off x="457200" y="3495675"/>
+            <ns1:ext cx="1181100" cy="247650"/>
+          </ns1:xfrm>
+          <ns1:prstGeom prst="rect">
+            <ns1:avLst/>
+          </ns1:prstGeom>
+          <ns1:solidFill>
+            <ns1:srgbClr val="FFF1CD"/>
+          </ns1:solidFill>
+          <ns1:ln w="9525">
+            <ns1:solidFill>
+              <ns1:srgbClr val="777777"/>
+            </ns1:solidFill>
+          </ns1:ln>
+        </ns0:spPr>
+      </ns0:sp>
+      <ns0:sp>
+        <ns0:nvSpPr>
+          <ns0:cNvPr id="61" name="">
+            <ns1:extLst>
+              <ns1:ext uri="{FF2B5EF4-FFF2-40B4-BE49-F238E27FC236}">
+                <ns2:creationId id="{52695565-BBB0-4508-81BA-A152731FC40A}"/>
+              </ns1:ext>
+            </ns1:extLst>
+          </ns0:cNvPr>
+          <ns0:cNvSpPr>
+            <ns1:spLocks noGrp="1"/>
+          </ns0:cNvSpPr>
+          <ns0:nvPr/>
+        </ns0:nvSpPr>
+        <ns0:spPr>
+          <ns1:xfrm>
+            <ns1:off x="485775" y="3495675"/>
+            <ns1:ext cx="1123950" cy="247650"/>
+          </ns1:xfrm>
+          <ns1:prstGeom prst="rect">
+            <ns1:avLst/>
+          </ns1:prstGeom>
+          <ns1:noFill/>
+          <ns1:ln w="0">
+            <ns1:noFill/>
+          </ns1:ln>
+        </ns0:spPr>
+        <ns0:txBody>
+          <ns1:bodyPr lIns="0" tIns="0" rIns="0" bIns="0" anchor="ctr"/>
+          <ns1:lstStyle>
+            <ns1:defPPr algn="ctr">
+              <ns1:defRPr sz="1275" b="0">
+                <ns1:solidFill>
+                  <ns1:srgbClr val="262626"/>
+                </ns1:solidFill>
+                <ns1:latin typeface="Microsoft YaHei"/>
+                <ns1:ea typeface="Microsoft YaHei"/>
+                <ns1:cs typeface="Microsoft YaHei"/>
+              </ns1:defRPr>
+            </ns1:defPPr>
+          </ns1:lstStyle>
+          <ns1:p>
+            <ns1:pPr algn="ctr">
+              <ns1:defRPr sz="1275" b="0">
+                <ns1:solidFill>
+                  <ns1:srgbClr val="262626"/>
+                </ns1:solidFill>
+                <ns1:latin typeface="Microsoft YaHei"/>
+                <ns1:ea typeface="Microsoft YaHei"/>
+                <ns1:cs typeface="Microsoft YaHei"/>
+              </ns1:defRPr>
+            </ns1:pPr>
+            <ns1:r>
+              <ns1:rPr sz="1275" b="0">
+                <ns1:solidFill>
+                  <ns1:srgbClr val="262626"/>
+                </ns1:solidFill>
+                <ns1:latin typeface="Microsoft YaHei"/>
+                <ns1:ea typeface="Microsoft YaHei"/>
+                <ns1:cs typeface="Microsoft YaHei"/>
+              </ns1:rPr>
+              <ns1:t>ACL Graph</ns1:t>
+            </ns1:r>
+          </ns1:p>
+        </ns0:txBody>
+      </ns0:sp>
+      <ns0:sp>
+        <ns0:nvSpPr>
+          <ns0:cNvPr id="62" name="">
+            <ns1:extLst>
+              <ns1:ext uri="{FF2B5EF4-FFF2-40B4-BE49-F238E27FC236}">
+                <ns2:creationId id="{CC08E3A4-79CF-46AD-A79E-20058A425077}"/>
+              </ns1:ext>
+            </ns1:extLst>
+          </ns0:cNvPr>
+          <ns0:cNvSpPr>
+            <ns1:spLocks noGrp="1"/>
+          </ns0:cNvSpPr>
+          <ns0:nvPr/>
+        </ns0:nvSpPr>
+        <ns0:spPr>
+          <ns1:xfrm>
+            <ns1:off x="1714500" y="3495675"/>
+            <ns1:ext cx="1181100" cy="247650"/>
+          </ns1:xfrm>
+          <ns1:prstGeom prst="rect">
+            <ns1:avLst/>
+          </ns1:prstGeom>
+          <ns1:solidFill>
+            <ns1:srgbClr val="FFF1CD"/>
+          </ns1:solidFill>
+          <ns1:ln w="9525">
+            <ns1:solidFill>
+              <ns1:srgbClr val="777777"/>
+            </ns1:solidFill>
+          </ns1:ln>
+        </ns0:spPr>
+      </ns0:sp>
+      <ns0:sp>
+        <ns0:nvSpPr>
+          <ns0:cNvPr id="63" name="">
+            <ns1:extLst>
+              <ns1:ext uri="{FF2B5EF4-FFF2-40B4-BE49-F238E27FC236}">
+                <ns2:creationId id="{EBA8E7CE-A7D9-4B6D-BFF3-096A27D5DF35}"/>
+              </ns1:ext>
+            </ns1:extLst>
+          </ns0:cNvPr>
+          <ns0:cNvSpPr>
+            <ns1:spLocks noGrp="1"/>
+          </ns0:cNvSpPr>
+          <ns0:nvPr/>
+        </ns0:nvSpPr>
+        <ns0:spPr>
+          <ns1:xfrm>
+            <ns1:off x="1743075" y="3495675"/>
+            <ns1:ext cx="1123950" cy="247650"/>
+          </ns1:xfrm>
+          <ns1:prstGeom prst="rect">
+            <ns1:avLst/>
+          </ns1:prstGeom>
+          <ns1:noFill/>
+          <ns1:ln w="0">
+            <ns1:noFill/>
+          </ns1:ln>
+        </ns0:spPr>
+        <ns0:txBody>
+          <ns1:bodyPr lIns="0" tIns="0" rIns="0" bIns="0" anchor="ctr"/>
+          <ns1:lstStyle>
+            <ns1:defPPr algn="ctr">
+              <ns1:defRPr sz="1275" b="0">
+                <ns1:solidFill>
+                  <ns1:srgbClr val="262626"/>
+                </ns1:solidFill>
+                <ns1:latin typeface="Microsoft YaHei"/>
+                <ns1:ea typeface="Microsoft YaHei"/>
+                <ns1:cs typeface="Microsoft YaHei"/>
+              </ns1:defRPr>
+            </ns1:defPPr>
+          </ns1:lstStyle>
+          <ns1:p>
+            <ns1:pPr algn="ctr">
+              <ns1:defRPr sz="1275" b="0">
+                <ns1:solidFill>
+                  <ns1:srgbClr val="262626"/>
+                </ns1:solidFill>
+                <ns1:latin typeface="Microsoft YaHei"/>
+                <ns1:ea typeface="Microsoft YaHei"/>
+                <ns1:cs typeface="Microsoft YaHei"/>
+              </ns1:defRPr>
+            </ns1:pPr>
+            <ns1:r>
+              <ns1:rPr sz="1275" b="0">
+                <ns1:solidFill>
+                  <ns1:srgbClr val="262626"/>
+                </ns1:solidFill>
+                <ns1:latin typeface="Microsoft YaHei"/>
+                <ns1:ea typeface="Microsoft YaHei"/>
+                <ns1:cs typeface="Microsoft YaHei"/>
+              </ns1:rPr>
+              <ns1:t>Prefix Cache</ns1:t>
+            </ns1:r>
+          </ns1:p>
+        </ns0:txBody>
+      </ns0:sp>
+      <ns0:sp>
+        <ns0:nvSpPr>
+          <ns0:cNvPr id="64" name="">
+            <ns1:extLst>
+              <ns1:ext uri="{FF2B5EF4-FFF2-40B4-BE49-F238E27FC236}">
+                <ns2:creationId id="{526BC283-29E2-425C-9992-F0B80382CB5E}"/>
+              </ns1:ext>
+            </ns1:extLst>
+          </ns0:cNvPr>
+          <ns0:cNvSpPr>
+            <ns1:spLocks noGrp="1"/>
+          </ns0:cNvSpPr>
+          <ns0:nvPr/>
+        </ns0:nvSpPr>
+        <ns0:spPr>
+          <ns1:xfrm>
+            <ns1:off x="457200" y="3790950"/>
+            <ns1:ext cx="2438400" cy="200025"/>
+          </ns1:xfrm>
+          <ns1:prstGeom prst="rect">
+            <ns1:avLst/>
+          </ns1:prstGeom>
+          <ns1:noFill/>
+          <ns1:ln w="0">
+            <ns1:noFill/>
+          </ns1:ln>
+        </ns0:spPr>
+        <ns0:txBody>
+          <ns1:bodyPr lIns="0" tIns="0" rIns="0" bIns="0" anchor="ctr"/>
+          <ns1:lstStyle>
+            <ns1:defPPr algn="ctr">
+              <ns1:defRPr sz="1275" b="1">
+                <ns1:solidFill>
+                  <ns1:srgbClr val="262626"/>
+                </ns1:solidFill>
+                <ns1:latin typeface="Microsoft YaHei"/>
+                <ns1:ea typeface="Microsoft YaHei"/>
+                <ns1:cs typeface="Microsoft YaHei"/>
+              </ns1:defRPr>
+            </ns1:defPPr>
+          </ns1:lstStyle>
+          <ns1:p>
+            <ns1:pPr algn="ctr">
+              <ns1:defRPr sz="1275" b="1">
+                <ns1:solidFill>
+                  <ns1:srgbClr val="262626"/>
+                </ns1:solidFill>
+                <ns1:latin typeface="Microsoft YaHei"/>
+                <ns1:ea typeface="Microsoft YaHei"/>
+                <ns1:cs typeface="Microsoft YaHei"/>
+              </ns1:defRPr>
+            </ns1:pPr>
+            <ns1:r>
+              <ns1:rPr sz="1275" b="1">
+                <ns1:solidFill>
+                  <ns1:srgbClr val="262626"/>
+                </ns1:solidFill>
+                <ns1:latin typeface="Microsoft YaHei"/>
+                <ns1:ea typeface="Microsoft YaHei"/>
+                <ns1:cs typeface="Microsoft YaHei"/>
+              </ns1:rPr>
+              <ns1:t>投机解码</ns1:t>
+            </ns1:r>
+          </ns1:p>
+        </ns0:txBody>
+      </ns0:sp>
+      <ns0:sp>
+        <ns0:nvSpPr>
+          <ns0:cNvPr id="65" name="">
+            <ns1:extLst>
+              <ns1:ext uri="{FF2B5EF4-FFF2-40B4-BE49-F238E27FC236}">
+                <ns2:creationId id="{A2EDF555-E37A-4F62-8E77-A96117F6BC65}"/>
+              </ns1:ext>
+            </ns1:extLst>
+          </ns0:cNvPr>
+          <ns0:cNvSpPr>
+            <ns1:spLocks noGrp="1"/>
+          </ns0:cNvSpPr>
+          <ns0:nvPr/>
+        </ns0:nvSpPr>
+        <ns0:spPr>
+          <ns1:xfrm>
+            <ns1:off x="457200" y="4019550"/>
+            <ns1:ext cx="581025" cy="247650"/>
+          </ns1:xfrm>
+          <ns1:prstGeom prst="rect">
+            <ns1:avLst/>
+          </ns1:prstGeom>
+          <ns1:solidFill>
+            <ns1:srgbClr val="E0EFD4"/>
+          </ns1:solidFill>
+          <ns1:ln w="9525">
+            <ns1:solidFill>
+              <ns1:srgbClr val="777777"/>
+            </ns1:solidFill>
+          </ns1:ln>
+        </ns0:spPr>
+      </ns0:sp>
+      <ns0:sp>
+        <ns0:nvSpPr>
+          <ns0:cNvPr id="66" name="">
+            <ns1:extLst>
+              <ns1:ext uri="{FF2B5EF4-FFF2-40B4-BE49-F238E27FC236}">
+                <ns2:creationId id="{6B08A785-1908-462D-9018-AF459F045A20}"/>
+              </ns1:ext>
+            </ns1:extLst>
+          </ns0:cNvPr>
+          <ns0:cNvSpPr>
+            <ns1:spLocks noGrp="1"/>
+          </ns0:cNvSpPr>
+          <ns0:nvPr/>
+        </ns0:nvSpPr>
+        <ns0:spPr>
+          <ns1:xfrm>
+            <ns1:off x="485775" y="4019550"/>
+            <ns1:ext cx="523875" cy="247650"/>
+          </ns1:xfrm>
+          <ns1:prstGeom prst="rect">
+            <ns1:avLst/>
+          </ns1:prstGeom>
+          <ns1:noFill/>
+          <ns1:ln w="0">
+            <ns1:noFill/>
+          </ns1:ln>
+        </ns0:spPr>
+        <ns0:txBody>
+          <ns1:bodyPr lIns="0" tIns="0" rIns="0" bIns="0" anchor="ctr"/>
+          <ns1:lstStyle>
+            <ns1:defPPr algn="ctr">
+              <ns1:defRPr sz="1125" b="0">
+                <ns1:solidFill>
+                  <ns1:srgbClr val="262626"/>
+                </ns1:solidFill>
+                <ns1:latin typeface="Microsoft YaHei"/>
+                <ns1:ea typeface="Microsoft YaHei"/>
+                <ns1:cs typeface="Microsoft YaHei"/>
+              </ns1:defRPr>
+            </ns1:defPPr>
+          </ns1:lstStyle>
+          <ns1:p>
+            <ns1:pPr algn="ctr">
+              <ns1:defRPr sz="1125" b="0">
+                <ns1:solidFill>
+                  <ns1:srgbClr val="262626"/>
+                </ns1:solidFill>
+                <ns1:latin typeface="Microsoft YaHei"/>
+                <ns1:ea typeface="Microsoft YaHei"/>
+                <ns1:cs typeface="Microsoft YaHei"/>
+              </ns1:defRPr>
+            </ns1:pPr>
+            <ns1:r>
+              <ns1:rPr sz="1125" b="0">
+                <ns1:solidFill>
+                  <ns1:srgbClr val="262626"/>
+                </ns1:solidFill>
+                <ns1:latin typeface="Microsoft YaHei"/>
+                <ns1:ea typeface="Microsoft YaHei"/>
+                <ns1:cs typeface="Microsoft YaHei"/>
+              </ns1:rPr>
+              <ns1:t>DSpark</ns1:t>
+            </ns1:r>
+          </ns1:p>
+        </ns0:txBody>
+      </ns0:sp>
+      <ns0:sp>
+        <ns0:nvSpPr>
+          <ns0:cNvPr id="67" name="">
+            <ns1:extLst>
+              <ns1:ext uri="{FF2B5EF4-FFF2-40B4-BE49-F238E27FC236}">
+                <ns2:creationId id="{CE14B6A2-329A-4FE7-80DB-26513D652E66}"/>
+              </ns1:ext>
+            </ns1:extLst>
+          </ns0:cNvPr>
+          <ns0:cNvSpPr>
+            <ns1:spLocks noGrp="1"/>
+          </ns0:cNvSpPr>
+          <ns0:nvPr/>
+        </ns0:nvSpPr>
+        <ns0:spPr>
+          <ns1:xfrm>
+            <ns1:off x="1076325" y="4019550"/>
+            <ns1:ext cx="581025" cy="247650"/>
+          </ns1:xfrm>
+          <ns1:prstGeom prst="rect">
+            <ns1:avLst/>
+          </ns1:prstGeom>
+          <ns1:solidFill>
+            <ns1:srgbClr val="E0EFD4"/>
+          </ns1:solidFill>
+          <ns1:ln w="9525">
+            <ns1:solidFill>
+              <ns1:srgbClr val="777777"/>
+            </ns1:solidFill>
+          </ns1:ln>
+        </ns0:spPr>
+      </ns0:sp>
+      <ns0:sp>
+        <ns0:nvSpPr>
+          <ns0:cNvPr id="68" name="">
+            <ns1:extLst>
+              <ns1:ext uri="{FF2B5EF4-FFF2-40B4-BE49-F238E27FC236}">
+                <ns2:creationId id="{470329C6-CDC8-4AE0-B5FB-2E51CDAAB979}"/>
+              </ns1:ext>
+            </ns1:extLst>
+          </ns0:cNvPr>
+          <ns0:cNvSpPr>
+            <ns1:spLocks noGrp="1"/>
+          </ns0:cNvSpPr>
+          <ns0:nvPr/>
+        </ns0:nvSpPr>
+        <ns0:spPr>
+          <ns1:xfrm>
+            <ns1:off x="1104900" y="4019550"/>
+            <ns1:ext cx="523875" cy="247650"/>
+          </ns1:xfrm>
+          <ns1:prstGeom prst="rect">
+            <ns1:avLst/>
+          </ns1:prstGeom>
+          <ns1:noFill/>
+          <ns1:ln w="0">
+            <ns1:noFill/>
+          </ns1:ln>
+        </ns0:spPr>
+        <ns0:txBody>
+          <ns1:bodyPr lIns="0" tIns="0" rIns="0" bIns="0" anchor="ctr"/>
+          <ns1:lstStyle>
+            <ns1:defPPr algn="ctr">
+              <ns1:defRPr sz="1125" b="0">
+                <ns1:solidFill>
+                  <ns1:srgbClr val="262626"/>
+                </ns1:solidFill>
+                <ns1:latin typeface="Microsoft YaHei"/>
+                <ns1:ea typeface="Microsoft YaHei"/>
+                <ns1:cs typeface="Microsoft YaHei"/>
+              </ns1:defRPr>
+            </ns1:defPPr>
+          </ns1:lstStyle>
+          <ns1:p>
+            <ns1:pPr algn="ctr">
+              <ns1:defRPr sz="1125" b="0">
+                <ns1:solidFill>
+                  <ns1:srgbClr val="262626"/>
+                </ns1:solidFill>
+                <ns1:latin typeface="Microsoft YaHei"/>
+                <ns1:ea typeface="Microsoft YaHei"/>
+                <ns1:cs typeface="Microsoft YaHei"/>
+              </ns1:defRPr>
+            </ns1:pPr>
+            <ns1:r>
+              <ns1:rPr sz="1125" b="0">
+                <ns1:solidFill>
+                  <ns1:srgbClr val="262626"/>
+                </ns1:solidFill>
+                <ns1:latin typeface="Microsoft YaHei"/>
+                <ns1:ea typeface="Microsoft YaHei"/>
+                <ns1:cs typeface="Microsoft YaHei"/>
+              </ns1:rPr>
+              <ns1:t>DFlash</ns1:t>
+            </ns1:r>
+          </ns1:p>
+        </ns0:txBody>
+      </ns0:sp>
+      <ns0:sp>
+        <ns0:nvSpPr>
+          <ns0:cNvPr id="69" name="">
+            <ns1:extLst>
+              <ns1:ext uri="{FF2B5EF4-FFF2-40B4-BE49-F238E27FC236}">
+                <ns2:creationId id="{61E433D0-6DA0-4DAA-A449-860D4D15D4A5}"/>
+              </ns1:ext>
+            </ns1:extLst>
+          </ns0:cNvPr>
+          <ns0:cNvSpPr>
+            <ns1:spLocks noGrp="1"/>
+          </ns0:cNvSpPr>
+          <ns0:nvPr/>
+        </ns0:nvSpPr>
+        <ns0:spPr>
+          <ns1:xfrm>
+            <ns1:off x="1695450" y="4019550"/>
+            <ns1:ext cx="581025" cy="247650"/>
+          </ns1:xfrm>
+          <ns1:prstGeom prst="rect">
+            <ns1:avLst/>
+          </ns1:prstGeom>
+          <ns1:solidFill>
+            <ns1:srgbClr val="E0EFD4"/>
+          </ns1:solidFill>
+          <ns1:ln w="9525">
+            <ns1:solidFill>
+              <ns1:srgbClr val="777777"/>
+            </ns1:solidFill>
+          </ns1:ln>
+        </ns0:spPr>
+      </ns0:sp>
+      <ns0:sp>
+        <ns0:nvSpPr>
+          <ns0:cNvPr id="70" name="">
+            <ns1:extLst>
+              <ns1:ext uri="{FF2B5EF4-FFF2-40B4-BE49-F238E27FC236}">
+                <ns2:creationId id="{B8538869-6FF3-4B85-9B77-A24D0744AC91}"/>
+              </ns1:ext>
+            </ns1:extLst>
+          </ns0:cNvPr>
+          <ns0:cNvSpPr>
+            <ns1:spLocks noGrp="1"/>
+          </ns0:cNvSpPr>
+          <ns0:nvPr/>
+        </ns0:nvSpPr>
+        <ns0:spPr>
+          <ns1:xfrm>
+            <ns1:off x="1724025" y="4019550"/>
+            <ns1:ext cx="523875" cy="247650"/>
+          </ns1:xfrm>
+          <ns1:prstGeom prst="rect">
+            <ns1:avLst/>
+          </ns1:prstGeom>
+          <ns1:noFill/>
+          <ns1:ln w="0">
+            <ns1:noFill/>
+          </ns1:ln>
+        </ns0:spPr>
+        <ns0:txBody>
+          <ns1:bodyPr lIns="0" tIns="0" rIns="0" bIns="0" anchor="ctr"/>
+          <ns1:lstStyle>
+            <ns1:defPPr algn="ctr">
+              <ns1:defRPr sz="1125" b="0">
+                <ns1:solidFill>
+                  <ns1:srgbClr val="262626"/>
+                </ns1:solidFill>
+                <ns1:latin typeface="Microsoft YaHei"/>
+                <ns1:ea typeface="Microsoft YaHei"/>
+                <ns1:cs typeface="Microsoft YaHei"/>
+              </ns1:defRPr>
+            </ns1:defPPr>
+          </ns1:lstStyle>
+          <ns1:p>
+            <ns1:pPr algn="ctr">
+              <ns1:defRPr sz="1125" b="0">
+                <ns1:solidFill>
+                  <ns1:srgbClr val="262626"/>
+                </ns1:solidFill>
+                <ns1:latin typeface="Microsoft YaHei"/>
+                <ns1:ea typeface="Microsoft YaHei"/>
+                <ns1:cs typeface="Microsoft YaHei"/>
+              </ns1:defRPr>
+            </ns1:pPr>
+            <ns1:r>
+              <ns1:rPr sz="1125" b="0">
+                <ns1:solidFill>
+                  <ns1:srgbClr val="262626"/>
+                </ns1:solidFill>
+                <ns1:latin typeface="Microsoft YaHei"/>
+                <ns1:ea typeface="Microsoft YaHei"/>
+                <ns1:cs typeface="Microsoft YaHei"/>
+              </ns1:rPr>
+              <ns1:t>EAGLE3</ns1:t>
+            </ns1:r>
+          </ns1:p>
+        </ns0:txBody>
+      </ns0:sp>
+      <ns0:sp>
+        <ns0:nvSpPr>
+          <ns0:cNvPr id="71" name="">
+            <ns1:extLst>
+              <ns1:ext uri="{FF2B5EF4-FFF2-40B4-BE49-F238E27FC236}">
+                <ns2:creationId id="{6CFB8563-D2FB-4427-A32F-333C0CB306BF}"/>
+              </ns1:ext>
+            </ns1:extLst>
+          </ns0:cNvPr>
+          <ns0:cNvSpPr>
+            <ns1:spLocks noGrp="1"/>
+          </ns0:cNvSpPr>
+          <ns0:nvPr/>
+        </ns0:nvSpPr>
+        <ns0:spPr>
+          <ns1:xfrm>
+            <ns1:off x="2314575" y="4019550"/>
+            <ns1:ext cx="581025" cy="247650"/>
+          </ns1:xfrm>
+          <ns1:prstGeom prst="rect">
+            <ns1:avLst/>
+          </ns1:prstGeom>
+          <ns1:solidFill>
+            <ns1:srgbClr val="FFF1CD"/>
+          </ns1:solidFill>
+          <ns1:ln w="9525">
+            <ns1:solidFill>
+              <ns1:srgbClr val="777777"/>
+            </ns1:solidFill>
+          </ns1:ln>
+        </ns0:spPr>
+      </ns0:sp>
+      <ns0:sp>
+        <ns0:nvSpPr>
+          <ns0:cNvPr id="72" name="">
+            <ns1:extLst>
+              <ns1:ext uri="{FF2B5EF4-FFF2-40B4-BE49-F238E27FC236}">
+                <ns2:creationId id="{1886070C-CB2D-4CF4-A26F-8D828D37AAED}"/>
+              </ns1:ext>
+            </ns1:extLst>
+          </ns0:cNvPr>
+          <ns0:cNvSpPr>
+            <ns1:spLocks noGrp="1"/>
+          </ns0:cNvSpPr>
+          <ns0:nvPr/>
+        </ns0:nvSpPr>
+        <ns0:spPr>
+          <ns1:xfrm>
+            <ns1:off x="2343150" y="4019550"/>
+            <ns1:ext cx="523875" cy="247650"/>
+          </ns1:xfrm>
+          <ns1:prstGeom prst="rect">
+            <ns1:avLst/>
+          </ns1:prstGeom>
+          <ns1:noFill/>
+          <ns1:ln w="0">
+            <ns1:noFill/>
+          </ns1:ln>
+        </ns0:spPr>
+        <ns0:txBody>
+          <ns1:bodyPr lIns="0" tIns="0" rIns="0" bIns="0" anchor="ctr"/>
+          <ns1:lstStyle>
+            <ns1:defPPr algn="ctr">
+              <ns1:defRPr sz="1125" b="0">
+                <ns1:solidFill>
+                  <ns1:srgbClr val="262626"/>
+                </ns1:solidFill>
+                <ns1:latin typeface="Microsoft YaHei"/>
+                <ns1:ea typeface="Microsoft YaHei"/>
+                <ns1:cs typeface="Microsoft YaHei"/>
+              </ns1:defRPr>
+            </ns1:defPPr>
+          </ns1:lstStyle>
+          <ns1:p>
+            <ns1:pPr algn="ctr">
+              <ns1:defRPr sz="1125" b="0">
+                <ns1:solidFill>
+                  <ns1:srgbClr val="262626"/>
+                </ns1:solidFill>
+                <ns1:latin typeface="Microsoft YaHei"/>
+                <ns1:ea typeface="Microsoft YaHei"/>
+                <ns1:cs typeface="Microsoft YaHei"/>
+              </ns1:defRPr>
+            </ns1:pPr>
+            <ns1:r>
+              <ns1:rPr sz="1125" b="0">
+                <ns1:solidFill>
+                  <ns1:srgbClr val="262626"/>
+                </ns1:solidFill>
+                <ns1:latin typeface="Microsoft YaHei"/>
+                <ns1:ea typeface="Microsoft YaHei"/>
+                <ns1:cs typeface="Microsoft YaHei"/>
+              </ns1:rPr>
+              <ns1:t>MTP</ns1:t>
+            </ns1:r>
+          </ns1:p>
+        </ns0:txBody>
+      </ns0:sp>
+      <ns0:sp>
+        <ns0:nvSpPr>
+          <ns0:cNvPr id="73" name="">
+            <ns1:extLst>
+              <ns1:ext uri="{FF2B5EF4-FFF2-40B4-BE49-F238E27FC236}">
+                <ns2:creationId id="{79094363-23D5-4CB9-808D-9C4783BD3103}"/>
+              </ns1:ext>
+            </ns1:extLst>
+          </ns0:cNvPr>
+          <ns0:cNvSpPr>
+            <ns1:spLocks noGrp="1"/>
+          </ns0:cNvSpPr>
+          <ns0:nvPr/>
+        </ns0:nvSpPr>
+        <ns0:spPr>
+          <ns1:xfrm>
+            <ns1:off x="457200" y="4305300"/>
+            <ns1:ext cx="2438400" cy="200025"/>
+          </ns1:xfrm>
+          <ns1:prstGeom prst="rect">
+            <ns1:avLst/>
+          </ns1:prstGeom>
+          <ns1:noFill/>
+          <ns1:ln w="0">
+            <ns1:noFill/>
+          </ns1:ln>
+        </ns0:spPr>
+        <ns0:txBody>
+          <ns1:bodyPr lIns="0" tIns="0" rIns="0" bIns="0" anchor="ctr"/>
+          <ns1:lstStyle>
+            <ns1:defPPr algn="ctr">
+              <ns1:defRPr sz="1275" b="1">
+                <ns1:solidFill>
+                  <ns1:srgbClr val="262626"/>
+                </ns1:solidFill>
+                <ns1:latin typeface="Microsoft YaHei"/>
+                <ns1:ea typeface="Microsoft YaHei"/>
+                <ns1:cs typeface="Microsoft YaHei"/>
+              </ns1:defRPr>
+            </ns1:defPPr>
+          </ns1:lstStyle>
+          <ns1:p>
+            <ns1:pPr algn="ctr">
+              <ns1:defRPr sz="1275" b="1">
+                <ns1:solidFill>
+                  <ns1:srgbClr val="262626"/>
+                </ns1:solidFill>
+                <ns1:latin typeface="Microsoft YaHei"/>
+                <ns1:ea typeface="Microsoft YaHei"/>
+                <ns1:cs typeface="Microsoft YaHei"/>
+              </ns1:defRPr>
+            </ns1:pPr>
+            <ns1:r>
+              <ns1:rPr sz="1275" b="1">
+                <ns1:solidFill>
+                  <ns1:srgbClr val="262626"/>
+                </ns1:solidFill>
+                <ns1:latin typeface="Microsoft YaHei"/>
+                <ns1:ea typeface="Microsoft YaHei"/>
+                <ns1:cs typeface="Microsoft YaHei"/>
+              </ns1:rPr>
+              <ns1:t>并行策略</ns1:t>
+            </ns1:r>
+          </ns1:p>
+        </ns0:txBody>
+      </ns0:sp>
+      <ns0:sp>
+        <ns0:nvSpPr>
+          <ns0:cNvPr id="74" name="">
+            <ns1:extLst>
+              <ns1:ext uri="{FF2B5EF4-FFF2-40B4-BE49-F238E27FC236}">
+                <ns2:creationId id="{7F8D755A-04B2-49E7-B8B0-1785C33A713D}"/>
+              </ns1:ext>
+            </ns1:extLst>
+          </ns0:cNvPr>
+          <ns0:cNvSpPr>
+            <ns1:spLocks noGrp="1"/>
+          </ns0:cNvSpPr>
+          <ns0:nvPr/>
+        </ns0:nvSpPr>
+        <ns0:spPr>
+          <ns1:xfrm>
+            <ns1:off x="457200" y="4552950"/>
+            <ns1:ext cx="762000" cy="247650"/>
+          </ns1:xfrm>
+          <ns1:prstGeom prst="rect">
+            <ns1:avLst/>
+          </ns1:prstGeom>
+          <ns1:solidFill>
+            <ns1:srgbClr val="FFF1CD"/>
+          </ns1:solidFill>
+          <ns1:ln w="9525">
+            <ns1:solidFill>
+              <ns1:srgbClr val="777777"/>
+            </ns1:solidFill>
+          </ns1:ln>
+        </ns0:spPr>
+      </ns0:sp>
+      <ns0:sp>
+        <ns0:nvSpPr>
+          <ns0:cNvPr id="75" name="">
+            <ns1:extLst>
+              <ns1:ext uri="{FF2B5EF4-FFF2-40B4-BE49-F238E27FC236}">
+                <ns2:creationId id="{E2383EDA-4810-44A1-82B0-6CBA6AEFCADF}"/>
+              </ns1:ext>
+            </ns1:extLst>
+          </ns0:cNvPr>
+          <ns0:cNvSpPr>
+            <ns1:spLocks noGrp="1"/>
+          </ns0:cNvSpPr>
+          <ns0:nvPr/>
+        </ns0:nvSpPr>
+        <ns0:spPr>
+          <ns1:xfrm>
+            <ns1:off x="485775" y="4552950"/>
+            <ns1:ext cx="704850" cy="247650"/>
+          </ns1:xfrm>
+          <ns1:prstGeom prst="rect">
+            <ns1:avLst/>
+          </ns1:prstGeom>
+          <ns1:noFill/>
+          <ns1:ln w="0">
+            <ns1:noFill/>
+          </ns1:ln>
+        </ns0:spPr>
+        <ns0:txBody>
+          <ns1:bodyPr lIns="0" tIns="0" rIns="0" bIns="0" anchor="ctr"/>
+          <ns1:lstStyle>
+            <ns1:defPPr algn="ctr">
+              <ns1:defRPr sz="1350" b="0">
+                <ns1:solidFill>
+                  <ns1:srgbClr val="262626"/>
+                </ns1:solidFill>
+                <ns1:latin typeface="Microsoft YaHei"/>
+                <ns1:ea typeface="Microsoft YaHei"/>
+                <ns1:cs typeface="Microsoft YaHei"/>
+              </ns1:defRPr>
+            </ns1:defPPr>
+          </ns1:lstStyle>
+          <ns1:p>
+            <ns1:pPr algn="ctr">
+              <ns1:defRPr sz="1350" b="0">
+                <ns1:solidFill>
+                  <ns1:srgbClr val="262626"/>
+                </ns1:solidFill>
+                <ns1:latin typeface="Microsoft YaHei"/>
+                <ns1:ea typeface="Microsoft YaHei"/>
+                <ns1:cs typeface="Microsoft YaHei"/>
+              </ns1:defRPr>
+            </ns1:pPr>
+            <ns1:r>
+              <ns1:rPr sz="1350" b="0">
+                <ns1:solidFill>
+                  <ns1:srgbClr val="262626"/>
+                </ns1:solidFill>
+                <ns1:latin typeface="Microsoft YaHei"/>
+                <ns1:ea typeface="Microsoft YaHei"/>
+                <ns1:cs typeface="Microsoft YaHei"/>
+              </ns1:rPr>
+              <ns1:t>TP</ns1:t>
+            </ns1:r>
+          </ns1:p>
+        </ns0:txBody>
+      </ns0:sp>
+      <ns0:sp>
+        <ns0:nvSpPr>
+          <ns0:cNvPr id="76" name="">
+            <ns1:extLst>
+              <ns1:ext uri="{FF2B5EF4-FFF2-40B4-BE49-F238E27FC236}">
+                <ns2:creationId id="{400CF098-E408-4A22-866A-043F668F9877}"/>
+              </ns1:ext>
+            </ns1:extLst>
+          </ns0:cNvPr>
+          <ns0:cNvSpPr>
+            <ns1:spLocks noGrp="1"/>
+          </ns0:cNvSpPr>
+          <ns0:nvPr/>
+        </ns0:nvSpPr>
+        <ns0:spPr>
+          <ns1:xfrm>
+            <ns1:off x="1295400" y="4552950"/>
+            <ns1:ext cx="762000" cy="247650"/>
+          </ns1:xfrm>
+          <ns1:prstGeom prst="rect">
+            <ns1:avLst/>
+          </ns1:prstGeom>
+          <ns1:solidFill>
+            <ns1:srgbClr val="E0EFD4"/>
+          </ns1:solidFill>
+          <ns1:ln w="9525">
+            <ns1:solidFill>
+              <ns1:srgbClr val="777777"/>
+            </ns1:solidFill>
+          </ns1:ln>
+        </ns0:spPr>
+      </ns0:sp>
+      <ns0:sp>
+        <ns0:nvSpPr>
+          <ns0:cNvPr id="77" name="">
+            <ns1:extLst>
+              <ns1:ext uri="{FF2B5EF4-FFF2-40B4-BE49-F238E27FC236}">
+                <ns2:creationId id="{564A8724-2398-4003-AD47-B525E04DAE91}"/>
+              </ns1:ext>
+            </ns1:extLst>
+          </ns0:cNvPr>
+          <ns0:cNvSpPr>
+            <ns1:spLocks noGrp="1"/>
+          </ns0:cNvSpPr>
+          <ns0:nvPr/>
+        </ns0:nvSpPr>
+        <ns0:spPr>
+          <ns1:xfrm>
+            <ns1:off x="1323975" y="4552950"/>
+            <ns1:ext cx="704850" cy="247650"/>
+          </ns1:xfrm>
+          <ns1:prstGeom prst="rect">
+            <ns1:avLst/>
+          </ns1:prstGeom>
+          <ns1:noFill/>
+          <ns1:ln w="0">
+            <ns1:noFill/>
+          </ns1:ln>
+        </ns0:spPr>
+        <ns0:txBody>
+          <ns1:bodyPr lIns="0" tIns="0" rIns="0" bIns="0" anchor="ctr"/>
+          <ns1:lstStyle>
+            <ns1:defPPr algn="ctr">
+              <ns1:defRPr sz="1350" b="0">
+                <ns1:solidFill>
+                  <ns1:srgbClr val="262626"/>
+                </ns1:solidFill>
+                <ns1:latin typeface="Microsoft YaHei"/>
+                <ns1:ea typeface="Microsoft YaHei"/>
+                <ns1:cs typeface="Microsoft YaHei"/>
+              </ns1:defRPr>
+            </ns1:defPPr>
+          </ns1:lstStyle>
+          <ns1:p>
+            <ns1:pPr algn="ctr">
+              <ns1:defRPr sz="1350" b="0">
+                <ns1:solidFill>
+                  <ns1:srgbClr val="262626"/>
+                </ns1:solidFill>
+                <ns1:latin typeface="Microsoft YaHei"/>
+                <ns1:ea typeface="Microsoft YaHei"/>
+                <ns1:cs typeface="Microsoft YaHei"/>
+              </ns1:defRPr>
+            </ns1:pPr>
+            <ns1:r>
+              <ns1:rPr sz="1350" b="0">
+                <ns1:solidFill>
+                  <ns1:srgbClr val="262626"/>
+                </ns1:solidFill>
+                <ns1:latin typeface="Microsoft YaHei"/>
+                <ns1:ea typeface="Microsoft YaHei"/>
+                <ns1:cs typeface="Microsoft YaHei"/>
+              </ns1:rPr>
+              <ns1:t>EP</ns1:t>
+            </ns1:r>
+          </ns1:p>
+        </ns0:txBody>
+      </ns0:sp>
+      <ns0:sp>
+        <ns0:nvSpPr>
+          <ns0:cNvPr id="78" name="">
+            <ns1:extLst>
+              <ns1:ext uri="{FF2B5EF4-FFF2-40B4-BE49-F238E27FC236}">
+                <ns2:creationId id="{48AE7AA2-2CC5-40EA-8E0E-C9C6BDAD0366}"/>
+              </ns1:ext>
+            </ns1:extLst>
+          </ns0:cNvPr>
+          <ns0:cNvSpPr>
+            <ns1:spLocks noGrp="1"/>
+          </ns0:cNvSpPr>
+          <ns0:nvPr/>
+        </ns0:nvSpPr>
+        <ns0:spPr>
+          <ns1:xfrm>
+            <ns1:off x="2133600" y="4552950"/>
+            <ns1:ext cx="762000" cy="247650"/>
+          </ns1:xfrm>
+          <ns1:prstGeom prst="rect">
+            <ns1:avLst/>
+          </ns1:prstGeom>
+          <ns1:solidFill>
+            <ns1:srgbClr val="FFF1CD"/>
+          </ns1:solidFill>
+          <ns1:ln w="9525">
+            <ns1:solidFill>
+              <ns1:srgbClr val="777777"/>
+            </ns1:solidFill>
+          </ns1:ln>
+        </ns0:spPr>
+      </ns0:sp>
+      <ns0:sp>
+        <ns0:nvSpPr>
+          <ns0:cNvPr id="79" name="">
+            <ns1:extLst>
+              <ns1:ext uri="{FF2B5EF4-FFF2-40B4-BE49-F238E27FC236}">
+                <ns2:creationId id="{3A3207FB-6FFB-4B12-9E1A-EB0F601F960B}"/>
+              </ns1:ext>
+            </ns1:extLst>
+          </ns0:cNvPr>
+          <ns0:cNvSpPr>
+            <ns1:spLocks noGrp="1"/>
+          </ns0:cNvSpPr>
+          <ns0:nvPr/>
+        </ns0:nvSpPr>
+        <ns0:spPr>
+          <ns1:xfrm>
+            <ns1:off x="2162175" y="4552950"/>
+            <ns1:ext cx="704850" cy="247650"/>
+          </ns1:xfrm>
+          <ns1:prstGeom prst="rect">
+            <ns1:avLst/>
+          </ns1:prstGeom>
+          <ns1:noFill/>
+          <ns1:ln w="0">
+            <ns1:noFill/>
+          </ns1:ln>
+        </ns0:spPr>
+        <ns0:txBody>
+          <ns1:bodyPr lIns="0" tIns="0" rIns="0" bIns="0" anchor="ctr"/>
+          <ns1:lstStyle>
+            <ns1:defPPr algn="ctr">
+              <ns1:defRPr sz="1350" b="0">
+                <ns1:solidFill>
+                  <ns1:srgbClr val="262626"/>
+                </ns1:solidFill>
+                <ns1:latin typeface="Microsoft YaHei"/>
+                <ns1:ea typeface="Microsoft YaHei"/>
+                <ns1:cs typeface="Microsoft YaHei"/>
+              </ns1:defRPr>
+            </ns1:defPPr>
+          </ns1:lstStyle>
+          <ns1:p>
+            <ns1:pPr algn="ctr">
+              <ns1:defRPr sz="1350" b="0">
+                <ns1:solidFill>
+                  <ns1:srgbClr val="262626"/>
+                </ns1:solidFill>
+                <ns1:latin typeface="Microsoft YaHei"/>
+                <ns1:ea typeface="Microsoft YaHei"/>
+                <ns1:cs typeface="Microsoft YaHei"/>
+              </ns1:defRPr>
+            </ns1:pPr>
+            <ns1:r>
+              <ns1:rPr sz="1350" b="0">
+                <ns1:solidFill>
+                  <ns1:srgbClr val="262626"/>
+                </ns1:solidFill>
+                <ns1:latin typeface="Microsoft YaHei"/>
+                <ns1:ea typeface="Microsoft YaHei"/>
+                <ns1:cs typeface="Microsoft YaHei"/>
+              </ns1:rPr>
+              <ns1:t>PP</ns1:t>
+            </ns1:r>
+          </ns1:p>
+        </ns0:txBody>
+      </ns0:sp>
+      <ns0:sp>
+        <ns0:nvSpPr>
+          <ns0:cNvPr id="80" name="">
+            <ns1:extLst>
+              <ns1:ext uri="{FF2B5EF4-FFF2-40B4-BE49-F238E27FC236}">
+                <ns2:creationId id="{46FA47F8-4337-44B5-8D5D-F19215C92932}"/>
+              </ns1:ext>
+            </ns1:extLst>
+          </ns0:cNvPr>
+          <ns0:cNvSpPr>
+            <ns1:spLocks noGrp="1"/>
+          </ns0:cNvSpPr>
+          <ns0:nvPr/>
+        </ns0:nvSpPr>
+        <ns0:spPr>
+          <ns1:xfrm>
+            <ns1:off x="3162300" y="3495675"/>
+            <ns1:ext cx="1181100" cy="247650"/>
+          </ns1:xfrm>
+          <ns1:prstGeom prst="rect">
+            <ns1:avLst/>
+          </ns1:prstGeom>
+          <ns1:solidFill>
+            <ns1:srgbClr val="FFF1CD"/>
+          </ns1:solidFill>
+          <ns1:ln w="9525">
+            <ns1:solidFill>
+              <ns1:srgbClr val="777777"/>
+            </ns1:solidFill>
+          </ns1:ln>
+        </ns0:spPr>
+      </ns0:sp>
+      <ns0:sp>
+        <ns0:nvSpPr>
+          <ns0:cNvPr id="81" name="">
+            <ns1:extLst>
+              <ns1:ext uri="{FF2B5EF4-FFF2-40B4-BE49-F238E27FC236}">
+                <ns2:creationId id="{D5F62778-F5C6-44AD-9B0F-7883EC9603A1}"/>
+              </ns1:ext>
+            </ns1:extLst>
+          </ns0:cNvPr>
+          <ns0:cNvSpPr>
+            <ns1:spLocks noGrp="1"/>
+          </ns0:cNvSpPr>
+          <ns0:nvPr/>
+        </ns0:nvSpPr>
+        <ns0:spPr>
+          <ns1:xfrm>
+            <ns1:off x="3190875" y="3495675"/>
+            <ns1:ext cx="1123950" cy="247650"/>
+          </ns1:xfrm>
+          <ns1:prstGeom prst="rect">
+            <ns1:avLst/>
+          </ns1:prstGeom>
+          <ns1:noFill/>
+          <ns1:ln w="0">
+            <ns1:noFill/>
+          </ns1:ln>
+        </ns0:spPr>
+        <ns0:txBody>
+          <ns1:bodyPr lIns="0" tIns="0" rIns="0" bIns="0" anchor="ctr"/>
+          <ns1:lstStyle>
+            <ns1:defPPr algn="ctr">
+              <ns1:defRPr sz="1350" b="0">
+                <ns1:solidFill>
+                  <ns1:srgbClr val="262626"/>
+                </ns1:solidFill>
+                <ns1:latin typeface="Microsoft YaHei"/>
+                <ns1:ea typeface="Microsoft YaHei"/>
+                <ns1:cs typeface="Microsoft YaHei"/>
+              </ns1:defRPr>
+            </ns1:defPPr>
+          </ns1:lstStyle>
+          <ns1:p>
+            <ns1:pPr algn="ctr">
+              <ns1:defRPr sz="1350" b="0">
+                <ns1:solidFill>
+                  <ns1:srgbClr val="262626"/>
+                </ns1:solidFill>
+                <ns1:latin typeface="Microsoft YaHei"/>
+                <ns1:ea typeface="Microsoft YaHei"/>
+                <ns1:cs typeface="Microsoft YaHei"/>
+              </ns1:defRPr>
+            </ns1:pPr>
+            <ns1:r>
+              <ns1:rPr sz="1350" b="0">
+                <ns1:solidFill>
+                  <ns1:srgbClr val="262626"/>
+                </ns1:solidFill>
+                <ns1:latin typeface="Microsoft YaHei"/>
+                <ns1:ea typeface="Microsoft YaHei"/>
+                <ns1:cs typeface="Microsoft YaHei"/>
+              </ns1:rPr>
+              <ns1:t>W4A8</ns1:t>
+            </ns1:r>
+          </ns1:p>
+        </ns0:txBody>
+      </ns0:sp>
+      <ns0:sp>
+        <ns0:nvSpPr>
+          <ns0:cNvPr id="82" name="">
+            <ns1:extLst>
+              <ns1:ext uri="{FF2B5EF4-FFF2-40B4-BE49-F238E27FC236}">
+                <ns2:creationId id="{E4C79EA6-4144-45F5-BE7E-77D53EB3C57B}"/>
+              </ns1:ext>
+            </ns1:extLst>
+          </ns0:cNvPr>
+          <ns0:cNvSpPr>
+            <ns1:spLocks noGrp="1"/>
+          </ns0:cNvSpPr>
+          <ns0:nvPr/>
+        </ns0:nvSpPr>
+        <ns0:spPr>
+          <ns1:xfrm>
+            <ns1:off x="4419600" y="3495675"/>
+            <ns1:ext cx="1181100" cy="247650"/>
+          </ns1:xfrm>
+          <ns1:prstGeom prst="rect">
+            <ns1:avLst/>
+          </ns1:prstGeom>
+          <ns1:solidFill>
+            <ns1:srgbClr val="E0EFD4"/>
+          </ns1:solidFill>
+          <ns1:ln w="9525">
+            <ns1:solidFill>
+              <ns1:srgbClr val="777777"/>
+            </ns1:solidFill>
+          </ns1:ln>
+        </ns0:spPr>
+      </ns0:sp>
+      <ns0:sp>
+        <ns0:nvSpPr>
+          <ns0:cNvPr id="83" name="">
+            <ns1:extLst>
+              <ns1:ext uri="{FF2B5EF4-FFF2-40B4-BE49-F238E27FC236}">
+                <ns2:creationId id="{06A2B3DC-40D5-4459-9222-F1C3F6768AC9}"/>
+              </ns1:ext>
+            </ns1:extLst>
+          </ns0:cNvPr>
+          <ns0:cNvSpPr>
+            <ns1:spLocks noGrp="1"/>
+          </ns0:cNvSpPr>
+          <ns0:nvPr/>
+        </ns0:nvSpPr>
+        <ns0:spPr>
+          <ns1:xfrm>
+            <ns1:off x="4448175" y="3495675"/>
+            <ns1:ext cx="1123950" cy="247650"/>
+          </ns1:xfrm>
+          <ns1:prstGeom prst="rect">
+            <ns1:avLst/>
+          </ns1:prstGeom>
+          <ns1:noFill/>
+          <ns1:ln w="0">
+            <ns1:noFill/>
+          </ns1:ln>
+        </ns0:spPr>
+        <ns0:txBody>
+          <ns1:bodyPr lIns="0" tIns="0" rIns="0" bIns="0" anchor="ctr"/>
+          <ns1:lstStyle>
+            <ns1:defPPr algn="ctr">
+              <ns1:defRPr sz="1350" b="0">
+                <ns1:solidFill>
+                  <ns1:srgbClr val="262626"/>
+                </ns1:solidFill>
+                <ns1:latin typeface="Microsoft YaHei"/>
+                <ns1:ea typeface="Microsoft YaHei"/>
+                <ns1:cs typeface="Microsoft YaHei"/>
+              </ns1:defRPr>
+            </ns1:defPPr>
+          </ns1:lstStyle>
+          <ns1:p>
+            <ns1:pPr algn="ctr">
+              <ns1:defRPr sz="1350" b="0">
+                <ns1:solidFill>
+                  <ns1:srgbClr val="262626"/>
+                </ns1:solidFill>
+                <ns1:latin typeface="Microsoft YaHei"/>
+                <ns1:ea typeface="Microsoft YaHei"/>
+                <ns1:cs typeface="Microsoft YaHei"/>
+              </ns1:defRPr>
+            </ns1:pPr>
+            <ns1:r>
+              <ns1:rPr sz="1350" b="0">
+                <ns1:solidFill>
+                  <ns1:srgbClr val="262626"/>
+                </ns1:solidFill>
+                <ns1:latin typeface="Microsoft YaHei"/>
+                <ns1:ea typeface="Microsoft YaHei"/>
+                <ns1:cs typeface="Microsoft YaHei"/>
+              </ns1:rPr>
+              <ns1:t>W4A4</ns1:t>
+            </ns1:r>
+          </ns1:p>
+        </ns0:txBody>
+      </ns0:sp>
+      <ns0:sp>
+        <ns0:nvSpPr>
+          <ns0:cNvPr id="84" name="">
+            <ns1:extLst>
+              <ns1:ext uri="{FF2B5EF4-FFF2-40B4-BE49-F238E27FC236}">
+                <ns2:creationId id="{2AFDD7CD-4F82-4E16-8018-38EE3476F093}"/>
+              </ns1:ext>
+            </ns1:extLst>
+          </ns0:cNvPr>
+          <ns0:cNvSpPr>
+            <ns1:spLocks noGrp="1"/>
+          </ns0:cNvSpPr>
+          <ns0:nvPr/>
+        </ns0:nvSpPr>
+        <ns0:spPr>
+          <ns1:xfrm>
+            <ns1:off x="3162300" y="3781425"/>
+            <ns1:ext cx="2438400" cy="228600"/>
+          </ns1:xfrm>
+          <ns1:prstGeom prst="rect">
+            <ns1:avLst/>
+          </ns1:prstGeom>
+          <ns1:solidFill>
+            <ns1:srgbClr val="E0EFD4"/>
+          </ns1:solidFill>
+          <ns1:ln w="9525">
+            <ns1:solidFill>
+              <ns1:srgbClr val="777777"/>
+            </ns1:solidFill>
+          </ns1:ln>
+        </ns0:spPr>
+      </ns0:sp>
+      <ns0:sp>
+        <ns0:nvSpPr>
+          <ns0:cNvPr id="85" name="">
+            <ns1:extLst>
+              <ns1:ext uri="{FF2B5EF4-FFF2-40B4-BE49-F238E27FC236}">
+                <ns2:creationId id="{8959EE2B-AEF9-4AFF-91BD-28657EF4E37A}"/>
+              </ns1:ext>
+            </ns1:extLst>
+          </ns0:cNvPr>
+          <ns0:cNvSpPr>
+            <ns1:spLocks noGrp="1"/>
+          </ns0:cNvSpPr>
+          <ns0:nvPr/>
+        </ns0:nvSpPr>
+        <ns0:spPr>
+          <ns1:xfrm>
+            <ns1:off x="3190875" y="3781425"/>
+            <ns1:ext cx="2381250" cy="228600"/>
+          </ns1:xfrm>
+          <ns1:prstGeom prst="rect">
+            <ns1:avLst/>
+          </ns1:prstGeom>
+          <ns1:noFill/>
+          <ns1:ln w="0">
+            <ns1:noFill/>
+          </ns1:ln>
+        </ns0:spPr>
+        <ns0:txBody>
+          <ns1:bodyPr lIns="0" tIns="0" rIns="0" bIns="0" anchor="ctr"/>
+          <ns1:lstStyle>
+            <ns1:defPPr algn="ctr">
+              <ns1:defRPr sz="1350" b="0">
+                <ns1:solidFill>
+                  <ns1:srgbClr val="262626"/>
+                </ns1:solidFill>
+                <ns1:latin typeface="Microsoft YaHei"/>
+                <ns1:ea typeface="Microsoft YaHei"/>
+                <ns1:cs typeface="Microsoft YaHei"/>
+              </ns1:defRPr>
+            </ns1:defPPr>
+          </ns1:lstStyle>
+          <ns1:p>
+            <ns1:pPr algn="ctr">
+              <ns1:defRPr sz="1350" b="0">
+                <ns1:solidFill>
+                  <ns1:srgbClr val="262626"/>
+                </ns1:solidFill>
+                <ns1:latin typeface="Microsoft YaHei"/>
+                <ns1:ea typeface="Microsoft YaHei"/>
+                <ns1:cs typeface="Microsoft YaHei"/>
+              </ns1:defRPr>
+            </ns1:pPr>
+            <ns1:r>
+              <ns1:rPr sz="1350" b="0">
+                <ns1:solidFill>
+                  <ns1:srgbClr val="262626"/>
+                </ns1:solidFill>
+                <ns1:latin typeface="Microsoft YaHei"/>
+                <ns1:ea typeface="Microsoft YaHei"/>
+                <ns1:cs typeface="Microsoft YaHei"/>
+              </ns1:rPr>
+              <ns1:t>FP4 / FP8</ns1:t>
+            </ns1:r>
+          </ns1:p>
+        </ns0:txBody>
+      </ns0:sp>
+      <ns0:sp>
+        <ns0:nvSpPr>
+          <ns0:cNvPr id="86" name="">
+            <ns1:extLst>
+              <ns1:ext uri="{FF2B5EF4-FFF2-40B4-BE49-F238E27FC236}">
+                <ns2:creationId id="{B1E713F8-1B42-4A73-A793-8243BDAE3475}"/>
+              </ns1:ext>
+            </ns1:extLst>
+          </ns0:cNvPr>
+          <ns0:cNvSpPr>
+            <ns1:spLocks noGrp="1"/>
+          </ns0:cNvSpPr>
+          <ns0:nvPr/>
+        </ns0:nvSpPr>
+        <ns0:spPr>
+          <ns1:xfrm>
+            <ns1:off x="3162300" y="4057650"/>
+            <ns1:ext cx="2438400" cy="228600"/>
+          </ns1:xfrm>
+          <ns1:prstGeom prst="rect">
+            <ns1:avLst/>
+          </ns1:prstGeom>
+          <ns1:solidFill>
+            <ns1:srgbClr val="E0EFD4"/>
+          </ns1:solidFill>
+          <ns1:ln w="9525">
+            <ns1:solidFill>
+              <ns1:srgbClr val="777777"/>
+            </ns1:solidFill>
+          </ns1:ln>
+        </ns0:spPr>
+      </ns0:sp>
+      <ns0:sp>
+        <ns0:nvSpPr>
+          <ns0:cNvPr id="87" name="">
+            <ns1:extLst>
+              <ns1:ext uri="{FF2B5EF4-FFF2-40B4-BE49-F238E27FC236}">
+                <ns2:creationId id="{5AD55729-C825-4B32-9DA8-FBC59FBAFAEB}"/>
+              </ns1:ext>
+            </ns1:extLst>
+          </ns0:cNvPr>
+          <ns0:cNvSpPr>
+            <ns1:spLocks noGrp="1"/>
+          </ns0:cNvSpPr>
+          <ns0:nvPr/>
+        </ns0:nvSpPr>
+        <ns0:spPr>
+          <ns1:xfrm>
+            <ns1:off x="3190875" y="4057650"/>
+            <ns1:ext cx="2381250" cy="228600"/>
+          </ns1:xfrm>
+          <ns1:prstGeom prst="rect">
+            <ns1:avLst/>
+          </ns1:prstGeom>
+          <ns1:noFill/>
+          <ns1:ln w="0">
+            <ns1:noFill/>
+          </ns1:ln>
+        </ns0:spPr>
+        <ns0:txBody>
+          <ns1:bodyPr lIns="0" tIns="0" rIns="0" bIns="0" anchor="ctr"/>
+          <ns1:lstStyle>
+            <ns1:defPPr algn="ctr">
+              <ns1:defRPr sz="1350" b="0">
+                <ns1:solidFill>
+                  <ns1:srgbClr val="262626"/>
+                </ns1:solidFill>
+                <ns1:latin typeface="Microsoft YaHei"/>
+                <ns1:ea typeface="Microsoft YaHei"/>
+                <ns1:cs typeface="Microsoft YaHei"/>
+              </ns1:defRPr>
+            </ns1:defPPr>
+          </ns1:lstStyle>
+          <ns1:p>
+            <ns1:pPr algn="ctr">
+              <ns1:defRPr sz="1350" b="0">
+                <ns1:solidFill>
+                  <ns1:srgbClr val="262626"/>
+                </ns1:solidFill>
+                <ns1:latin typeface="Microsoft YaHei"/>
+                <ns1:ea typeface="Microsoft YaHei"/>
+                <ns1:cs typeface="Microsoft YaHei"/>
+              </ns1:defRPr>
+            </ns1:pPr>
+            <ns1:r>
+              <ns1:rPr sz="1350" b="0">
+                <ns1:solidFill>
+                  <ns1:srgbClr val="262626"/>
+                </ns1:solidFill>
+                <ns1:latin typeface="Microsoft YaHei"/>
+                <ns1:ea typeface="Microsoft YaHei"/>
+                <ns1:cs typeface="Microsoft YaHei"/>
+              </ns1:rPr>
+              <ns1:t>KV Cache 量化</ns1:t>
+            </ns1:r>
+          </ns1:p>
+        </ns0:txBody>
+      </ns0:sp>
+      <ns0:sp>
+        <ns0:nvSpPr>
+          <ns0:cNvPr id="88" name="">
+            <ns1:extLst>
+              <ns1:ext uri="{FF2B5EF4-FFF2-40B4-BE49-F238E27FC236}">
+                <ns2:creationId id="{AB8972F9-2EA6-45F4-8FE9-AACF43F0BFB1}"/>
+              </ns1:ext>
+            </ns1:extLst>
+          </ns0:cNvPr>
+          <ns0:cNvSpPr>
+            <ns1:spLocks noGrp="1"/>
+          </ns0:cNvSpPr>
+          <ns0:nvPr/>
+        </ns0:nvSpPr>
+        <ns0:spPr>
+          <ns1:xfrm>
+            <ns1:off x="3162300" y="4333875"/>
+            <ns1:ext cx="2438400" cy="228600"/>
+          </ns1:xfrm>
+          <ns1:prstGeom prst="rect">
+            <ns1:avLst/>
+          </ns1:prstGeom>
+          <ns1:solidFill>
+            <ns1:srgbClr val="E0EFD4"/>
+          </ns1:solidFill>
+          <ns1:ln w="9525">
+            <ns1:solidFill>
+              <ns1:srgbClr val="777777"/>
+            </ns1:solidFill>
+          </ns1:ln>
+        </ns0:spPr>
+      </ns0:sp>
+      <ns0:sp>
+        <ns0:nvSpPr>
+          <ns0:cNvPr id="89" name="">
+            <ns1:extLst>
+              <ns1:ext uri="{FF2B5EF4-FFF2-40B4-BE49-F238E27FC236}">
+                <ns2:creationId id="{520D2B95-FD8F-4D37-94F3-1416410000DB}"/>
+              </ns1:ext>
+            </ns1:extLst>
+          </ns0:cNvPr>
+          <ns0:cNvSpPr>
+            <ns1:spLocks noGrp="1"/>
+          </ns0:cNvSpPr>
+          <ns0:nvPr/>
+        </ns0:nvSpPr>
+        <ns0:spPr>
+          <ns1:xfrm>
+            <ns1:off x="3190875" y="4333875"/>
+            <ns1:ext cx="2381250" cy="228600"/>
+          </ns1:xfrm>
+          <ns1:prstGeom prst="rect">
+            <ns1:avLst/>
+          </ns1:prstGeom>
+          <ns1:noFill/>
+          <ns1:ln w="0">
+            <ns1:noFill/>
+          </ns1:ln>
+        </ns0:spPr>
+        <ns0:txBody>
+          <ns1:bodyPr lIns="0" tIns="0" rIns="0" bIns="0" anchor="ctr"/>
+          <ns1:lstStyle>
+            <ns1:defPPr algn="ctr">
+              <ns1:defRPr sz="1350" b="0">
+                <ns1:solidFill>
+                  <ns1:srgbClr val="262626"/>
+                </ns1:solidFill>
+                <ns1:latin typeface="Microsoft YaHei"/>
+                <ns1:ea typeface="Microsoft YaHei"/>
+                <ns1:cs typeface="Microsoft YaHei"/>
+              </ns1:defRPr>
+            </ns1:defPPr>
+          </ns1:lstStyle>
+          <ns1:p>
+            <ns1:pPr algn="ctr">
+              <ns1:defRPr sz="1350" b="0">
+                <ns1:solidFill>
+                  <ns1:srgbClr val="262626"/>
+                </ns1:solidFill>
+                <ns1:latin typeface="Microsoft YaHei"/>
+                <ns1:ea typeface="Microsoft YaHei"/>
+                <ns1:cs typeface="Microsoft YaHei"/>
+              </ns1:defRPr>
+            </ns1:pPr>
+            <ns1:r>
+              <ns1:rPr sz="1350" b="0">
+                <ns1:solidFill>
+                  <ns1:srgbClr val="262626"/>
+                </ns1:solidFill>
+                <ns1:latin typeface="Microsoft YaHei"/>
+                <ns1:ea typeface="Microsoft YaHei"/>
+                <ns1:cs typeface="Microsoft YaHei"/>
+              </ns1:rPr>
+              <ns1:t>Layer Offload</ns1:t>
+            </ns1:r>
+          </ns1:p>
+        </ns0:txBody>
+      </ns0:sp>
+      <ns0:sp>
+        <ns0:nvSpPr>
+          <ns0:cNvPr id="90" name="">
+            <ns1:extLst>
+              <ns1:ext uri="{FF2B5EF4-FFF2-40B4-BE49-F238E27FC236}">
+                <ns2:creationId id="{1885D6B5-D53D-4E5D-BAD0-C3A99DBCA009}"/>
+              </ns1:ext>
+            </ns1:extLst>
+          </ns0:cNvPr>
+          <ns0:cNvSpPr>
+            <ns1:spLocks noGrp="1"/>
+          </ns0:cNvSpPr>
+          <ns0:nvPr/>
+        </ns0:nvSpPr>
+        <ns0:spPr>
+          <ns1:xfrm>
+            <ns1:off x="3162300" y="4610100"/>
+            <ns1:ext cx="2438400" cy="228600"/>
+          </ns1:xfrm>
+          <ns1:prstGeom prst="rect">
+            <ns1:avLst/>
+          </ns1:prstGeom>
+          <ns1:solidFill>
+            <ns1:srgbClr val="E0EFD4"/>
+          </ns1:solidFill>
+          <ns1:ln w="9525">
+            <ns1:solidFill>
+              <ns1:srgbClr val="777777"/>
+            </ns1:solidFill>
+          </ns1:ln>
+        </ns0:spPr>
+      </ns0:sp>
+      <ns0:sp>
+        <ns0:nvSpPr>
+          <ns0:cNvPr id="91" name="">
+            <ns1:extLst>
+              <ns1:ext uri="{FF2B5EF4-FFF2-40B4-BE49-F238E27FC236}">
+                <ns2:creationId id="{5B2397FC-A934-4D67-8213-1AA7ADD55B01}"/>
+              </ns1:ext>
+            </ns1:extLst>
+          </ns0:cNvPr>
+          <ns0:cNvSpPr>
+            <ns1:spLocks noGrp="1"/>
+          </ns0:cNvSpPr>
+          <ns0:nvPr/>
+        </ns0:nvSpPr>
+        <ns0:spPr>
+          <ns1:xfrm>
+            <ns1:off x="3190875" y="4610100"/>
+            <ns1:ext cx="2381250" cy="228600"/>
+          </ns1:xfrm>
+          <ns1:prstGeom prst="rect">
+            <ns1:avLst/>
+          </ns1:prstGeom>
+          <ns1:noFill/>
+          <ns1:ln w="0">
+            <ns1:noFill/>
+          </ns1:ln>
+        </ns0:spPr>
+        <ns0:txBody>
+          <ns1:bodyPr lIns="0" tIns="0" rIns="0" bIns="0" anchor="ctr"/>
+          <ns1:lstStyle>
+            <ns1:defPPr algn="ctr">
+              <ns1:defRPr sz="1350" b="0">
+                <ns1:solidFill>
+                  <ns1:srgbClr val="262626"/>
+                </ns1:solidFill>
+                <ns1:latin typeface="Microsoft YaHei"/>
+                <ns1:ea typeface="Microsoft YaHei"/>
+                <ns1:cs typeface="Microsoft YaHei"/>
+              </ns1:defRPr>
+            </ns1:defPPr>
+          </ns1:lstStyle>
+          <ns1:p>
+            <ns1:pPr algn="ctr">
+              <ns1:defRPr sz="1350" b="0">
+                <ns1:solidFill>
+                  <ns1:srgbClr val="262626"/>
+                </ns1:solidFill>
+                <ns1:latin typeface="Microsoft YaHei"/>
+                <ns1:ea typeface="Microsoft YaHei"/>
+                <ns1:cs typeface="Microsoft YaHei"/>
+              </ns1:defRPr>
+            </ns1:pPr>
+            <ns1:r>
+              <ns1:rPr sz="1350" b="0">
+                <ns1:solidFill>
+                  <ns1:srgbClr val="262626"/>
+                </ns1:solidFill>
+                <ns1:latin typeface="Microsoft YaHei"/>
+                <ns1:ea typeface="Microsoft YaHei"/>
+                <ns1:cs typeface="Microsoft YaHei"/>
+              </ns1:rPr>
+              <ns1:t>MoE Offload</ns1:t>
+            </ns1:r>
+          </ns1:p>
+        </ns0:txBody>
+      </ns0:sp>
+      <ns0:sp>
+        <ns0:nvSpPr>
+          <ns0:cNvPr id="92" name="">
+            <ns1:extLst>
+              <ns1:ext uri="{FF2B5EF4-FFF2-40B4-BE49-F238E27FC236}">
+                <ns2:creationId id="{F255BED6-EC61-4F4A-A228-22ED1387AA4E}"/>
+              </ns1:ext>
+            </ns1:extLst>
+          </ns0:cNvPr>
+          <ns0:cNvSpPr>
+            <ns1:spLocks noGrp="1"/>
+          </ns0:cNvSpPr>
+          <ns0:nvPr/>
+        </ns0:nvSpPr>
+        <ns0:spPr>
+          <ns1:xfrm>
+            <ns1:off x="266700" y="5095875"/>
+            <ns1:ext cx="5524500" cy="295275"/>
+          </ns1:xfrm>
+          <ns1:prstGeom prst="roundRect">
+            <ns1:avLst>
+              <ns1:gd name="adj" fmla="val 32258"/>
+            </ns1:avLst>
+          </ns1:prstGeom>
+          <ns1:solidFill>
+            <ns1:srgbClr val="E6E6E6"/>
+          </ns1:solidFill>
+          <ns1:ln w="9525">
+            <ns1:solidFill>
+              <ns1:srgbClr val="777777"/>
+            </ns1:solidFill>
+          </ns1:ln>
+        </ns0:spPr>
+      </ns0:sp>
+      <ns0:sp>
+        <ns0:nvSpPr>
+          <ns0:cNvPr id="93" name="">
+            <ns1:extLst>
+              <ns1:ext uri="{FF2B5EF4-FFF2-40B4-BE49-F238E27FC236}">
+                <ns2:creationId id="{EDA92E1A-DBF6-4604-8B3D-27DFA34AEC5A}"/>
+              </ns1:ext>
+            </ns1:extLst>
+          </ns0:cNvPr>
+          <ns0:cNvSpPr>
+            <ns1:spLocks noGrp="1"/>
+          </ns0:cNvSpPr>
+          <ns0:nvPr/>
+        </ns0:nvSpPr>
+        <ns0:spPr>
+          <ns1:xfrm>
+            <ns1:off x="371475" y="5095875"/>
+            <ns1:ext cx="5314950" cy="295275"/>
+          </ns1:xfrm>
+          <ns1:prstGeom prst="rect">
+            <ns1:avLst/>
+          </ns1:prstGeom>
+          <ns1:noFill/>
+          <ns1:ln w="0">
+            <ns1:noFill/>
+          </ns1:ln>
+        </ns0:spPr>
+        <ns0:txBody>
+          <ns1:bodyPr lIns="0" tIns="0" rIns="0" bIns="0" anchor="ctr"/>
+          <ns1:lstStyle>
+            <ns1:defPPr algn="ctr">
+              <ns1:defRPr sz="1575" b="1">
+                <ns1:solidFill>
+                  <ns1:srgbClr val="262626"/>
+                </ns1:solidFill>
+                <ns1:latin typeface="Microsoft YaHei"/>
+                <ns1:ea typeface="Microsoft YaHei"/>
+                <ns1:cs typeface="Microsoft YaHei"/>
+              </ns1:defRPr>
+            </ns1:defPPr>
+          </ns1:lstStyle>
+          <ns1:p>
+            <ns1:pPr algn="ctr">
+              <ns1:defRPr sz="1575" b="1">
+                <ns1:solidFill>
+                  <ns1:srgbClr val="262626"/>
+                </ns1:solidFill>
+                <ns1:latin typeface="Microsoft YaHei"/>
+                <ns1:ea typeface="Microsoft YaHei"/>
+                <ns1:cs typeface="Microsoft YaHei"/>
+              </ns1:defRPr>
+            </ns1:pPr>
+            <ns1:r>
+              <ns1:rPr sz="1575" b="1">
+                <ns1:solidFill>
+                  <ns1:srgbClr val="262626"/>
+                </ns1:solidFill>
+                <ns1:latin typeface="Microsoft YaHei"/>
+                <ns1:ea typeface="Microsoft YaHei"/>
+                <ns1:cs typeface="Microsoft YaHei"/>
+              </ns1:rPr>
+              <ns1:t>运行时：PyTorch / torch_npu</ns1:t>
+            </ns1:r>
+          </ns1:p>
+        </ns0:txBody>
+      </ns0:sp>
+      <ns0:sp>
+        <ns0:nvSpPr>
+          <ns0:cNvPr id="94" name="">
+            <ns1:extLst>
+              <ns1:ext uri="{FF2B5EF4-FFF2-40B4-BE49-F238E27FC236}">
+                <ns2:creationId id="{DA3EDFE2-3B08-4EBE-890A-6A9705C9BD95}"/>
+              </ns1:ext>
+            </ns1:extLst>
+          </ns0:cNvPr>
+          <ns0:cNvSpPr>
+            <ns1:spLocks noGrp="1"/>
+          </ns0:cNvSpPr>
+          <ns0:nvPr/>
+        </ns0:nvSpPr>
+        <ns0:spPr>
+          <ns1:xfrm>
+            <ns1:off x="266700" y="5495925"/>
+            <ns1:ext cx="5524500" cy="323850"/>
+          </ns1:xfrm>
+          <ns1:prstGeom prst="roundRect">
+            <ns1:avLst>
+              <ns1:gd name="adj" fmla="val 29412"/>
+            </ns1:avLst>
+          </ns1:prstGeom>
+          <ns1:solidFill>
+            <ns1:srgbClr val="E6E6E6"/>
+          </ns1:solidFill>
+          <ns1:ln w="9525">
+            <ns1:solidFill>
+              <ns1:srgbClr val="777777"/>
+            </ns1:solidFill>
+          </ns1:ln>
+        </ns0:spPr>
+      </ns0:sp>
+      <ns0:sp>
+        <ns0:nvSpPr>
+          <ns0:cNvPr id="95" name="">
+            <ns1:extLst>
+              <ns1:ext uri="{FF2B5EF4-FFF2-40B4-BE49-F238E27FC236}">
+                <ns2:creationId id="{F49EE736-EF45-4B2A-A9EC-F31310DE147E}"/>
+              </ns1:ext>
+            </ns1:extLst>
+          </ns0:cNvPr>
+          <ns0:cNvSpPr>
+            <ns1:spLocks noGrp="1"/>
+          </ns0:cNvSpPr>
+          <ns0:nvPr/>
+        </ns0:nvSpPr>
+        <ns0:spPr>
+          <ns1:xfrm>
+            <ns1:off x="371475" y="5495925"/>
+            <ns1:ext cx="1047750" cy="323850"/>
+          </ns1:xfrm>
+          <ns1:prstGeom prst="rect">
+            <ns1:avLst/>
+          </ns1:prstGeom>
+          <ns1:noFill/>
+          <ns1:ln w="0">
+            <ns1:noFill/>
+          </ns1:ln>
+        </ns0:spPr>
+        <ns0:txBody>
+          <ns1:bodyPr lIns="0" tIns="0" rIns="0" bIns="0" anchor="ctr"/>
+          <ns1:lstStyle>
+            <ns1:defPPr algn="ctr">
+              <ns1:defRPr sz="1725" b="1">
+                <ns1:solidFill>
+                  <ns1:srgbClr val="262626"/>
+                </ns1:solidFill>
+                <ns1:latin typeface="Microsoft YaHei"/>
+                <ns1:ea typeface="Microsoft YaHei"/>
+                <ns1:cs typeface="Microsoft YaHei"/>
+              </ns1:defRPr>
+            </ns1:defPPr>
+          </ns1:lstStyle>
+          <ns1:p>
+            <ns1:pPr algn="ctr">
+              <ns1:defRPr sz="1725" b="1">
+                <ns1:solidFill>
+                  <ns1:srgbClr val="262626"/>
+                </ns1:solidFill>
+                <ns1:latin typeface="Microsoft YaHei"/>
+                <ns1:ea typeface="Microsoft YaHei"/>
+                <ns1:cs typeface="Microsoft YaHei"/>
+              </ns1:defRPr>
+            </ns1:pPr>
+            <ns1:r>
+              <ns1:rPr sz="1725" b="1">
+                <ns1:solidFill>
+                  <ns1:srgbClr val="262626"/>
+                </ns1:solidFill>
+                <ns1:latin typeface="Microsoft YaHei"/>
+                <ns1:ea typeface="Microsoft YaHei"/>
+                <ns1:cs typeface="Microsoft YaHei"/>
+              </ns1:rPr>
+              <ns1:t>CANN</ns1:t>
+            </ns1:r>
+          </ns1:p>
+        </ns0:txBody>
+      </ns0:sp>
+      <ns0:sp>
+        <ns0:nvSpPr>
+          <ns0:cNvPr id="96" name="">
+            <ns1:extLst>
+              <ns1:ext uri="{FF2B5EF4-FFF2-40B4-BE49-F238E27FC236}">
+                <ns2:creationId id="{DF8E2BE6-7E2C-4EF7-A0E0-F1E9DC98A35C}"/>
+              </ns1:ext>
+            </ns1:extLst>
+          </ns0:cNvPr>
+          <ns0:cNvSpPr>
+            <ns1:spLocks noGrp="1"/>
+          </ns0:cNvSpPr>
+          <ns0:nvPr/>
+        </ns0:nvSpPr>
+        <ns0:spPr>
+          <ns1:xfrm>
+            <ns1:off x="1552575" y="5543550"/>
+            <ns1:ext cx="4095750" cy="228600"/>
+          </ns1:xfrm>
+          <ns1:prstGeom prst="rect">
+            <ns1:avLst/>
+          </ns1:prstGeom>
+          <ns1:solidFill>
+            <ns1:srgbClr val="E0EFD4"/>
+          </ns1:solidFill>
+          <ns1:ln w="9525">
+            <ns1:solidFill>
+              <ns1:srgbClr val="777777"/>
+            </ns1:solidFill>
+          </ns1:ln>
+        </ns0:spPr>
+      </ns0:sp>
+      <ns0:sp>
+        <ns0:nvSpPr>
+          <ns0:cNvPr id="97" name="">
+            <ns1:extLst>
+              <ns1:ext uri="{FF2B5EF4-FFF2-40B4-BE49-F238E27FC236}">
+                <ns2:creationId id="{4A4F066E-8643-4CF9-8BAC-28EFDF9D3761}"/>
+              </ns1:ext>
+            </ns1:extLst>
+          </ns0:cNvPr>
+          <ns0:cNvSpPr>
+            <ns1:spLocks noGrp="1"/>
+          </ns0:cNvSpPr>
+          <ns0:nvPr/>
+        </ns0:nvSpPr>
+        <ns0:spPr>
+          <ns1:xfrm>
+            <ns1:off x="1581150" y="5543550"/>
+            <ns1:ext cx="4038600" cy="228600"/>
+          </ns1:xfrm>
+          <ns1:prstGeom prst="rect">
+            <ns1:avLst/>
+          </ns1:prstGeom>
+          <ns1:noFill/>
+          <ns1:ln w="0">
+            <ns1:noFill/>
+          </ns1:ln>
+        </ns0:spPr>
+        <ns0:txBody>
+          <ns1:bodyPr lIns="0" tIns="0" rIns="0" bIns="0" anchor="ctr"/>
+          <ns1:lstStyle>
+            <ns1:defPPr algn="ctr">
+              <ns1:defRPr sz="1500" b="0">
+                <ns1:solidFill>
+                  <ns1:srgbClr val="262626"/>
+                </ns1:solidFill>
+                <ns1:latin typeface="Microsoft YaHei"/>
+                <ns1:ea typeface="Microsoft YaHei"/>
+                <ns1:cs typeface="Microsoft YaHei"/>
+              </ns1:defRPr>
+            </ns1:defPPr>
+          </ns1:lstStyle>
+          <ns1:p>
+            <ns1:pPr algn="ctr">
+              <ns1:defRPr sz="1500" b="0">
+                <ns1:solidFill>
+                  <ns1:srgbClr val="262626"/>
+                </ns1:solidFill>
+                <ns1:latin typeface="Microsoft YaHei"/>
+                <ns1:ea typeface="Microsoft YaHei"/>
+                <ns1:cs typeface="Microsoft YaHei"/>
+              </ns1:defRPr>
+            </ns1:pPr>
+            <ns1:r>
+              <ns1:rPr sz="1500" b="0">
+                <ns1:solidFill>
+                  <ns1:srgbClr val="262626"/>
+                </ns1:solidFill>
+                <ns1:latin typeface="Microsoft YaHei"/>
+                <ns1:ea typeface="Microsoft YaHei"/>
+                <ns1:cs typeface="Microsoft YaHei"/>
+              </ns1:rPr>
+              <ns1:t>融合算子</ns1:t>
+            </ns1:r>
+          </ns1:p>
+        </ns0:txBody>
+      </ns0:sp>
+      <ns0:sp>
+        <ns0:nvSpPr>
+          <ns0:cNvPr id="98" name="">
+            <ns1:extLst>
+              <ns1:ext uri="{FF2B5EF4-FFF2-40B4-BE49-F238E27FC236}">
+                <ns2:creationId id="{C01E57FD-ECED-4309-9866-9D0D4A03F4E7}"/>
+              </ns1:ext>
+            </ns1:extLst>
+          </ns0:cNvPr>
+          <ns0:cNvSpPr>
+            <ns1:spLocks noGrp="1"/>
+          </ns0:cNvSpPr>
+          <ns0:nvPr/>
+        </ns0:nvSpPr>
+        <ns0:spPr>
+          <ns1:xfrm>
+            <ns1:off x="266700" y="5924550"/>
+            <ns1:ext cx="5524500" cy="276225"/>
+          </ns1:xfrm>
+          <ns1:prstGeom prst="roundRect">
+            <ns1:avLst>
+              <ns1:gd name="adj" fmla="val 34483"/>
+            </ns1:avLst>
+          </ns1:prstGeom>
+          <ns1:solidFill>
+            <ns1:srgbClr val="E6E6E6"/>
+          </ns1:solidFill>
+          <ns1:ln w="9525">
+            <ns1:solidFill>
+              <ns1:srgbClr val="777777"/>
+            </ns1:solidFill>
+          </ns1:ln>
+        </ns0:spPr>
+      </ns0:sp>
+      <ns0:sp>
+        <ns0:nvSpPr>
+          <ns0:cNvPr id="99" name="">
+            <ns1:extLst>
+              <ns1:ext uri="{FF2B5EF4-FFF2-40B4-BE49-F238E27FC236}">
+                <ns2:creationId id="{E6D364E6-F15C-44E0-81C1-EED09BACFB77}"/>
+              </ns1:ext>
+            </ns1:extLst>
+          </ns0:cNvPr>
+          <ns0:cNvSpPr>
+            <ns1:spLocks noGrp="1"/>
+          </ns0:cNvSpPr>
+          <ns0:nvPr/>
+        </ns0:nvSpPr>
+        <ns0:spPr>
+          <ns1:xfrm>
+            <ns1:off x="371475" y="5924550"/>
+            <ns1:ext cx="5314950" cy="276225"/>
+          </ns1:xfrm>
+          <ns1:prstGeom prst="rect">
+            <ns1:avLst/>
+          </ns1:prstGeom>
+          <ns1:noFill/>
+          <ns1:ln w="0">
+            <ns1:noFill/>
+          </ns1:ln>
+        </ns0:spPr>
+        <ns0:txBody>
+          <ns1:bodyPr lIns="0" tIns="0" rIns="0" bIns="0" anchor="ctr"/>
+          <ns1:lstStyle>
+            <ns1:defPPr algn="ctr">
+              <ns1:defRPr sz="1575" b="1">
+                <ns1:solidFill>
+                  <ns1:srgbClr val="262626"/>
+                </ns1:solidFill>
+                <ns1:latin typeface="Microsoft YaHei"/>
+                <ns1:ea typeface="Microsoft YaHei"/>
+                <ns1:cs typeface="Microsoft YaHei"/>
+              </ns1:defRPr>
+            </ns1:defPPr>
+          </ns1:lstStyle>
+          <ns1:p>
+            <ns1:pPr algn="ctr">
+              <ns1:defRPr sz="1575" b="1">
+                <ns1:solidFill>
+                  <ns1:srgbClr val="262626"/>
+                </ns1:solidFill>
+                <ns1:latin typeface="Microsoft YaHei"/>
+                <ns1:ea typeface="Microsoft YaHei"/>
+                <ns1:cs typeface="Microsoft YaHei"/>
+              </ns1:defRPr>
+            </ns1:pPr>
+            <ns1:r>
+              <ns1:rPr sz="1575" b="1">
+                <ns1:solidFill>
+                  <ns1:srgbClr val="262626"/>
+                </ns1:solidFill>
+                <ns1:latin typeface="Microsoft YaHei"/>
+                <ns1:ea typeface="Microsoft YaHei"/>
+                <ns1:cs typeface="Microsoft YaHei"/>
+              </ns1:rPr>
+              <ns1:t>Linux：Ubuntu / openEuler</ns1:t>
+            </ns1:r>
+          </ns1:p>
+        </ns0:txBody>
+      </ns0:sp>
+      <ns0:sp>
+        <ns0:nvSpPr>
+          <ns0:cNvPr id="100" name="">
+            <ns1:extLst>
+              <ns1:ext uri="{FF2B5EF4-FFF2-40B4-BE49-F238E27FC236}">
+                <ns2:creationId id="{A62A2497-D006-4CBF-8638-D63F5B3C115D}"/>
+              </ns1:ext>
+            </ns1:extLst>
+          </ns0:cNvPr>
+          <ns0:cNvSpPr>
+            <ns1:spLocks noGrp="1"/>
+          </ns0:cNvSpPr>
+          <ns0:nvPr/>
+        </ns0:nvSpPr>
+        <ns0:spPr>
+          <ns1:xfrm>
+            <ns1:off x="266700" y="6305550"/>
+            <ns1:ext cx="5524500" cy="276225"/>
+          </ns1:xfrm>
+          <ns1:prstGeom prst="roundRect">
+            <ns1:avLst>
+              <ns1:gd name="adj" fmla="val 34483"/>
+            </ns1:avLst>
+          </ns1:prstGeom>
+          <ns1:solidFill>
+            <ns1:srgbClr val="E6E6E6"/>
+          </ns1:solidFill>
+          <ns1:ln w="9525">
+            <ns1:solidFill>
+              <ns1:srgbClr val="777777"/>
+            </ns1:solidFill>
+          </ns1:ln>
+        </ns0:spPr>
+      </ns0:sp>
+      <ns0:sp>
+        <ns0:nvSpPr>
+          <ns0:cNvPr id="101" name="">
+            <ns1:extLst>
+              <ns1:ext uri="{FF2B5EF4-FFF2-40B4-BE49-F238E27FC236}">
+                <ns2:creationId id="{C28601A4-33BC-4626-BACF-EDD0E5DEA02D}"/>
+              </ns1:ext>
+            </ns1:extLst>
+          </ns0:cNvPr>
+          <ns0:cNvSpPr>
+            <ns1:spLocks noGrp="1"/>
+          </ns0:cNvSpPr>
+          <ns0:nvPr/>
+        </ns0:nvSpPr>
+        <ns0:spPr>
+          <ns1:xfrm>
+            <ns1:off x="371475" y="6305550"/>
+            <ns1:ext cx="5314950" cy="276225"/>
+          </ns1:xfrm>
+          <ns1:prstGeom prst="rect">
+            <ns1:avLst/>
+          </ns1:prstGeom>
+          <ns1:noFill/>
+          <ns1:ln w="0">
+            <ns1:noFill/>
+          </ns1:ln>
+        </ns0:spPr>
+        <ns0:txBody>
+          <ns1:bodyPr lIns="0" tIns="0" rIns="0" bIns="0" anchor="ctr"/>
+          <ns1:lstStyle>
+            <ns1:defPPr algn="ctr">
+              <ns1:defRPr sz="1500" b="1">
+                <ns1:solidFill>
+                  <ns1:srgbClr val="262626"/>
+                </ns1:solidFill>
+                <ns1:latin typeface="Microsoft YaHei"/>
+                <ns1:ea typeface="Microsoft YaHei"/>
+                <ns1:cs typeface="Microsoft YaHei"/>
+              </ns1:defRPr>
+            </ns1:defPPr>
+          </ns1:lstStyle>
+          <ns1:p>
+            <ns1:pPr algn="ctr">
+              <ns1:defRPr sz="1500" b="1">
+                <ns1:solidFill>
+                  <ns1:srgbClr val="262626"/>
+                </ns1:solidFill>
+                <ns1:latin typeface="Microsoft YaHei"/>
+                <ns1:ea typeface="Microsoft YaHei"/>
+                <ns1:cs typeface="Microsoft YaHei"/>
+              </ns1:defRPr>
+            </ns1:pPr>
+            <ns1:r>
+              <ns1:rPr sz="1500" b="1">
+                <ns1:solidFill>
+                  <ns1:srgbClr val="262626"/>
+                </ns1:solidFill>
+                <ns1:latin typeface="Microsoft YaHei"/>
+                <ns1:ea typeface="Microsoft YaHei"/>
+                <ns1:cs typeface="Microsoft YaHei"/>
+              </ns1:rPr>
+              <ns1:t>固件 / 驱动 · 昇腾 NPU（按芯片适配）</ns1:t>
+            </ns1:r>
+          </ns1:p>
+        </ns0:txBody>
+      </ns0:sp>
+      <ns0:sp>
+        <ns0:nvSpPr>
+          <ns0:cNvPr id="102" name="">
+            <ns1:extLst>
+              <ns1:ext uri="{FF2B5EF4-FFF2-40B4-BE49-F238E27FC236}">
+                <ns2:creationId id="{DE1B2B44-44AD-4766-AEBB-841F853CA62B}"/>
+              </ns1:ext>
+            </ns1:extLst>
+          </ns0:cNvPr>
+          <ns0:cNvSpPr>
+            <ns1:spLocks noGrp="1"/>
+          </ns0:cNvSpPr>
+          <ns0:nvPr/>
+        </ns0:nvSpPr>
+        <ns0:spPr>
+          <ns1:xfrm>
+            <ns1:off x="3209925" y="6677025"/>
+            <ns1:ext cx="209550" cy="114300"/>
+          </ns1:xfrm>
+          <ns1:prstGeom prst="rect">
+            <ns1:avLst/>
+          </ns1:prstGeom>
+          <ns1:solidFill>
+            <ns1:srgbClr val="FFF1CD"/>
+          </ns1:solidFill>
+          <ns1:ln w="9525">
+            <ns1:solidFill>
+              <ns1:srgbClr val="777777"/>
+            </ns1:solidFill>
+          </ns1:ln>
+        </ns0:spPr>
+      </ns0:sp>
+      <ns0:sp>
+        <ns0:nvSpPr>
+          <ns0:cNvPr id="103" name="">
+            <ns1:extLst>
+              <ns1:ext uri="{FF2B5EF4-FFF2-40B4-BE49-F238E27FC236}">
+                <ns2:creationId id="{4DAE2752-539C-4790-AD52-4F01348F7EB4}"/>
+              </ns1:ext>
+            </ns1:extLst>
+          </ns0:cNvPr>
+          <ns0:cNvSpPr>
+            <ns1:spLocks noGrp="1"/>
+          </ns0:cNvSpPr>
+          <ns0:nvPr/>
+        </ns0:nvSpPr>
+        <ns0:spPr>
+          <ns1:xfrm>
+            <ns1:off x="3467100" y="6629400"/>
+            <ns1:ext cx="781050" cy="209550"/>
+          </ns1:xfrm>
+          <ns1:prstGeom prst="rect">
+            <ns1:avLst/>
+          </ns1:prstGeom>
+          <ns1:noFill/>
+          <ns1:ln w="0">
+            <ns1:noFill/>
+          </ns1:ln>
+        </ns0:spPr>
+        <ns0:txBody>
+          <ns1:bodyPr lIns="0" tIns="0" rIns="0" bIns="0" anchor="ctr"/>
+          <ns1:lstStyle>
+            <ns1:defPPr algn="l">
+              <ns1:defRPr sz="1050" b="0">
+                <ns1:solidFill>
+                  <ns1:srgbClr val="666666"/>
+                </ns1:solidFill>
+                <ns1:latin typeface="Microsoft YaHei"/>
+                <ns1:ea typeface="Microsoft YaHei"/>
+                <ns1:cs typeface="Microsoft YaHei"/>
+              </ns1:defRPr>
+            </ns1:defPPr>
+          </ns1:lstStyle>
+          <ns1:p>
+            <ns1:pPr algn="l">
+              <ns1:defRPr sz="1050" b="0">
+                <ns1:solidFill>
+                  <ns1:srgbClr val="666666"/>
+                </ns1:solidFill>
+                <ns1:latin typeface="Microsoft YaHei"/>
+                <ns1:ea typeface="Microsoft YaHei"/>
+                <ns1:cs typeface="Microsoft YaHei"/>
+              </ns1:defRPr>
+            </ns1:pPr>
+            <ns1:r>
+              <ns1:rPr sz="1050" b="0">
+                <ns1:solidFill>
+                  <ns1:srgbClr val="666666"/>
+                </ns1:solidFill>
+                <ns1:latin typeface="Microsoft YaHei"/>
+                <ns1:ea typeface="Microsoft YaHei"/>
+                <ns1:cs typeface="Microsoft YaHei"/>
+              </ns1:rPr>
+              <ns1:t>已有基础</ns1:t>
+            </ns1:r>
+          </ns1:p>
+        </ns0:txBody>
+      </ns0:sp>
+      <ns0:sp>
+        <ns0:nvSpPr>
+          <ns0:cNvPr id="104" name="">
+            <ns1:extLst>
+              <ns1:ext uri="{FF2B5EF4-FFF2-40B4-BE49-F238E27FC236}">
+                <ns2:creationId id="{88D4858F-3CDC-4493-A3A2-C8D8CB85CF50}"/>
+              </ns1:ext>
+            </ns1:extLst>
+          </ns0:cNvPr>
+          <ns0:cNvSpPr>
+            <ns1:spLocks noGrp="1"/>
+          </ns0:cNvSpPr>
+          <ns0:nvPr/>
+        </ns0:nvSpPr>
+        <ns0:spPr>
+          <ns1:xfrm>
+            <ns1:off x="4410075" y="6677025"/>
+            <ns1:ext cx="209550" cy="114300"/>
+          </ns1:xfrm>
+          <ns1:prstGeom prst="rect">
+            <ns1:avLst/>
+          </ns1:prstGeom>
+          <ns1:solidFill>
+            <ns1:srgbClr val="E0EFD4"/>
+          </ns1:solidFill>
+          <ns1:ln w="9525">
+            <ns1:solidFill>
+              <ns1:srgbClr val="777777"/>
+            </ns1:solidFill>
+          </ns1:ln>
+        </ns0:spPr>
+      </ns0:sp>
+      <ns0:sp>
+        <ns0:nvSpPr>
+          <ns0:cNvPr id="105" name="">
+            <ns1:extLst>
+              <ns1:ext uri="{FF2B5EF4-FFF2-40B4-BE49-F238E27FC236}">
+                <ns2:creationId id="{1B16329C-08DC-48FE-8E46-1033504268A5}"/>
+              </ns1:ext>
+            </ns1:extLst>
+          </ns0:cNvPr>
+          <ns0:cNvSpPr>
+            <ns1:spLocks noGrp="1"/>
+          </ns0:cNvSpPr>
+          <ns0:nvPr/>
+        </ns0:nvSpPr>
+        <ns0:spPr>
+          <ns1:xfrm>
+            <ns1:off x="4667250" y="6629400"/>
+            <ns1:ext cx="781050" cy="209550"/>
+          </ns1:xfrm>
+          <ns1:prstGeom prst="rect">
+            <ns1:avLst/>
+          </ns1:prstGeom>
+          <ns1:noFill/>
+          <ns1:ln w="0">
+            <ns1:noFill/>
+          </ns1:ln>
+        </ns0:spPr>
+        <ns0:txBody>
+          <ns1:bodyPr lIns="0" tIns="0" rIns="0" bIns="0" anchor="ctr"/>
+          <ns1:lstStyle>
+            <ns1:defPPr algn="l">
+              <ns1:defRPr sz="1050" b="0">
+                <ns1:solidFill>
+                  <ns1:srgbClr val="666666"/>
+                </ns1:solidFill>
+                <ns1:latin typeface="Microsoft YaHei"/>
+                <ns1:ea typeface="Microsoft YaHei"/>
+                <ns1:cs typeface="Microsoft YaHei"/>
+              </ns1:defRPr>
+            </ns1:defPPr>
+          </ns1:lstStyle>
+          <ns1:p>
+            <ns1:pPr algn="l">
+              <ns1:defRPr sz="1050" b="0">
+                <ns1:solidFill>
+                  <ns1:srgbClr val="666666"/>
+                </ns1:solidFill>
+                <ns1:latin typeface="Microsoft YaHei"/>
+                <ns1:ea typeface="Microsoft YaHei"/>
+                <ns1:cs typeface="Microsoft YaHei"/>
+              </ns1:defRPr>
+            </ns1:pPr>
+            <ns1:r>
+              <ns1:rPr sz="1050" b="0">
+                <ns1:solidFill>
+                  <ns1:srgbClr val="666666"/>
+                </ns1:solidFill>
+                <ns1:latin typeface="Microsoft YaHei"/>
+                <ns1:ea typeface="Microsoft YaHei"/>
+                <ns1:cs typeface="Microsoft YaHei"/>
+              </ns1:rPr>
+              <ns1:t>待完善</ns1:t>
+            </ns1:r>
+          </ns1:p>
+        </ns0:txBody>
+      </ns0:sp>
+    </ns0:spTree>
+    <ns0:extLst>
+      <ns0:ext uri="{BB962C8B-B14F-4D97-AF65-F5344CB8AC3E}">
+        <ns3:creationId val="1885384665"/>
+      </ns0:ext>
+    </ns0:extLst>
+  </ns0:cSld>
+</ns0:sld>
+</file>
+
+<file path=ppt/slides/slide8.xml><?xml version="1.0" encoding="utf-8"?>
+<ns0:sld xmlns:ns0="http://schemas.openxmlformats.org/presentationml/2006/main" xmlns:ns1="http://schemas.openxmlformats.org/drawingml/2006/main" xmlns:ns2="http://schemas.microsoft.com/office/drawing/2014/main" xmlns:ns3="http://schemas.microsoft.com/office/powerpoint/2010/main">
+  <ns0:cSld>
+    <ns0:bg>
+      <ns0:bgPr>
+        <ns1:solidFill>
+          <ns1:srgbClr val="FFFFFF"/>
+        </ns1:solidFill>
+      </ns0:bgPr>
+    </ns0:bg>
+    <ns0:spTree>
+      <ns0:nvGrpSpPr>
+        <ns0:cNvPr id="1" name=""/>
+        <ns0:cNvGrpSpPr/>
+        <ns0:nvPr/>
+      </ns0:nvGrpSpPr>
+      <ns0:grpSpPr>
+        <ns1:xfrm/>
+      </ns0:grpSpPr>
+      <ns0:sp>
+        <ns0:nvSpPr>
           <ns0:cNvPr id="13" name="">
             <ns1:extLst>
               <ns1:ext uri="{FF2B5EF4-FFF2-40B4-BE49-F238E27FC236}">
@@ -11648,7 +20322,7 @@
                 <ns1:ea typeface="Microsoft YaHei"/>
                 <ns1:cs typeface="Microsoft YaHei"/>
               </ns1:rPr>
-              <ns1:t>06</ns1:t>
+              <ns1:t>08</ns1:t>
             </ns1:r>
           </ns1:p>
         </ns0:txBody>
